--- a/hearts-and-minds/journey-decks/hm-journey-layla-v1.pptx
+++ b/hearts-and-minds/journey-decks/hm-journey-layla-v1.pptx
@@ -685,12 +685,12 @@
           <a:p>
             <a:r>
               <a:rPr lang="en-US" dirty="0"/>
-              <a:t>Stratification, the cohort the clinic finds hardest to keep
-Around 8% of UK adult women live with iron-deficiency anaemia. They are concentrated in cohorts the system serves least well, women in work, women with caring responsibilities, women in shift patterns. The clinical condition is straightforward. The venue mismatch is structural.
-Quote: I have had this for years. I take the tablets, I do the blood test, I get the result. Every part of that works except finding the time to do the blood test.
-What the model is doing underneath: NICE clinical knowledge summaries place IDA prevalence at around 8% in adult UK women. The standard monitoring cycle is a six-monthly FBC. The cohort is well-defined; the access problem is the failure to attend appointments at clinic-friendly hours.
-The old way: Treat the cohort the same as a 9-to-5 retired patient cohort. Watch DNA rates climb. Send rebooking letters. Blame the patient for not engaging.
-What the care team sees: Hannah, GP. Practice nurse. Anita on the ICB / GP commissioner side.</a:t>
+              <a:t>Stratification, a treated condition and a cycle nobody can see slipping
+Around 8% of adult women in the UK live with iron deficiency anaemia. For most, treatment is a tablet and a blood test every six months. The test is the only way anyone knows whether the tablet is working, and it is the part that falls away when a life runs on shifts.
+Quote: I take the tablets every day. It is the blood test I keep missing, and that is the bit that tells them whether the tablets are doing anything.
+What the model is doing underneath: NICE clinical knowledge summaries place IDA prevalence at around 8% in adult UK women. Treatment response is monitored by full blood count and ferritin, typically at six-monthly intervals for a patient on long-term iron. The cohort is already known to primary care; the risk is the interval quietly stretching, not the diagnosis being missed.
+The old way: Treat a treated cohort as if attendance were the patient's job. When the six-month check slips, send a letter. When the letter fails, close the recall and wait for her to come back symptomatic.
+What the care team sees: Hannah, GP. Practice nurse. Anita on the ICB / GP commissioner side, watching a monitoring cycle nobody can measure.</a:t>
             </a:r>
             <a:endParaRPr lang="en-US" dirty="0"/>
           </a:p>
@@ -778,12 +778,12 @@
           <a:p>
             <a:r>
               <a:rPr lang="en-US" dirty="0"/>
-              <a:t>Identification, Hannah's practice flags her
-Hannah is reviewing the IDA cohort. Layla is overdue her six-month FBC, with a flag on the record for previously missed appointments. The practice opens the conversation about doing the next blood at home. The friction was always the venue; the offer changes the venue.
-Quote: Hannah said: do you want to try doing the next blood at home? I said yes faster than she could finish the sentence.
-What the model is doing underneath: Around 15 million general-practice appointments are missed each year, costing the NHS £216 million. The cohort that DNAs is the cohort the clinic-only model fails by design. The home pathway is the structural answer, not a service-recovery patch.
-The old way: Re-book, re-book, re-book, miss, discharge from the cycle, see her again at A&amp;E or in a re-presentation that costs ten times more.
-What the care team sees: Hannah. Practice nurse. Practice manager. Anita.</a:t>
+              <a:t>Identification, the practice system orders and nobody has to ask
+Hannah's recall search flags Layla as due. In the GP-initiated pattern the practice system raises the order for the FBC and ferritin, the platform ships the kit, and the appointment Layla could never keep is never booked. There is no conversation to have, because there is nothing for Layla to agree to yet.
+Quote: Nobody rang me. A text said a kit was coming for my six-month bloods, and it came. That was the whole appointment.
+What the model is doing underneath: Around 15 million general-practice appointments are missed each year, costing the NHS £216 million. The GP-initiated pattern removes the appointment rather than chasing it: the order originates in the practice system as part of the review cycle, the kit is dispatched against it, and the result is written back to the GP record. Layla is the sample provider, not the orderer or the recipient.
+The old way: Book, miss, re-book, miss, then a DNA code on the record that follows her into every future conversation about engagement.
+What the care team sees: Hannah. The practice recall administrator. The supplier dispatching against the practice order. Anita, whose access figures stop counting Layla as a failure.</a:t>
             </a:r>
             <a:endParaRPr lang="en-US" dirty="0"/>
           </a:p>
@@ -871,12 +871,12 @@
           <a:p>
             <a:r>
               <a:rPr lang="en-US" dirty="0"/>
-              <a:t>Diagnosis, the FBC on a Saturday morning
-The kit arrives. Layla takes the sample at the kitchen table on a Saturday morning while the kids are watching TV. She posts it back. The lab processes it. The result lands in Hannah's GP system in time for the cycle that the clinic would have run.
-Quote: It was a Saturday job. I did it before the kids were up. I posted it on the way to the shops. I forgot about it until the result came through on the app.
-What the model is doing underneath: The home capillary FBC is a recognised pathway for routine monitoring. The sample is processed at a UKAS-accredited lab on the same assay platform that processes in-clinic samples. The result writes back to the practice EPR via the framework integration.
-The old way: Take a half-day off work. Find childcare. Sit in the waiting room. Get the blood drawn in 90 seconds. Drive home. The friction is the day, not the test.
-What the care team sees: The supplier shipping the kit. The lab. The platform writing the result back. Layla.</a:t>
+              <a:t>Diagnosis, a sample between shifts
+The kit arrives on a Wednesday. Layla takes the capillary sample at the kitchen table while the kids finish their homework, before her evening shift, posts it on the way in and does not think about it again. The lab processes it on the same platform as any clinic sample and the result lands in Hannah's record on time.
+Quote: Twenty minutes between the kids' homework and the start of my shift. I would not have got to the surgery and back in that gap, let alone waited.
+What the model is doing underneath: The home capillary FBC and ferritin are a recognised route for routine monitoring. The sample is processed at a UKAS-accredited lab on the same assay platform that processes in-clinic samples, and the result writes back to the practice EPR through the framework integration. Nothing about the clinical standard changes; only the venue and the timing do.
+The old way: An appointment at the surgery in working hours, which for Layla means an hour of unpaid time and a manager she has to ask twice a year, or a check that does not happen.
+What the care team sees: The supplier shipping the kit. The lab. The platform writing the result back. Layla, on her own timetable.</a:t>
             </a:r>
             <a:endParaRPr lang="en-US" dirty="0"/>
           </a:p>
@@ -964,12 +964,12 @@
           <a:p>
             <a:r>
               <a:rPr lang="en-US" dirty="0"/>
-              <a:t>Treatment, the prescription adjusted on the trend
-The result confirms her haemoglobin and ferritin trends. Hannah reviews the result alongside the prior cycles. The iron prescription stays unchanged or is adjusted on the basis of the trend, exactly as it would have been from an in-clinic sample. The clinical conversation, if needed, happens by phone or message.
-Quote: Hannah sent me a message. Same prescription, see you in six months. That was the entire appointment. I was at work.
-What the model is doing underneath: The treatment pathway is NICE-guideline-aligned and unchanged by the home venue. Iron supplementation continues, with dose adjustments based on the haemoglobin and ferritin response. The GP holds the prescribing accountability.
-The old way: Drag the patient back into clinic to discuss a result that was always going to be a prescription continuation. The visit was the cost; the message was the value.
-What the care team sees: Hannah. Practice pharmacist if dose changes. NICE guidelines.</a:t>
+              <a:t>Treatment, the dose follows the ferritin
+Hannah reviews the haemoglobin and ferritin against the previous cycles. This time the ferritin has plateaued below target, so the dose is adjusted and a note goes to Layla. Same clinical decision as an in-clinic sample would have prompted, with one difference: it happened on time, so the trend was still readable.
+Quote: A message from the practice: we are changing your dose, here is why, the new prescription is at the pharmacy. I read it on my break.
+What the model is doing underneath: The treatment pathway is NICE-guideline-aligned and unchanged by the home venue: iron supplementation is titrated to the FBC and ferritin response, and the GP holds prescribing accountability. What the home cycle adds is timeliness. A dose that needs changing gets changed at six months, not at fourteen.
+The old way: A result reviewed months late, if at all, and a dose change made on a trend with a hole in it.
+What the care team sees: Hannah. Practice pharmacist for the dose change. The community pharmacy that already has her prescription.</a:t>
             </a:r>
             <a:endParaRPr lang="en-US" dirty="0"/>
           </a:p>
@@ -1057,12 +1057,12 @@
           <a:p>
             <a:r>
               <a:rPr lang="en-US" dirty="0"/>
-              <a:t>Long-term optimisation, the cycle that fits her life
-Layla stays in the cycle. The next FBC is on a calendar reminder in six months. The kit will arrive. The Saturday morning will happen. The trend will be reviewed. Layla's anaemia is monitored to the same clinical standard, and the practice no longer carries her DNA history.
-Quote: I do not feel like the patient who keeps letting them down anymore. I just feel like a patient.
-What the model is doing underneath: Sustained engagement with monitoring is the outcome that matters clinically. The home cycle holds the patient in the cohort, surfaces threshold breaches on time, and frees the practice nurse slot for the patients who clinically need clinic.
-The old way: Drift out of the cycle. Re-present in a year or two with a haemoglobin much lower than it should have been. The clinical risk was always in the model, not the patient.
-What the care team sees: Layla. Hannah. The practice nurse. The platform holding the cycle reminder.</a:t>
+              <a:t>Long-term optimisation, silence as the good result
+The cycle holds. The next kit is dated for six months, tied to the practice recall rather than to Layla's memory or her rota. If the trend is steady she hears nothing, and nothing is the right answer. If it moves, she hears from Hannah. Either way the practice knows, which is the whole point.
+Quote: I used to feel like I was always about to be in trouble with the surgery. Now the only time I hear from them is when there is actually something to say.
+What the model is doing underneath: Sustained monitoring is the clinical outcome for a treated long-term condition. The home cycle keeps the interval honest, surfaces a falling ferritin at the point it can be corrected cheaply, and frees the practice nurse slot for patients who clinically need the room. The illustration ends where the configuration stands: held, low priority under the framework, and able to run on the same rails as every other primary-care cycle if the gate opens.
+The old way: Drift out of the cycle for a year or two and re-present with a haemoglobin far lower than it needed to be. The risk was always in the interval, not in the patient.
+What the care team sees: Layla. Hannah. The practice nurse. The platform holding the recall date.</a:t>
             </a:r>
             <a:endParaRPr lang="en-US" dirty="0"/>
           </a:p>
@@ -1685,7 +1685,7 @@
                 <a:ea typeface="Arial" pitchFamily="34" charset="-122"/>
                 <a:cs typeface="Arial" pitchFamily="34" charset="-120"/>
               </a:rPr>
-              <a:t>A Saturday,</a:t>
+              <a:t>Three years on the tablets.</a:t>
             </a:r>
             <a:endParaRPr lang="en-US" sz="2400" dirty="0"/>
           </a:p>
@@ -1702,7 +1702,7 @@
                 <a:ea typeface="Arial" pitchFamily="34" charset="-122"/>
                 <a:cs typeface="Arial" pitchFamily="34" charset="-120"/>
               </a:rPr>
-              <a:t>not a sick day.</a:t>
+              <a:t>The trend is the treatment.</a:t>
             </a:r>
             <a:endParaRPr lang="en-US" sz="2400" dirty="0"/>
           </a:p>
@@ -1717,7 +1717,7 @@
         <p:spPr>
           <a:xfrm>
             <a:off x="640080" y="3258312"/>
-            <a:ext cx="6949440" cy="835152"/>
+            <a:ext cx="6949440" cy="1578864"/>
           </a:xfrm>
           <a:prstGeom prst="rect">
             <a:avLst/>
@@ -1743,7 +1743,7 @@
                 <a:ea typeface="Arial" pitchFamily="34" charset="-122"/>
                 <a:cs typeface="Arial" pitchFamily="34" charset="-120"/>
               </a:rPr>
-              <a:t>Layla is 42, works full-time, has two children and a mother she helps care for. Her GP, Hannah, manages her iron-deficiency anaemia. The six-monthly FBC is routine. The Tuesday-morning slot is impossible. </a:t>
+              <a:t>Layla is 42, a single parent with two school-age kids and two part-time jobs, one of them on shifts. Her iron deficiency anaemia was diagnosed three years ago; she has been on ferrous sulphate since, and her GP, Hannah, needs a full blood count and ferritin every six months to know whether it is still working. Nobody doubts Layla will take the tablets. The question is whether anyone will see the trend. </a:t>
             </a:r>
             <a:pPr indent="0" marL="0">
               <a:buNone/>
@@ -1757,7 +1757,7 @@
                 <a:ea typeface="Arial" pitchFamily="34" charset="-122"/>
                 <a:cs typeface="Arial" pitchFamily="34" charset="-120"/>
               </a:rPr>
-              <a:t>This is the story of how she stays in monitoring without staying out of work.</a:t>
+              <a:t>This is the story of a monitoring cycle that holds because it stopped asking for her working hours. It is told as an illustration: the anaemia configuration is held under the Prioritisation Framework, not in build.</a:t>
             </a:r>
             <a:endParaRPr lang="en-US" sz="1200" dirty="0"/>
           </a:p>
@@ -1771,7 +1771,7 @@
         </p:nvSpPr>
         <p:spPr>
           <a:xfrm>
-            <a:off x="640080" y="4230624"/>
+            <a:off x="640080" y="4974336"/>
             <a:ext cx="6949440" cy="365760"/>
           </a:xfrm>
           <a:prstGeom prst="rect">
@@ -1796,7 +1796,7 @@
                 <a:ea typeface="Arial" pitchFamily="34" charset="-122"/>
                 <a:cs typeface="Arial" pitchFamily="34" charset="-120"/>
               </a:rPr>
-              <a:t>A patient's story through the operating model</a:t>
+              <a:t>A patient's story through the operating model, GP-initiated, told as an illustration</a:t>
             </a:r>
             <a:endParaRPr lang="en-US" sz="1050" dirty="0"/>
           </a:p>
@@ -1829,7 +1829,7 @@
       </p:sp>
       <p:pic>
         <p:nvPicPr>
-          <p:cNvPr id="10" name="Image 1" descr="/sessions/quirky-zen-galileo/mnt/outputs/hmdecks/img/layla-portrait.jpg">    </p:cNvPr>
+          <p:cNvPr id="10" name="Image 1" descr="/sessions/quirky-zen-galileo/mnt/outputs/hmdecks5/img/layla-portrait.jpg">    </p:cNvPr>
           <p:cNvPicPr>
             <a:picLocks noChangeAspect="1"/>
           </p:cNvPicPr>
@@ -1922,7 +1922,7 @@
                 <a:ea typeface="Arial" pitchFamily="34" charset="-122"/>
                 <a:cs typeface="Arial" pitchFamily="34" charset="-120"/>
               </a:rPr>
-              <a:t>Patient on iron supplementation · Primary-care monitoring cohort</a:t>
+              <a:t>GP-initiated patient · Iron deficiency anaemia · held configuration</a:t>
             </a:r>
             <a:endParaRPr lang="en-US" sz="1100" dirty="0"/>
           </a:p>
@@ -2382,7 +2382,7 @@
                 <a:ea typeface="Arial" pitchFamily="34" charset="-122"/>
                 <a:cs typeface="Arial" pitchFamily="34" charset="-120"/>
               </a:rPr>
-              <a:t>the cohort the clinic finds hardest to keep</a:t>
+              <a:t>a treated condition, a cycle nobody can see slipping</a:t>
             </a:r>
             <a:endParaRPr lang="en-US" sz="900" dirty="0"/>
           </a:p>
@@ -2580,7 +2580,7 @@
                 <a:ea typeface="Arial" pitchFamily="34" charset="-122"/>
                 <a:cs typeface="Arial" pitchFamily="34" charset="-120"/>
               </a:rPr>
-              <a:t>Hannah's practice flags her</a:t>
+              <a:t>the practice system orders, nobody has to ask</a:t>
             </a:r>
             <a:endParaRPr lang="en-US" sz="900" dirty="0"/>
           </a:p>
@@ -2778,7 +2778,7 @@
                 <a:ea typeface="Arial" pitchFamily="34" charset="-122"/>
                 <a:cs typeface="Arial" pitchFamily="34" charset="-120"/>
               </a:rPr>
-              <a:t>the FBC on a Saturday morning</a:t>
+              <a:t>a sample between shifts</a:t>
             </a:r>
             <a:endParaRPr lang="en-US" sz="900" dirty="0"/>
           </a:p>
@@ -2976,7 +2976,7 @@
                 <a:ea typeface="Arial" pitchFamily="34" charset="-122"/>
                 <a:cs typeface="Arial" pitchFamily="34" charset="-120"/>
               </a:rPr>
-              <a:t>the prescription adjusted on the trend</a:t>
+              <a:t>the dose follows the ferritin</a:t>
             </a:r>
             <a:endParaRPr lang="en-US" sz="900" dirty="0"/>
           </a:p>
@@ -3174,7 +3174,7 @@
                 <a:ea typeface="Arial" pitchFamily="34" charset="-122"/>
                 <a:cs typeface="Arial" pitchFamily="34" charset="-120"/>
               </a:rPr>
-              <a:t>the cycle that fits her life</a:t>
+              <a:t>silence as the good result</a:t>
             </a:r>
             <a:endParaRPr lang="en-US" sz="900" dirty="0"/>
           </a:p>
@@ -3281,7 +3281,7 @@
                 <a:ea typeface="Arial" pitchFamily="34" charset="-122"/>
                 <a:cs typeface="Arial" pitchFamily="34" charset="-120"/>
               </a:rPr>
-              <a:t>The bloods need doing. The clinic visit never needed to be the way to do them.</a:t>
+              <a:t>Known, treated, and never quietly lost.</a:t>
             </a:r>
             <a:endParaRPr lang="en-US" sz="1500" dirty="0"/>
           </a:p>
@@ -3322,7 +3322,7 @@
                 <a:ea typeface="Arial" pitchFamily="34" charset="-122"/>
                 <a:cs typeface="Arial" pitchFamily="34" charset="-120"/>
               </a:rPr>
-              <a:t>Layla has the condition. The condition needs monitoring. The clinic is where the monitoring has always happened, but the clinic is exactly the venue that does not work for her life. </a:t>
+              <a:t>Layla is not a diagnosis waiting to happen. She is a patient the system already knows and already treats. The failure mode for someone like her is not a missed screen but a missed check: a six-month cycle that slips to nine, then twelve, while the iron dose that was right three years ago quietly stops being right. </a:t>
             </a:r>
             <a:pPr indent="0" marL="0">
               <a:buNone/>
@@ -3336,7 +3336,7 @@
                 <a:ea typeface="Arial" pitchFamily="34" charset="-122"/>
                 <a:cs typeface="Arial" pitchFamily="34" charset="-120"/>
               </a:rPr>
-              <a:t>Move the venue. Keep the monitoring.</a:t>
+              <a:t>Hold the cycle and you hold the treatment.</a:t>
             </a:r>
             <a:endParaRPr lang="en-US" sz="1100" dirty="0"/>
           </a:p>
@@ -3443,7 +3443,7 @@
                 <a:ea typeface="Arial" pitchFamily="34" charset="-122"/>
                 <a:cs typeface="Arial" pitchFamily="34" charset="-120"/>
               </a:rPr>
-              <a:t>No half-day off. No childcare juggle. No DNA letter saying she is the problem.</a:t>
+              <a:t>Her hours change every week. The kit does not care.</a:t>
             </a:r>
             <a:endParaRPr lang="en-US" sz="1500" dirty="0"/>
           </a:p>
@@ -3484,7 +3484,7 @@
                 <a:ea typeface="Arial" pitchFamily="34" charset="-122"/>
                 <a:cs typeface="Arial" pitchFamily="34" charset="-120"/>
               </a:rPr>
-              <a:t>A Saturday-morning sample. The result back in Hannah's system on time. The next iron prescription unchanged or adjusted as the trend says. </a:t>
+              <a:t>Two part-time jobs, one on a rota that moves, mean a fixed clinic slot is a bet against her own timetable, and an hour in a waiting room is an hour she is not paid for. A kit that arrives when the cycle is due and gets taken between shifts costs her nothing she cannot spare. </a:t>
             </a:r>
             <a:pPr indent="0" marL="0">
               <a:buNone/>
@@ -3498,7 +3498,7 @@
                 <a:ea typeface="Arial" pitchFamily="34" charset="-122"/>
                 <a:cs typeface="Arial" pitchFamily="34" charset="-120"/>
               </a:rPr>
-              <a:t>The system stops blaming her for the venue being wrong.</a:t>
+              <a:t>The result goes to Hannah. Layla hears from the practice only if the dose needs to change.</a:t>
             </a:r>
             <a:endParaRPr lang="en-US" sz="1100" dirty="0"/>
           </a:p>
@@ -3775,7 +3775,7 @@
                 <a:ea typeface="Arial" pitchFamily="34" charset="-122"/>
                 <a:cs typeface="Arial" pitchFamily="34" charset="-120"/>
               </a:rPr>
-              <a:t>Stratification, the cohort the clinic finds hardest to keep</a:t>
+              <a:t>Stratification, a treated condition and a cycle nobody can see slipping</a:t>
             </a:r>
             <a:endParaRPr lang="en-US" sz="2000" dirty="0"/>
           </a:p>
@@ -3853,7 +3853,7 @@
         <p:spPr>
           <a:xfrm>
             <a:off x="457200" y="1920240"/>
-            <a:ext cx="4892040" cy="1098550"/>
+            <a:ext cx="4892040" cy="1137285"/>
           </a:xfrm>
           <a:prstGeom prst="rect">
             <a:avLst/>
@@ -3871,7 +3871,7 @@
               <a:buNone/>
             </a:pPr>
             <a:r>
-              <a:rPr lang="en-US" sz="1300" b="1" dirty="0">
+              <a:rPr lang="en-US" sz="1350" b="1" dirty="0">
                 <a:solidFill>
                   <a:srgbClr val="003087"/>
                 </a:solidFill>
@@ -3879,9 +3879,9 @@
                 <a:ea typeface="Arial" pitchFamily="34" charset="-122"/>
                 <a:cs typeface="Arial" pitchFamily="34" charset="-120"/>
               </a:rPr>
-              <a:t>Around 8% of UK adult women live with iron-deficiency anaemia. They are concentrated in cohorts the system serves least well, women in work, women with caring responsibilities, women in shift patterns. The clinical condition is straightforward. The venue mismatch is structural.</a:t>
-            </a:r>
-            <a:endParaRPr lang="en-US" sz="1300" dirty="0"/>
+              <a:t>Around 8% of adult women in the UK live with iron deficiency anaemia. For most, treatment is a tablet and a blood test every six months. The test is the only way anyone knows whether the tablet is working, and it is the part that falls away when a life runs on shifts.</a:t>
+            </a:r>
+            <a:endParaRPr lang="en-US" sz="1350" dirty="0"/>
           </a:p>
         </p:txBody>
       </p:sp>
@@ -3893,8 +3893,8 @@
         </p:nvSpPr>
         <p:spPr>
           <a:xfrm>
-            <a:off x="457200" y="3128518"/>
-            <a:ext cx="4892040" cy="944499"/>
+            <a:off x="457200" y="3167253"/>
+            <a:ext cx="4892040" cy="797306"/>
           </a:xfrm>
           <a:prstGeom prst="rect">
             <a:avLst/>
@@ -3918,8 +3918,8 @@
         </p:nvSpPr>
         <p:spPr>
           <a:xfrm>
-            <a:off x="457200" y="3128518"/>
-            <a:ext cx="82296" cy="944499"/>
+            <a:off x="457200" y="3167253"/>
+            <a:ext cx="82296" cy="797306"/>
           </a:xfrm>
           <a:prstGeom prst="rect">
             <a:avLst/>
@@ -3943,8 +3943,8 @@
         </p:nvSpPr>
         <p:spPr>
           <a:xfrm>
-            <a:off x="685800" y="3183382"/>
-            <a:ext cx="4526280" cy="578739"/>
+            <a:off x="685800" y="3222117"/>
+            <a:ext cx="4526280" cy="431546"/>
           </a:xfrm>
           <a:prstGeom prst="rect">
             <a:avLst/>
@@ -3970,7 +3970,7 @@
                 <a:ea typeface="Arial" pitchFamily="34" charset="-122"/>
                 <a:cs typeface="Arial" pitchFamily="34" charset="-120"/>
               </a:rPr>
-              <a:t>“I have had this for years. I take the tablets, I do the blood test, I get the result. Every part of that works except finding the time to do the blood test.”</a:t>
+              <a:t>“I take the tablets every day. It is the blood test I keep missing, and that is the bit that tells them whether the tablets are doing anything.”</a:t>
             </a:r>
             <a:endParaRPr lang="en-US" sz="950" dirty="0"/>
           </a:p>
@@ -3984,7 +3984,7 @@
         </p:nvSpPr>
         <p:spPr>
           <a:xfrm>
-            <a:off x="685800" y="3762121"/>
+            <a:off x="685800" y="3653663"/>
             <a:ext cx="4526280" cy="256032"/>
           </a:xfrm>
           <a:prstGeom prst="rect">
@@ -4017,7 +4017,7 @@
       </p:sp>
       <p:pic>
         <p:nvPicPr>
-          <p:cNvPr id="13" name="Image 1" descr="/sessions/quirky-zen-galileo/mnt/outputs/hmdecks/img/layla-stage1.jpg">    </p:cNvPr>
+          <p:cNvPr id="13" name="Image 1" descr="/sessions/quirky-zen-galileo/mnt/outputs/hmdecks5/img/layla-stage1.jpg">    </p:cNvPr>
           <p:cNvPicPr>
             <a:picLocks noChangeAspect="1"/>
           </p:cNvPicPr>
@@ -4031,8 +4031,8 @@
         </p:blipFill>
         <p:spPr>
           <a:xfrm>
-            <a:off x="457200" y="4237609"/>
-            <a:ext cx="3679121" cy="2053463"/>
+            <a:off x="457200" y="4129151"/>
+            <a:ext cx="3873442" cy="2161921"/>
           </a:xfrm>
           <a:prstGeom prst="rect">
             <a:avLst/>
@@ -4112,7 +4112,7 @@
         <p:spPr>
           <a:xfrm>
             <a:off x="5669280" y="1371600"/>
-            <a:ext cx="6065215" cy="712470"/>
+            <a:ext cx="6065215" cy="1053338"/>
           </a:xfrm>
           <a:prstGeom prst="rect">
             <a:avLst/>
@@ -4137,7 +4137,7 @@
         <p:spPr>
           <a:xfrm>
             <a:off x="5779008" y="1408176"/>
-            <a:ext cx="5845759" cy="657606"/>
+            <a:ext cx="5845759" cy="998474"/>
           </a:xfrm>
           <a:prstGeom prst="rect">
             <a:avLst/>
@@ -4161,7 +4161,7 @@
                 <a:ea typeface="Arial" pitchFamily="34" charset="-122"/>
                 <a:cs typeface="Arial" pitchFamily="34" charset="-120"/>
               </a:rPr>
-              <a:t>NICE clinical knowledge summaries place IDA prevalence at around 8% in adult UK women. The standard monitoring cycle is a six-monthly FBC. The cohort is well-defined; the access problem is the failure to attend appointments at clinic-friendly hours.</a:t>
+              <a:t>NICE clinical knowledge summaries place IDA prevalence at around 8% in adult UK women. Treatment response is monitored by full blood count and ferritin, typically at six-monthly intervals for a patient on long-term iron. The cohort is already known to primary care; the risk is the interval quietly stretching, not the diagnosis being missed.</a:t>
             </a:r>
             <a:endParaRPr lang="en-US" sz="1100" dirty="0"/>
           </a:p>
@@ -4175,7 +4175,7 @@
         </p:nvSpPr>
         <p:spPr>
           <a:xfrm>
-            <a:off x="5669280" y="2212086"/>
+            <a:off x="5669280" y="2552954"/>
             <a:ext cx="6065215" cy="274320"/>
           </a:xfrm>
           <a:prstGeom prst="rect">
@@ -4200,7 +4200,7 @@
         </p:nvSpPr>
         <p:spPr>
           <a:xfrm>
-            <a:off x="5779008" y="2212086"/>
+            <a:off x="5779008" y="2552954"/>
             <a:ext cx="5845759" cy="274320"/>
           </a:xfrm>
           <a:prstGeom prst="rect">
@@ -4239,8 +4239,8 @@
         </p:nvSpPr>
         <p:spPr>
           <a:xfrm>
-            <a:off x="5669280" y="2486406"/>
-            <a:ext cx="6065215" cy="542036"/>
+            <a:off x="5669280" y="2827274"/>
+            <a:ext cx="6065215" cy="712470"/>
           </a:xfrm>
           <a:prstGeom prst="rect">
             <a:avLst/>
@@ -4264,8 +4264,8 @@
         </p:nvSpPr>
         <p:spPr>
           <a:xfrm>
-            <a:off x="5779008" y="2522982"/>
-            <a:ext cx="5845759" cy="487172"/>
+            <a:off x="5779008" y="2863850"/>
+            <a:ext cx="5845759" cy="657606"/>
           </a:xfrm>
           <a:prstGeom prst="rect">
             <a:avLst/>
@@ -4289,7 +4289,7 @@
                 <a:ea typeface="Arial" pitchFamily="34" charset="-122"/>
                 <a:cs typeface="Arial" pitchFamily="34" charset="-120"/>
               </a:rPr>
-              <a:t>Treat the cohort the same as a 9-to-5 retired patient cohort. Watch DNA rates climb. Send rebooking letters. Blame the patient for not engaging.</a:t>
+              <a:t>Treat a treated cohort as if attendance were the patient's job. When the six-month check slips, send a letter. When the letter fails, close the recall and wait for her to come back symptomatic.</a:t>
             </a:r>
             <a:endParaRPr lang="en-US" sz="1100" dirty="0"/>
           </a:p>
@@ -4303,7 +4303,7 @@
         </p:nvSpPr>
         <p:spPr>
           <a:xfrm>
-            <a:off x="5669280" y="3156458"/>
+            <a:off x="5669280" y="3667760"/>
             <a:ext cx="6065215" cy="274320"/>
           </a:xfrm>
           <a:prstGeom prst="rect">
@@ -4328,7 +4328,7 @@
         </p:nvSpPr>
         <p:spPr>
           <a:xfrm>
-            <a:off x="5779008" y="3156458"/>
+            <a:off x="5779008" y="3667760"/>
             <a:ext cx="5845759" cy="274320"/>
           </a:xfrm>
           <a:prstGeom prst="rect">
@@ -4367,8 +4367,8 @@
         </p:nvSpPr>
         <p:spPr>
           <a:xfrm>
-            <a:off x="5669280" y="3430778"/>
-            <a:ext cx="6065215" cy="371602"/>
+            <a:off x="5669280" y="3942080"/>
+            <a:ext cx="6065215" cy="542036"/>
           </a:xfrm>
           <a:prstGeom prst="rect">
             <a:avLst/>
@@ -4392,8 +4392,8 @@
         </p:nvSpPr>
         <p:spPr>
           <a:xfrm>
-            <a:off x="5779008" y="3467354"/>
-            <a:ext cx="5845759" cy="316738"/>
+            <a:off x="5779008" y="3978656"/>
+            <a:ext cx="5845759" cy="487172"/>
           </a:xfrm>
           <a:prstGeom prst="rect">
             <a:avLst/>
@@ -4417,7 +4417,7 @@
                 <a:ea typeface="Arial" pitchFamily="34" charset="-122"/>
                 <a:cs typeface="Arial" pitchFamily="34" charset="-120"/>
               </a:rPr>
-              <a:t>Hannah, GP. Practice nurse. Anita on the ICB / GP commissioner side.</a:t>
+              <a:t>Hannah, GP. Practice nurse. Anita on the ICB / GP commissioner side, watching a monitoring cycle nobody can measure.</a:t>
             </a:r>
             <a:endParaRPr lang="en-US" sz="1100" dirty="0"/>
           </a:p>
@@ -4694,7 +4694,7 @@
                 <a:ea typeface="Arial" pitchFamily="34" charset="-122"/>
                 <a:cs typeface="Arial" pitchFamily="34" charset="-120"/>
               </a:rPr>
-              <a:t>Identification, Hannah's practice flags her</a:t>
+              <a:t>Identification, the practice system orders and nobody has to ask</a:t>
             </a:r>
             <a:endParaRPr lang="en-US" sz="2000" dirty="0"/>
           </a:p>
@@ -4772,7 +4772,7 @@
         <p:spPr>
           <a:xfrm>
             <a:off x="457200" y="1920240"/>
-            <a:ext cx="4892040" cy="1137285"/>
+            <a:ext cx="4892040" cy="1207008"/>
           </a:xfrm>
           <a:prstGeom prst="rect">
             <a:avLst/>
@@ -4790,7 +4790,7 @@
               <a:buNone/>
             </a:pPr>
             <a:r>
-              <a:rPr lang="en-US" sz="1350" b="1" dirty="0">
+              <a:rPr lang="en-US" sz="1200" b="1" dirty="0">
                 <a:solidFill>
                   <a:srgbClr val="003087"/>
                 </a:solidFill>
@@ -4798,9 +4798,9 @@
                 <a:ea typeface="Arial" pitchFamily="34" charset="-122"/>
                 <a:cs typeface="Arial" pitchFamily="34" charset="-120"/>
               </a:rPr>
-              <a:t>Hannah is reviewing the IDA cohort. Layla is overdue her six-month FBC, with a flag on the record for previously missed appointments. The practice opens the conversation about doing the next blood at home. The friction was always the venue; the offer changes the venue.</a:t>
-            </a:r>
-            <a:endParaRPr lang="en-US" sz="1350" dirty="0"/>
+              <a:t>Hannah's recall search flags Layla as due. In the GP-initiated pattern the practice system raises the order for the FBC and ferritin, the platform ships the kit, and the appointment Layla could never keep is never booked. There is no conversation to have, because there is nothing for Layla to agree to yet.</a:t>
+            </a:r>
+            <a:endParaRPr lang="en-US" sz="1200" dirty="0"/>
           </a:p>
         </p:txBody>
       </p:sp>
@@ -4812,7 +4812,7 @@
         </p:nvSpPr>
         <p:spPr>
           <a:xfrm>
-            <a:off x="457200" y="3167253"/>
+            <a:off x="457200" y="3236976"/>
             <a:ext cx="4892040" cy="859282"/>
           </a:xfrm>
           <a:prstGeom prst="rect">
@@ -4837,7 +4837,7 @@
         </p:nvSpPr>
         <p:spPr>
           <a:xfrm>
-            <a:off x="457200" y="3167253"/>
+            <a:off x="457200" y="3236976"/>
             <a:ext cx="82296" cy="859282"/>
           </a:xfrm>
           <a:prstGeom prst="rect">
@@ -4862,7 +4862,7 @@
         </p:nvSpPr>
         <p:spPr>
           <a:xfrm>
-            <a:off x="685800" y="3222117"/>
+            <a:off x="685800" y="3291840"/>
             <a:ext cx="4526280" cy="493522"/>
           </a:xfrm>
           <a:prstGeom prst="rect">
@@ -4889,7 +4889,7 @@
                 <a:ea typeface="Arial" pitchFamily="34" charset="-122"/>
                 <a:cs typeface="Arial" pitchFamily="34" charset="-120"/>
               </a:rPr>
-              <a:t>“Hannah said: do you want to try doing the next blood at home? I said yes faster than she could finish the sentence.”</a:t>
+              <a:t>“Nobody rang me. A text said a kit was coming for my six-month bloods, and it came. That was the whole appointment.”</a:t>
             </a:r>
             <a:endParaRPr lang="en-US" sz="1150" dirty="0"/>
           </a:p>
@@ -4903,7 +4903,7 @@
         </p:nvSpPr>
         <p:spPr>
           <a:xfrm>
-            <a:off x="685800" y="3715639"/>
+            <a:off x="685800" y="3785362"/>
             <a:ext cx="4526280" cy="256032"/>
           </a:xfrm>
           <a:prstGeom prst="rect">
@@ -4936,7 +4936,7 @@
       </p:sp>
       <p:pic>
         <p:nvPicPr>
-          <p:cNvPr id="13" name="Image 1" descr="/sessions/quirky-zen-galileo/mnt/outputs/hmdecks/img/layla-stage2.jpg">    </p:cNvPr>
+          <p:cNvPr id="13" name="Image 1" descr="/sessions/quirky-zen-galileo/mnt/outputs/hmdecks5/img/layla-stage2.jpg">    </p:cNvPr>
           <p:cNvPicPr>
             <a:picLocks noChangeAspect="1"/>
           </p:cNvPicPr>
@@ -4950,8 +4950,8 @@
         </p:blipFill>
         <p:spPr>
           <a:xfrm>
-            <a:off x="457200" y="4191127"/>
-            <a:ext cx="3762401" cy="2099945"/>
+            <a:off x="457200" y="4260850"/>
+            <a:ext cx="3637481" cy="2030222"/>
           </a:xfrm>
           <a:prstGeom prst="rect">
             <a:avLst/>
@@ -5031,7 +5031,7 @@
         <p:spPr>
           <a:xfrm>
             <a:off x="5669280" y="1371600"/>
-            <a:ext cx="6065215" cy="712470"/>
+            <a:ext cx="6065215" cy="1053338"/>
           </a:xfrm>
           <a:prstGeom prst="rect">
             <a:avLst/>
@@ -5056,7 +5056,7 @@
         <p:spPr>
           <a:xfrm>
             <a:off x="5779008" y="1408176"/>
-            <a:ext cx="5845759" cy="657606"/>
+            <a:ext cx="5845759" cy="998474"/>
           </a:xfrm>
           <a:prstGeom prst="rect">
             <a:avLst/>
@@ -5080,7 +5080,7 @@
                 <a:ea typeface="Arial" pitchFamily="34" charset="-122"/>
                 <a:cs typeface="Arial" pitchFamily="34" charset="-120"/>
               </a:rPr>
-              <a:t>Around 15 million general-practice appointments are missed each year, costing the NHS £216 million. The cohort that DNAs is the cohort the clinic-only model fails by design. The home pathway is the structural answer, not a service-recovery patch.</a:t>
+              <a:t>Around 15 million general-practice appointments are missed each year, costing the NHS £216 million. The GP-initiated pattern removes the appointment rather than chasing it: the order originates in the practice system as part of the review cycle, the kit is dispatched against it, and the result is written back to the GP record. Layla is the sample provider, not the orderer or the recipient.</a:t>
             </a:r>
             <a:endParaRPr lang="en-US" sz="1100" dirty="0"/>
           </a:p>
@@ -5094,7 +5094,7 @@
         </p:nvSpPr>
         <p:spPr>
           <a:xfrm>
-            <a:off x="5669280" y="2212086"/>
+            <a:off x="5669280" y="2552954"/>
             <a:ext cx="6065215" cy="274320"/>
           </a:xfrm>
           <a:prstGeom prst="rect">
@@ -5119,7 +5119,7 @@
         </p:nvSpPr>
         <p:spPr>
           <a:xfrm>
-            <a:off x="5779008" y="2212086"/>
+            <a:off x="5779008" y="2552954"/>
             <a:ext cx="5845759" cy="274320"/>
           </a:xfrm>
           <a:prstGeom prst="rect">
@@ -5158,7 +5158,7 @@
         </p:nvSpPr>
         <p:spPr>
           <a:xfrm>
-            <a:off x="5669280" y="2486406"/>
+            <a:off x="5669280" y="2827274"/>
             <a:ext cx="6065215" cy="542036"/>
           </a:xfrm>
           <a:prstGeom prst="rect">
@@ -5183,7 +5183,7 @@
         </p:nvSpPr>
         <p:spPr>
           <a:xfrm>
-            <a:off x="5779008" y="2522982"/>
+            <a:off x="5779008" y="2863850"/>
             <a:ext cx="5845759" cy="487172"/>
           </a:xfrm>
           <a:prstGeom prst="rect">
@@ -5208,7 +5208,7 @@
                 <a:ea typeface="Arial" pitchFamily="34" charset="-122"/>
                 <a:cs typeface="Arial" pitchFamily="34" charset="-120"/>
               </a:rPr>
-              <a:t>Re-book, re-book, re-book, miss, discharge from the cycle, see her again at A&amp;E or in a re-presentation that costs ten times more.</a:t>
+              <a:t>Book, miss, re-book, miss, then a DNA code on the record that follows her into every future conversation about engagement.</a:t>
             </a:r>
             <a:endParaRPr lang="en-US" sz="1100" dirty="0"/>
           </a:p>
@@ -5222,7 +5222,7 @@
         </p:nvSpPr>
         <p:spPr>
           <a:xfrm>
-            <a:off x="5669280" y="3156458"/>
+            <a:off x="5669280" y="3497326"/>
             <a:ext cx="6065215" cy="274320"/>
           </a:xfrm>
           <a:prstGeom prst="rect">
@@ -5247,7 +5247,7 @@
         </p:nvSpPr>
         <p:spPr>
           <a:xfrm>
-            <a:off x="5779008" y="3156458"/>
+            <a:off x="5779008" y="3497326"/>
             <a:ext cx="5845759" cy="274320"/>
           </a:xfrm>
           <a:prstGeom prst="rect">
@@ -5286,8 +5286,8 @@
         </p:nvSpPr>
         <p:spPr>
           <a:xfrm>
-            <a:off x="5669280" y="3430778"/>
-            <a:ext cx="6065215" cy="371602"/>
+            <a:off x="5669280" y="3771646"/>
+            <a:ext cx="6065215" cy="542036"/>
           </a:xfrm>
           <a:prstGeom prst="rect">
             <a:avLst/>
@@ -5311,8 +5311,8 @@
         </p:nvSpPr>
         <p:spPr>
           <a:xfrm>
-            <a:off x="5779008" y="3467354"/>
-            <a:ext cx="5845759" cy="316738"/>
+            <a:off x="5779008" y="3808222"/>
+            <a:ext cx="5845759" cy="487172"/>
           </a:xfrm>
           <a:prstGeom prst="rect">
             <a:avLst/>
@@ -5336,7 +5336,7 @@
                 <a:ea typeface="Arial" pitchFamily="34" charset="-122"/>
                 <a:cs typeface="Arial" pitchFamily="34" charset="-120"/>
               </a:rPr>
-              <a:t>Hannah. Practice nurse. Practice manager. Anita.</a:t>
+              <a:t>Hannah. The practice recall administrator. The supplier dispatching against the practice order. Anita, whose access figures stop counting Layla as a failure.</a:t>
             </a:r>
             <a:endParaRPr lang="en-US" sz="1100" dirty="0"/>
           </a:p>
@@ -5613,7 +5613,7 @@
                 <a:ea typeface="Arial" pitchFamily="34" charset="-122"/>
                 <a:cs typeface="Arial" pitchFamily="34" charset="-120"/>
               </a:rPr>
-              <a:t>Diagnosis, the FBC on a Saturday morning</a:t>
+              <a:t>Diagnosis, a sample between shifts</a:t>
             </a:r>
             <a:endParaRPr lang="en-US" sz="2000" dirty="0"/>
           </a:p>
@@ -5691,7 +5691,7 @@
         <p:spPr>
           <a:xfrm>
             <a:off x="457200" y="1920240"/>
-            <a:ext cx="4892040" cy="1214755"/>
+            <a:ext cx="4892040" cy="1207008"/>
           </a:xfrm>
           <a:prstGeom prst="rect">
             <a:avLst/>
@@ -5709,7 +5709,7 @@
               <a:buNone/>
             </a:pPr>
             <a:r>
-              <a:rPr lang="en-US" sz="1450" b="1" dirty="0">
+              <a:rPr lang="en-US" sz="1200" b="1" dirty="0">
                 <a:solidFill>
                   <a:srgbClr val="003087"/>
                 </a:solidFill>
@@ -5717,9 +5717,9 @@
                 <a:ea typeface="Arial" pitchFamily="34" charset="-122"/>
                 <a:cs typeface="Arial" pitchFamily="34" charset="-120"/>
               </a:rPr>
-              <a:t>The kit arrives. Layla takes the sample at the kitchen table on a Saturday morning while the kids are watching TV. She posts it back. The lab processes it. The result lands in Hannah's GP system in time for the cycle that the clinic would have run.</a:t>
-            </a:r>
-            <a:endParaRPr lang="en-US" sz="1450" dirty="0"/>
+              <a:t>The kit arrives on a Wednesday. Layla takes the capillary sample at the kitchen table while the kids finish their homework, before her evening shift, posts it on the way in and does not think about it again. The lab processes it on the same platform as any clinic sample and the result lands in Hannah's record on time.</a:t>
+            </a:r>
+            <a:endParaRPr lang="en-US" sz="1200" dirty="0"/>
           </a:p>
         </p:txBody>
       </p:sp>
@@ -5731,7 +5731,7 @@
         </p:nvSpPr>
         <p:spPr>
           <a:xfrm>
-            <a:off x="457200" y="3244723"/>
+            <a:off x="457200" y="3236976"/>
             <a:ext cx="4892040" cy="944499"/>
           </a:xfrm>
           <a:prstGeom prst="rect">
@@ -5756,7 +5756,7 @@
         </p:nvSpPr>
         <p:spPr>
           <a:xfrm>
-            <a:off x="457200" y="3244723"/>
+            <a:off x="457200" y="3236976"/>
             <a:ext cx="82296" cy="944499"/>
           </a:xfrm>
           <a:prstGeom prst="rect">
@@ -5781,7 +5781,7 @@
         </p:nvSpPr>
         <p:spPr>
           <a:xfrm>
-            <a:off x="685800" y="3299587"/>
+            <a:off x="685800" y="3291840"/>
             <a:ext cx="4526280" cy="578739"/>
           </a:xfrm>
           <a:prstGeom prst="rect">
@@ -5808,7 +5808,7 @@
                 <a:ea typeface="Arial" pitchFamily="34" charset="-122"/>
                 <a:cs typeface="Arial" pitchFamily="34" charset="-120"/>
               </a:rPr>
-              <a:t>“It was a Saturday job. I did it before the kids were up. I posted it on the way to the shops. I forgot about it until the result came through on the app.”</a:t>
+              <a:t>“Twenty minutes between the kids' homework and the start of my shift. I would not have got to the surgery and back in that gap, let alone waited.”</a:t>
             </a:r>
             <a:endParaRPr lang="en-US" sz="950" dirty="0"/>
           </a:p>
@@ -5822,7 +5822,7 @@
         </p:nvSpPr>
         <p:spPr>
           <a:xfrm>
-            <a:off x="685800" y="3878326"/>
+            <a:off x="685800" y="3870579"/>
             <a:ext cx="4526280" cy="256032"/>
           </a:xfrm>
           <a:prstGeom prst="rect">
@@ -5855,7 +5855,7 @@
       </p:sp>
       <p:pic>
         <p:nvPicPr>
-          <p:cNvPr id="13" name="Image 1" descr="/sessions/quirky-zen-galileo/mnt/outputs/hmdecks/img/layla-stage3.jpg">    </p:cNvPr>
+          <p:cNvPr id="13" name="Image 1" descr="/sessions/quirky-zen-galileo/mnt/outputs/hmdecks5/img/layla-stage3.jpg">    </p:cNvPr>
           <p:cNvPicPr>
             <a:picLocks noChangeAspect="1"/>
           </p:cNvPicPr>
@@ -5869,8 +5869,8 @@
         </p:blipFill>
         <p:spPr>
           <a:xfrm>
-            <a:off x="457200" y="4353814"/>
-            <a:ext cx="3470921" cy="1937258"/>
+            <a:off x="457200" y="4346067"/>
+            <a:ext cx="3484801" cy="1945005"/>
           </a:xfrm>
           <a:prstGeom prst="rect">
             <a:avLst/>
@@ -5950,7 +5950,7 @@
         <p:spPr>
           <a:xfrm>
             <a:off x="5669280" y="1371600"/>
-            <a:ext cx="6065215" cy="882904"/>
+            <a:ext cx="6065215" cy="1053338"/>
           </a:xfrm>
           <a:prstGeom prst="rect">
             <a:avLst/>
@@ -5975,7 +5975,7 @@
         <p:spPr>
           <a:xfrm>
             <a:off x="5779008" y="1408176"/>
-            <a:ext cx="5845759" cy="828040"/>
+            <a:ext cx="5845759" cy="998474"/>
           </a:xfrm>
           <a:prstGeom prst="rect">
             <a:avLst/>
@@ -5999,7 +5999,7 @@
                 <a:ea typeface="Arial" pitchFamily="34" charset="-122"/>
                 <a:cs typeface="Arial" pitchFamily="34" charset="-120"/>
               </a:rPr>
-              <a:t>The home capillary FBC is a recognised pathway for routine monitoring. The sample is processed at a UKAS-accredited lab on the same assay platform that processes in-clinic samples. The result writes back to the practice EPR via the framework integration.</a:t>
+              <a:t>The home capillary FBC and ferritin are a recognised route for routine monitoring. The sample is processed at a UKAS-accredited lab on the same assay platform that processes in-clinic samples, and the result writes back to the practice EPR through the framework integration. Nothing about the clinical standard changes; only the venue and the timing do.</a:t>
             </a:r>
             <a:endParaRPr lang="en-US" sz="1100" dirty="0"/>
           </a:p>
@@ -6013,7 +6013,7 @@
         </p:nvSpPr>
         <p:spPr>
           <a:xfrm>
-            <a:off x="5669280" y="2382520"/>
+            <a:off x="5669280" y="2552954"/>
             <a:ext cx="6065215" cy="274320"/>
           </a:xfrm>
           <a:prstGeom prst="rect">
@@ -6038,7 +6038,7 @@
         </p:nvSpPr>
         <p:spPr>
           <a:xfrm>
-            <a:off x="5779008" y="2382520"/>
+            <a:off x="5779008" y="2552954"/>
             <a:ext cx="5845759" cy="274320"/>
           </a:xfrm>
           <a:prstGeom prst="rect">
@@ -6077,8 +6077,8 @@
         </p:nvSpPr>
         <p:spPr>
           <a:xfrm>
-            <a:off x="5669280" y="2656840"/>
-            <a:ext cx="6065215" cy="542036"/>
+            <a:off x="5669280" y="2827274"/>
+            <a:ext cx="6065215" cy="712470"/>
           </a:xfrm>
           <a:prstGeom prst="rect">
             <a:avLst/>
@@ -6102,8 +6102,8 @@
         </p:nvSpPr>
         <p:spPr>
           <a:xfrm>
-            <a:off x="5779008" y="2693416"/>
-            <a:ext cx="5845759" cy="487172"/>
+            <a:off x="5779008" y="2863850"/>
+            <a:ext cx="5845759" cy="657606"/>
           </a:xfrm>
           <a:prstGeom prst="rect">
             <a:avLst/>
@@ -6127,7 +6127,7 @@
                 <a:ea typeface="Arial" pitchFamily="34" charset="-122"/>
                 <a:cs typeface="Arial" pitchFamily="34" charset="-120"/>
               </a:rPr>
-              <a:t>Take a half-day off work. Find childcare. Sit in the waiting room. Get the blood drawn in 90 seconds. Drive home. The friction is the day, not the test.</a:t>
+              <a:t>An appointment at the surgery in working hours, which for Layla means an hour of unpaid time and a manager she has to ask twice a year, or a check that does not happen.</a:t>
             </a:r>
             <a:endParaRPr lang="en-US" sz="1100" dirty="0"/>
           </a:p>
@@ -6141,7 +6141,7 @@
         </p:nvSpPr>
         <p:spPr>
           <a:xfrm>
-            <a:off x="5669280" y="3326892"/>
+            <a:off x="5669280" y="3667760"/>
             <a:ext cx="6065215" cy="274320"/>
           </a:xfrm>
           <a:prstGeom prst="rect">
@@ -6166,7 +6166,7 @@
         </p:nvSpPr>
         <p:spPr>
           <a:xfrm>
-            <a:off x="5779008" y="3326892"/>
+            <a:off x="5779008" y="3667760"/>
             <a:ext cx="5845759" cy="274320"/>
           </a:xfrm>
           <a:prstGeom prst="rect">
@@ -6205,7 +6205,7 @@
         </p:nvSpPr>
         <p:spPr>
           <a:xfrm>
-            <a:off x="5669280" y="3601212"/>
+            <a:off x="5669280" y="3942080"/>
             <a:ext cx="6065215" cy="542036"/>
           </a:xfrm>
           <a:prstGeom prst="rect">
@@ -6230,7 +6230,7 @@
         </p:nvSpPr>
         <p:spPr>
           <a:xfrm>
-            <a:off x="5779008" y="3637788"/>
+            <a:off x="5779008" y="3978656"/>
             <a:ext cx="5845759" cy="487172"/>
           </a:xfrm>
           <a:prstGeom prst="rect">
@@ -6255,7 +6255,7 @@
                 <a:ea typeface="Arial" pitchFamily="34" charset="-122"/>
                 <a:cs typeface="Arial" pitchFamily="34" charset="-120"/>
               </a:rPr>
-              <a:t>The supplier shipping the kit. The lab. The platform writing the result back. Layla.</a:t>
+              <a:t>The supplier shipping the kit. The lab. The platform writing the result back. Layla, on her own timetable.</a:t>
             </a:r>
             <a:endParaRPr lang="en-US" sz="1100" dirty="0"/>
           </a:p>
@@ -6532,7 +6532,7 @@
                 <a:ea typeface="Arial" pitchFamily="34" charset="-122"/>
                 <a:cs typeface="Arial" pitchFamily="34" charset="-120"/>
               </a:rPr>
-              <a:t>Treatment, the prescription adjusted on the trend</a:t>
+              <a:t>Treatment, the dose follows the ferritin</a:t>
             </a:r>
             <a:endParaRPr lang="en-US" sz="2000" dirty="0"/>
           </a:p>
@@ -6636,7 +6636,7 @@
                 <a:ea typeface="Arial" pitchFamily="34" charset="-122"/>
                 <a:cs typeface="Arial" pitchFamily="34" charset="-120"/>
               </a:rPr>
-              <a:t>The result confirms her haemoglobin and ferritin trends. Hannah reviews the result alongside the prior cycles. The iron prescription stays unchanged or is adjusted on the basis of the trend, exactly as it would have been from an in-clinic sample. The clinical conversation, if needed, happens by phone or message.</a:t>
+              <a:t>Hannah reviews the haemoglobin and ferritin against the previous cycles. This time the ferritin has plateaued below target, so the dose is adjusted and a note goes to Layla. Same clinical decision as an in-clinic sample would have prompted, with one difference: it happened on time, so the trend was still readable.</a:t>
             </a:r>
             <a:endParaRPr lang="en-US" sz="1200" dirty="0"/>
           </a:p>
@@ -6651,7 +6651,7 @@
         <p:spPr>
           <a:xfrm>
             <a:off x="457200" y="3236976"/>
-            <a:ext cx="4892040" cy="859282"/>
+            <a:ext cx="4892040" cy="812800"/>
           </a:xfrm>
           <a:prstGeom prst="rect">
             <a:avLst/>
@@ -6676,7 +6676,7 @@
         <p:spPr>
           <a:xfrm>
             <a:off x="457200" y="3236976"/>
-            <a:ext cx="82296" cy="859282"/>
+            <a:ext cx="82296" cy="812800"/>
           </a:xfrm>
           <a:prstGeom prst="rect">
             <a:avLst/>
@@ -6701,7 +6701,7 @@
         <p:spPr>
           <a:xfrm>
             <a:off x="685800" y="3291840"/>
-            <a:ext cx="4526280" cy="493522"/>
+            <a:ext cx="4526280" cy="447040"/>
           </a:xfrm>
           <a:prstGeom prst="rect">
             <a:avLst/>
@@ -6719,7 +6719,7 @@
               <a:buNone/>
             </a:pPr>
             <a:r>
-              <a:rPr lang="en-US" sz="1150" i="1" dirty="0">
+              <a:rPr lang="en-US" sz="1000" i="1" dirty="0">
                 <a:solidFill>
                   <a:srgbClr val="231F20"/>
                 </a:solidFill>
@@ -6727,9 +6727,9 @@
                 <a:ea typeface="Arial" pitchFamily="34" charset="-122"/>
                 <a:cs typeface="Arial" pitchFamily="34" charset="-120"/>
               </a:rPr>
-              <a:t>“Hannah sent me a message. Same prescription, see you in six months. That was the entire appointment. I was at work.”</a:t>
-            </a:r>
-            <a:endParaRPr lang="en-US" sz="1150" dirty="0"/>
+              <a:t>“A message from the practice: we are changing your dose, here is why, the new prescription is at the pharmacy. I read it on my break.”</a:t>
+            </a:r>
+            <a:endParaRPr lang="en-US" sz="1000" dirty="0"/>
           </a:p>
         </p:txBody>
       </p:sp>
@@ -6741,7 +6741,7 @@
         </p:nvSpPr>
         <p:spPr>
           <a:xfrm>
-            <a:off x="685800" y="3785362"/>
+            <a:off x="685800" y="3738880"/>
             <a:ext cx="4526280" cy="256032"/>
           </a:xfrm>
           <a:prstGeom prst="rect">
@@ -6774,7 +6774,7 @@
       </p:sp>
       <p:pic>
         <p:nvPicPr>
-          <p:cNvPr id="13" name="Image 1" descr="/sessions/quirky-zen-galileo/mnt/outputs/hmdecks/img/layla-stage4.jpg">    </p:cNvPr>
+          <p:cNvPr id="13" name="Image 1" descr="/sessions/quirky-zen-galileo/mnt/outputs/hmdecks5/img/layla-stage4.jpg">    </p:cNvPr>
           <p:cNvPicPr>
             <a:picLocks noChangeAspect="1"/>
           </p:cNvPicPr>
@@ -6788,8 +6788,8 @@
         </p:blipFill>
         <p:spPr>
           <a:xfrm>
-            <a:off x="457200" y="4260850"/>
-            <a:ext cx="3637481" cy="2030222"/>
+            <a:off x="457200" y="4214368"/>
+            <a:ext cx="3720761" cy="2076704"/>
           </a:xfrm>
           <a:prstGeom prst="rect">
             <a:avLst/>
@@ -6869,7 +6869,7 @@
         <p:spPr>
           <a:xfrm>
             <a:off x="5669280" y="1371600"/>
-            <a:ext cx="6065215" cy="712470"/>
+            <a:ext cx="6065215" cy="882904"/>
           </a:xfrm>
           <a:prstGeom prst="rect">
             <a:avLst/>
@@ -6894,7 +6894,7 @@
         <p:spPr>
           <a:xfrm>
             <a:off x="5779008" y="1408176"/>
-            <a:ext cx="5845759" cy="657606"/>
+            <a:ext cx="5845759" cy="828040"/>
           </a:xfrm>
           <a:prstGeom prst="rect">
             <a:avLst/>
@@ -6918,7 +6918,7 @@
                 <a:ea typeface="Arial" pitchFamily="34" charset="-122"/>
                 <a:cs typeface="Arial" pitchFamily="34" charset="-120"/>
               </a:rPr>
-              <a:t>The treatment pathway is NICE-guideline-aligned and unchanged by the home venue. Iron supplementation continues, with dose adjustments based on the haemoglobin and ferritin response. The GP holds the prescribing accountability.</a:t>
+              <a:t>The treatment pathway is NICE-guideline-aligned and unchanged by the home venue: iron supplementation is titrated to the FBC and ferritin response, and the GP holds prescribing accountability. What the home cycle adds is timeliness. A dose that needs changing gets changed at six months, not at fourteen.</a:t>
             </a:r>
             <a:endParaRPr lang="en-US" sz="1100" dirty="0"/>
           </a:p>
@@ -6932,7 +6932,7 @@
         </p:nvSpPr>
         <p:spPr>
           <a:xfrm>
-            <a:off x="5669280" y="2212086"/>
+            <a:off x="5669280" y="2382520"/>
             <a:ext cx="6065215" cy="274320"/>
           </a:xfrm>
           <a:prstGeom prst="rect">
@@ -6957,7 +6957,7 @@
         </p:nvSpPr>
         <p:spPr>
           <a:xfrm>
-            <a:off x="5779008" y="2212086"/>
+            <a:off x="5779008" y="2382520"/>
             <a:ext cx="5845759" cy="274320"/>
           </a:xfrm>
           <a:prstGeom prst="rect">
@@ -6996,7 +6996,7 @@
         </p:nvSpPr>
         <p:spPr>
           <a:xfrm>
-            <a:off x="5669280" y="2486406"/>
+            <a:off x="5669280" y="2656840"/>
             <a:ext cx="6065215" cy="542036"/>
           </a:xfrm>
           <a:prstGeom prst="rect">
@@ -7021,7 +7021,7 @@
         </p:nvSpPr>
         <p:spPr>
           <a:xfrm>
-            <a:off x="5779008" y="2522982"/>
+            <a:off x="5779008" y="2693416"/>
             <a:ext cx="5845759" cy="487172"/>
           </a:xfrm>
           <a:prstGeom prst="rect">
@@ -7046,7 +7046,7 @@
                 <a:ea typeface="Arial" pitchFamily="34" charset="-122"/>
                 <a:cs typeface="Arial" pitchFamily="34" charset="-120"/>
               </a:rPr>
-              <a:t>Drag the patient back into clinic to discuss a result that was always going to be a prescription continuation. The visit was the cost; the message was the value.</a:t>
+              <a:t>A result reviewed months late, if at all, and a dose change made on a trend with a hole in it.</a:t>
             </a:r>
             <a:endParaRPr lang="en-US" sz="1100" dirty="0"/>
           </a:p>
@@ -7060,7 +7060,7 @@
         </p:nvSpPr>
         <p:spPr>
           <a:xfrm>
-            <a:off x="5669280" y="3156458"/>
+            <a:off x="5669280" y="3326892"/>
             <a:ext cx="6065215" cy="274320"/>
           </a:xfrm>
           <a:prstGeom prst="rect">
@@ -7085,7 +7085,7 @@
         </p:nvSpPr>
         <p:spPr>
           <a:xfrm>
-            <a:off x="5779008" y="3156458"/>
+            <a:off x="5779008" y="3326892"/>
             <a:ext cx="5845759" cy="274320"/>
           </a:xfrm>
           <a:prstGeom prst="rect">
@@ -7124,8 +7124,8 @@
         </p:nvSpPr>
         <p:spPr>
           <a:xfrm>
-            <a:off x="5669280" y="3430778"/>
-            <a:ext cx="6065215" cy="371602"/>
+            <a:off x="5669280" y="3601212"/>
+            <a:ext cx="6065215" cy="542036"/>
           </a:xfrm>
           <a:prstGeom prst="rect">
             <a:avLst/>
@@ -7149,8 +7149,8 @@
         </p:nvSpPr>
         <p:spPr>
           <a:xfrm>
-            <a:off x="5779008" y="3467354"/>
-            <a:ext cx="5845759" cy="316738"/>
+            <a:off x="5779008" y="3637788"/>
+            <a:ext cx="5845759" cy="487172"/>
           </a:xfrm>
           <a:prstGeom prst="rect">
             <a:avLst/>
@@ -7174,7 +7174,7 @@
                 <a:ea typeface="Arial" pitchFamily="34" charset="-122"/>
                 <a:cs typeface="Arial" pitchFamily="34" charset="-120"/>
               </a:rPr>
-              <a:t>Hannah. Practice pharmacist if dose changes. NICE guidelines.</a:t>
+              <a:t>Hannah. Practice pharmacist for the dose change. The community pharmacy that already has her prescription.</a:t>
             </a:r>
             <a:endParaRPr lang="en-US" sz="1100" dirty="0"/>
           </a:p>
@@ -7451,7 +7451,7 @@
                 <a:ea typeface="Arial" pitchFamily="34" charset="-122"/>
                 <a:cs typeface="Arial" pitchFamily="34" charset="-120"/>
               </a:rPr>
-              <a:t>Long-term optimisation, the cycle that fits her life</a:t>
+              <a:t>Long-term optimisation, silence as the good result</a:t>
             </a:r>
             <a:endParaRPr lang="en-US" sz="2000" dirty="0"/>
           </a:p>
@@ -7529,7 +7529,7 @@
         <p:spPr>
           <a:xfrm>
             <a:off x="457200" y="1920240"/>
-            <a:ext cx="4892040" cy="1098550"/>
+            <a:ext cx="4892040" cy="1021080"/>
           </a:xfrm>
           <a:prstGeom prst="rect">
             <a:avLst/>
@@ -7547,7 +7547,7 @@
               <a:buNone/>
             </a:pPr>
             <a:r>
-              <a:rPr lang="en-US" sz="1300" b="1" dirty="0">
+              <a:rPr lang="en-US" sz="1200" b="1" dirty="0">
                 <a:solidFill>
                   <a:srgbClr val="003087"/>
                 </a:solidFill>
@@ -7555,9 +7555,9 @@
                 <a:ea typeface="Arial" pitchFamily="34" charset="-122"/>
                 <a:cs typeface="Arial" pitchFamily="34" charset="-120"/>
               </a:rPr>
-              <a:t>Layla stays in the cycle. The next FBC is on a calendar reminder in six months. The kit will arrive. The Saturday morning will happen. The trend will be reviewed. Layla's anaemia is monitored to the same clinical standard, and the practice no longer carries her DNA history.</a:t>
-            </a:r>
-            <a:endParaRPr lang="en-US" sz="1300" dirty="0"/>
+              <a:t>The cycle holds. The next kit is dated for six months, tied to the practice recall rather than to Layla's memory or her rota. If the trend is steady she hears nothing, and nothing is the right answer. If it moves, she hears from Hannah. Either way the practice knows, which is the whole point.</a:t>
+            </a:r>
+            <a:endParaRPr lang="en-US" sz="1200" dirty="0"/>
           </a:p>
         </p:txBody>
       </p:sp>
@@ -7569,8 +7569,8 @@
         </p:nvSpPr>
         <p:spPr>
           <a:xfrm>
-            <a:off x="457200" y="3128518"/>
-            <a:ext cx="4892040" cy="859282"/>
+            <a:off x="457200" y="3051048"/>
+            <a:ext cx="4892040" cy="944499"/>
           </a:xfrm>
           <a:prstGeom prst="rect">
             <a:avLst/>
@@ -7594,8 +7594,8 @@
         </p:nvSpPr>
         <p:spPr>
           <a:xfrm>
-            <a:off x="457200" y="3128518"/>
-            <a:ext cx="82296" cy="859282"/>
+            <a:off x="457200" y="3051048"/>
+            <a:ext cx="82296" cy="944499"/>
           </a:xfrm>
           <a:prstGeom prst="rect">
             <a:avLst/>
@@ -7619,8 +7619,8 @@
         </p:nvSpPr>
         <p:spPr>
           <a:xfrm>
-            <a:off x="685800" y="3183382"/>
-            <a:ext cx="4526280" cy="493522"/>
+            <a:off x="685800" y="3105912"/>
+            <a:ext cx="4526280" cy="578739"/>
           </a:xfrm>
           <a:prstGeom prst="rect">
             <a:avLst/>
@@ -7638,7 +7638,7 @@
               <a:buNone/>
             </a:pPr>
             <a:r>
-              <a:rPr lang="en-US" sz="1150" i="1" dirty="0">
+              <a:rPr lang="en-US" sz="950" i="1" dirty="0">
                 <a:solidFill>
                   <a:srgbClr val="231F20"/>
                 </a:solidFill>
@@ -7646,9 +7646,9 @@
                 <a:ea typeface="Arial" pitchFamily="34" charset="-122"/>
                 <a:cs typeface="Arial" pitchFamily="34" charset="-120"/>
               </a:rPr>
-              <a:t>“I do not feel like the patient who keeps letting them down anymore. I just feel like a patient.”</a:t>
-            </a:r>
-            <a:endParaRPr lang="en-US" sz="1150" dirty="0"/>
+              <a:t>“I used to feel like I was always about to be in trouble with the surgery. Now the only time I hear from them is when there is actually something to say.”</a:t>
+            </a:r>
+            <a:endParaRPr lang="en-US" sz="950" dirty="0"/>
           </a:p>
         </p:txBody>
       </p:sp>
@@ -7660,7 +7660,7 @@
         </p:nvSpPr>
         <p:spPr>
           <a:xfrm>
-            <a:off x="685800" y="3676904"/>
+            <a:off x="685800" y="3684651"/>
             <a:ext cx="4526280" cy="256032"/>
           </a:xfrm>
           <a:prstGeom prst="rect">
@@ -7693,7 +7693,7 @@
       </p:sp>
       <p:pic>
         <p:nvPicPr>
-          <p:cNvPr id="13" name="Image 1" descr="/sessions/quirky-zen-galileo/mnt/outputs/hmdecks/img/layla-stage5.jpg">    </p:cNvPr>
+          <p:cNvPr id="13" name="Image 1" descr="/sessions/quirky-zen-galileo/mnt/outputs/hmdecks5/img/layla-stage5.jpg">    </p:cNvPr>
           <p:cNvPicPr>
             <a:picLocks noChangeAspect="1"/>
           </p:cNvPicPr>
@@ -7707,8 +7707,8 @@
         </p:blipFill>
         <p:spPr>
           <a:xfrm>
-            <a:off x="457200" y="4152392"/>
-            <a:ext cx="3831802" cy="2138680"/>
+            <a:off x="457200" y="4160139"/>
+            <a:ext cx="3817922" cy="2130933"/>
           </a:xfrm>
           <a:prstGeom prst="rect">
             <a:avLst/>
@@ -7788,7 +7788,7 @@
         <p:spPr>
           <a:xfrm>
             <a:off x="5669280" y="1371600"/>
-            <a:ext cx="6065215" cy="712470"/>
+            <a:ext cx="6065215" cy="1223772"/>
           </a:xfrm>
           <a:prstGeom prst="rect">
             <a:avLst/>
@@ -7813,7 +7813,7 @@
         <p:spPr>
           <a:xfrm>
             <a:off x="5779008" y="1408176"/>
-            <a:ext cx="5845759" cy="657606"/>
+            <a:ext cx="5845759" cy="1168908"/>
           </a:xfrm>
           <a:prstGeom prst="rect">
             <a:avLst/>
@@ -7837,7 +7837,7 @@
                 <a:ea typeface="Arial" pitchFamily="34" charset="-122"/>
                 <a:cs typeface="Arial" pitchFamily="34" charset="-120"/>
               </a:rPr>
-              <a:t>Sustained engagement with monitoring is the outcome that matters clinically. The home cycle holds the patient in the cohort, surfaces threshold breaches on time, and frees the practice nurse slot for the patients who clinically need clinic.</a:t>
+              <a:t>Sustained monitoring is the clinical outcome for a treated long-term condition. The home cycle keeps the interval honest, surfaces a falling ferritin at the point it can be corrected cheaply, and frees the practice nurse slot for patients who clinically need the room. The illustration ends where the configuration stands: held, low priority under the framework, and able to run on the same rails as every other primary-care cycle if the gate opens.</a:t>
             </a:r>
             <a:endParaRPr lang="en-US" sz="1100" dirty="0"/>
           </a:p>
@@ -7851,7 +7851,7 @@
         </p:nvSpPr>
         <p:spPr>
           <a:xfrm>
-            <a:off x="5669280" y="2212086"/>
+            <a:off x="5669280" y="2723388"/>
             <a:ext cx="6065215" cy="274320"/>
           </a:xfrm>
           <a:prstGeom prst="rect">
@@ -7876,7 +7876,7 @@
         </p:nvSpPr>
         <p:spPr>
           <a:xfrm>
-            <a:off x="5779008" y="2212086"/>
+            <a:off x="5779008" y="2723388"/>
             <a:ext cx="5845759" cy="274320"/>
           </a:xfrm>
           <a:prstGeom prst="rect">
@@ -7915,8 +7915,8 @@
         </p:nvSpPr>
         <p:spPr>
           <a:xfrm>
-            <a:off x="5669280" y="2486406"/>
-            <a:ext cx="6065215" cy="712470"/>
+            <a:off x="5669280" y="2997708"/>
+            <a:ext cx="6065215" cy="542036"/>
           </a:xfrm>
           <a:prstGeom prst="rect">
             <a:avLst/>
@@ -7940,8 +7940,8 @@
         </p:nvSpPr>
         <p:spPr>
           <a:xfrm>
-            <a:off x="5779008" y="2522982"/>
-            <a:ext cx="5845759" cy="657606"/>
+            <a:off x="5779008" y="3034284"/>
+            <a:ext cx="5845759" cy="487172"/>
           </a:xfrm>
           <a:prstGeom prst="rect">
             <a:avLst/>
@@ -7965,7 +7965,7 @@
                 <a:ea typeface="Arial" pitchFamily="34" charset="-122"/>
                 <a:cs typeface="Arial" pitchFamily="34" charset="-120"/>
               </a:rPr>
-              <a:t>Drift out of the cycle. Re-present in a year or two with a haemoglobin much lower than it should have been. The clinical risk was always in the model, not the patient.</a:t>
+              <a:t>Drift out of the cycle for a year or two and re-present with a haemoglobin far lower than it needed to be. The risk was always in the interval, not in the patient.</a:t>
             </a:r>
             <a:endParaRPr lang="en-US" sz="1100" dirty="0"/>
           </a:p>
@@ -7979,7 +7979,7 @@
         </p:nvSpPr>
         <p:spPr>
           <a:xfrm>
-            <a:off x="5669280" y="3326892"/>
+            <a:off x="5669280" y="3667760"/>
             <a:ext cx="6065215" cy="274320"/>
           </a:xfrm>
           <a:prstGeom prst="rect">
@@ -8004,7 +8004,7 @@
         </p:nvSpPr>
         <p:spPr>
           <a:xfrm>
-            <a:off x="5779008" y="3326892"/>
+            <a:off x="5779008" y="3667760"/>
             <a:ext cx="5845759" cy="274320"/>
           </a:xfrm>
           <a:prstGeom prst="rect">
@@ -8043,7 +8043,7 @@
         </p:nvSpPr>
         <p:spPr>
           <a:xfrm>
-            <a:off x="5669280" y="3601212"/>
+            <a:off x="5669280" y="3942080"/>
             <a:ext cx="6065215" cy="371602"/>
           </a:xfrm>
           <a:prstGeom prst="rect">
@@ -8068,7 +8068,7 @@
         </p:nvSpPr>
         <p:spPr>
           <a:xfrm>
-            <a:off x="5779008" y="3637788"/>
+            <a:off x="5779008" y="3978656"/>
             <a:ext cx="5845759" cy="316738"/>
           </a:xfrm>
           <a:prstGeom prst="rect">
@@ -8093,7 +8093,7 @@
                 <a:ea typeface="Arial" pitchFamily="34" charset="-122"/>
                 <a:cs typeface="Arial" pitchFamily="34" charset="-120"/>
               </a:rPr>
-              <a:t>Layla. Hannah. The practice nurse. The platform holding the cycle reminder.</a:t>
+              <a:t>Layla. Hannah. The practice nurse. The platform holding the recall date.</a:t>
             </a:r>
             <a:endParaRPr lang="en-US" sz="1100" dirty="0"/>
           </a:p>
@@ -8435,7 +8435,7 @@
                 <a:ea typeface="Arial" pitchFamily="34" charset="-122"/>
                 <a:cs typeface="Arial" pitchFamily="34" charset="-120"/>
               </a:rPr>
-              <a:t>In monitoring. In work. In the cohort the system actually holds, not the cohort the system quietly drops.</a:t>
+              <a:t>Monitored on time. Paid for every shift. Known to the practice as a patient, not as a DNA code.</a:t>
             </a:r>
             <a:endParaRPr lang="en-US" sz="2200" dirty="0"/>
           </a:p>
@@ -8450,7 +8450,7 @@
         <p:spPr>
           <a:xfrm>
             <a:off x="457200" y="2011680"/>
-            <a:ext cx="11277295" cy="463296"/>
+            <a:ext cx="11277295" cy="835152"/>
           </a:xfrm>
           <a:prstGeom prst="rect">
             <a:avLst/>
@@ -8476,7 +8476,7 @@
                 <a:ea typeface="Arial" pitchFamily="34" charset="-122"/>
                 <a:cs typeface="Arial" pitchFamily="34" charset="-120"/>
               </a:rPr>
-              <a:t>Layla does not see commissioning, frameworks or platforms. She sees a kit through the door, a Saturday morning sample, and a message from Hannah saying see you in six months. </a:t>
+              <a:t>Layla does not see the framework or the platform. She sees a text, a kit, twenty minutes between homework and a shift, and a message from Hannah only when something needs to change. The trend that tells the practice whether three years of tablets are still working stays readable, because the cycle stopped asking for the one thing she cannot give it: a fixed hour in a working week. </a:t>
             </a:r>
             <a:pPr indent="0" marL="0">
               <a:buNone/>
@@ -8490,21 +8490,7 @@
                 <a:ea typeface="Arial" pitchFamily="34" charset="-122"/>
                 <a:cs typeface="Arial" pitchFamily="34" charset="-120"/>
               </a:rPr>
-              <a:t>The half-day off she did not take is the half-day she got with her family instead.</a:t>
-            </a:r>
-            <a:pPr indent="0" marL="0">
-              <a:buNone/>
-            </a:pPr>
-            <a:r>
-              <a:rPr lang="en-US" sz="1200" dirty="0">
-                <a:solidFill>
-                  <a:srgbClr val="231F20"/>
-                </a:solidFill>
-                <a:latin typeface="Arial" pitchFamily="34" charset="0"/>
-                <a:ea typeface="Arial" pitchFamily="34" charset="-122"/>
-                <a:cs typeface="Arial" pitchFamily="34" charset="-120"/>
-              </a:rPr>
-              <a:t> The cycle holds.</a:t>
+              <a:t>The configuration is held, so this is an illustration of the GP-initiated pattern, not a live pathway. The point stands: hold the cycle and you hold the treatment.</a:t>
             </a:r>
             <a:endParaRPr lang="en-US" sz="1200" dirty="0"/>
           </a:p>
@@ -8518,12 +8504,12 @@
         </p:nvSpPr>
         <p:spPr>
           <a:xfrm>
-            <a:off x="457200" y="2749296"/>
-            <a:ext cx="11277295" cy="1737360"/>
+            <a:off x="457200" y="3121152"/>
+            <a:ext cx="11277295" cy="1874012"/>
           </a:xfrm>
           <a:prstGeom prst="roundRect">
             <a:avLst>
-              <a:gd name="adj" fmla="val 5263"/>
+              <a:gd name="adj" fmla="val 4879"/>
             </a:avLst>
           </a:prstGeom>
           <a:solidFill>
@@ -8545,7 +8531,7 @@
         </p:nvSpPr>
         <p:spPr>
           <a:xfrm>
-            <a:off x="457200" y="2749296"/>
+            <a:off x="457200" y="3121152"/>
             <a:ext cx="11277295" cy="73152"/>
           </a:xfrm>
           <a:prstGeom prst="rect">
@@ -8570,7 +8556,7 @@
         </p:nvSpPr>
         <p:spPr>
           <a:xfrm>
-            <a:off x="731520" y="2932176"/>
+            <a:off x="731520" y="3304032"/>
             <a:ext cx="5486400" cy="274320"/>
           </a:xfrm>
           <a:prstGeom prst="rect">
@@ -8609,8 +8595,8 @@
         </p:nvSpPr>
         <p:spPr>
           <a:xfrm>
-            <a:off x="731520" y="3252216"/>
-            <a:ext cx="10728655" cy="777240"/>
+            <a:off x="731520" y="3624072"/>
+            <a:ext cx="10728655" cy="913892"/>
           </a:xfrm>
           <a:prstGeom prst="rect">
             <a:avLst/>
@@ -8639,7 +8625,7 @@
                 <a:ea typeface="Arial" pitchFamily="34" charset="-122"/>
                 <a:cs typeface="Arial" pitchFamily="34" charset="-120"/>
               </a:rPr>
-              <a:t>When the iron deficiency landing opens under a roadmap gate, the money will work the way Devi's already does: a set price per completed test, paid by the commissioner direct to the supplier, against a national ceiling. Nothing about Layla's economics is exotic. The saving is the string of missed appointments the practice stops paying for in slots, letters and chased bookings, and the diagnosis that stops being late.</a:t>
+              <a:t>If the iron deficiency configuration opens under a roadmap gate, the money would work the way every other primary-care cycle does: a cost per activity for each completed test, paid by the commissioner direct to the supplier, against a national ceiling. Nothing about Layla's economics is exotic. The saving is the string of missed and re-booked appointments the practice stops paying for in slots, letters and chased bookings, and the dose change that stops being fourteen months late.</a:t>
             </a:r>
             <a:endParaRPr lang="en-US" sz="1150" dirty="0"/>
           </a:p>
@@ -8653,7 +8639,7 @@
         </p:nvSpPr>
         <p:spPr>
           <a:xfrm>
-            <a:off x="731520" y="4075176"/>
+            <a:off x="731520" y="4583684"/>
             <a:ext cx="10728655" cy="320040"/>
           </a:xfrm>
           <a:prstGeom prst="rect">

--- a/hearts-and-minds/journey-decks/hm-journey-layla-v1.pptx
+++ b/hearts-and-minds/journey-decks/hm-journey-layla-v1.pptx
@@ -1502,13 +1502,6 @@
 <file path=ppt/slides/slide1.xml><?xml version="1.0" encoding="utf-8"?>
 <p:sld xmlns:a="http://schemas.openxmlformats.org/drawingml/2006/main" xmlns:r="http://schemas.openxmlformats.org/officeDocument/2006/relationships" xmlns:p="http://schemas.openxmlformats.org/presentationml/2006/main">
   <p:cSld name="Slide 1">
-    <p:bg>
-      <p:bgPr>
-        <a:solidFill>
-          <a:srgbClr val="003087"/>
-        </a:solidFill>
-      </p:bgPr>
-    </p:bg>
     <p:spTree>
       <p:nvGrpSpPr>
         <p:cNvPr id="1" name=""/>
@@ -1525,7 +1518,7 @@
       </p:grpSpPr>
       <p:pic>
         <p:nvPicPr>
-          <p:cNvPr id="2" name="Image 0" descr="/sessions/quirky-zen-galileo/mnt/outputs/deckbuild/nhs_logo.png">    </p:cNvPr>
+          <p:cNvPr id="2" name="Image 0" descr="/sessions/quirky-zen-galileo/mnt/NHS/07 Sites &amp; Repos/dtx-ecosystem/hearts-and-minds/_generators/assets/bg-hero.jpg">    </p:cNvPr>
           <p:cNvPicPr>
             <a:picLocks noChangeAspect="1"/>
           </p:cNvPicPr>
@@ -1539,8 +1532,8 @@
         </p:blipFill>
         <p:spPr>
           <a:xfrm>
-            <a:off x="10591495" y="365760"/>
-            <a:ext cx="1143000" cy="466344"/>
+            <a:off x="0" y="0"/>
+            <a:ext cx="12191695" cy="6858000"/>
           </a:xfrm>
           <a:prstGeom prst="rect">
             <a:avLst/>
@@ -1549,14 +1542,65 @@
       </p:pic>
       <p:sp>
         <p:nvSpPr>
-          <p:cNvPr id="3" name="Text 0"/>
-          <p:cNvSpPr/>
-          <p:nvPr/>
-        </p:nvSpPr>
-        <p:spPr>
-          <a:xfrm>
-            <a:off x="640080" y="502920"/>
-            <a:ext cx="9326880" cy="274320"/>
+          <p:cNvPr id="3" name="Shape 0"/>
+          <p:cNvSpPr/>
+          <p:nvPr/>
+        </p:nvSpPr>
+        <p:spPr>
+          <a:xfrm>
+            <a:off x="10782523" y="457200"/>
+            <a:ext cx="860532" cy="658368"/>
+          </a:xfrm>
+          <a:prstGeom prst="roundRect">
+            <a:avLst>
+              <a:gd name="adj" fmla="val 11111"/>
+            </a:avLst>
+          </a:prstGeom>
+          <a:solidFill>
+            <a:srgbClr val="FFFFFF"/>
+          </a:solidFill>
+          <a:ln w="12700">
+            <a:solidFill>
+              <a:srgbClr val="FFFFFF"/>
+            </a:solidFill>
+            <a:prstDash val="solid"/>
+          </a:ln>
+        </p:spPr>
+      </p:sp>
+      <p:pic>
+        <p:nvPicPr>
+          <p:cNvPr id="4" name="Image 1" descr="/sessions/quirky-zen-galileo/mnt/NHS/07 Sites &amp; Repos/dtx-ecosystem/hearts-and-minds/_generators/assets/nhs-logo.png">    </p:cNvPr>
+          <p:cNvPicPr>
+            <a:picLocks noChangeAspect="1"/>
+          </p:cNvPicPr>
+          <p:nvPr/>
+        </p:nvPicPr>
+        <p:blipFill>
+          <a:blip r:embed="rId2"/>
+          <a:stretch>
+            <a:fillRect/>
+          </a:stretch>
+        </p:blipFill>
+        <p:spPr>
+          <a:xfrm>
+            <a:off x="10919683" y="557784"/>
+            <a:ext cx="586212" cy="457200"/>
+          </a:xfrm>
+          <a:prstGeom prst="rect">
+            <a:avLst/>
+          </a:prstGeom>
+        </p:spPr>
+      </p:pic>
+      <p:sp>
+        <p:nvSpPr>
+          <p:cNvPr id="5" name="Text 1"/>
+          <p:cNvSpPr/>
+          <p:nvPr/>
+        </p:nvSpPr>
+        <p:spPr>
+          <a:xfrm>
+            <a:off x="685800" y="566928"/>
+            <a:ext cx="8778240" cy="274320"/>
           </a:xfrm>
           <a:prstGeom prst="rect">
             <a:avLst/>
@@ -1572,32 +1616,248 @@
               <a:buNone/>
             </a:pPr>
             <a:r>
-              <a:rPr lang="en-US" sz="1050" b="1" spc="300" kern="0" dirty="0">
-                <a:solidFill>
-                  <a:srgbClr val="7EC8E3"/>
-                </a:solidFill>
-                <a:latin typeface="Arial" pitchFamily="34" charset="0"/>
-                <a:ea typeface="Arial" pitchFamily="34" charset="-122"/>
-                <a:cs typeface="Arial" pitchFamily="34" charset="-120"/>
+              <a:rPr lang="en-US" sz="1000" b="1" spc="280" kern="0" dirty="0">
+                <a:solidFill>
+                  <a:srgbClr val="FFD66B"/>
+                </a:solidFill>
+                <a:latin typeface="Segoe UI" pitchFamily="34" charset="0"/>
+                <a:ea typeface="Segoe UI" pitchFamily="34" charset="-122"/>
+                <a:cs typeface="Segoe UI" pitchFamily="34" charset="-120"/>
               </a:rPr>
               <a:t>HEARTS AND MINDS  ·  HOMETEST OPERATING MODEL  ·  PATIENT JOURNEY</a:t>
             </a:r>
+            <a:endParaRPr lang="en-US" sz="1000" dirty="0"/>
+          </a:p>
+        </p:txBody>
+      </p:sp>
+      <p:sp>
+        <p:nvSpPr>
+          <p:cNvPr id="6" name="Shape 2"/>
+          <p:cNvSpPr/>
+          <p:nvPr/>
+        </p:nvSpPr>
+        <p:spPr>
+          <a:xfrm>
+            <a:off x="685800" y="969264"/>
+            <a:ext cx="822960" cy="50292"/>
+          </a:xfrm>
+          <a:prstGeom prst="rect">
+            <a:avLst/>
+          </a:prstGeom>
+          <a:solidFill>
+            <a:srgbClr val="FFD66B"/>
+          </a:solidFill>
+          <a:ln w="12700">
+            <a:solidFill>
+              <a:srgbClr val="FFD66B"/>
+            </a:solidFill>
+            <a:prstDash val="solid"/>
+          </a:ln>
+        </p:spPr>
+      </p:sp>
+      <p:sp>
+        <p:nvSpPr>
+          <p:cNvPr id="7" name="Text 3"/>
+          <p:cNvSpPr/>
+          <p:nvPr/>
+        </p:nvSpPr>
+        <p:spPr>
+          <a:xfrm>
+            <a:off x="685800" y="1133856"/>
+            <a:ext cx="7132320" cy="960120"/>
+          </a:xfrm>
+          <a:prstGeom prst="rect">
+            <a:avLst/>
+          </a:prstGeom>
+          <a:noFill/>
+          <a:ln/>
+        </p:spPr>
+        <p:txBody>
+          <a:bodyPr wrap="square" lIns="0" tIns="0" rIns="0" bIns="0" rtlCol="0" anchor="ctr"/>
+          <a:lstStyle/>
+          <a:p>
+            <a:pPr indent="0" marL="0">
+              <a:buNone/>
+            </a:pPr>
+            <a:r>
+              <a:rPr lang="en-US" sz="5600" b="1" spc="-120" kern="0" dirty="0">
+                <a:solidFill>
+                  <a:srgbClr val="FFFFFF"/>
+                </a:solidFill>
+                <a:latin typeface="Segoe UI" pitchFamily="34" charset="0"/>
+                <a:ea typeface="Segoe UI" pitchFamily="34" charset="-122"/>
+                <a:cs typeface="Segoe UI" pitchFamily="34" charset="-120"/>
+              </a:rPr>
+              <a:t>Layla.</a:t>
+            </a:r>
+            <a:endParaRPr lang="en-US" sz="5600" dirty="0"/>
+          </a:p>
+        </p:txBody>
+      </p:sp>
+      <p:sp>
+        <p:nvSpPr>
+          <p:cNvPr id="8" name="Text 4"/>
+          <p:cNvSpPr/>
+          <p:nvPr/>
+        </p:nvSpPr>
+        <p:spPr>
+          <a:xfrm>
+            <a:off x="685800" y="2139696"/>
+            <a:ext cx="6858000" cy="847344"/>
+          </a:xfrm>
+          <a:prstGeom prst="rect">
+            <a:avLst/>
+          </a:prstGeom>
+          <a:noFill/>
+          <a:ln/>
+        </p:spPr>
+        <p:txBody>
+          <a:bodyPr wrap="square" lIns="0" tIns="0" rIns="0" bIns="0" rtlCol="0" anchor="t">
+            <a:normAutofit/>
+          </a:bodyPr>
+          <a:lstStyle/>
+          <a:p>
+            <a:pPr indent="0" marL="0">
+              <a:buNone/>
+            </a:pPr>
+            <a:r>
+              <a:rPr lang="en-US" sz="2400" dirty="0">
+                <a:solidFill>
+                  <a:srgbClr val="FFFFFF"/>
+                </a:solidFill>
+                <a:latin typeface="Segoe UI" pitchFamily="34" charset="0"/>
+                <a:ea typeface="Segoe UI" pitchFamily="34" charset="-122"/>
+                <a:cs typeface="Segoe UI" pitchFamily="34" charset="-120"/>
+              </a:rPr>
+              <a:t>Three years on the tablets.</a:t>
+            </a:r>
+            <a:endParaRPr lang="en-US" sz="2400" dirty="0"/>
+          </a:p>
+          <a:p>
+            <a:pPr indent="0" marL="0">
+              <a:buNone/>
+            </a:pPr>
+            <a:r>
+              <a:rPr lang="en-US" sz="2400" dirty="0">
+                <a:solidFill>
+                  <a:srgbClr val="FFFFFF"/>
+                </a:solidFill>
+                <a:latin typeface="Segoe UI" pitchFamily="34" charset="0"/>
+                <a:ea typeface="Segoe UI" pitchFamily="34" charset="-122"/>
+                <a:cs typeface="Segoe UI" pitchFamily="34" charset="-120"/>
+              </a:rPr>
+              <a:t>The trend is the treatment.</a:t>
+            </a:r>
+            <a:endParaRPr lang="en-US" sz="2400" dirty="0"/>
+          </a:p>
+        </p:txBody>
+      </p:sp>
+      <p:sp>
+        <p:nvSpPr>
+          <p:cNvPr id="9" name="Text 5"/>
+          <p:cNvSpPr/>
+          <p:nvPr/>
+        </p:nvSpPr>
+        <p:spPr>
+          <a:xfrm>
+            <a:off x="685800" y="3243072"/>
+            <a:ext cx="6858000" cy="1603248"/>
+          </a:xfrm>
+          <a:prstGeom prst="rect">
+            <a:avLst/>
+          </a:prstGeom>
+          <a:noFill/>
+          <a:ln/>
+        </p:spPr>
+        <p:txBody>
+          <a:bodyPr wrap="square" lIns="0" tIns="0" rIns="0" bIns="0" rtlCol="0" anchor="t">
+            <a:normAutofit/>
+          </a:bodyPr>
+          <a:lstStyle/>
+          <a:p>
+            <a:pPr indent="0" marL="0">
+              <a:buNone/>
+            </a:pPr>
+            <a:r>
+              <a:rPr lang="en-US" sz="1200" dirty="0">
+                <a:solidFill>
+                  <a:srgbClr val="DCE7F0"/>
+                </a:solidFill>
+                <a:latin typeface="Segoe UI" pitchFamily="34" charset="0"/>
+                <a:ea typeface="Segoe UI" pitchFamily="34" charset="-122"/>
+                <a:cs typeface="Segoe UI" pitchFamily="34" charset="-120"/>
+              </a:rPr>
+              <a:t>Layla is 42, a single parent with two school-age kids and two part-time jobs, one of them on shifts. Her iron deficiency anaemia was diagnosed three years ago; she has been on ferrous sulphate since, and her GP, Hannah, needs a full blood count and ferritin every six months to know whether it is still working. Nobody doubts Layla will take the tablets. The question is whether anyone will see the trend. </a:t>
+            </a:r>
+            <a:pPr indent="0" marL="0">
+              <a:buNone/>
+            </a:pPr>
+            <a:r>
+              <a:rPr lang="en-US" sz="1200" b="1" dirty="0">
+                <a:solidFill>
+                  <a:srgbClr val="DCE7F0"/>
+                </a:solidFill>
+                <a:latin typeface="Segoe UI" pitchFamily="34" charset="0"/>
+                <a:ea typeface="Segoe UI" pitchFamily="34" charset="-122"/>
+                <a:cs typeface="Segoe UI" pitchFamily="34" charset="-120"/>
+              </a:rPr>
+              <a:t>This is the story of a monitoring cycle that holds because it stopped asking for her working hours. It is told as an illustration: the anaemia configuration is held under the Prioritisation Framework, not in build.</a:t>
+            </a:r>
+            <a:endParaRPr lang="en-US" sz="1200" dirty="0"/>
+          </a:p>
+        </p:txBody>
+      </p:sp>
+      <p:sp>
+        <p:nvSpPr>
+          <p:cNvPr id="10" name="Text 6"/>
+          <p:cNvSpPr/>
+          <p:nvPr/>
+        </p:nvSpPr>
+        <p:spPr>
+          <a:xfrm>
+            <a:off x="685800" y="4992624"/>
+            <a:ext cx="6858000" cy="384048"/>
+          </a:xfrm>
+          <a:prstGeom prst="rect">
+            <a:avLst/>
+          </a:prstGeom>
+          <a:noFill/>
+          <a:ln/>
+        </p:spPr>
+        <p:txBody>
+          <a:bodyPr wrap="square" lIns="0" tIns="0" rIns="0" bIns="0" rtlCol="0" anchor="t"/>
+          <a:lstStyle/>
+          <a:p>
+            <a:pPr indent="0" marL="0">
+              <a:buNone/>
+            </a:pPr>
+            <a:r>
+              <a:rPr lang="en-US" sz="1050" i="1" dirty="0">
+                <a:solidFill>
+                  <a:srgbClr val="9FC2E8"/>
+                </a:solidFill>
+                <a:latin typeface="Segoe UI" pitchFamily="34" charset="0"/>
+                <a:ea typeface="Segoe UI" pitchFamily="34" charset="-122"/>
+                <a:cs typeface="Segoe UI" pitchFamily="34" charset="-120"/>
+              </a:rPr>
+              <a:t>A patient's story through the operating model, GP-initiated, told as an illustration</a:t>
+            </a:r>
             <a:endParaRPr lang="en-US" sz="1050" dirty="0"/>
           </a:p>
         </p:txBody>
       </p:sp>
       <p:sp>
         <p:nvSpPr>
-          <p:cNvPr id="4" name="Shape 1"/>
-          <p:cNvSpPr/>
-          <p:nvPr/>
-        </p:nvSpPr>
-        <p:spPr>
-          <a:xfrm>
-            <a:off x="640080" y="914400"/>
-            <a:ext cx="822960" cy="54864"/>
-          </a:xfrm>
-          <a:prstGeom prst="rect">
+          <p:cNvPr id="11" name="Shape 7"/>
+          <p:cNvSpPr/>
+          <p:nvPr/>
+        </p:nvSpPr>
+        <p:spPr>
+          <a:xfrm>
+            <a:off x="8618220" y="1412748"/>
+            <a:ext cx="2788920" cy="2788920"/>
+          </a:xfrm>
+          <a:prstGeom prst="ellipse">
             <a:avLst/>
           </a:prstGeom>
           <a:solidFill>
@@ -1611,16 +1871,39 @@
           </a:ln>
         </p:spPr>
       </p:sp>
-      <p:sp>
-        <p:nvSpPr>
-          <p:cNvPr id="5" name="Text 2"/>
-          <p:cNvSpPr/>
-          <p:nvPr/>
-        </p:nvSpPr>
-        <p:spPr>
-          <a:xfrm>
-            <a:off x="640080" y="1097280"/>
-            <a:ext cx="7315200" cy="1005840"/>
+      <p:pic>
+        <p:nvPicPr>
+          <p:cNvPr id="12" name="Image 2" descr="/sessions/quirky-zen-galileo/mnt/outputs/jd/img/layla-portrait.jpg">    </p:cNvPr>
+          <p:cNvPicPr>
+            <a:picLocks noChangeAspect="1"/>
+          </p:cNvPicPr>
+          <p:nvPr/>
+        </p:nvPicPr>
+        <p:blipFill>
+          <a:blip r:embed="rId3"/>
+          <a:srcRect l="0" r="0" t="0" b="0"/>
+          <a:stretch/>
+        </p:blipFill>
+        <p:spPr>
+          <a:xfrm>
+            <a:off x="8686800" y="1481328"/>
+            <a:ext cx="2651760" cy="2651760"/>
+          </a:xfrm>
+          <a:prstGeom prst="ellipse">
+            <a:avLst/>
+          </a:prstGeom>
+        </p:spPr>
+      </p:pic>
+      <p:sp>
+        <p:nvSpPr>
+          <p:cNvPr id="13" name="Text 8"/>
+          <p:cNvSpPr/>
+          <p:nvPr/>
+        </p:nvSpPr>
+        <p:spPr>
+          <a:xfrm>
+            <a:off x="8183880" y="4352544"/>
+            <a:ext cx="3657600" cy="402336"/>
           </a:xfrm>
           <a:prstGeom prst="rect">
             <a:avLst/>
@@ -1632,34 +1915,34 @@
           <a:bodyPr wrap="square" lIns="0" tIns="0" rIns="0" bIns="0" rtlCol="0" anchor="ctr"/>
           <a:lstStyle/>
           <a:p>
-            <a:pPr indent="0" marL="0">
-              <a:buNone/>
-            </a:pPr>
-            <a:r>
-              <a:rPr lang="en-US" sz="6000" b="1" dirty="0">
+            <a:pPr algn="ctr" indent="0" marL="0">
+              <a:buNone/>
+            </a:pPr>
+            <a:r>
+              <a:rPr lang="en-US" sz="1900" b="1" dirty="0">
                 <a:solidFill>
                   <a:srgbClr val="FFFFFF"/>
                 </a:solidFill>
-                <a:latin typeface="Arial" pitchFamily="34" charset="0"/>
-                <a:ea typeface="Arial" pitchFamily="34" charset="-122"/>
-                <a:cs typeface="Arial" pitchFamily="34" charset="-120"/>
-              </a:rPr>
-              <a:t>Layla.</a:t>
-            </a:r>
-            <a:endParaRPr lang="en-US" sz="6000" dirty="0"/>
-          </a:p>
-        </p:txBody>
-      </p:sp>
-      <p:sp>
-        <p:nvSpPr>
-          <p:cNvPr id="6" name="Text 3"/>
-          <p:cNvSpPr/>
-          <p:nvPr/>
-        </p:nvSpPr>
-        <p:spPr>
-          <a:xfrm>
-            <a:off x="640080" y="2148840"/>
-            <a:ext cx="6949440" cy="835152"/>
+                <a:latin typeface="Segoe UI" pitchFamily="34" charset="0"/>
+                <a:ea typeface="Segoe UI" pitchFamily="34" charset="-122"/>
+                <a:cs typeface="Segoe UI" pitchFamily="34" charset="-120"/>
+              </a:rPr>
+              <a:t>Layla</a:t>
+            </a:r>
+            <a:endParaRPr lang="en-US" sz="1900" dirty="0"/>
+          </a:p>
+        </p:txBody>
+      </p:sp>
+      <p:sp>
+        <p:nvSpPr>
+          <p:cNvPr id="14" name="Text 9"/>
+          <p:cNvSpPr/>
+          <p:nvPr/>
+        </p:nvSpPr>
+        <p:spPr>
+          <a:xfrm>
+            <a:off x="7955280" y="4754880"/>
+            <a:ext cx="4114800" cy="658368"/>
           </a:xfrm>
           <a:prstGeom prst="rect">
             <a:avLst/>
@@ -1673,106 +1956,34 @@
           </a:bodyPr>
           <a:lstStyle/>
           <a:p>
-            <a:pPr indent="0" marL="0">
-              <a:buNone/>
-            </a:pPr>
-            <a:r>
-              <a:rPr lang="en-US" sz="2400" dirty="0">
-                <a:solidFill>
-                  <a:srgbClr val="FFFFFF"/>
-                </a:solidFill>
-                <a:latin typeface="Arial" pitchFamily="34" charset="0"/>
-                <a:ea typeface="Arial" pitchFamily="34" charset="-122"/>
-                <a:cs typeface="Arial" pitchFamily="34" charset="-120"/>
-              </a:rPr>
-              <a:t>Three years on the tablets.</a:t>
-            </a:r>
-            <a:endParaRPr lang="en-US" sz="2400" dirty="0"/>
-          </a:p>
-          <a:p>
-            <a:pPr indent="0" marL="0">
-              <a:buNone/>
-            </a:pPr>
-            <a:r>
-              <a:rPr lang="en-US" sz="2400" dirty="0">
-                <a:solidFill>
-                  <a:srgbClr val="FFFFFF"/>
-                </a:solidFill>
-                <a:latin typeface="Arial" pitchFamily="34" charset="0"/>
-                <a:ea typeface="Arial" pitchFamily="34" charset="-122"/>
-                <a:cs typeface="Arial" pitchFamily="34" charset="-120"/>
-              </a:rPr>
-              <a:t>The trend is the treatment.</a:t>
-            </a:r>
-            <a:endParaRPr lang="en-US" sz="2400" dirty="0"/>
-          </a:p>
-        </p:txBody>
-      </p:sp>
-      <p:sp>
-        <p:nvSpPr>
-          <p:cNvPr id="7" name="Text 4"/>
-          <p:cNvSpPr/>
-          <p:nvPr/>
-        </p:nvSpPr>
-        <p:spPr>
-          <a:xfrm>
-            <a:off x="640080" y="3258312"/>
-            <a:ext cx="6949440" cy="1578864"/>
-          </a:xfrm>
-          <a:prstGeom prst="rect">
-            <a:avLst/>
-          </a:prstGeom>
-          <a:noFill/>
-          <a:ln/>
-        </p:spPr>
-        <p:txBody>
-          <a:bodyPr wrap="square" lIns="0" tIns="0" rIns="0" bIns="0" rtlCol="0" anchor="t">
-            <a:normAutofit/>
-          </a:bodyPr>
-          <a:lstStyle/>
-          <a:p>
-            <a:pPr indent="0" marL="0">
-              <a:buNone/>
-            </a:pPr>
-            <a:r>
-              <a:rPr lang="en-US" sz="1200" dirty="0">
-                <a:solidFill>
-                  <a:srgbClr val="DCE7F0"/>
-                </a:solidFill>
-                <a:latin typeface="Arial" pitchFamily="34" charset="0"/>
-                <a:ea typeface="Arial" pitchFamily="34" charset="-122"/>
-                <a:cs typeface="Arial" pitchFamily="34" charset="-120"/>
-              </a:rPr>
-              <a:t>Layla is 42, a single parent with two school-age kids and two part-time jobs, one of them on shifts. Her iron deficiency anaemia was diagnosed three years ago; she has been on ferrous sulphate since, and her GP, Hannah, needs a full blood count and ferritin every six months to know whether it is still working. Nobody doubts Layla will take the tablets. The question is whether anyone will see the trend. </a:t>
-            </a:r>
-            <a:pPr indent="0" marL="0">
-              <a:buNone/>
-            </a:pPr>
-            <a:r>
-              <a:rPr lang="en-US" sz="1200" b="1" dirty="0">
-                <a:solidFill>
-                  <a:srgbClr val="DCE7F0"/>
-                </a:solidFill>
-                <a:latin typeface="Arial" pitchFamily="34" charset="0"/>
-                <a:ea typeface="Arial" pitchFamily="34" charset="-122"/>
-                <a:cs typeface="Arial" pitchFamily="34" charset="-120"/>
-              </a:rPr>
-              <a:t>This is the story of a monitoring cycle that holds because it stopped asking for her working hours. It is told as an illustration: the anaemia configuration is held under the Prioritisation Framework, not in build.</a:t>
-            </a:r>
-            <a:endParaRPr lang="en-US" sz="1200" dirty="0"/>
-          </a:p>
-        </p:txBody>
-      </p:sp>
-      <p:sp>
-        <p:nvSpPr>
-          <p:cNvPr id="8" name="Text 5"/>
-          <p:cNvSpPr/>
-          <p:nvPr/>
-        </p:nvSpPr>
-        <p:spPr>
-          <a:xfrm>
-            <a:off x="640080" y="4974336"/>
-            <a:ext cx="6949440" cy="365760"/>
+            <a:pPr algn="ctr" indent="0" marL="0">
+              <a:buNone/>
+            </a:pPr>
+            <a:r>
+              <a:rPr lang="en-US" sz="1050" spc="60" kern="0" dirty="0">
+                <a:solidFill>
+                  <a:srgbClr val="FFD66B"/>
+                </a:solidFill>
+                <a:latin typeface="Segoe UI" pitchFamily="34" charset="0"/>
+                <a:ea typeface="Segoe UI" pitchFamily="34" charset="-122"/>
+                <a:cs typeface="Segoe UI" pitchFamily="34" charset="-120"/>
+              </a:rPr>
+              <a:t>GP-initiated patient · Iron deficiency anaemia · held configuration</a:t>
+            </a:r>
+            <a:endParaRPr lang="en-US" sz="1050" dirty="0"/>
+          </a:p>
+        </p:txBody>
+      </p:sp>
+      <p:sp>
+        <p:nvSpPr>
+          <p:cNvPr id="15" name="Text 10"/>
+          <p:cNvSpPr/>
+          <p:nvPr/>
+        </p:nvSpPr>
+        <p:spPr>
+          <a:xfrm>
+            <a:off x="457200" y="6455664"/>
+            <a:ext cx="4206240" cy="274320"/>
           </a:xfrm>
           <a:prstGeom prst="rect">
             <a:avLst/>
@@ -1788,78 +1999,30 @@
               <a:buNone/>
             </a:pPr>
             <a:r>
-              <a:rPr lang="en-US" sz="1050" i="1" dirty="0">
-                <a:solidFill>
-                  <a:srgbClr val="7EC8E3"/>
-                </a:solidFill>
-                <a:latin typeface="Arial" pitchFamily="34" charset="0"/>
-                <a:ea typeface="Arial" pitchFamily="34" charset="-122"/>
-                <a:cs typeface="Arial" pitchFamily="34" charset="-120"/>
-              </a:rPr>
-              <a:t>A patient's story through the operating model, GP-initiated, told as an illustration</a:t>
-            </a:r>
-            <a:endParaRPr lang="en-US" sz="1050" dirty="0"/>
-          </a:p>
-        </p:txBody>
-      </p:sp>
-      <p:sp>
-        <p:nvSpPr>
-          <p:cNvPr id="9" name="Shape 6"/>
-          <p:cNvSpPr/>
-          <p:nvPr/>
-        </p:nvSpPr>
-        <p:spPr>
-          <a:xfrm>
-            <a:off x="8476488" y="1344168"/>
-            <a:ext cx="2889504" cy="2889504"/>
-          </a:xfrm>
-          <a:prstGeom prst="ellipse">
-            <a:avLst/>
-          </a:prstGeom>
-          <a:solidFill>
-            <a:srgbClr val="FFB91D"/>
-          </a:solidFill>
-          <a:ln w="12700">
-            <a:solidFill>
-              <a:srgbClr val="FFB91D"/>
-            </a:solidFill>
-            <a:prstDash val="solid"/>
-          </a:ln>
-        </p:spPr>
-      </p:sp>
-      <p:pic>
-        <p:nvPicPr>
-          <p:cNvPr id="10" name="Image 1" descr="/sessions/quirky-zen-galileo/mnt/outputs/hmdecks5/img/layla-portrait.jpg">    </p:cNvPr>
-          <p:cNvPicPr>
-            <a:picLocks noChangeAspect="1"/>
-          </p:cNvPicPr>
-          <p:nvPr/>
-        </p:nvPicPr>
-        <p:blipFill>
-          <a:blip r:embed="rId2"/>
-          <a:srcRect l="0" r="0" t="0" b="0"/>
-          <a:stretch/>
-        </p:blipFill>
-        <p:spPr>
-          <a:xfrm>
-            <a:off x="8549640" y="1417320"/>
-            <a:ext cx="2743200" cy="2743200"/>
-          </a:xfrm>
-          <a:prstGeom prst="ellipse">
-            <a:avLst/>
-          </a:prstGeom>
-        </p:spPr>
-      </p:pic>
-      <p:sp>
-        <p:nvSpPr>
-          <p:cNvPr id="11" name="Text 7"/>
-          <p:cNvSpPr/>
-          <p:nvPr/>
-        </p:nvSpPr>
-        <p:spPr>
-          <a:xfrm>
-            <a:off x="8138160" y="4343400"/>
-            <a:ext cx="3566160" cy="411480"/>
+              <a:rPr lang="en-US" sz="850" dirty="0">
+                <a:solidFill>
+                  <a:srgbClr val="9FC2E8"/>
+                </a:solidFill>
+                <a:latin typeface="Segoe UI" pitchFamily="34" charset="0"/>
+                <a:ea typeface="Segoe UI" pitchFamily="34" charset="-122"/>
+                <a:cs typeface="Segoe UI" pitchFamily="34" charset="-120"/>
+              </a:rPr>
+              <a:t>HomeTest Operating Model  ·  Hearts and Minds</a:t>
+            </a:r>
+            <a:endParaRPr lang="en-US" sz="850" dirty="0"/>
+          </a:p>
+        </p:txBody>
+      </p:sp>
+      <p:sp>
+        <p:nvSpPr>
+          <p:cNvPr id="16" name="Text 11"/>
+          <p:cNvSpPr/>
+          <p:nvPr/>
+        </p:nvSpPr>
+        <p:spPr>
+          <a:xfrm>
+            <a:off x="4754880" y="6455664"/>
+            <a:ext cx="6430975" cy="274320"/>
           </a:xfrm>
           <a:prstGeom prst="rect">
             <a:avLst/>
@@ -1871,134 +2034,17 @@
           <a:bodyPr wrap="square" lIns="0" tIns="0" rIns="0" bIns="0" rtlCol="0" anchor="ctr"/>
           <a:lstStyle/>
           <a:p>
-            <a:pPr algn="ctr" indent="0" marL="0">
-              <a:buNone/>
-            </a:pPr>
-            <a:r>
-              <a:rPr lang="en-US" sz="2000" b="1" dirty="0">
-                <a:solidFill>
-                  <a:srgbClr val="FFFFFF"/>
-                </a:solidFill>
-                <a:latin typeface="Arial" pitchFamily="34" charset="0"/>
-                <a:ea typeface="Arial" pitchFamily="34" charset="-122"/>
-                <a:cs typeface="Arial" pitchFamily="34" charset="-120"/>
-              </a:rPr>
-              <a:t>Layla</a:t>
-            </a:r>
-            <a:endParaRPr lang="en-US" sz="2000" dirty="0"/>
-          </a:p>
-        </p:txBody>
-      </p:sp>
-      <p:sp>
-        <p:nvSpPr>
-          <p:cNvPr id="12" name="Text 8"/>
-          <p:cNvSpPr/>
-          <p:nvPr/>
-        </p:nvSpPr>
-        <p:spPr>
-          <a:xfrm>
-            <a:off x="7955280" y="4754880"/>
-            <a:ext cx="3931920" cy="640080"/>
-          </a:xfrm>
-          <a:prstGeom prst="rect">
-            <a:avLst/>
-          </a:prstGeom>
-          <a:noFill/>
-          <a:ln/>
-        </p:spPr>
-        <p:txBody>
-          <a:bodyPr wrap="square" lIns="0" tIns="0" rIns="0" bIns="0" rtlCol="0" anchor="t"/>
-          <a:lstStyle/>
-          <a:p>
-            <a:pPr algn="ctr" indent="0" marL="0">
-              <a:buNone/>
-            </a:pPr>
-            <a:r>
-              <a:rPr lang="en-US" sz="1100" dirty="0">
-                <a:solidFill>
-                  <a:srgbClr val="FFB91D"/>
-                </a:solidFill>
-                <a:latin typeface="Arial" pitchFamily="34" charset="0"/>
-                <a:ea typeface="Arial" pitchFamily="34" charset="-122"/>
-                <a:cs typeface="Arial" pitchFamily="34" charset="-120"/>
-              </a:rPr>
-              <a:t>GP-initiated patient · Iron deficiency anaemia · held configuration</a:t>
-            </a:r>
-            <a:endParaRPr lang="en-US" sz="1100" dirty="0"/>
-          </a:p>
-        </p:txBody>
-      </p:sp>
-      <p:sp>
-        <p:nvSpPr>
-          <p:cNvPr id="13" name="Text 9"/>
-          <p:cNvSpPr/>
-          <p:nvPr/>
-        </p:nvSpPr>
-        <p:spPr>
-          <a:xfrm>
-            <a:off x="457200" y="6473952"/>
-            <a:ext cx="3108960" cy="274320"/>
-          </a:xfrm>
-          <a:prstGeom prst="rect">
-            <a:avLst/>
-          </a:prstGeom>
-          <a:noFill/>
-          <a:ln/>
-        </p:spPr>
-        <p:txBody>
-          <a:bodyPr wrap="square" lIns="0" tIns="0" rIns="0" bIns="0" rtlCol="0" anchor="ctr"/>
-          <a:lstStyle/>
-          <a:p>
-            <a:pPr indent="0" marL="0">
-              <a:buNone/>
-            </a:pPr>
-            <a:r>
-              <a:rPr lang="en-US" sz="850" dirty="0">
-                <a:solidFill>
-                  <a:srgbClr val="7EC8E3"/>
-                </a:solidFill>
-                <a:latin typeface="Arial" pitchFamily="34" charset="0"/>
-                <a:ea typeface="Arial" pitchFamily="34" charset="-122"/>
-                <a:cs typeface="Arial" pitchFamily="34" charset="-120"/>
-              </a:rPr>
-              <a:t>HomeTest Operating Model  ·  Hearts and Minds</a:t>
-            </a:r>
-            <a:endParaRPr lang="en-US" sz="850" dirty="0"/>
-          </a:p>
-        </p:txBody>
-      </p:sp>
-      <p:sp>
-        <p:nvSpPr>
-          <p:cNvPr id="14" name="Text 10"/>
-          <p:cNvSpPr/>
-          <p:nvPr/>
-        </p:nvSpPr>
-        <p:spPr>
-          <a:xfrm>
-            <a:off x="3657600" y="6473952"/>
-            <a:ext cx="7528255" cy="274320"/>
-          </a:xfrm>
-          <a:prstGeom prst="rect">
-            <a:avLst/>
-          </a:prstGeom>
-          <a:noFill/>
-          <a:ln/>
-        </p:spPr>
-        <p:txBody>
-          <a:bodyPr wrap="square" lIns="0" tIns="0" rIns="0" bIns="0" rtlCol="0" anchor="ctr"/>
-          <a:lstStyle/>
-          <a:p>
             <a:pPr algn="r" indent="0" marL="0">
               <a:buNone/>
             </a:pPr>
             <a:r>
               <a:rPr lang="en-US" sz="800" dirty="0">
                 <a:solidFill>
-                  <a:srgbClr val="7EC8E3"/>
-                </a:solidFill>
-                <a:latin typeface="Arial" pitchFamily="34" charset="0"/>
-                <a:ea typeface="Arial" pitchFamily="34" charset="-122"/>
-                <a:cs typeface="Arial" pitchFamily="34" charset="-120"/>
+                  <a:srgbClr val="9FC2E8"/>
+                </a:solidFill>
+                <a:latin typeface="Segoe UI" pitchFamily="34" charset="0"/>
+                <a:ea typeface="Segoe UI" pitchFamily="34" charset="-122"/>
+                <a:cs typeface="Segoe UI" pitchFamily="34" charset="-120"/>
               </a:rPr>
               <a:t>Commercial positions are agreed in principle and remain subject to the live procurement.</a:t>
             </a:r>
@@ -2038,137 +2084,9 @@
           <a:chExt cx="0" cy="0"/>
         </a:xfrm>
       </p:grpSpPr>
-      <p:sp>
-        <p:nvSpPr>
-          <p:cNvPr id="2" name="Shape 0"/>
-          <p:cNvSpPr/>
-          <p:nvPr/>
-        </p:nvSpPr>
-        <p:spPr>
-          <a:xfrm>
-            <a:off x="0" y="0"/>
-            <a:ext cx="12191695" cy="868680"/>
-          </a:xfrm>
-          <a:prstGeom prst="rect">
-            <a:avLst/>
-          </a:prstGeom>
-          <a:solidFill>
-            <a:srgbClr val="003087"/>
-          </a:solidFill>
-          <a:ln w="12700">
-            <a:solidFill>
-              <a:srgbClr val="003087"/>
-            </a:solidFill>
-            <a:prstDash val="solid"/>
-          </a:ln>
-        </p:spPr>
-      </p:sp>
-      <p:sp>
-        <p:nvSpPr>
-          <p:cNvPr id="3" name="Shape 1"/>
-          <p:cNvSpPr/>
-          <p:nvPr/>
-        </p:nvSpPr>
-        <p:spPr>
-          <a:xfrm>
-            <a:off x="0" y="868680"/>
-            <a:ext cx="12191695" cy="54864"/>
-          </a:xfrm>
-          <a:prstGeom prst="rect">
-            <a:avLst/>
-          </a:prstGeom>
-          <a:solidFill>
-            <a:srgbClr val="FFB91D"/>
-          </a:solidFill>
-          <a:ln w="12700">
-            <a:solidFill>
-              <a:srgbClr val="FFB91D"/>
-            </a:solidFill>
-            <a:prstDash val="solid"/>
-          </a:ln>
-        </p:spPr>
-      </p:sp>
-      <p:sp>
-        <p:nvSpPr>
-          <p:cNvPr id="4" name="Text 2"/>
-          <p:cNvSpPr/>
-          <p:nvPr/>
-        </p:nvSpPr>
-        <p:spPr>
-          <a:xfrm>
-            <a:off x="457200" y="128016"/>
-            <a:ext cx="8686800" cy="256032"/>
-          </a:xfrm>
-          <a:prstGeom prst="rect">
-            <a:avLst/>
-          </a:prstGeom>
-          <a:noFill/>
-          <a:ln/>
-        </p:spPr>
-        <p:txBody>
-          <a:bodyPr wrap="square" lIns="0" tIns="0" rIns="0" bIns="0" rtlCol="0" anchor="ctr"/>
-          <a:lstStyle/>
-          <a:p>
-            <a:pPr indent="0" marL="0">
-              <a:buNone/>
-            </a:pPr>
-            <a:r>
-              <a:rPr lang="en-US" sz="950" b="1" spc="200" kern="0" dirty="0">
-                <a:solidFill>
-                  <a:srgbClr val="7EC8E3"/>
-                </a:solidFill>
-                <a:latin typeface="Arial" pitchFamily="34" charset="0"/>
-                <a:ea typeface="Arial" pitchFamily="34" charset="-122"/>
-                <a:cs typeface="Arial" pitchFamily="34" charset="-120"/>
-              </a:rPr>
-              <a:t>HEARTS AND MINDS  ·  PATIENT JOURNEY</a:t>
-            </a:r>
-            <a:endParaRPr lang="en-US" sz="950" dirty="0"/>
-          </a:p>
-        </p:txBody>
-      </p:sp>
-      <p:sp>
-        <p:nvSpPr>
-          <p:cNvPr id="5" name="Text 3"/>
-          <p:cNvSpPr/>
-          <p:nvPr/>
-        </p:nvSpPr>
-        <p:spPr>
-          <a:xfrm>
-            <a:off x="457200" y="384048"/>
-            <a:ext cx="9601200" cy="411480"/>
-          </a:xfrm>
-          <a:prstGeom prst="rect">
-            <a:avLst/>
-          </a:prstGeom>
-          <a:noFill/>
-          <a:ln/>
-        </p:spPr>
-        <p:txBody>
-          <a:bodyPr wrap="square" lIns="0" tIns="0" rIns="0" bIns="0" rtlCol="0" anchor="ctr"/>
-          <a:lstStyle/>
-          <a:p>
-            <a:pPr indent="0" marL="0">
-              <a:buNone/>
-            </a:pPr>
-            <a:r>
-              <a:rPr lang="en-US" sz="2000" b="1" dirty="0">
-                <a:solidFill>
-                  <a:srgbClr val="FFFFFF"/>
-                </a:solidFill>
-                <a:latin typeface="Arial" pitchFamily="34" charset="0"/>
-                <a:ea typeface="Arial" pitchFamily="34" charset="-122"/>
-                <a:cs typeface="Arial" pitchFamily="34" charset="-120"/>
-              </a:rPr>
-              <a:t>Layla's journey at a glance</a:t>
-            </a:r>
-            <a:endParaRPr lang="en-US" sz="2000" dirty="0"/>
-          </a:p>
-        </p:txBody>
-      </p:sp>
       <p:pic>
         <p:nvPicPr>
-          <p:cNvPr id="6" name="Image 0" descr="/sessions/quirky-zen-galileo/mnt/outputs/deckbuild/nhs_logo.png">    </p:cNvPr>
+          <p:cNvPr id="2" name="Image 0" descr="/sessions/quirky-zen-galileo/mnt/NHS/07 Sites &amp; Repos/dtx-ecosystem/hearts-and-minds/_generators/assets/bg-band.jpg">    </p:cNvPr>
           <p:cNvPicPr>
             <a:picLocks noChangeAspect="1"/>
           </p:cNvPicPr>
@@ -2182,8 +2100,8 @@
         </p:blipFill>
         <p:spPr>
           <a:xfrm>
-            <a:off x="10774375" y="201168"/>
-            <a:ext cx="960120" cy="393192"/>
+            <a:off x="0" y="0"/>
+            <a:ext cx="12191695" cy="932688"/>
           </a:xfrm>
           <a:prstGeom prst="rect">
             <a:avLst/>
@@ -2192,41 +2110,14 @@
       </p:pic>
       <p:sp>
         <p:nvSpPr>
-          <p:cNvPr id="7" name="Shape 4"/>
-          <p:cNvSpPr/>
-          <p:nvPr/>
-        </p:nvSpPr>
-        <p:spPr>
-          <a:xfrm>
-            <a:off x="457200" y="1234440"/>
-            <a:ext cx="2167677" cy="1234440"/>
-          </a:xfrm>
-          <a:prstGeom prst="roundRect">
-            <a:avLst>
-              <a:gd name="adj" fmla="val 5926"/>
-            </a:avLst>
-          </a:prstGeom>
-          <a:solidFill>
-            <a:srgbClr val="F0F4F5"/>
-          </a:solidFill>
-          <a:ln w="9525">
-            <a:solidFill>
-              <a:srgbClr val="DDE3E8"/>
-            </a:solidFill>
-            <a:prstDash val="solid"/>
-          </a:ln>
-        </p:spPr>
-      </p:sp>
-      <p:sp>
-        <p:nvSpPr>
-          <p:cNvPr id="8" name="Shape 5"/>
-          <p:cNvSpPr/>
-          <p:nvPr/>
-        </p:nvSpPr>
-        <p:spPr>
-          <a:xfrm>
-            <a:off x="457200" y="1234440"/>
-            <a:ext cx="2167677" cy="54864"/>
+          <p:cNvPr id="3" name="Shape 0"/>
+          <p:cNvSpPr/>
+          <p:nvPr/>
+        </p:nvSpPr>
+        <p:spPr>
+          <a:xfrm>
+            <a:off x="0" y="932688"/>
+            <a:ext cx="12191695" cy="50292"/>
           </a:xfrm>
           <a:prstGeom prst="rect">
             <a:avLst/>
@@ -2244,13 +2135,196 @@
       </p:sp>
       <p:sp>
         <p:nvSpPr>
-          <p:cNvPr id="9" name="Shape 6"/>
-          <p:cNvSpPr/>
-          <p:nvPr/>
-        </p:nvSpPr>
-        <p:spPr>
-          <a:xfrm>
-            <a:off x="585216" y="1417320"/>
+          <p:cNvPr id="4" name="Text 1"/>
+          <p:cNvSpPr/>
+          <p:nvPr/>
+        </p:nvSpPr>
+        <p:spPr>
+          <a:xfrm>
+            <a:off x="502920" y="137160"/>
+            <a:ext cx="8595360" cy="256032"/>
+          </a:xfrm>
+          <a:prstGeom prst="rect">
+            <a:avLst/>
+          </a:prstGeom>
+          <a:noFill/>
+          <a:ln/>
+        </p:spPr>
+        <p:txBody>
+          <a:bodyPr wrap="square" lIns="0" tIns="0" rIns="0" bIns="0" rtlCol="0" anchor="ctr"/>
+          <a:lstStyle/>
+          <a:p>
+            <a:pPr indent="0" marL="0">
+              <a:buNone/>
+            </a:pPr>
+            <a:r>
+              <a:rPr lang="en-US" sz="950" b="1" spc="240" kern="0" dirty="0">
+                <a:solidFill>
+                  <a:srgbClr val="FFD66B"/>
+                </a:solidFill>
+                <a:latin typeface="Segoe UI" pitchFamily="34" charset="0"/>
+                <a:ea typeface="Segoe UI" pitchFamily="34" charset="-122"/>
+                <a:cs typeface="Segoe UI" pitchFamily="34" charset="-120"/>
+              </a:rPr>
+              <a:t>HEARTS AND MINDS  ·  PATIENT JOURNEY</a:t>
+            </a:r>
+            <a:endParaRPr lang="en-US" sz="950" dirty="0"/>
+          </a:p>
+        </p:txBody>
+      </p:sp>
+      <p:sp>
+        <p:nvSpPr>
+          <p:cNvPr id="5" name="Text 2"/>
+          <p:cNvSpPr/>
+          <p:nvPr/>
+        </p:nvSpPr>
+        <p:spPr>
+          <a:xfrm>
+            <a:off x="502920" y="402336"/>
+            <a:ext cx="9509760" cy="457200"/>
+          </a:xfrm>
+          <a:prstGeom prst="rect">
+            <a:avLst/>
+          </a:prstGeom>
+          <a:noFill/>
+          <a:ln/>
+        </p:spPr>
+        <p:txBody>
+          <a:bodyPr wrap="square" lIns="0" tIns="0" rIns="0" bIns="0" rtlCol="0" anchor="ctr">
+            <a:normAutofit/>
+          </a:bodyPr>
+          <a:lstStyle/>
+          <a:p>
+            <a:pPr indent="0" marL="0">
+              <a:buNone/>
+            </a:pPr>
+            <a:r>
+              <a:rPr lang="en-US" sz="2100" b="1" dirty="0">
+                <a:solidFill>
+                  <a:srgbClr val="FFFFFF"/>
+                </a:solidFill>
+                <a:latin typeface="Segoe UI" pitchFamily="34" charset="0"/>
+                <a:ea typeface="Segoe UI" pitchFamily="34" charset="-122"/>
+                <a:cs typeface="Segoe UI" pitchFamily="34" charset="-120"/>
+              </a:rPr>
+              <a:t>Layla’s journey at a glance</a:t>
+            </a:r>
+            <a:endParaRPr lang="en-US" sz="2100" dirty="0"/>
+          </a:p>
+        </p:txBody>
+      </p:sp>
+      <p:sp>
+        <p:nvSpPr>
+          <p:cNvPr id="6" name="Shape 3"/>
+          <p:cNvSpPr/>
+          <p:nvPr/>
+        </p:nvSpPr>
+        <p:spPr>
+          <a:xfrm>
+            <a:off x="10942806" y="173736"/>
+            <a:ext cx="791689" cy="605699"/>
+          </a:xfrm>
+          <a:prstGeom prst="roundRect">
+            <a:avLst>
+              <a:gd name="adj" fmla="val 12077"/>
+            </a:avLst>
+          </a:prstGeom>
+          <a:solidFill>
+            <a:srgbClr val="FFFFFF"/>
+          </a:solidFill>
+          <a:ln w="12700">
+            <a:solidFill>
+              <a:srgbClr val="FFFFFF"/>
+            </a:solidFill>
+            <a:prstDash val="solid"/>
+          </a:ln>
+        </p:spPr>
+      </p:sp>
+      <p:pic>
+        <p:nvPicPr>
+          <p:cNvPr id="7" name="Image 1" descr="/sessions/quirky-zen-galileo/mnt/NHS/07 Sites &amp; Repos/dtx-ecosystem/hearts-and-minds/_generators/assets/nhs-logo.png">    </p:cNvPr>
+          <p:cNvPicPr>
+            <a:picLocks noChangeAspect="1"/>
+          </p:cNvPicPr>
+          <p:nvPr/>
+        </p:nvPicPr>
+        <p:blipFill>
+          <a:blip r:embed="rId2"/>
+          <a:stretch>
+            <a:fillRect/>
+          </a:stretch>
+        </p:blipFill>
+        <p:spPr>
+          <a:xfrm>
+            <a:off x="11068993" y="266273"/>
+            <a:ext cx="539315" cy="420624"/>
+          </a:xfrm>
+          <a:prstGeom prst="rect">
+            <a:avLst/>
+          </a:prstGeom>
+        </p:spPr>
+      </p:pic>
+      <p:sp>
+        <p:nvSpPr>
+          <p:cNvPr id="8" name="Shape 4"/>
+          <p:cNvSpPr/>
+          <p:nvPr/>
+        </p:nvSpPr>
+        <p:spPr>
+          <a:xfrm>
+            <a:off x="457200" y="1239012"/>
+            <a:ext cx="2167677" cy="1243584"/>
+          </a:xfrm>
+          <a:prstGeom prst="roundRect">
+            <a:avLst>
+              <a:gd name="adj" fmla="val 7353"/>
+            </a:avLst>
+          </a:prstGeom>
+          <a:solidFill>
+            <a:srgbClr val="F8FAFC"/>
+          </a:solidFill>
+          <a:ln w="9525">
+            <a:solidFill>
+              <a:srgbClr val="EBEEF1"/>
+            </a:solidFill>
+            <a:prstDash val="solid"/>
+          </a:ln>
+        </p:spPr>
+      </p:sp>
+      <p:sp>
+        <p:nvSpPr>
+          <p:cNvPr id="9" name="Shape 5"/>
+          <p:cNvSpPr/>
+          <p:nvPr/>
+        </p:nvSpPr>
+        <p:spPr>
+          <a:xfrm>
+            <a:off x="457200" y="1239012"/>
+            <a:ext cx="2167677" cy="64008"/>
+          </a:xfrm>
+          <a:prstGeom prst="rect">
+            <a:avLst/>
+          </a:prstGeom>
+          <a:solidFill>
+            <a:srgbClr val="FFB91D"/>
+          </a:solidFill>
+          <a:ln w="12700">
+            <a:solidFill>
+              <a:srgbClr val="FFB91D"/>
+            </a:solidFill>
+            <a:prstDash val="solid"/>
+          </a:ln>
+        </p:spPr>
+      </p:sp>
+      <p:sp>
+        <p:nvSpPr>
+          <p:cNvPr id="10" name="Shape 6"/>
+          <p:cNvSpPr/>
+          <p:nvPr/>
+        </p:nvSpPr>
+        <p:spPr>
+          <a:xfrm>
+            <a:off x="594360" y="1440180"/>
             <a:ext cx="347472" cy="347472"/>
           </a:xfrm>
           <a:prstGeom prst="ellipse">
@@ -2269,13 +2343,13 @@
       </p:sp>
       <p:sp>
         <p:nvSpPr>
-          <p:cNvPr id="10" name="Text 7"/>
-          <p:cNvSpPr/>
-          <p:nvPr/>
-        </p:nvSpPr>
-        <p:spPr>
-          <a:xfrm>
-            <a:off x="585216" y="1417320"/>
+          <p:cNvPr id="11" name="Text 7"/>
+          <p:cNvSpPr/>
+          <p:nvPr/>
+        </p:nvSpPr>
+        <p:spPr>
+          <a:xfrm>
+            <a:off x="594360" y="1440180"/>
             <a:ext cx="347472" cy="347472"/>
           </a:xfrm>
           <a:prstGeom prst="rect">
@@ -2296,9 +2370,9 @@
                 <a:solidFill>
                   <a:srgbClr val="FFFFFF"/>
                 </a:solidFill>
-                <a:latin typeface="Arial" pitchFamily="34" charset="0"/>
-                <a:ea typeface="Arial" pitchFamily="34" charset="-122"/>
-                <a:cs typeface="Arial" pitchFamily="34" charset="-120"/>
+                <a:latin typeface="Segoe UI" pitchFamily="34" charset="0"/>
+                <a:ea typeface="Segoe UI" pitchFamily="34" charset="-122"/>
+                <a:cs typeface="Segoe UI" pitchFamily="34" charset="-120"/>
               </a:rPr>
               <a:t>1</a:t>
             </a:r>
@@ -2308,14 +2382,14 @@
       </p:sp>
       <p:sp>
         <p:nvSpPr>
-          <p:cNvPr id="11" name="Text 8"/>
-          <p:cNvSpPr/>
-          <p:nvPr/>
-        </p:nvSpPr>
-        <p:spPr>
-          <a:xfrm>
-            <a:off x="1005840" y="1380744"/>
-            <a:ext cx="1527597" cy="420624"/>
+          <p:cNvPr id="12" name="Text 8"/>
+          <p:cNvSpPr/>
+          <p:nvPr/>
+        </p:nvSpPr>
+        <p:spPr>
+          <a:xfrm>
+            <a:off x="1005840" y="1403604"/>
+            <a:ext cx="1491021" cy="420624"/>
           </a:xfrm>
           <a:prstGeom prst="rect">
             <a:avLst/>
@@ -2337,9 +2411,9 @@
                 <a:solidFill>
                   <a:srgbClr val="003087"/>
                 </a:solidFill>
-                <a:latin typeface="Arial" pitchFamily="34" charset="0"/>
-                <a:ea typeface="Arial" pitchFamily="34" charset="-122"/>
-                <a:cs typeface="Arial" pitchFamily="34" charset="-120"/>
+                <a:latin typeface="Segoe UI" pitchFamily="34" charset="0"/>
+                <a:ea typeface="Segoe UI" pitchFamily="34" charset="-122"/>
+                <a:cs typeface="Segoe UI" pitchFamily="34" charset="-120"/>
               </a:rPr>
               <a:t>Stratification</a:t>
             </a:r>
@@ -2349,14 +2423,14 @@
       </p:sp>
       <p:sp>
         <p:nvSpPr>
-          <p:cNvPr id="12" name="Text 9"/>
-          <p:cNvSpPr/>
-          <p:nvPr/>
-        </p:nvSpPr>
-        <p:spPr>
-          <a:xfrm>
-            <a:off x="585216" y="1856232"/>
-            <a:ext cx="1911645" cy="539496"/>
+          <p:cNvPr id="13" name="Text 9"/>
+          <p:cNvSpPr/>
+          <p:nvPr/>
+        </p:nvSpPr>
+        <p:spPr>
+          <a:xfrm>
+            <a:off x="594360" y="1879092"/>
+            <a:ext cx="1893357" cy="493776"/>
           </a:xfrm>
           <a:prstGeom prst="rect">
             <a:avLst/>
@@ -2378,9 +2452,9 @@
                 <a:solidFill>
                   <a:srgbClr val="4C6272"/>
                 </a:solidFill>
-                <a:latin typeface="Arial" pitchFamily="34" charset="0"/>
-                <a:ea typeface="Arial" pitchFamily="34" charset="-122"/>
-                <a:cs typeface="Arial" pitchFamily="34" charset="-120"/>
+                <a:latin typeface="Segoe UI" pitchFamily="34" charset="0"/>
+                <a:ea typeface="Segoe UI" pitchFamily="34" charset="-122"/>
+                <a:cs typeface="Segoe UI" pitchFamily="34" charset="-120"/>
               </a:rPr>
               <a:t>a treated condition, a cycle nobody can see slipping</a:t>
             </a:r>
@@ -2390,26 +2464,26 @@
       </p:sp>
       <p:sp>
         <p:nvSpPr>
-          <p:cNvPr id="13" name="Shape 10"/>
-          <p:cNvSpPr/>
-          <p:nvPr/>
-        </p:nvSpPr>
-        <p:spPr>
-          <a:xfrm>
-            <a:off x="2734605" y="1234440"/>
-            <a:ext cx="2167677" cy="1234440"/>
+          <p:cNvPr id="14" name="Shape 10"/>
+          <p:cNvSpPr/>
+          <p:nvPr/>
+        </p:nvSpPr>
+        <p:spPr>
+          <a:xfrm>
+            <a:off x="2734605" y="1239012"/>
+            <a:ext cx="2167677" cy="1243584"/>
           </a:xfrm>
           <a:prstGeom prst="roundRect">
             <a:avLst>
-              <a:gd name="adj" fmla="val 5926"/>
+              <a:gd name="adj" fmla="val 7353"/>
             </a:avLst>
           </a:prstGeom>
           <a:solidFill>
-            <a:srgbClr val="F0F4F5"/>
+            <a:srgbClr val="F8FAFC"/>
           </a:solidFill>
           <a:ln w="9525">
             <a:solidFill>
-              <a:srgbClr val="DDE3E8"/>
+              <a:srgbClr val="EBEEF1"/>
             </a:solidFill>
             <a:prstDash val="solid"/>
           </a:ln>
@@ -2417,14 +2491,14 @@
       </p:sp>
       <p:sp>
         <p:nvSpPr>
-          <p:cNvPr id="14" name="Shape 11"/>
-          <p:cNvSpPr/>
-          <p:nvPr/>
-        </p:nvSpPr>
-        <p:spPr>
-          <a:xfrm>
-            <a:off x="2734605" y="1234440"/>
-            <a:ext cx="2167677" cy="54864"/>
+          <p:cNvPr id="15" name="Shape 11"/>
+          <p:cNvSpPr/>
+          <p:nvPr/>
+        </p:nvSpPr>
+        <p:spPr>
+          <a:xfrm>
+            <a:off x="2734605" y="1239012"/>
+            <a:ext cx="2167677" cy="64008"/>
           </a:xfrm>
           <a:prstGeom prst="rect">
             <a:avLst/>
@@ -2442,13 +2516,13 @@
       </p:sp>
       <p:sp>
         <p:nvSpPr>
-          <p:cNvPr id="15" name="Shape 12"/>
-          <p:cNvSpPr/>
-          <p:nvPr/>
-        </p:nvSpPr>
-        <p:spPr>
-          <a:xfrm>
-            <a:off x="2862621" y="1417320"/>
+          <p:cNvPr id="16" name="Shape 12"/>
+          <p:cNvSpPr/>
+          <p:nvPr/>
+        </p:nvSpPr>
+        <p:spPr>
+          <a:xfrm>
+            <a:off x="2871765" y="1440180"/>
             <a:ext cx="347472" cy="347472"/>
           </a:xfrm>
           <a:prstGeom prst="ellipse">
@@ -2467,13 +2541,13 @@
       </p:sp>
       <p:sp>
         <p:nvSpPr>
-          <p:cNvPr id="16" name="Text 13"/>
-          <p:cNvSpPr/>
-          <p:nvPr/>
-        </p:nvSpPr>
-        <p:spPr>
-          <a:xfrm>
-            <a:off x="2862621" y="1417320"/>
+          <p:cNvPr id="17" name="Text 13"/>
+          <p:cNvSpPr/>
+          <p:nvPr/>
+        </p:nvSpPr>
+        <p:spPr>
+          <a:xfrm>
+            <a:off x="2871765" y="1440180"/>
             <a:ext cx="347472" cy="347472"/>
           </a:xfrm>
           <a:prstGeom prst="rect">
@@ -2494,9 +2568,9 @@
                 <a:solidFill>
                   <a:srgbClr val="FFFFFF"/>
                 </a:solidFill>
-                <a:latin typeface="Arial" pitchFamily="34" charset="0"/>
-                <a:ea typeface="Arial" pitchFamily="34" charset="-122"/>
-                <a:cs typeface="Arial" pitchFamily="34" charset="-120"/>
+                <a:latin typeface="Segoe UI" pitchFamily="34" charset="0"/>
+                <a:ea typeface="Segoe UI" pitchFamily="34" charset="-122"/>
+                <a:cs typeface="Segoe UI" pitchFamily="34" charset="-120"/>
               </a:rPr>
               <a:t>2</a:t>
             </a:r>
@@ -2506,14 +2580,14 @@
       </p:sp>
       <p:sp>
         <p:nvSpPr>
-          <p:cNvPr id="17" name="Text 14"/>
-          <p:cNvSpPr/>
-          <p:nvPr/>
-        </p:nvSpPr>
-        <p:spPr>
-          <a:xfrm>
-            <a:off x="3283245" y="1380744"/>
-            <a:ext cx="1527597" cy="420624"/>
+          <p:cNvPr id="18" name="Text 14"/>
+          <p:cNvSpPr/>
+          <p:nvPr/>
+        </p:nvSpPr>
+        <p:spPr>
+          <a:xfrm>
+            <a:off x="3283245" y="1403604"/>
+            <a:ext cx="1491021" cy="420624"/>
           </a:xfrm>
           <a:prstGeom prst="rect">
             <a:avLst/>
@@ -2535,9 +2609,9 @@
                 <a:solidFill>
                   <a:srgbClr val="003087"/>
                 </a:solidFill>
-                <a:latin typeface="Arial" pitchFamily="34" charset="0"/>
-                <a:ea typeface="Arial" pitchFamily="34" charset="-122"/>
-                <a:cs typeface="Arial" pitchFamily="34" charset="-120"/>
+                <a:latin typeface="Segoe UI" pitchFamily="34" charset="0"/>
+                <a:ea typeface="Segoe UI" pitchFamily="34" charset="-122"/>
+                <a:cs typeface="Segoe UI" pitchFamily="34" charset="-120"/>
               </a:rPr>
               <a:t>Identification</a:t>
             </a:r>
@@ -2547,14 +2621,14 @@
       </p:sp>
       <p:sp>
         <p:nvSpPr>
-          <p:cNvPr id="18" name="Text 15"/>
-          <p:cNvSpPr/>
-          <p:nvPr/>
-        </p:nvSpPr>
-        <p:spPr>
-          <a:xfrm>
-            <a:off x="2862621" y="1856232"/>
-            <a:ext cx="1911645" cy="539496"/>
+          <p:cNvPr id="19" name="Text 15"/>
+          <p:cNvSpPr/>
+          <p:nvPr/>
+        </p:nvSpPr>
+        <p:spPr>
+          <a:xfrm>
+            <a:off x="2871765" y="1879092"/>
+            <a:ext cx="1893357" cy="493776"/>
           </a:xfrm>
           <a:prstGeom prst="rect">
             <a:avLst/>
@@ -2576,9 +2650,9 @@
                 <a:solidFill>
                   <a:srgbClr val="4C6272"/>
                 </a:solidFill>
-                <a:latin typeface="Arial" pitchFamily="34" charset="0"/>
-                <a:ea typeface="Arial" pitchFamily="34" charset="-122"/>
-                <a:cs typeface="Arial" pitchFamily="34" charset="-120"/>
+                <a:latin typeface="Segoe UI" pitchFamily="34" charset="0"/>
+                <a:ea typeface="Segoe UI" pitchFamily="34" charset="-122"/>
+                <a:cs typeface="Segoe UI" pitchFamily="34" charset="-120"/>
               </a:rPr>
               <a:t>the practice system orders, nobody has to ask</a:t>
             </a:r>
@@ -2588,26 +2662,26 @@
       </p:sp>
       <p:sp>
         <p:nvSpPr>
-          <p:cNvPr id="19" name="Shape 16"/>
-          <p:cNvSpPr/>
-          <p:nvPr/>
-        </p:nvSpPr>
-        <p:spPr>
-          <a:xfrm>
-            <a:off x="5012009" y="1234440"/>
-            <a:ext cx="2167677" cy="1234440"/>
+          <p:cNvPr id="20" name="Shape 16"/>
+          <p:cNvSpPr/>
+          <p:nvPr/>
+        </p:nvSpPr>
+        <p:spPr>
+          <a:xfrm>
+            <a:off x="5012009" y="1239012"/>
+            <a:ext cx="2167677" cy="1243584"/>
           </a:xfrm>
           <a:prstGeom prst="roundRect">
             <a:avLst>
-              <a:gd name="adj" fmla="val 5926"/>
+              <a:gd name="adj" fmla="val 7353"/>
             </a:avLst>
           </a:prstGeom>
           <a:solidFill>
-            <a:srgbClr val="F0F4F5"/>
+            <a:srgbClr val="F8FAFC"/>
           </a:solidFill>
           <a:ln w="9525">
             <a:solidFill>
-              <a:srgbClr val="DDE3E8"/>
+              <a:srgbClr val="EBEEF1"/>
             </a:solidFill>
             <a:prstDash val="solid"/>
           </a:ln>
@@ -2615,14 +2689,14 @@
       </p:sp>
       <p:sp>
         <p:nvSpPr>
-          <p:cNvPr id="20" name="Shape 17"/>
-          <p:cNvSpPr/>
-          <p:nvPr/>
-        </p:nvSpPr>
-        <p:spPr>
-          <a:xfrm>
-            <a:off x="5012009" y="1234440"/>
-            <a:ext cx="2167677" cy="54864"/>
+          <p:cNvPr id="21" name="Shape 17"/>
+          <p:cNvSpPr/>
+          <p:nvPr/>
+        </p:nvSpPr>
+        <p:spPr>
+          <a:xfrm>
+            <a:off x="5012009" y="1239012"/>
+            <a:ext cx="2167677" cy="64008"/>
           </a:xfrm>
           <a:prstGeom prst="rect">
             <a:avLst/>
@@ -2640,13 +2714,13 @@
       </p:sp>
       <p:sp>
         <p:nvSpPr>
-          <p:cNvPr id="21" name="Shape 18"/>
-          <p:cNvSpPr/>
-          <p:nvPr/>
-        </p:nvSpPr>
-        <p:spPr>
-          <a:xfrm>
-            <a:off x="5140025" y="1417320"/>
+          <p:cNvPr id="22" name="Shape 18"/>
+          <p:cNvSpPr/>
+          <p:nvPr/>
+        </p:nvSpPr>
+        <p:spPr>
+          <a:xfrm>
+            <a:off x="5149169" y="1440180"/>
             <a:ext cx="347472" cy="347472"/>
           </a:xfrm>
           <a:prstGeom prst="ellipse">
@@ -2665,13 +2739,13 @@
       </p:sp>
       <p:sp>
         <p:nvSpPr>
-          <p:cNvPr id="22" name="Text 19"/>
-          <p:cNvSpPr/>
-          <p:nvPr/>
-        </p:nvSpPr>
-        <p:spPr>
-          <a:xfrm>
-            <a:off x="5140025" y="1417320"/>
+          <p:cNvPr id="23" name="Text 19"/>
+          <p:cNvSpPr/>
+          <p:nvPr/>
+        </p:nvSpPr>
+        <p:spPr>
+          <a:xfrm>
+            <a:off x="5149169" y="1440180"/>
             <a:ext cx="347472" cy="347472"/>
           </a:xfrm>
           <a:prstGeom prst="rect">
@@ -2692,9 +2766,9 @@
                 <a:solidFill>
                   <a:srgbClr val="FFFFFF"/>
                 </a:solidFill>
-                <a:latin typeface="Arial" pitchFamily="34" charset="0"/>
-                <a:ea typeface="Arial" pitchFamily="34" charset="-122"/>
-                <a:cs typeface="Arial" pitchFamily="34" charset="-120"/>
+                <a:latin typeface="Segoe UI" pitchFamily="34" charset="0"/>
+                <a:ea typeface="Segoe UI" pitchFamily="34" charset="-122"/>
+                <a:cs typeface="Segoe UI" pitchFamily="34" charset="-120"/>
               </a:rPr>
               <a:t>3</a:t>
             </a:r>
@@ -2704,14 +2778,14 @@
       </p:sp>
       <p:sp>
         <p:nvSpPr>
-          <p:cNvPr id="23" name="Text 20"/>
-          <p:cNvSpPr/>
-          <p:nvPr/>
-        </p:nvSpPr>
-        <p:spPr>
-          <a:xfrm>
-            <a:off x="5560649" y="1380744"/>
-            <a:ext cx="1527597" cy="420624"/>
+          <p:cNvPr id="24" name="Text 20"/>
+          <p:cNvSpPr/>
+          <p:nvPr/>
+        </p:nvSpPr>
+        <p:spPr>
+          <a:xfrm>
+            <a:off x="5560649" y="1403604"/>
+            <a:ext cx="1491021" cy="420624"/>
           </a:xfrm>
           <a:prstGeom prst="rect">
             <a:avLst/>
@@ -2733,9 +2807,9 @@
                 <a:solidFill>
                   <a:srgbClr val="003087"/>
                 </a:solidFill>
-                <a:latin typeface="Arial" pitchFamily="34" charset="0"/>
-                <a:ea typeface="Arial" pitchFamily="34" charset="-122"/>
-                <a:cs typeface="Arial" pitchFamily="34" charset="-120"/>
+                <a:latin typeface="Segoe UI" pitchFamily="34" charset="0"/>
+                <a:ea typeface="Segoe UI" pitchFamily="34" charset="-122"/>
+                <a:cs typeface="Segoe UI" pitchFamily="34" charset="-120"/>
               </a:rPr>
               <a:t>Diagnosis</a:t>
             </a:r>
@@ -2745,14 +2819,14 @@
       </p:sp>
       <p:sp>
         <p:nvSpPr>
-          <p:cNvPr id="24" name="Text 21"/>
-          <p:cNvSpPr/>
-          <p:nvPr/>
-        </p:nvSpPr>
-        <p:spPr>
-          <a:xfrm>
-            <a:off x="5140025" y="1856232"/>
-            <a:ext cx="1911645" cy="539496"/>
+          <p:cNvPr id="25" name="Text 21"/>
+          <p:cNvSpPr/>
+          <p:nvPr/>
+        </p:nvSpPr>
+        <p:spPr>
+          <a:xfrm>
+            <a:off x="5149169" y="1879092"/>
+            <a:ext cx="1893357" cy="493776"/>
           </a:xfrm>
           <a:prstGeom prst="rect">
             <a:avLst/>
@@ -2774,9 +2848,9 @@
                 <a:solidFill>
                   <a:srgbClr val="4C6272"/>
                 </a:solidFill>
-                <a:latin typeface="Arial" pitchFamily="34" charset="0"/>
-                <a:ea typeface="Arial" pitchFamily="34" charset="-122"/>
-                <a:cs typeface="Arial" pitchFamily="34" charset="-120"/>
+                <a:latin typeface="Segoe UI" pitchFamily="34" charset="0"/>
+                <a:ea typeface="Segoe UI" pitchFamily="34" charset="-122"/>
+                <a:cs typeface="Segoe UI" pitchFamily="34" charset="-120"/>
               </a:rPr>
               <a:t>a sample between shifts</a:t>
             </a:r>
@@ -2786,26 +2860,26 @@
       </p:sp>
       <p:sp>
         <p:nvSpPr>
-          <p:cNvPr id="25" name="Shape 22"/>
-          <p:cNvSpPr/>
-          <p:nvPr/>
-        </p:nvSpPr>
-        <p:spPr>
-          <a:xfrm>
-            <a:off x="7289414" y="1234440"/>
-            <a:ext cx="2167677" cy="1234440"/>
+          <p:cNvPr id="26" name="Shape 22"/>
+          <p:cNvSpPr/>
+          <p:nvPr/>
+        </p:nvSpPr>
+        <p:spPr>
+          <a:xfrm>
+            <a:off x="7289414" y="1239012"/>
+            <a:ext cx="2167677" cy="1243584"/>
           </a:xfrm>
           <a:prstGeom prst="roundRect">
             <a:avLst>
-              <a:gd name="adj" fmla="val 5926"/>
+              <a:gd name="adj" fmla="val 7353"/>
             </a:avLst>
           </a:prstGeom>
           <a:solidFill>
-            <a:srgbClr val="F0F4F5"/>
+            <a:srgbClr val="F8FAFC"/>
           </a:solidFill>
           <a:ln w="9525">
             <a:solidFill>
-              <a:srgbClr val="DDE3E8"/>
+              <a:srgbClr val="EBEEF1"/>
             </a:solidFill>
             <a:prstDash val="solid"/>
           </a:ln>
@@ -2813,14 +2887,14 @@
       </p:sp>
       <p:sp>
         <p:nvSpPr>
-          <p:cNvPr id="26" name="Shape 23"/>
-          <p:cNvSpPr/>
-          <p:nvPr/>
-        </p:nvSpPr>
-        <p:spPr>
-          <a:xfrm>
-            <a:off x="7289414" y="1234440"/>
-            <a:ext cx="2167677" cy="54864"/>
+          <p:cNvPr id="27" name="Shape 23"/>
+          <p:cNvSpPr/>
+          <p:nvPr/>
+        </p:nvSpPr>
+        <p:spPr>
+          <a:xfrm>
+            <a:off x="7289414" y="1239012"/>
+            <a:ext cx="2167677" cy="64008"/>
           </a:xfrm>
           <a:prstGeom prst="rect">
             <a:avLst/>
@@ -2838,13 +2912,13 @@
       </p:sp>
       <p:sp>
         <p:nvSpPr>
-          <p:cNvPr id="27" name="Shape 24"/>
-          <p:cNvSpPr/>
-          <p:nvPr/>
-        </p:nvSpPr>
-        <p:spPr>
-          <a:xfrm>
-            <a:off x="7417430" y="1417320"/>
+          <p:cNvPr id="28" name="Shape 24"/>
+          <p:cNvSpPr/>
+          <p:nvPr/>
+        </p:nvSpPr>
+        <p:spPr>
+          <a:xfrm>
+            <a:off x="7426574" y="1440180"/>
             <a:ext cx="347472" cy="347472"/>
           </a:xfrm>
           <a:prstGeom prst="ellipse">
@@ -2863,13 +2937,13 @@
       </p:sp>
       <p:sp>
         <p:nvSpPr>
-          <p:cNvPr id="28" name="Text 25"/>
-          <p:cNvSpPr/>
-          <p:nvPr/>
-        </p:nvSpPr>
-        <p:spPr>
-          <a:xfrm>
-            <a:off x="7417430" y="1417320"/>
+          <p:cNvPr id="29" name="Text 25"/>
+          <p:cNvSpPr/>
+          <p:nvPr/>
+        </p:nvSpPr>
+        <p:spPr>
+          <a:xfrm>
+            <a:off x="7426574" y="1440180"/>
             <a:ext cx="347472" cy="347472"/>
           </a:xfrm>
           <a:prstGeom prst="rect">
@@ -2890,9 +2964,9 @@
                 <a:solidFill>
                   <a:srgbClr val="FFFFFF"/>
                 </a:solidFill>
-                <a:latin typeface="Arial" pitchFamily="34" charset="0"/>
-                <a:ea typeface="Arial" pitchFamily="34" charset="-122"/>
-                <a:cs typeface="Arial" pitchFamily="34" charset="-120"/>
+                <a:latin typeface="Segoe UI" pitchFamily="34" charset="0"/>
+                <a:ea typeface="Segoe UI" pitchFamily="34" charset="-122"/>
+                <a:cs typeface="Segoe UI" pitchFamily="34" charset="-120"/>
               </a:rPr>
               <a:t>4</a:t>
             </a:r>
@@ -2902,14 +2976,14 @@
       </p:sp>
       <p:sp>
         <p:nvSpPr>
-          <p:cNvPr id="29" name="Text 26"/>
-          <p:cNvSpPr/>
-          <p:nvPr/>
-        </p:nvSpPr>
-        <p:spPr>
-          <a:xfrm>
-            <a:off x="7838054" y="1380744"/>
-            <a:ext cx="1527597" cy="420624"/>
+          <p:cNvPr id="30" name="Text 26"/>
+          <p:cNvSpPr/>
+          <p:nvPr/>
+        </p:nvSpPr>
+        <p:spPr>
+          <a:xfrm>
+            <a:off x="7838054" y="1403604"/>
+            <a:ext cx="1491021" cy="420624"/>
           </a:xfrm>
           <a:prstGeom prst="rect">
             <a:avLst/>
@@ -2931,9 +3005,9 @@
                 <a:solidFill>
                   <a:srgbClr val="003087"/>
                 </a:solidFill>
-                <a:latin typeface="Arial" pitchFamily="34" charset="0"/>
-                <a:ea typeface="Arial" pitchFamily="34" charset="-122"/>
-                <a:cs typeface="Arial" pitchFamily="34" charset="-120"/>
+                <a:latin typeface="Segoe UI" pitchFamily="34" charset="0"/>
+                <a:ea typeface="Segoe UI" pitchFamily="34" charset="-122"/>
+                <a:cs typeface="Segoe UI" pitchFamily="34" charset="-120"/>
               </a:rPr>
               <a:t>Treatment</a:t>
             </a:r>
@@ -2943,14 +3017,14 @@
       </p:sp>
       <p:sp>
         <p:nvSpPr>
-          <p:cNvPr id="30" name="Text 27"/>
-          <p:cNvSpPr/>
-          <p:nvPr/>
-        </p:nvSpPr>
-        <p:spPr>
-          <a:xfrm>
-            <a:off x="7417430" y="1856232"/>
-            <a:ext cx="1911645" cy="539496"/>
+          <p:cNvPr id="31" name="Text 27"/>
+          <p:cNvSpPr/>
+          <p:nvPr/>
+        </p:nvSpPr>
+        <p:spPr>
+          <a:xfrm>
+            <a:off x="7426574" y="1879092"/>
+            <a:ext cx="1893357" cy="493776"/>
           </a:xfrm>
           <a:prstGeom prst="rect">
             <a:avLst/>
@@ -2972,9 +3046,9 @@
                 <a:solidFill>
                   <a:srgbClr val="4C6272"/>
                 </a:solidFill>
-                <a:latin typeface="Arial" pitchFamily="34" charset="0"/>
-                <a:ea typeface="Arial" pitchFamily="34" charset="-122"/>
-                <a:cs typeface="Arial" pitchFamily="34" charset="-120"/>
+                <a:latin typeface="Segoe UI" pitchFamily="34" charset="0"/>
+                <a:ea typeface="Segoe UI" pitchFamily="34" charset="-122"/>
+                <a:cs typeface="Segoe UI" pitchFamily="34" charset="-120"/>
               </a:rPr>
               <a:t>the dose follows the ferritin</a:t>
             </a:r>
@@ -2984,26 +3058,26 @@
       </p:sp>
       <p:sp>
         <p:nvSpPr>
-          <p:cNvPr id="31" name="Shape 28"/>
-          <p:cNvSpPr/>
-          <p:nvPr/>
-        </p:nvSpPr>
-        <p:spPr>
-          <a:xfrm>
-            <a:off x="9566819" y="1234440"/>
-            <a:ext cx="2167677" cy="1234440"/>
+          <p:cNvPr id="32" name="Shape 28"/>
+          <p:cNvSpPr/>
+          <p:nvPr/>
+        </p:nvSpPr>
+        <p:spPr>
+          <a:xfrm>
+            <a:off x="9566819" y="1239012"/>
+            <a:ext cx="2167677" cy="1243584"/>
           </a:xfrm>
           <a:prstGeom prst="roundRect">
             <a:avLst>
-              <a:gd name="adj" fmla="val 5926"/>
+              <a:gd name="adj" fmla="val 7353"/>
             </a:avLst>
           </a:prstGeom>
           <a:solidFill>
-            <a:srgbClr val="F0F4F5"/>
+            <a:srgbClr val="F8FAFC"/>
           </a:solidFill>
           <a:ln w="9525">
             <a:solidFill>
-              <a:srgbClr val="DDE3E8"/>
+              <a:srgbClr val="EBEEF1"/>
             </a:solidFill>
             <a:prstDash val="solid"/>
           </a:ln>
@@ -3011,14 +3085,14 @@
       </p:sp>
       <p:sp>
         <p:nvSpPr>
-          <p:cNvPr id="32" name="Shape 29"/>
-          <p:cNvSpPr/>
-          <p:nvPr/>
-        </p:nvSpPr>
-        <p:spPr>
-          <a:xfrm>
-            <a:off x="9566819" y="1234440"/>
-            <a:ext cx="2167677" cy="54864"/>
+          <p:cNvPr id="33" name="Shape 29"/>
+          <p:cNvSpPr/>
+          <p:nvPr/>
+        </p:nvSpPr>
+        <p:spPr>
+          <a:xfrm>
+            <a:off x="9566819" y="1239012"/>
+            <a:ext cx="2167677" cy="64008"/>
           </a:xfrm>
           <a:prstGeom prst="rect">
             <a:avLst/>
@@ -3036,13 +3110,13 @@
       </p:sp>
       <p:sp>
         <p:nvSpPr>
-          <p:cNvPr id="33" name="Shape 30"/>
-          <p:cNvSpPr/>
-          <p:nvPr/>
-        </p:nvSpPr>
-        <p:spPr>
-          <a:xfrm>
-            <a:off x="9694835" y="1417320"/>
+          <p:cNvPr id="34" name="Shape 30"/>
+          <p:cNvSpPr/>
+          <p:nvPr/>
+        </p:nvSpPr>
+        <p:spPr>
+          <a:xfrm>
+            <a:off x="9703979" y="1440180"/>
             <a:ext cx="347472" cy="347472"/>
           </a:xfrm>
           <a:prstGeom prst="ellipse">
@@ -3061,13 +3135,13 @@
       </p:sp>
       <p:sp>
         <p:nvSpPr>
-          <p:cNvPr id="34" name="Text 31"/>
-          <p:cNvSpPr/>
-          <p:nvPr/>
-        </p:nvSpPr>
-        <p:spPr>
-          <a:xfrm>
-            <a:off x="9694835" y="1417320"/>
+          <p:cNvPr id="35" name="Text 31"/>
+          <p:cNvSpPr/>
+          <p:nvPr/>
+        </p:nvSpPr>
+        <p:spPr>
+          <a:xfrm>
+            <a:off x="9703979" y="1440180"/>
             <a:ext cx="347472" cy="347472"/>
           </a:xfrm>
           <a:prstGeom prst="rect">
@@ -3088,9 +3162,9 @@
                 <a:solidFill>
                   <a:srgbClr val="FFFFFF"/>
                 </a:solidFill>
-                <a:latin typeface="Arial" pitchFamily="34" charset="0"/>
-                <a:ea typeface="Arial" pitchFamily="34" charset="-122"/>
-                <a:cs typeface="Arial" pitchFamily="34" charset="-120"/>
+                <a:latin typeface="Segoe UI" pitchFamily="34" charset="0"/>
+                <a:ea typeface="Segoe UI" pitchFamily="34" charset="-122"/>
+                <a:cs typeface="Segoe UI" pitchFamily="34" charset="-120"/>
               </a:rPr>
               <a:t>5</a:t>
             </a:r>
@@ -3100,14 +3174,14 @@
       </p:sp>
       <p:sp>
         <p:nvSpPr>
-          <p:cNvPr id="35" name="Text 32"/>
-          <p:cNvSpPr/>
-          <p:nvPr/>
-        </p:nvSpPr>
-        <p:spPr>
-          <a:xfrm>
-            <a:off x="10115459" y="1380744"/>
-            <a:ext cx="1527597" cy="420624"/>
+          <p:cNvPr id="36" name="Text 32"/>
+          <p:cNvSpPr/>
+          <p:nvPr/>
+        </p:nvSpPr>
+        <p:spPr>
+          <a:xfrm>
+            <a:off x="10115459" y="1403604"/>
+            <a:ext cx="1491021" cy="420624"/>
           </a:xfrm>
           <a:prstGeom prst="rect">
             <a:avLst/>
@@ -3129,9 +3203,9 @@
                 <a:solidFill>
                   <a:srgbClr val="003087"/>
                 </a:solidFill>
-                <a:latin typeface="Arial" pitchFamily="34" charset="0"/>
-                <a:ea typeface="Arial" pitchFamily="34" charset="-122"/>
-                <a:cs typeface="Arial" pitchFamily="34" charset="-120"/>
+                <a:latin typeface="Segoe UI" pitchFamily="34" charset="0"/>
+                <a:ea typeface="Segoe UI" pitchFamily="34" charset="-122"/>
+                <a:cs typeface="Segoe UI" pitchFamily="34" charset="-120"/>
               </a:rPr>
               <a:t>Long-term optimisation</a:t>
             </a:r>
@@ -3141,14 +3215,14 @@
       </p:sp>
       <p:sp>
         <p:nvSpPr>
-          <p:cNvPr id="36" name="Text 33"/>
-          <p:cNvSpPr/>
-          <p:nvPr/>
-        </p:nvSpPr>
-        <p:spPr>
-          <a:xfrm>
-            <a:off x="9694835" y="1856232"/>
-            <a:ext cx="1911645" cy="539496"/>
+          <p:cNvPr id="37" name="Text 33"/>
+          <p:cNvSpPr/>
+          <p:nvPr/>
+        </p:nvSpPr>
+        <p:spPr>
+          <a:xfrm>
+            <a:off x="9703979" y="1879092"/>
+            <a:ext cx="1893357" cy="493776"/>
           </a:xfrm>
           <a:prstGeom prst="rect">
             <a:avLst/>
@@ -3170,9 +3244,9 @@
                 <a:solidFill>
                   <a:srgbClr val="4C6272"/>
                 </a:solidFill>
-                <a:latin typeface="Arial" pitchFamily="34" charset="0"/>
-                <a:ea typeface="Arial" pitchFamily="34" charset="-122"/>
-                <a:cs typeface="Arial" pitchFamily="34" charset="-120"/>
+                <a:latin typeface="Segoe UI" pitchFamily="34" charset="0"/>
+                <a:ea typeface="Segoe UI" pitchFamily="34" charset="-122"/>
+                <a:cs typeface="Segoe UI" pitchFamily="34" charset="-120"/>
               </a:rPr>
               <a:t>silence as the good result</a:t>
             </a:r>
@@ -3182,22 +3256,22 @@
       </p:sp>
       <p:sp>
         <p:nvSpPr>
-          <p:cNvPr id="37" name="Shape 34"/>
-          <p:cNvSpPr/>
-          <p:nvPr/>
-        </p:nvSpPr>
-        <p:spPr>
-          <a:xfrm>
-            <a:off x="457200" y="2788920"/>
-            <a:ext cx="5501488" cy="3520440"/>
+          <p:cNvPr id="38" name="Shape 34"/>
+          <p:cNvSpPr/>
+          <p:nvPr/>
+        </p:nvSpPr>
+        <p:spPr>
+          <a:xfrm>
+            <a:off x="457200" y="2793492"/>
+            <a:ext cx="5501488" cy="2261616"/>
           </a:xfrm>
           <a:prstGeom prst="roundRect">
             <a:avLst>
-              <a:gd name="adj" fmla="val 2597"/>
+              <a:gd name="adj" fmla="val 4043"/>
             </a:avLst>
           </a:prstGeom>
           <a:solidFill>
-            <a:srgbClr val="D5E8F0"/>
+            <a:srgbClr val="F4F8FC"/>
           </a:solidFill>
           <a:ln w="9525">
             <a:solidFill>
@@ -3209,14 +3283,14 @@
       </p:sp>
       <p:sp>
         <p:nvSpPr>
-          <p:cNvPr id="38" name="Text 35"/>
-          <p:cNvSpPr/>
-          <p:nvPr/>
-        </p:nvSpPr>
-        <p:spPr>
-          <a:xfrm>
-            <a:off x="685800" y="2953512"/>
-            <a:ext cx="5044288" cy="256032"/>
+          <p:cNvPr id="39" name="Text 35"/>
+          <p:cNvSpPr/>
+          <p:nvPr/>
+        </p:nvSpPr>
+        <p:spPr>
+          <a:xfrm>
+            <a:off x="676656" y="2976372"/>
+            <a:ext cx="5062576" cy="237744"/>
           </a:xfrm>
           <a:prstGeom prst="rect">
             <a:avLst/>
@@ -3232,30 +3306,30 @@
               <a:buNone/>
             </a:pPr>
             <a:r>
-              <a:rPr lang="en-US" sz="900" b="1" spc="150" kern="0" dirty="0">
+              <a:rPr lang="en-US" sz="850" b="1" spc="160" kern="0" dirty="0">
                 <a:solidFill>
                   <a:srgbClr val="005EB8"/>
                 </a:solidFill>
-                <a:latin typeface="Arial" pitchFamily="34" charset="0"/>
-                <a:ea typeface="Arial" pitchFamily="34" charset="-122"/>
-                <a:cs typeface="Arial" pitchFamily="34" charset="-120"/>
+                <a:latin typeface="Segoe UI" pitchFamily="34" charset="0"/>
+                <a:ea typeface="Segoe UI" pitchFamily="34" charset="-122"/>
+                <a:cs typeface="Segoe UI" pitchFamily="34" charset="-120"/>
               </a:rPr>
               <a:t>THE PATIENT NORTH STAR</a:t>
             </a:r>
-            <a:endParaRPr lang="en-US" sz="900" dirty="0"/>
-          </a:p>
-        </p:txBody>
-      </p:sp>
-      <p:sp>
-        <p:nvSpPr>
-          <p:cNvPr id="39" name="Text 36"/>
-          <p:cNvSpPr/>
-          <p:nvPr/>
-        </p:nvSpPr>
-        <p:spPr>
-          <a:xfrm>
-            <a:off x="685800" y="3227832"/>
-            <a:ext cx="5044288" cy="685800"/>
+            <a:endParaRPr lang="en-US" sz="850" dirty="0"/>
+          </a:p>
+        </p:txBody>
+      </p:sp>
+      <p:sp>
+        <p:nvSpPr>
+          <p:cNvPr id="40" name="Text 36"/>
+          <p:cNvSpPr/>
+          <p:nvPr/>
+        </p:nvSpPr>
+        <p:spPr>
+          <a:xfrm>
+            <a:off x="676656" y="3250692"/>
+            <a:ext cx="5062576" cy="291084"/>
           </a:xfrm>
           <a:prstGeom prst="rect">
             <a:avLst/>
@@ -3277,9 +3351,9 @@
                 <a:solidFill>
                   <a:srgbClr val="003087"/>
                 </a:solidFill>
-                <a:latin typeface="Arial" pitchFamily="34" charset="0"/>
-                <a:ea typeface="Arial" pitchFamily="34" charset="-122"/>
-                <a:cs typeface="Arial" pitchFamily="34" charset="-120"/>
+                <a:latin typeface="Segoe UI" pitchFamily="34" charset="0"/>
+                <a:ea typeface="Segoe UI" pitchFamily="34" charset="-122"/>
+                <a:cs typeface="Segoe UI" pitchFamily="34" charset="-120"/>
               </a:rPr>
               <a:t>Known, treated, and never quietly lost.</a:t>
             </a:r>
@@ -3289,14 +3363,14 @@
       </p:sp>
       <p:sp>
         <p:nvSpPr>
-          <p:cNvPr id="40" name="Text 37"/>
-          <p:cNvSpPr/>
-          <p:nvPr/>
-        </p:nvSpPr>
-        <p:spPr>
-          <a:xfrm>
-            <a:off x="685800" y="3959352"/>
-            <a:ext cx="5044288" cy="2194560"/>
+          <p:cNvPr id="41" name="Text 37"/>
+          <p:cNvSpPr/>
+          <p:nvPr/>
+        </p:nvSpPr>
+        <p:spPr>
+          <a:xfrm>
+            <a:off x="676656" y="3614928"/>
+            <a:ext cx="5062576" cy="1257300"/>
           </a:xfrm>
           <a:prstGeom prst="rect">
             <a:avLst/>
@@ -3316,11 +3390,11 @@
             <a:r>
               <a:rPr lang="en-US" sz="1100" dirty="0">
                 <a:solidFill>
-                  <a:srgbClr val="231F20"/>
-                </a:solidFill>
-                <a:latin typeface="Arial" pitchFamily="34" charset="0"/>
-                <a:ea typeface="Arial" pitchFamily="34" charset="-122"/>
-                <a:cs typeface="Arial" pitchFamily="34" charset="-120"/>
+                  <a:srgbClr val="212B32"/>
+                </a:solidFill>
+                <a:latin typeface="Segoe UI" pitchFamily="34" charset="0"/>
+                <a:ea typeface="Segoe UI" pitchFamily="34" charset="-122"/>
+                <a:cs typeface="Segoe UI" pitchFamily="34" charset="-120"/>
               </a:rPr>
               <a:t>Layla is not a diagnosis waiting to happen. She is a patient the system already knows and already treats. The failure mode for someone like her is not a missed screen but a missed check: a six-month cycle that slips to nine, then twelve, while the iron dose that was right three years ago quietly stops being right. </a:t>
             </a:r>
@@ -3330,11 +3404,11 @@
             <a:r>
               <a:rPr lang="en-US" sz="1100" b="1" dirty="0">
                 <a:solidFill>
-                  <a:srgbClr val="231F20"/>
-                </a:solidFill>
-                <a:latin typeface="Arial" pitchFamily="34" charset="0"/>
-                <a:ea typeface="Arial" pitchFamily="34" charset="-122"/>
-                <a:cs typeface="Arial" pitchFamily="34" charset="-120"/>
+                  <a:srgbClr val="212B32"/>
+                </a:solidFill>
+                <a:latin typeface="Segoe UI" pitchFamily="34" charset="0"/>
+                <a:ea typeface="Segoe UI" pitchFamily="34" charset="-122"/>
+                <a:cs typeface="Segoe UI" pitchFamily="34" charset="-120"/>
               </a:rPr>
               <a:t>Hold the cycle and you hold the treatment.</a:t>
             </a:r>
@@ -3344,22 +3418,22 @@
       </p:sp>
       <p:sp>
         <p:nvSpPr>
-          <p:cNvPr id="41" name="Shape 38"/>
-          <p:cNvSpPr/>
-          <p:nvPr/>
-        </p:nvSpPr>
-        <p:spPr>
-          <a:xfrm>
-            <a:off x="6233008" y="2788920"/>
-            <a:ext cx="5501488" cy="3520440"/>
+          <p:cNvPr id="42" name="Shape 38"/>
+          <p:cNvSpPr/>
+          <p:nvPr/>
+        </p:nvSpPr>
+        <p:spPr>
+          <a:xfrm>
+            <a:off x="6233008" y="2793492"/>
+            <a:ext cx="5501488" cy="2261616"/>
           </a:xfrm>
           <a:prstGeom prst="roundRect">
             <a:avLst>
-              <a:gd name="adj" fmla="val 2597"/>
+              <a:gd name="adj" fmla="val 4043"/>
             </a:avLst>
           </a:prstGeom>
           <a:solidFill>
-            <a:srgbClr val="FFF3CD"/>
+            <a:srgbClr val="FFF9EC"/>
           </a:solidFill>
           <a:ln w="9525">
             <a:solidFill>
@@ -3371,14 +3445,14 @@
       </p:sp>
       <p:sp>
         <p:nvSpPr>
-          <p:cNvPr id="42" name="Text 39"/>
-          <p:cNvSpPr/>
-          <p:nvPr/>
-        </p:nvSpPr>
-        <p:spPr>
-          <a:xfrm>
-            <a:off x="6461608" y="2953512"/>
-            <a:ext cx="5044288" cy="256032"/>
+          <p:cNvPr id="43" name="Text 39"/>
+          <p:cNvSpPr/>
+          <p:nvPr/>
+        </p:nvSpPr>
+        <p:spPr>
+          <a:xfrm>
+            <a:off x="6452464" y="2976372"/>
+            <a:ext cx="5062576" cy="237744"/>
           </a:xfrm>
           <a:prstGeom prst="rect">
             <a:avLst/>
@@ -3394,30 +3468,30 @@
               <a:buNone/>
             </a:pPr>
             <a:r>
-              <a:rPr lang="en-US" sz="900" b="1" spc="150" kern="0" dirty="0">
+              <a:rPr lang="en-US" sz="850" b="1" spc="160" kern="0" dirty="0">
                 <a:solidFill>
                   <a:srgbClr val="8A6D1F"/>
                 </a:solidFill>
-                <a:latin typeface="Arial" pitchFamily="34" charset="0"/>
-                <a:ea typeface="Arial" pitchFamily="34" charset="-122"/>
-                <a:cs typeface="Arial" pitchFamily="34" charset="-120"/>
+                <a:latin typeface="Segoe UI" pitchFamily="34" charset="0"/>
+                <a:ea typeface="Segoe UI" pitchFamily="34" charset="-122"/>
+                <a:cs typeface="Segoe UI" pitchFamily="34" charset="-120"/>
               </a:rPr>
               <a:t>WHY THIS WORKS FOR HER</a:t>
             </a:r>
-            <a:endParaRPr lang="en-US" sz="900" dirty="0"/>
-          </a:p>
-        </p:txBody>
-      </p:sp>
-      <p:sp>
-        <p:nvSpPr>
-          <p:cNvPr id="43" name="Text 40"/>
-          <p:cNvSpPr/>
-          <p:nvPr/>
-        </p:nvSpPr>
-        <p:spPr>
-          <a:xfrm>
-            <a:off x="6461608" y="3227832"/>
-            <a:ext cx="5044288" cy="685800"/>
+            <a:endParaRPr lang="en-US" sz="850" dirty="0"/>
+          </a:p>
+        </p:txBody>
+      </p:sp>
+      <p:sp>
+        <p:nvSpPr>
+          <p:cNvPr id="44" name="Text 40"/>
+          <p:cNvSpPr/>
+          <p:nvPr/>
+        </p:nvSpPr>
+        <p:spPr>
+          <a:xfrm>
+            <a:off x="6452464" y="3250692"/>
+            <a:ext cx="5062576" cy="527304"/>
           </a:xfrm>
           <a:prstGeom prst="rect">
             <a:avLst/>
@@ -3439,9 +3513,9 @@
                 <a:solidFill>
                   <a:srgbClr val="003087"/>
                 </a:solidFill>
-                <a:latin typeface="Arial" pitchFamily="34" charset="0"/>
-                <a:ea typeface="Arial" pitchFamily="34" charset="-122"/>
-                <a:cs typeface="Arial" pitchFamily="34" charset="-120"/>
+                <a:latin typeface="Segoe UI" pitchFamily="34" charset="0"/>
+                <a:ea typeface="Segoe UI" pitchFamily="34" charset="-122"/>
+                <a:cs typeface="Segoe UI" pitchFamily="34" charset="-120"/>
               </a:rPr>
               <a:t>Her hours change every week. The kit does not care.</a:t>
             </a:r>
@@ -3451,14 +3525,14 @@
       </p:sp>
       <p:sp>
         <p:nvSpPr>
-          <p:cNvPr id="44" name="Text 41"/>
-          <p:cNvSpPr/>
-          <p:nvPr/>
-        </p:nvSpPr>
-        <p:spPr>
-          <a:xfrm>
-            <a:off x="6461608" y="3959352"/>
-            <a:ext cx="5044288" cy="2194560"/>
+          <p:cNvPr id="45" name="Text 41"/>
+          <p:cNvSpPr/>
+          <p:nvPr/>
+        </p:nvSpPr>
+        <p:spPr>
+          <a:xfrm>
+            <a:off x="6452464" y="3851148"/>
+            <a:ext cx="5062576" cy="1021080"/>
           </a:xfrm>
           <a:prstGeom prst="rect">
             <a:avLst/>
@@ -3476,13 +3550,13 @@
               <a:buNone/>
             </a:pPr>
             <a:r>
-              <a:rPr lang="en-US" sz="1100" dirty="0">
-                <a:solidFill>
-                  <a:srgbClr val="231F20"/>
-                </a:solidFill>
-                <a:latin typeface="Arial" pitchFamily="34" charset="0"/>
-                <a:ea typeface="Arial" pitchFamily="34" charset="-122"/>
-                <a:cs typeface="Arial" pitchFamily="34" charset="-120"/>
+              <a:rPr lang="en-US" sz="1000" dirty="0">
+                <a:solidFill>
+                  <a:srgbClr val="212B32"/>
+                </a:solidFill>
+                <a:latin typeface="Segoe UI" pitchFamily="34" charset="0"/>
+                <a:ea typeface="Segoe UI" pitchFamily="34" charset="-122"/>
+                <a:cs typeface="Segoe UI" pitchFamily="34" charset="-120"/>
               </a:rPr>
               <a:t>Two part-time jobs, one on a rota that moves, mean a fixed clinic slot is a bet against her own timetable, and an hour in a waiting room is an hour she is not paid for. A kit that arrives when the cycle is due and gets taken between shifts costs her nothing she cannot spare. </a:t>
             </a:r>
@@ -3490,30 +3564,30 @@
               <a:buNone/>
             </a:pPr>
             <a:r>
-              <a:rPr lang="en-US" sz="1100" b="1" dirty="0">
-                <a:solidFill>
-                  <a:srgbClr val="231F20"/>
-                </a:solidFill>
-                <a:latin typeface="Arial" pitchFamily="34" charset="0"/>
-                <a:ea typeface="Arial" pitchFamily="34" charset="-122"/>
-                <a:cs typeface="Arial" pitchFamily="34" charset="-120"/>
+              <a:rPr lang="en-US" sz="1000" b="1" dirty="0">
+                <a:solidFill>
+                  <a:srgbClr val="212B32"/>
+                </a:solidFill>
+                <a:latin typeface="Segoe UI" pitchFamily="34" charset="0"/>
+                <a:ea typeface="Segoe UI" pitchFamily="34" charset="-122"/>
+                <a:cs typeface="Segoe UI" pitchFamily="34" charset="-120"/>
               </a:rPr>
               <a:t>The result goes to Hannah. Layla hears from the practice only if the dose needs to change.</a:t>
             </a:r>
-            <a:endParaRPr lang="en-US" sz="1100" dirty="0"/>
-          </a:p>
-        </p:txBody>
-      </p:sp>
-      <p:sp>
-        <p:nvSpPr>
-          <p:cNvPr id="45" name="Text 42"/>
-          <p:cNvSpPr/>
-          <p:nvPr/>
-        </p:nvSpPr>
-        <p:spPr>
-          <a:xfrm>
-            <a:off x="457200" y="6473952"/>
-            <a:ext cx="3108960" cy="274320"/>
+            <a:endParaRPr lang="en-US" sz="1000" dirty="0"/>
+          </a:p>
+        </p:txBody>
+      </p:sp>
+      <p:sp>
+        <p:nvSpPr>
+          <p:cNvPr id="46" name="Text 42"/>
+          <p:cNvSpPr/>
+          <p:nvPr/>
+        </p:nvSpPr>
+        <p:spPr>
+          <a:xfrm>
+            <a:off x="457200" y="6455664"/>
+            <a:ext cx="4206240" cy="274320"/>
           </a:xfrm>
           <a:prstGeom prst="rect">
             <a:avLst/>
@@ -3533,9 +3607,9 @@
                 <a:solidFill>
                   <a:srgbClr val="7E8B97"/>
                 </a:solidFill>
-                <a:latin typeface="Arial" pitchFamily="34" charset="0"/>
-                <a:ea typeface="Arial" pitchFamily="34" charset="-122"/>
-                <a:cs typeface="Arial" pitchFamily="34" charset="-120"/>
+                <a:latin typeface="Segoe UI" pitchFamily="34" charset="0"/>
+                <a:ea typeface="Segoe UI" pitchFamily="34" charset="-122"/>
+                <a:cs typeface="Segoe UI" pitchFamily="34" charset="-120"/>
               </a:rPr>
               <a:t>Layla  ·  Hearts and Minds</a:t>
             </a:r>
@@ -3545,14 +3619,14 @@
       </p:sp>
       <p:sp>
         <p:nvSpPr>
-          <p:cNvPr id="46" name="Text 43"/>
-          <p:cNvSpPr/>
-          <p:nvPr/>
-        </p:nvSpPr>
-        <p:spPr>
-          <a:xfrm>
-            <a:off x="3657600" y="6473952"/>
-            <a:ext cx="7528255" cy="274320"/>
+          <p:cNvPr id="47" name="Text 43"/>
+          <p:cNvSpPr/>
+          <p:nvPr/>
+        </p:nvSpPr>
+        <p:spPr>
+          <a:xfrm>
+            <a:off x="4754880" y="6455664"/>
+            <a:ext cx="6430975" cy="274320"/>
           </a:xfrm>
           <a:prstGeom prst="rect">
             <a:avLst/>
@@ -3572,9 +3646,9 @@
                 <a:solidFill>
                   <a:srgbClr val="7E8B97"/>
                 </a:solidFill>
-                <a:latin typeface="Arial" pitchFamily="34" charset="0"/>
-                <a:ea typeface="Arial" pitchFamily="34" charset="-122"/>
-                <a:cs typeface="Arial" pitchFamily="34" charset="-120"/>
+                <a:latin typeface="Segoe UI" pitchFamily="34" charset="0"/>
+                <a:ea typeface="Segoe UI" pitchFamily="34" charset="-122"/>
+                <a:cs typeface="Segoe UI" pitchFamily="34" charset="-120"/>
               </a:rPr>
               <a:t>Commercial positions are agreed in principle and remain subject to the live procurement.</a:t>
             </a:r>
@@ -3584,14 +3658,14 @@
       </p:sp>
       <p:sp>
         <p:nvSpPr>
-          <p:cNvPr id="47" name="Text 44"/>
-          <p:cNvSpPr/>
-          <p:nvPr/>
-        </p:nvSpPr>
-        <p:spPr>
-          <a:xfrm>
-            <a:off x="11368735" y="6473952"/>
-            <a:ext cx="365760" cy="274320"/>
+          <p:cNvPr id="48" name="Text 44"/>
+          <p:cNvSpPr/>
+          <p:nvPr/>
+        </p:nvSpPr>
+        <p:spPr>
+          <a:xfrm>
+            <a:off x="11323015" y="6455664"/>
+            <a:ext cx="411480" cy="274320"/>
           </a:xfrm>
           <a:prstGeom prst="rect">
             <a:avLst/>
@@ -3611,9 +3685,9 @@
                 <a:solidFill>
                   <a:srgbClr val="7E8B97"/>
                 </a:solidFill>
-                <a:latin typeface="Arial" pitchFamily="34" charset="0"/>
-                <a:ea typeface="Arial" pitchFamily="34" charset="-122"/>
-                <a:cs typeface="Arial" pitchFamily="34" charset="-120"/>
+                <a:latin typeface="Segoe UI" pitchFamily="34" charset="0"/>
+                <a:ea typeface="Segoe UI" pitchFamily="34" charset="-122"/>
+                <a:cs typeface="Segoe UI" pitchFamily="34" charset="-120"/>
               </a:rPr>
               <a:t>2</a:t>
             </a:r>
@@ -3653,137 +3727,9 @@
           <a:chExt cx="0" cy="0"/>
         </a:xfrm>
       </p:grpSpPr>
-      <p:sp>
-        <p:nvSpPr>
-          <p:cNvPr id="2" name="Shape 0"/>
-          <p:cNvSpPr/>
-          <p:nvPr/>
-        </p:nvSpPr>
-        <p:spPr>
-          <a:xfrm>
-            <a:off x="0" y="0"/>
-            <a:ext cx="12191695" cy="868680"/>
-          </a:xfrm>
-          <a:prstGeom prst="rect">
-            <a:avLst/>
-          </a:prstGeom>
-          <a:solidFill>
-            <a:srgbClr val="003087"/>
-          </a:solidFill>
-          <a:ln w="12700">
-            <a:solidFill>
-              <a:srgbClr val="003087"/>
-            </a:solidFill>
-            <a:prstDash val="solid"/>
-          </a:ln>
-        </p:spPr>
-      </p:sp>
-      <p:sp>
-        <p:nvSpPr>
-          <p:cNvPr id="3" name="Shape 1"/>
-          <p:cNvSpPr/>
-          <p:nvPr/>
-        </p:nvSpPr>
-        <p:spPr>
-          <a:xfrm>
-            <a:off x="0" y="868680"/>
-            <a:ext cx="12191695" cy="54864"/>
-          </a:xfrm>
-          <a:prstGeom prst="rect">
-            <a:avLst/>
-          </a:prstGeom>
-          <a:solidFill>
-            <a:srgbClr val="FFB91D"/>
-          </a:solidFill>
-          <a:ln w="12700">
-            <a:solidFill>
-              <a:srgbClr val="FFB91D"/>
-            </a:solidFill>
-            <a:prstDash val="solid"/>
-          </a:ln>
-        </p:spPr>
-      </p:sp>
-      <p:sp>
-        <p:nvSpPr>
-          <p:cNvPr id="4" name="Text 2"/>
-          <p:cNvSpPr/>
-          <p:nvPr/>
-        </p:nvSpPr>
-        <p:spPr>
-          <a:xfrm>
-            <a:off x="457200" y="128016"/>
-            <a:ext cx="8686800" cy="256032"/>
-          </a:xfrm>
-          <a:prstGeom prst="rect">
-            <a:avLst/>
-          </a:prstGeom>
-          <a:noFill/>
-          <a:ln/>
-        </p:spPr>
-        <p:txBody>
-          <a:bodyPr wrap="square" lIns="0" tIns="0" rIns="0" bIns="0" rtlCol="0" anchor="ctr"/>
-          <a:lstStyle/>
-          <a:p>
-            <a:pPr indent="0" marL="0">
-              <a:buNone/>
-            </a:pPr>
-            <a:r>
-              <a:rPr lang="en-US" sz="950" b="1" spc="200" kern="0" dirty="0">
-                <a:solidFill>
-                  <a:srgbClr val="7EC8E3"/>
-                </a:solidFill>
-                <a:latin typeface="Arial" pitchFamily="34" charset="0"/>
-                <a:ea typeface="Arial" pitchFamily="34" charset="-122"/>
-                <a:cs typeface="Arial" pitchFamily="34" charset="-120"/>
-              </a:rPr>
-              <a:t>HEARTS AND MINDS  ·  LAYLA'S JOURNEY  ·  STAGE 1 OF 5</a:t>
-            </a:r>
-            <a:endParaRPr lang="en-US" sz="950" dirty="0"/>
-          </a:p>
-        </p:txBody>
-      </p:sp>
-      <p:sp>
-        <p:nvSpPr>
-          <p:cNvPr id="5" name="Text 3"/>
-          <p:cNvSpPr/>
-          <p:nvPr/>
-        </p:nvSpPr>
-        <p:spPr>
-          <a:xfrm>
-            <a:off x="457200" y="384048"/>
-            <a:ext cx="9601200" cy="411480"/>
-          </a:xfrm>
-          <a:prstGeom prst="rect">
-            <a:avLst/>
-          </a:prstGeom>
-          <a:noFill/>
-          <a:ln/>
-        </p:spPr>
-        <p:txBody>
-          <a:bodyPr wrap="square" lIns="0" tIns="0" rIns="0" bIns="0" rtlCol="0" anchor="ctr"/>
-          <a:lstStyle/>
-          <a:p>
-            <a:pPr indent="0" marL="0">
-              <a:buNone/>
-            </a:pPr>
-            <a:r>
-              <a:rPr lang="en-US" sz="2000" b="1" dirty="0">
-                <a:solidFill>
-                  <a:srgbClr val="FFFFFF"/>
-                </a:solidFill>
-                <a:latin typeface="Arial" pitchFamily="34" charset="0"/>
-                <a:ea typeface="Arial" pitchFamily="34" charset="-122"/>
-                <a:cs typeface="Arial" pitchFamily="34" charset="-120"/>
-              </a:rPr>
-              <a:t>Stratification, a treated condition and a cycle nobody can see slipping</a:t>
-            </a:r>
-            <a:endParaRPr lang="en-US" sz="2000" dirty="0"/>
-          </a:p>
-        </p:txBody>
-      </p:sp>
       <p:pic>
         <p:nvPicPr>
-          <p:cNvPr id="6" name="Image 0" descr="/sessions/quirky-zen-galileo/mnt/outputs/deckbuild/nhs_logo.png">    </p:cNvPr>
+          <p:cNvPr id="2" name="Image 0" descr="/sessions/quirky-zen-galileo/mnt/NHS/07 Sites &amp; Repos/dtx-ecosystem/hearts-and-minds/_generators/assets/bg-band.jpg">    </p:cNvPr>
           <p:cNvPicPr>
             <a:picLocks noChangeAspect="1"/>
           </p:cNvPicPr>
@@ -3797,8 +3743,8 @@
         </p:blipFill>
         <p:spPr>
           <a:xfrm>
-            <a:off x="10774375" y="201168"/>
-            <a:ext cx="960120" cy="393192"/>
+            <a:off x="0" y="0"/>
+            <a:ext cx="12191695" cy="932688"/>
           </a:xfrm>
           <a:prstGeom prst="rect">
             <a:avLst/>
@@ -3807,119 +3753,14 @@
       </p:pic>
       <p:sp>
         <p:nvSpPr>
-          <p:cNvPr id="7" name="Text 4"/>
-          <p:cNvSpPr/>
-          <p:nvPr/>
-        </p:nvSpPr>
-        <p:spPr>
-          <a:xfrm>
-            <a:off x="429768" y="1024128"/>
-            <a:ext cx="1463040" cy="868680"/>
-          </a:xfrm>
-          <a:prstGeom prst="rect">
-            <a:avLst/>
-          </a:prstGeom>
-          <a:noFill/>
-          <a:ln/>
-        </p:spPr>
-        <p:txBody>
-          <a:bodyPr wrap="square" lIns="0" tIns="0" rIns="0" bIns="0" rtlCol="0" anchor="ctr"/>
-          <a:lstStyle/>
-          <a:p>
-            <a:pPr indent="0" marL="0">
-              <a:buNone/>
-            </a:pPr>
-            <a:r>
-              <a:rPr lang="en-US" sz="5200" b="1" dirty="0">
-                <a:solidFill>
-                  <a:srgbClr val="FFB91D"/>
-                </a:solidFill>
-                <a:latin typeface="Arial" pitchFamily="34" charset="0"/>
-                <a:ea typeface="Arial" pitchFamily="34" charset="-122"/>
-                <a:cs typeface="Arial" pitchFamily="34" charset="-120"/>
-              </a:rPr>
-              <a:t>01</a:t>
-            </a:r>
-            <a:endParaRPr lang="en-US" sz="5200" dirty="0"/>
-          </a:p>
-        </p:txBody>
-      </p:sp>
-      <p:sp>
-        <p:nvSpPr>
-          <p:cNvPr id="8" name="Text 5"/>
-          <p:cNvSpPr/>
-          <p:nvPr/>
-        </p:nvSpPr>
-        <p:spPr>
-          <a:xfrm>
-            <a:off x="457200" y="1920240"/>
-            <a:ext cx="4892040" cy="1137285"/>
-          </a:xfrm>
-          <a:prstGeom prst="rect">
-            <a:avLst/>
-          </a:prstGeom>
-          <a:noFill/>
-          <a:ln/>
-        </p:spPr>
-        <p:txBody>
-          <a:bodyPr wrap="square" lIns="0" tIns="0" rIns="0" bIns="0" rtlCol="0" anchor="t">
-            <a:normAutofit/>
-          </a:bodyPr>
-          <a:lstStyle/>
-          <a:p>
-            <a:pPr indent="0" marL="0">
-              <a:buNone/>
-            </a:pPr>
-            <a:r>
-              <a:rPr lang="en-US" sz="1350" b="1" dirty="0">
-                <a:solidFill>
-                  <a:srgbClr val="003087"/>
-                </a:solidFill>
-                <a:latin typeface="Arial" pitchFamily="34" charset="0"/>
-                <a:ea typeface="Arial" pitchFamily="34" charset="-122"/>
-                <a:cs typeface="Arial" pitchFamily="34" charset="-120"/>
-              </a:rPr>
-              <a:t>Around 8% of adult women in the UK live with iron deficiency anaemia. For most, treatment is a tablet and a blood test every six months. The test is the only way anyone knows whether the tablet is working, and it is the part that falls away when a life runs on shifts.</a:t>
-            </a:r>
-            <a:endParaRPr lang="en-US" sz="1350" dirty="0"/>
-          </a:p>
-        </p:txBody>
-      </p:sp>
-      <p:sp>
-        <p:nvSpPr>
-          <p:cNvPr id="9" name="Shape 6"/>
-          <p:cNvSpPr/>
-          <p:nvPr/>
-        </p:nvSpPr>
-        <p:spPr>
-          <a:xfrm>
-            <a:off x="457200" y="3167253"/>
-            <a:ext cx="4892040" cy="797306"/>
-          </a:xfrm>
-          <a:prstGeom prst="rect">
-            <a:avLst/>
-          </a:prstGeom>
-          <a:solidFill>
-            <a:srgbClr val="F0F4F5"/>
-          </a:solidFill>
-          <a:ln w="12700">
-            <a:solidFill>
-              <a:srgbClr val="F0F4F5"/>
-            </a:solidFill>
-            <a:prstDash val="solid"/>
-          </a:ln>
-        </p:spPr>
-      </p:sp>
-      <p:sp>
-        <p:nvSpPr>
-          <p:cNvPr id="10" name="Shape 7"/>
-          <p:cNvSpPr/>
-          <p:nvPr/>
-        </p:nvSpPr>
-        <p:spPr>
-          <a:xfrm>
-            <a:off x="457200" y="3167253"/>
-            <a:ext cx="82296" cy="797306"/>
+          <p:cNvPr id="3" name="Shape 0"/>
+          <p:cNvSpPr/>
+          <p:nvPr/>
+        </p:nvSpPr>
+        <p:spPr>
+          <a:xfrm>
+            <a:off x="0" y="932688"/>
+            <a:ext cx="12191695" cy="50292"/>
           </a:xfrm>
           <a:prstGeom prst="rect">
             <a:avLst/>
@@ -3937,23 +3778,62 @@
       </p:sp>
       <p:sp>
         <p:nvSpPr>
-          <p:cNvPr id="11" name="Text 8"/>
-          <p:cNvSpPr/>
-          <p:nvPr/>
-        </p:nvSpPr>
-        <p:spPr>
-          <a:xfrm>
-            <a:off x="685800" y="3222117"/>
-            <a:ext cx="4526280" cy="431546"/>
-          </a:xfrm>
-          <a:prstGeom prst="rect">
-            <a:avLst/>
-          </a:prstGeom>
-          <a:noFill/>
-          <a:ln/>
-        </p:spPr>
-        <p:txBody>
-          <a:bodyPr wrap="square" lIns="0" tIns="0" rIns="0" bIns="0" rtlCol="0" anchor="t">
+          <p:cNvPr id="4" name="Text 1"/>
+          <p:cNvSpPr/>
+          <p:nvPr/>
+        </p:nvSpPr>
+        <p:spPr>
+          <a:xfrm>
+            <a:off x="502920" y="137160"/>
+            <a:ext cx="8595360" cy="256032"/>
+          </a:xfrm>
+          <a:prstGeom prst="rect">
+            <a:avLst/>
+          </a:prstGeom>
+          <a:noFill/>
+          <a:ln/>
+        </p:spPr>
+        <p:txBody>
+          <a:bodyPr wrap="square" lIns="0" tIns="0" rIns="0" bIns="0" rtlCol="0" anchor="ctr"/>
+          <a:lstStyle/>
+          <a:p>
+            <a:pPr indent="0" marL="0">
+              <a:buNone/>
+            </a:pPr>
+            <a:r>
+              <a:rPr lang="en-US" sz="950" b="1" spc="240" kern="0" dirty="0">
+                <a:solidFill>
+                  <a:srgbClr val="FFD66B"/>
+                </a:solidFill>
+                <a:latin typeface="Segoe UI" pitchFamily="34" charset="0"/>
+                <a:ea typeface="Segoe UI" pitchFamily="34" charset="-122"/>
+                <a:cs typeface="Segoe UI" pitchFamily="34" charset="-120"/>
+              </a:rPr>
+              <a:t>HEARTS AND MINDS  ·  LAYLA’S JOURNEY  ·  STAGE 1 OF 5</a:t>
+            </a:r>
+            <a:endParaRPr lang="en-US" sz="950" dirty="0"/>
+          </a:p>
+        </p:txBody>
+      </p:sp>
+      <p:sp>
+        <p:nvSpPr>
+          <p:cNvPr id="5" name="Text 2"/>
+          <p:cNvSpPr/>
+          <p:nvPr/>
+        </p:nvSpPr>
+        <p:spPr>
+          <a:xfrm>
+            <a:off x="502920" y="402336"/>
+            <a:ext cx="9509760" cy="457200"/>
+          </a:xfrm>
+          <a:prstGeom prst="rect">
+            <a:avLst/>
+          </a:prstGeom>
+          <a:noFill/>
+          <a:ln/>
+        </p:spPr>
+        <p:txBody>
+          <a:bodyPr wrap="square" lIns="0" tIns="0" rIns="0" bIns="0" rtlCol="0" anchor="ctr">
             <a:normAutofit/>
           </a:bodyPr>
           <a:lstStyle/>
@@ -3962,62 +3842,50 @@
               <a:buNone/>
             </a:pPr>
             <a:r>
-              <a:rPr lang="en-US" sz="950" i="1" dirty="0">
-                <a:solidFill>
-                  <a:srgbClr val="231F20"/>
-                </a:solidFill>
-                <a:latin typeface="Arial" pitchFamily="34" charset="0"/>
-                <a:ea typeface="Arial" pitchFamily="34" charset="-122"/>
-                <a:cs typeface="Arial" pitchFamily="34" charset="-120"/>
-              </a:rPr>
-              <a:t>“I take the tablets every day. It is the blood test I keep missing, and that is the bit that tells them whether the tablets are doing anything.”</a:t>
-            </a:r>
-            <a:endParaRPr lang="en-US" sz="950" dirty="0"/>
-          </a:p>
-        </p:txBody>
-      </p:sp>
-      <p:sp>
-        <p:nvSpPr>
-          <p:cNvPr id="12" name="Text 9"/>
-          <p:cNvSpPr/>
-          <p:nvPr/>
-        </p:nvSpPr>
-        <p:spPr>
-          <a:xfrm>
-            <a:off x="685800" y="3653663"/>
-            <a:ext cx="4526280" cy="256032"/>
-          </a:xfrm>
-          <a:prstGeom prst="rect">
-            <a:avLst/>
-          </a:prstGeom>
-          <a:noFill/>
-          <a:ln/>
-        </p:spPr>
-        <p:txBody>
-          <a:bodyPr wrap="square" lIns="0" tIns="0" rIns="0" bIns="0" rtlCol="0" anchor="ctr"/>
-          <a:lstStyle/>
-          <a:p>
-            <a:pPr indent="0" marL="0">
-              <a:buNone/>
-            </a:pPr>
-            <a:r>
-              <a:rPr lang="en-US" sz="950" b="1" dirty="0">
-                <a:solidFill>
-                  <a:srgbClr val="8A6D1F"/>
-                </a:solidFill>
-                <a:latin typeface="Arial" pitchFamily="34" charset="0"/>
-                <a:ea typeface="Arial" pitchFamily="34" charset="-122"/>
-                <a:cs typeface="Arial" pitchFamily="34" charset="-120"/>
-              </a:rPr>
-              <a:t>Layla</a:t>
-            </a:r>
-            <a:endParaRPr lang="en-US" sz="950" dirty="0"/>
-          </a:p>
-        </p:txBody>
+              <a:rPr lang="en-US" sz="2050" b="1" dirty="0">
+                <a:solidFill>
+                  <a:srgbClr val="FFFFFF"/>
+                </a:solidFill>
+                <a:latin typeface="Segoe UI" pitchFamily="34" charset="0"/>
+                <a:ea typeface="Segoe UI" pitchFamily="34" charset="-122"/>
+                <a:cs typeface="Segoe UI" pitchFamily="34" charset="-120"/>
+              </a:rPr>
+              <a:t>Stratification, a treated condition and a cycle nobody can see slipping</a:t>
+            </a:r>
+            <a:endParaRPr lang="en-US" sz="2050" dirty="0"/>
+          </a:p>
+        </p:txBody>
+      </p:sp>
+      <p:sp>
+        <p:nvSpPr>
+          <p:cNvPr id="6" name="Shape 3"/>
+          <p:cNvSpPr/>
+          <p:nvPr/>
+        </p:nvSpPr>
+        <p:spPr>
+          <a:xfrm>
+            <a:off x="10942806" y="173736"/>
+            <a:ext cx="791689" cy="605699"/>
+          </a:xfrm>
+          <a:prstGeom prst="roundRect">
+            <a:avLst>
+              <a:gd name="adj" fmla="val 12077"/>
+            </a:avLst>
+          </a:prstGeom>
+          <a:solidFill>
+            <a:srgbClr val="FFFFFF"/>
+          </a:solidFill>
+          <a:ln w="12700">
+            <a:solidFill>
+              <a:srgbClr val="FFFFFF"/>
+            </a:solidFill>
+            <a:prstDash val="solid"/>
+          </a:ln>
+        </p:spPr>
       </p:sp>
       <p:pic>
         <p:nvPicPr>
-          <p:cNvPr id="13" name="Image 1" descr="/sessions/quirky-zen-galileo/mnt/outputs/hmdecks5/img/layla-stage1.jpg">    </p:cNvPr>
+          <p:cNvPr id="7" name="Image 1" descr="/sessions/quirky-zen-galileo/mnt/NHS/07 Sites &amp; Repos/dtx-ecosystem/hearts-and-minds/_generators/assets/nhs-logo.png">    </p:cNvPr>
           <p:cNvPicPr>
             <a:picLocks noChangeAspect="1"/>
           </p:cNvPicPr>
@@ -4031,8 +3899,8 @@
         </p:blipFill>
         <p:spPr>
           <a:xfrm>
-            <a:off x="457200" y="4129151"/>
-            <a:ext cx="3873442" cy="2161921"/>
+            <a:off x="11068993" y="266273"/>
+            <a:ext cx="539315" cy="420624"/>
           </a:xfrm>
           <a:prstGeom prst="rect">
             <a:avLst/>
@@ -4041,13 +3909,246 @@
       </p:pic>
       <p:sp>
         <p:nvSpPr>
-          <p:cNvPr id="14" name="Shape 10"/>
-          <p:cNvSpPr/>
-          <p:nvPr/>
-        </p:nvSpPr>
-        <p:spPr>
-          <a:xfrm>
-            <a:off x="5669280" y="1097280"/>
+          <p:cNvPr id="8" name="Text 4"/>
+          <p:cNvSpPr/>
+          <p:nvPr/>
+        </p:nvSpPr>
+        <p:spPr>
+          <a:xfrm>
+            <a:off x="429768" y="1129284"/>
+            <a:ext cx="1463040" cy="841248"/>
+          </a:xfrm>
+          <a:prstGeom prst="rect">
+            <a:avLst/>
+          </a:prstGeom>
+          <a:noFill/>
+          <a:ln/>
+        </p:spPr>
+        <p:txBody>
+          <a:bodyPr wrap="square" lIns="0" tIns="0" rIns="0" bIns="0" rtlCol="0" anchor="ctr"/>
+          <a:lstStyle/>
+          <a:p>
+            <a:pPr indent="0" marL="0">
+              <a:buNone/>
+            </a:pPr>
+            <a:r>
+              <a:rPr lang="en-US" sz="5000" b="1" spc="-100" kern="0" dirty="0">
+                <a:solidFill>
+                  <a:srgbClr val="FFB91D"/>
+                </a:solidFill>
+                <a:latin typeface="Segoe UI" pitchFamily="34" charset="0"/>
+                <a:ea typeface="Segoe UI" pitchFamily="34" charset="-122"/>
+                <a:cs typeface="Segoe UI" pitchFamily="34" charset="-120"/>
+              </a:rPr>
+              <a:t>01</a:t>
+            </a:r>
+            <a:endParaRPr lang="en-US" sz="5000" dirty="0"/>
+          </a:p>
+        </p:txBody>
+      </p:sp>
+      <p:sp>
+        <p:nvSpPr>
+          <p:cNvPr id="9" name="Text 5"/>
+          <p:cNvSpPr/>
+          <p:nvPr/>
+        </p:nvSpPr>
+        <p:spPr>
+          <a:xfrm>
+            <a:off x="457200" y="2007108"/>
+            <a:ext cx="4892040" cy="1154430"/>
+          </a:xfrm>
+          <a:prstGeom prst="rect">
+            <a:avLst/>
+          </a:prstGeom>
+          <a:noFill/>
+          <a:ln/>
+        </p:spPr>
+        <p:txBody>
+          <a:bodyPr wrap="square" lIns="0" tIns="0" rIns="0" bIns="0" rtlCol="0" anchor="t">
+            <a:normAutofit/>
+          </a:bodyPr>
+          <a:lstStyle/>
+          <a:p>
+            <a:pPr indent="0" marL="0">
+              <a:buNone/>
+            </a:pPr>
+            <a:r>
+              <a:rPr lang="en-US" sz="1350" b="1" dirty="0">
+                <a:solidFill>
+                  <a:srgbClr val="003087"/>
+                </a:solidFill>
+                <a:latin typeface="Segoe UI" pitchFamily="34" charset="0"/>
+                <a:ea typeface="Segoe UI" pitchFamily="34" charset="-122"/>
+                <a:cs typeface="Segoe UI" pitchFamily="34" charset="-120"/>
+              </a:rPr>
+              <a:t>Around 8% of adult women in the UK live with iron deficiency anaemia. For most, treatment is a tablet and a blood test every six months. The test is the only way anyone knows whether the tablet is working, and it is the part that falls away when a life runs on shifts.</a:t>
+            </a:r>
+            <a:endParaRPr lang="en-US" sz="1350" dirty="0"/>
+          </a:p>
+        </p:txBody>
+      </p:sp>
+      <p:sp>
+        <p:nvSpPr>
+          <p:cNvPr id="10" name="Shape 6"/>
+          <p:cNvSpPr/>
+          <p:nvPr/>
+        </p:nvSpPr>
+        <p:spPr>
+          <a:xfrm>
+            <a:off x="457200" y="3289554"/>
+            <a:ext cx="4892040" cy="1051560"/>
+          </a:xfrm>
+          <a:prstGeom prst="rect">
+            <a:avLst/>
+          </a:prstGeom>
+          <a:solidFill>
+            <a:srgbClr val="F8FAFC"/>
+          </a:solidFill>
+          <a:ln w="12700">
+            <a:solidFill>
+              <a:srgbClr val="F8FAFC"/>
+            </a:solidFill>
+            <a:prstDash val="solid"/>
+          </a:ln>
+        </p:spPr>
+      </p:sp>
+      <p:sp>
+        <p:nvSpPr>
+          <p:cNvPr id="11" name="Shape 7"/>
+          <p:cNvSpPr/>
+          <p:nvPr/>
+        </p:nvSpPr>
+        <p:spPr>
+          <a:xfrm>
+            <a:off x="457200" y="3289554"/>
+            <a:ext cx="82296" cy="1051560"/>
+          </a:xfrm>
+          <a:prstGeom prst="rect">
+            <a:avLst/>
+          </a:prstGeom>
+          <a:solidFill>
+            <a:srgbClr val="FFB91D"/>
+          </a:solidFill>
+          <a:ln w="12700">
+            <a:solidFill>
+              <a:srgbClr val="FFB91D"/>
+            </a:solidFill>
+            <a:prstDash val="solid"/>
+          </a:ln>
+        </p:spPr>
+      </p:sp>
+      <p:sp>
+        <p:nvSpPr>
+          <p:cNvPr id="12" name="Text 8"/>
+          <p:cNvSpPr/>
+          <p:nvPr/>
+        </p:nvSpPr>
+        <p:spPr>
+          <a:xfrm>
+            <a:off x="694944" y="3353562"/>
+            <a:ext cx="4507992" cy="667512"/>
+          </a:xfrm>
+          <a:prstGeom prst="rect">
+            <a:avLst/>
+          </a:prstGeom>
+          <a:noFill/>
+          <a:ln/>
+        </p:spPr>
+        <p:txBody>
+          <a:bodyPr wrap="square" lIns="0" tIns="0" rIns="0" bIns="0" rtlCol="0" anchor="t">
+            <a:normAutofit/>
+          </a:bodyPr>
+          <a:lstStyle/>
+          <a:p>
+            <a:pPr indent="0" marL="0">
+              <a:buNone/>
+            </a:pPr>
+            <a:r>
+              <a:rPr lang="en-US" sz="1150" i="1" dirty="0">
+                <a:solidFill>
+                  <a:srgbClr val="212B32"/>
+                </a:solidFill>
+                <a:latin typeface="Segoe UI" pitchFamily="34" charset="0"/>
+                <a:ea typeface="Segoe UI" pitchFamily="34" charset="-122"/>
+                <a:cs typeface="Segoe UI" pitchFamily="34" charset="-120"/>
+              </a:rPr>
+              <a:t>“I take the tablets every day. It is the blood test I keep missing, and that is the bit that tells them whether the tablets are doing anything.”</a:t>
+            </a:r>
+            <a:endParaRPr lang="en-US" sz="1150" dirty="0"/>
+          </a:p>
+        </p:txBody>
+      </p:sp>
+      <p:sp>
+        <p:nvSpPr>
+          <p:cNvPr id="13" name="Text 9"/>
+          <p:cNvSpPr/>
+          <p:nvPr/>
+        </p:nvSpPr>
+        <p:spPr>
+          <a:xfrm>
+            <a:off x="694944" y="4021074"/>
+            <a:ext cx="4507992" cy="256032"/>
+          </a:xfrm>
+          <a:prstGeom prst="rect">
+            <a:avLst/>
+          </a:prstGeom>
+          <a:noFill/>
+          <a:ln/>
+        </p:spPr>
+        <p:txBody>
+          <a:bodyPr wrap="square" lIns="0" tIns="0" rIns="0" bIns="0" rtlCol="0" anchor="ctr"/>
+          <a:lstStyle/>
+          <a:p>
+            <a:pPr indent="0" marL="0">
+              <a:buNone/>
+            </a:pPr>
+            <a:r>
+              <a:rPr lang="en-US" sz="950" b="1" dirty="0">
+                <a:solidFill>
+                  <a:srgbClr val="8A6D1F"/>
+                </a:solidFill>
+                <a:latin typeface="Segoe UI" pitchFamily="34" charset="0"/>
+                <a:ea typeface="Segoe UI" pitchFamily="34" charset="-122"/>
+                <a:cs typeface="Segoe UI" pitchFamily="34" charset="-120"/>
+              </a:rPr>
+              <a:t>Layla</a:t>
+            </a:r>
+            <a:endParaRPr lang="en-US" sz="950" dirty="0"/>
+          </a:p>
+        </p:txBody>
+      </p:sp>
+      <p:pic>
+        <p:nvPicPr>
+          <p:cNvPr id="14" name="Image 2" descr="/sessions/quirky-zen-galileo/mnt/outputs/jd/img/layla-stage1.jpg">    </p:cNvPr>
+          <p:cNvPicPr>
+            <a:picLocks noChangeAspect="1"/>
+          </p:cNvPicPr>
+          <p:nvPr/>
+        </p:nvPicPr>
+        <p:blipFill>
+          <a:blip r:embed="rId3"/>
+          <a:srcRect l="0" r="0" t="0" b="0"/>
+          <a:stretch/>
+        </p:blipFill>
+        <p:spPr>
+          <a:xfrm>
+            <a:off x="457200" y="4523994"/>
+            <a:ext cx="4892040" cy="1767078"/>
+          </a:xfrm>
+          <a:prstGeom prst="rect">
+            <a:avLst/>
+          </a:prstGeom>
+        </p:spPr>
+      </p:pic>
+      <p:sp>
+        <p:nvSpPr>
+          <p:cNvPr id="15" name="Shape 10"/>
+          <p:cNvSpPr/>
+          <p:nvPr/>
+        </p:nvSpPr>
+        <p:spPr>
+          <a:xfrm>
+            <a:off x="5669280" y="1184148"/>
             <a:ext cx="6065215" cy="274320"/>
           </a:xfrm>
           <a:prstGeom prst="rect">
@@ -4066,14 +4167,14 @@
       </p:sp>
       <p:sp>
         <p:nvSpPr>
-          <p:cNvPr id="15" name="Text 11"/>
-          <p:cNvSpPr/>
-          <p:nvPr/>
-        </p:nvSpPr>
-        <p:spPr>
-          <a:xfrm>
-            <a:off x="5779008" y="1097280"/>
-            <a:ext cx="5845759" cy="274320"/>
+          <p:cNvPr id="16" name="Text 11"/>
+          <p:cNvSpPr/>
+          <p:nvPr/>
+        </p:nvSpPr>
+        <p:spPr>
+          <a:xfrm>
+            <a:off x="5788152" y="1184148"/>
+            <a:ext cx="5827471" cy="274320"/>
           </a:xfrm>
           <a:prstGeom prst="rect">
             <a:avLst/>
@@ -4093,9 +4194,9 @@
                 <a:solidFill>
                   <a:srgbClr val="FFFFFF"/>
                 </a:solidFill>
-                <a:latin typeface="Arial" pitchFamily="34" charset="0"/>
-                <a:ea typeface="Arial" pitchFamily="34" charset="-122"/>
-                <a:cs typeface="Arial" pitchFamily="34" charset="-120"/>
+                <a:latin typeface="Segoe UI" pitchFamily="34" charset="0"/>
+                <a:ea typeface="Segoe UI" pitchFamily="34" charset="-122"/>
+                <a:cs typeface="Segoe UI" pitchFamily="34" charset="-120"/>
               </a:rPr>
               <a:t>WHAT THE MODEL IS DOING UNDERNEATH</a:t>
             </a:r>
@@ -4105,14 +4206,14 @@
       </p:sp>
       <p:sp>
         <p:nvSpPr>
-          <p:cNvPr id="16" name="Shape 12"/>
-          <p:cNvSpPr/>
-          <p:nvPr/>
-        </p:nvSpPr>
-        <p:spPr>
-          <a:xfrm>
-            <a:off x="5669280" y="1371600"/>
-            <a:ext cx="6065215" cy="1053338"/>
+          <p:cNvPr id="17" name="Shape 12"/>
+          <p:cNvSpPr/>
+          <p:nvPr/>
+        </p:nvSpPr>
+        <p:spPr>
+          <a:xfrm>
+            <a:off x="5669280" y="1458468"/>
+            <a:ext cx="6065215" cy="1067308"/>
           </a:xfrm>
           <a:prstGeom prst="rect">
             <a:avLst/>
@@ -4130,14 +4231,14 @@
       </p:sp>
       <p:sp>
         <p:nvSpPr>
-          <p:cNvPr id="17" name="Text 13"/>
-          <p:cNvSpPr/>
-          <p:nvPr/>
-        </p:nvSpPr>
-        <p:spPr>
-          <a:xfrm>
-            <a:off x="5779008" y="1408176"/>
-            <a:ext cx="5845759" cy="998474"/>
+          <p:cNvPr id="18" name="Text 13"/>
+          <p:cNvSpPr/>
+          <p:nvPr/>
+        </p:nvSpPr>
+        <p:spPr>
+          <a:xfrm>
+            <a:off x="5788152" y="1495044"/>
+            <a:ext cx="5827471" cy="1012444"/>
           </a:xfrm>
           <a:prstGeom prst="rect">
             <a:avLst/>
@@ -4155,11 +4256,11 @@
             <a:r>
               <a:rPr lang="en-US" sz="1100" dirty="0">
                 <a:solidFill>
-                  <a:srgbClr val="231F20"/>
-                </a:solidFill>
-                <a:latin typeface="Arial" pitchFamily="34" charset="0"/>
-                <a:ea typeface="Arial" pitchFamily="34" charset="-122"/>
-                <a:cs typeface="Arial" pitchFamily="34" charset="-120"/>
+                  <a:srgbClr val="212B32"/>
+                </a:solidFill>
+                <a:latin typeface="Segoe UI" pitchFamily="34" charset="0"/>
+                <a:ea typeface="Segoe UI" pitchFamily="34" charset="-122"/>
+                <a:cs typeface="Segoe UI" pitchFamily="34" charset="-120"/>
               </a:rPr>
               <a:t>NICE clinical knowledge summaries place IDA prevalence at around 8% in adult UK women. Treatment response is monitored by full blood count and ferritin, typically at six-monthly intervals for a patient on long-term iron. The cohort is already known to primary care; the risk is the interval quietly stretching, not the diagnosis being missed.</a:t>
             </a:r>
@@ -4169,13 +4270,13 @@
       </p:sp>
       <p:sp>
         <p:nvSpPr>
-          <p:cNvPr id="18" name="Shape 14"/>
-          <p:cNvSpPr/>
-          <p:nvPr/>
-        </p:nvSpPr>
-        <p:spPr>
-          <a:xfrm>
-            <a:off x="5669280" y="2552954"/>
+          <p:cNvPr id="19" name="Shape 14"/>
+          <p:cNvSpPr/>
+          <p:nvPr/>
+        </p:nvSpPr>
+        <p:spPr>
+          <a:xfrm>
+            <a:off x="5669280" y="2653792"/>
             <a:ext cx="6065215" cy="274320"/>
           </a:xfrm>
           <a:prstGeom prst="rect">
@@ -4194,14 +4295,14 @@
       </p:sp>
       <p:sp>
         <p:nvSpPr>
-          <p:cNvPr id="19" name="Text 15"/>
-          <p:cNvSpPr/>
-          <p:nvPr/>
-        </p:nvSpPr>
-        <p:spPr>
-          <a:xfrm>
-            <a:off x="5779008" y="2552954"/>
-            <a:ext cx="5845759" cy="274320"/>
+          <p:cNvPr id="20" name="Text 15"/>
+          <p:cNvSpPr/>
+          <p:nvPr/>
+        </p:nvSpPr>
+        <p:spPr>
+          <a:xfrm>
+            <a:off x="5788152" y="2653792"/>
+            <a:ext cx="5827471" cy="274320"/>
           </a:xfrm>
           <a:prstGeom prst="rect">
             <a:avLst/>
@@ -4221,9 +4322,9 @@
                 <a:solidFill>
                   <a:srgbClr val="FFFFFF"/>
                 </a:solidFill>
-                <a:latin typeface="Arial" pitchFamily="34" charset="0"/>
-                <a:ea typeface="Arial" pitchFamily="34" charset="-122"/>
-                <a:cs typeface="Arial" pitchFamily="34" charset="-120"/>
+                <a:latin typeface="Segoe UI" pitchFamily="34" charset="0"/>
+                <a:ea typeface="Segoe UI" pitchFamily="34" charset="-122"/>
+                <a:cs typeface="Segoe UI" pitchFamily="34" charset="-120"/>
               </a:rPr>
               <a:t>THE OLD WAY</a:t>
             </a:r>
@@ -4233,24 +4334,24 @@
       </p:sp>
       <p:sp>
         <p:nvSpPr>
-          <p:cNvPr id="20" name="Shape 16"/>
-          <p:cNvSpPr/>
-          <p:nvPr/>
-        </p:nvSpPr>
-        <p:spPr>
-          <a:xfrm>
-            <a:off x="5669280" y="2827274"/>
-            <a:ext cx="6065215" cy="712470"/>
-          </a:xfrm>
-          <a:prstGeom prst="rect">
-            <a:avLst/>
-          </a:prstGeom>
-          <a:solidFill>
-            <a:srgbClr val="F0F4F5"/>
+          <p:cNvPr id="21" name="Shape 16"/>
+          <p:cNvSpPr/>
+          <p:nvPr/>
+        </p:nvSpPr>
+        <p:spPr>
+          <a:xfrm>
+            <a:off x="5669280" y="2928112"/>
+            <a:ext cx="6065215" cy="720852"/>
+          </a:xfrm>
+          <a:prstGeom prst="rect">
+            <a:avLst/>
+          </a:prstGeom>
+          <a:solidFill>
+            <a:srgbClr val="F8FAFC"/>
           </a:solidFill>
           <a:ln w="12700">
             <a:solidFill>
-              <a:srgbClr val="F0F4F5"/>
+              <a:srgbClr val="F8FAFC"/>
             </a:solidFill>
             <a:prstDash val="solid"/>
           </a:ln>
@@ -4258,14 +4359,14 @@
       </p:sp>
       <p:sp>
         <p:nvSpPr>
-          <p:cNvPr id="21" name="Text 17"/>
-          <p:cNvSpPr/>
-          <p:nvPr/>
-        </p:nvSpPr>
-        <p:spPr>
-          <a:xfrm>
-            <a:off x="5779008" y="2863850"/>
-            <a:ext cx="5845759" cy="657606"/>
+          <p:cNvPr id="22" name="Text 17"/>
+          <p:cNvSpPr/>
+          <p:nvPr/>
+        </p:nvSpPr>
+        <p:spPr>
+          <a:xfrm>
+            <a:off x="5788152" y="2964688"/>
+            <a:ext cx="5827471" cy="665988"/>
           </a:xfrm>
           <a:prstGeom prst="rect">
             <a:avLst/>
@@ -4283,11 +4384,11 @@
             <a:r>
               <a:rPr lang="en-US" sz="1100" dirty="0">
                 <a:solidFill>
-                  <a:srgbClr val="231F20"/>
-                </a:solidFill>
-                <a:latin typeface="Arial" pitchFamily="34" charset="0"/>
-                <a:ea typeface="Arial" pitchFamily="34" charset="-122"/>
-                <a:cs typeface="Arial" pitchFamily="34" charset="-120"/>
+                  <a:srgbClr val="212B32"/>
+                </a:solidFill>
+                <a:latin typeface="Segoe UI" pitchFamily="34" charset="0"/>
+                <a:ea typeface="Segoe UI" pitchFamily="34" charset="-122"/>
+                <a:cs typeface="Segoe UI" pitchFamily="34" charset="-120"/>
               </a:rPr>
               <a:t>Treat a treated cohort as if attendance were the patient's job. When the six-month check slips, send a letter. When the letter fails, close the recall and wait for her to come back symptomatic.</a:t>
             </a:r>
@@ -4297,13 +4398,13 @@
       </p:sp>
       <p:sp>
         <p:nvSpPr>
-          <p:cNvPr id="22" name="Shape 18"/>
-          <p:cNvSpPr/>
-          <p:nvPr/>
-        </p:nvSpPr>
-        <p:spPr>
-          <a:xfrm>
-            <a:off x="5669280" y="3667760"/>
+          <p:cNvPr id="23" name="Shape 18"/>
+          <p:cNvSpPr/>
+          <p:nvPr/>
+        </p:nvSpPr>
+        <p:spPr>
+          <a:xfrm>
+            <a:off x="5669280" y="3776980"/>
             <a:ext cx="6065215" cy="274320"/>
           </a:xfrm>
           <a:prstGeom prst="rect">
@@ -4322,14 +4423,14 @@
       </p:sp>
       <p:sp>
         <p:nvSpPr>
-          <p:cNvPr id="23" name="Text 19"/>
-          <p:cNvSpPr/>
-          <p:nvPr/>
-        </p:nvSpPr>
-        <p:spPr>
-          <a:xfrm>
-            <a:off x="5779008" y="3667760"/>
-            <a:ext cx="5845759" cy="274320"/>
+          <p:cNvPr id="24" name="Text 19"/>
+          <p:cNvSpPr/>
+          <p:nvPr/>
+        </p:nvSpPr>
+        <p:spPr>
+          <a:xfrm>
+            <a:off x="5788152" y="3776980"/>
+            <a:ext cx="5827471" cy="274320"/>
           </a:xfrm>
           <a:prstGeom prst="rect">
             <a:avLst/>
@@ -4349,9 +4450,9 @@
                 <a:solidFill>
                   <a:srgbClr val="FFFFFF"/>
                 </a:solidFill>
-                <a:latin typeface="Arial" pitchFamily="34" charset="0"/>
-                <a:ea typeface="Arial" pitchFamily="34" charset="-122"/>
-                <a:cs typeface="Arial" pitchFamily="34" charset="-120"/>
+                <a:latin typeface="Segoe UI" pitchFamily="34" charset="0"/>
+                <a:ea typeface="Segoe UI" pitchFamily="34" charset="-122"/>
+                <a:cs typeface="Segoe UI" pitchFamily="34" charset="-120"/>
               </a:rPr>
               <a:t>WHAT THE CARE TEAM SEES</a:t>
             </a:r>
@@ -4361,14 +4462,14 @@
       </p:sp>
       <p:sp>
         <p:nvSpPr>
-          <p:cNvPr id="24" name="Shape 20"/>
-          <p:cNvSpPr/>
-          <p:nvPr/>
-        </p:nvSpPr>
-        <p:spPr>
-          <a:xfrm>
-            <a:off x="5669280" y="3942080"/>
-            <a:ext cx="6065215" cy="542036"/>
+          <p:cNvPr id="25" name="Shape 20"/>
+          <p:cNvSpPr/>
+          <p:nvPr/>
+        </p:nvSpPr>
+        <p:spPr>
+          <a:xfrm>
+            <a:off x="5669280" y="4051300"/>
+            <a:ext cx="6065215" cy="547624"/>
           </a:xfrm>
           <a:prstGeom prst="rect">
             <a:avLst/>
@@ -4386,14 +4487,14 @@
       </p:sp>
       <p:sp>
         <p:nvSpPr>
-          <p:cNvPr id="25" name="Text 21"/>
-          <p:cNvSpPr/>
-          <p:nvPr/>
-        </p:nvSpPr>
-        <p:spPr>
-          <a:xfrm>
-            <a:off x="5779008" y="3978656"/>
-            <a:ext cx="5845759" cy="487172"/>
+          <p:cNvPr id="26" name="Text 21"/>
+          <p:cNvSpPr/>
+          <p:nvPr/>
+        </p:nvSpPr>
+        <p:spPr>
+          <a:xfrm>
+            <a:off x="5788152" y="4087876"/>
+            <a:ext cx="5827471" cy="492760"/>
           </a:xfrm>
           <a:prstGeom prst="rect">
             <a:avLst/>
@@ -4411,11 +4512,11 @@
             <a:r>
               <a:rPr lang="en-US" sz="1100" dirty="0">
                 <a:solidFill>
-                  <a:srgbClr val="231F20"/>
-                </a:solidFill>
-                <a:latin typeface="Arial" pitchFamily="34" charset="0"/>
-                <a:ea typeface="Arial" pitchFamily="34" charset="-122"/>
-                <a:cs typeface="Arial" pitchFamily="34" charset="-120"/>
+                  <a:srgbClr val="212B32"/>
+                </a:solidFill>
+                <a:latin typeface="Segoe UI" pitchFamily="34" charset="0"/>
+                <a:ea typeface="Segoe UI" pitchFamily="34" charset="-122"/>
+                <a:cs typeface="Segoe UI" pitchFamily="34" charset="-120"/>
               </a:rPr>
               <a:t>Hannah, GP. Practice nurse. Anita on the ICB / GP commissioner side, watching a monitoring cycle nobody can measure.</a:t>
             </a:r>
@@ -4425,14 +4526,14 @@
       </p:sp>
       <p:sp>
         <p:nvSpPr>
-          <p:cNvPr id="27" name="Text 22"/>
-          <p:cNvSpPr/>
-          <p:nvPr/>
-        </p:nvSpPr>
-        <p:spPr>
-          <a:xfrm>
-            <a:off x="457200" y="6473952"/>
-            <a:ext cx="3108960" cy="274320"/>
+          <p:cNvPr id="28" name="Text 22"/>
+          <p:cNvSpPr/>
+          <p:nvPr/>
+        </p:nvSpPr>
+        <p:spPr>
+          <a:xfrm>
+            <a:off x="457200" y="6455664"/>
+            <a:ext cx="4206240" cy="274320"/>
           </a:xfrm>
           <a:prstGeom prst="rect">
             <a:avLst/>
@@ -4452,9 +4553,9 @@
                 <a:solidFill>
                   <a:srgbClr val="7E8B97"/>
                 </a:solidFill>
-                <a:latin typeface="Arial" pitchFamily="34" charset="0"/>
-                <a:ea typeface="Arial" pitchFamily="34" charset="-122"/>
-                <a:cs typeface="Arial" pitchFamily="34" charset="-120"/>
+                <a:latin typeface="Segoe UI" pitchFamily="34" charset="0"/>
+                <a:ea typeface="Segoe UI" pitchFamily="34" charset="-122"/>
+                <a:cs typeface="Segoe UI" pitchFamily="34" charset="-120"/>
               </a:rPr>
               <a:t>Layla  ·  Hearts and Minds</a:t>
             </a:r>
@@ -4464,14 +4565,14 @@
       </p:sp>
       <p:sp>
         <p:nvSpPr>
-          <p:cNvPr id="28" name="Text 23"/>
-          <p:cNvSpPr/>
-          <p:nvPr/>
-        </p:nvSpPr>
-        <p:spPr>
-          <a:xfrm>
-            <a:off x="3657600" y="6473952"/>
-            <a:ext cx="7528255" cy="274320"/>
+          <p:cNvPr id="29" name="Text 23"/>
+          <p:cNvSpPr/>
+          <p:nvPr/>
+        </p:nvSpPr>
+        <p:spPr>
+          <a:xfrm>
+            <a:off x="4754880" y="6455664"/>
+            <a:ext cx="6430975" cy="274320"/>
           </a:xfrm>
           <a:prstGeom prst="rect">
             <a:avLst/>
@@ -4491,9 +4592,9 @@
                 <a:solidFill>
                   <a:srgbClr val="7E8B97"/>
                 </a:solidFill>
-                <a:latin typeface="Arial" pitchFamily="34" charset="0"/>
-                <a:ea typeface="Arial" pitchFamily="34" charset="-122"/>
-                <a:cs typeface="Arial" pitchFamily="34" charset="-120"/>
+                <a:latin typeface="Segoe UI" pitchFamily="34" charset="0"/>
+                <a:ea typeface="Segoe UI" pitchFamily="34" charset="-122"/>
+                <a:cs typeface="Segoe UI" pitchFamily="34" charset="-120"/>
               </a:rPr>
               <a:t>Commercial positions are agreed in principle and remain subject to the live procurement.</a:t>
             </a:r>
@@ -4503,14 +4604,14 @@
       </p:sp>
       <p:sp>
         <p:nvSpPr>
-          <p:cNvPr id="29" name="Text 24"/>
-          <p:cNvSpPr/>
-          <p:nvPr/>
-        </p:nvSpPr>
-        <p:spPr>
-          <a:xfrm>
-            <a:off x="11368735" y="6473952"/>
-            <a:ext cx="365760" cy="274320"/>
+          <p:cNvPr id="30" name="Text 24"/>
+          <p:cNvSpPr/>
+          <p:nvPr/>
+        </p:nvSpPr>
+        <p:spPr>
+          <a:xfrm>
+            <a:off x="11323015" y="6455664"/>
+            <a:ext cx="411480" cy="274320"/>
           </a:xfrm>
           <a:prstGeom prst="rect">
             <a:avLst/>
@@ -4530,9 +4631,9 @@
                 <a:solidFill>
                   <a:srgbClr val="7E8B97"/>
                 </a:solidFill>
-                <a:latin typeface="Arial" pitchFamily="34" charset="0"/>
-                <a:ea typeface="Arial" pitchFamily="34" charset="-122"/>
-                <a:cs typeface="Arial" pitchFamily="34" charset="-120"/>
+                <a:latin typeface="Segoe UI" pitchFamily="34" charset="0"/>
+                <a:ea typeface="Segoe UI" pitchFamily="34" charset="-122"/>
+                <a:cs typeface="Segoe UI" pitchFamily="34" charset="-120"/>
               </a:rPr>
               <a:t>3</a:t>
             </a:r>
@@ -4572,137 +4673,9 @@
           <a:chExt cx="0" cy="0"/>
         </a:xfrm>
       </p:grpSpPr>
-      <p:sp>
-        <p:nvSpPr>
-          <p:cNvPr id="2" name="Shape 0"/>
-          <p:cNvSpPr/>
-          <p:nvPr/>
-        </p:nvSpPr>
-        <p:spPr>
-          <a:xfrm>
-            <a:off x="0" y="0"/>
-            <a:ext cx="12191695" cy="868680"/>
-          </a:xfrm>
-          <a:prstGeom prst="rect">
-            <a:avLst/>
-          </a:prstGeom>
-          <a:solidFill>
-            <a:srgbClr val="003087"/>
-          </a:solidFill>
-          <a:ln w="12700">
-            <a:solidFill>
-              <a:srgbClr val="003087"/>
-            </a:solidFill>
-            <a:prstDash val="solid"/>
-          </a:ln>
-        </p:spPr>
-      </p:sp>
-      <p:sp>
-        <p:nvSpPr>
-          <p:cNvPr id="3" name="Shape 1"/>
-          <p:cNvSpPr/>
-          <p:nvPr/>
-        </p:nvSpPr>
-        <p:spPr>
-          <a:xfrm>
-            <a:off x="0" y="868680"/>
-            <a:ext cx="12191695" cy="54864"/>
-          </a:xfrm>
-          <a:prstGeom prst="rect">
-            <a:avLst/>
-          </a:prstGeom>
-          <a:solidFill>
-            <a:srgbClr val="FFB91D"/>
-          </a:solidFill>
-          <a:ln w="12700">
-            <a:solidFill>
-              <a:srgbClr val="FFB91D"/>
-            </a:solidFill>
-            <a:prstDash val="solid"/>
-          </a:ln>
-        </p:spPr>
-      </p:sp>
-      <p:sp>
-        <p:nvSpPr>
-          <p:cNvPr id="4" name="Text 2"/>
-          <p:cNvSpPr/>
-          <p:nvPr/>
-        </p:nvSpPr>
-        <p:spPr>
-          <a:xfrm>
-            <a:off x="457200" y="128016"/>
-            <a:ext cx="8686800" cy="256032"/>
-          </a:xfrm>
-          <a:prstGeom prst="rect">
-            <a:avLst/>
-          </a:prstGeom>
-          <a:noFill/>
-          <a:ln/>
-        </p:spPr>
-        <p:txBody>
-          <a:bodyPr wrap="square" lIns="0" tIns="0" rIns="0" bIns="0" rtlCol="0" anchor="ctr"/>
-          <a:lstStyle/>
-          <a:p>
-            <a:pPr indent="0" marL="0">
-              <a:buNone/>
-            </a:pPr>
-            <a:r>
-              <a:rPr lang="en-US" sz="950" b="1" spc="200" kern="0" dirty="0">
-                <a:solidFill>
-                  <a:srgbClr val="7EC8E3"/>
-                </a:solidFill>
-                <a:latin typeface="Arial" pitchFamily="34" charset="0"/>
-                <a:ea typeface="Arial" pitchFamily="34" charset="-122"/>
-                <a:cs typeface="Arial" pitchFamily="34" charset="-120"/>
-              </a:rPr>
-              <a:t>HEARTS AND MINDS  ·  LAYLA'S JOURNEY  ·  STAGE 2 OF 5</a:t>
-            </a:r>
-            <a:endParaRPr lang="en-US" sz="950" dirty="0"/>
-          </a:p>
-        </p:txBody>
-      </p:sp>
-      <p:sp>
-        <p:nvSpPr>
-          <p:cNvPr id="5" name="Text 3"/>
-          <p:cNvSpPr/>
-          <p:nvPr/>
-        </p:nvSpPr>
-        <p:spPr>
-          <a:xfrm>
-            <a:off x="457200" y="384048"/>
-            <a:ext cx="9601200" cy="411480"/>
-          </a:xfrm>
-          <a:prstGeom prst="rect">
-            <a:avLst/>
-          </a:prstGeom>
-          <a:noFill/>
-          <a:ln/>
-        </p:spPr>
-        <p:txBody>
-          <a:bodyPr wrap="square" lIns="0" tIns="0" rIns="0" bIns="0" rtlCol="0" anchor="ctr"/>
-          <a:lstStyle/>
-          <a:p>
-            <a:pPr indent="0" marL="0">
-              <a:buNone/>
-            </a:pPr>
-            <a:r>
-              <a:rPr lang="en-US" sz="2000" b="1" dirty="0">
-                <a:solidFill>
-                  <a:srgbClr val="FFFFFF"/>
-                </a:solidFill>
-                <a:latin typeface="Arial" pitchFamily="34" charset="0"/>
-                <a:ea typeface="Arial" pitchFamily="34" charset="-122"/>
-                <a:cs typeface="Arial" pitchFamily="34" charset="-120"/>
-              </a:rPr>
-              <a:t>Identification, the practice system orders and nobody has to ask</a:t>
-            </a:r>
-            <a:endParaRPr lang="en-US" sz="2000" dirty="0"/>
-          </a:p>
-        </p:txBody>
-      </p:sp>
       <p:pic>
         <p:nvPicPr>
-          <p:cNvPr id="6" name="Image 0" descr="/sessions/quirky-zen-galileo/mnt/outputs/deckbuild/nhs_logo.png">    </p:cNvPr>
+          <p:cNvPr id="2" name="Image 0" descr="/sessions/quirky-zen-galileo/mnt/NHS/07 Sites &amp; Repos/dtx-ecosystem/hearts-and-minds/_generators/assets/bg-band.jpg">    </p:cNvPr>
           <p:cNvPicPr>
             <a:picLocks noChangeAspect="1"/>
           </p:cNvPicPr>
@@ -4716,8 +4689,8 @@
         </p:blipFill>
         <p:spPr>
           <a:xfrm>
-            <a:off x="10774375" y="201168"/>
-            <a:ext cx="960120" cy="393192"/>
+            <a:off x="0" y="0"/>
+            <a:ext cx="12191695" cy="932688"/>
           </a:xfrm>
           <a:prstGeom prst="rect">
             <a:avLst/>
@@ -4726,119 +4699,14 @@
       </p:pic>
       <p:sp>
         <p:nvSpPr>
-          <p:cNvPr id="7" name="Text 4"/>
-          <p:cNvSpPr/>
-          <p:nvPr/>
-        </p:nvSpPr>
-        <p:spPr>
-          <a:xfrm>
-            <a:off x="429768" y="1024128"/>
-            <a:ext cx="1463040" cy="868680"/>
-          </a:xfrm>
-          <a:prstGeom prst="rect">
-            <a:avLst/>
-          </a:prstGeom>
-          <a:noFill/>
-          <a:ln/>
-        </p:spPr>
-        <p:txBody>
-          <a:bodyPr wrap="square" lIns="0" tIns="0" rIns="0" bIns="0" rtlCol="0" anchor="ctr"/>
-          <a:lstStyle/>
-          <a:p>
-            <a:pPr indent="0" marL="0">
-              <a:buNone/>
-            </a:pPr>
-            <a:r>
-              <a:rPr lang="en-US" sz="5200" b="1" dirty="0">
-                <a:solidFill>
-                  <a:srgbClr val="FFB91D"/>
-                </a:solidFill>
-                <a:latin typeface="Arial" pitchFamily="34" charset="0"/>
-                <a:ea typeface="Arial" pitchFamily="34" charset="-122"/>
-                <a:cs typeface="Arial" pitchFamily="34" charset="-120"/>
-              </a:rPr>
-              <a:t>02</a:t>
-            </a:r>
-            <a:endParaRPr lang="en-US" sz="5200" dirty="0"/>
-          </a:p>
-        </p:txBody>
-      </p:sp>
-      <p:sp>
-        <p:nvSpPr>
-          <p:cNvPr id="8" name="Text 5"/>
-          <p:cNvSpPr/>
-          <p:nvPr/>
-        </p:nvSpPr>
-        <p:spPr>
-          <a:xfrm>
-            <a:off x="457200" y="1920240"/>
-            <a:ext cx="4892040" cy="1207008"/>
-          </a:xfrm>
-          <a:prstGeom prst="rect">
-            <a:avLst/>
-          </a:prstGeom>
-          <a:noFill/>
-          <a:ln/>
-        </p:spPr>
-        <p:txBody>
-          <a:bodyPr wrap="square" lIns="0" tIns="0" rIns="0" bIns="0" rtlCol="0" anchor="t">
-            <a:normAutofit/>
-          </a:bodyPr>
-          <a:lstStyle/>
-          <a:p>
-            <a:pPr indent="0" marL="0">
-              <a:buNone/>
-            </a:pPr>
-            <a:r>
-              <a:rPr lang="en-US" sz="1200" b="1" dirty="0">
-                <a:solidFill>
-                  <a:srgbClr val="003087"/>
-                </a:solidFill>
-                <a:latin typeface="Arial" pitchFamily="34" charset="0"/>
-                <a:ea typeface="Arial" pitchFamily="34" charset="-122"/>
-                <a:cs typeface="Arial" pitchFamily="34" charset="-120"/>
-              </a:rPr>
-              <a:t>Hannah's recall search flags Layla as due. In the GP-initiated pattern the practice system raises the order for the FBC and ferritin, the platform ships the kit, and the appointment Layla could never keep is never booked. There is no conversation to have, because there is nothing for Layla to agree to yet.</a:t>
-            </a:r>
-            <a:endParaRPr lang="en-US" sz="1200" dirty="0"/>
-          </a:p>
-        </p:txBody>
-      </p:sp>
-      <p:sp>
-        <p:nvSpPr>
-          <p:cNvPr id="9" name="Shape 6"/>
-          <p:cNvSpPr/>
-          <p:nvPr/>
-        </p:nvSpPr>
-        <p:spPr>
-          <a:xfrm>
-            <a:off x="457200" y="3236976"/>
-            <a:ext cx="4892040" cy="859282"/>
-          </a:xfrm>
-          <a:prstGeom prst="rect">
-            <a:avLst/>
-          </a:prstGeom>
-          <a:solidFill>
-            <a:srgbClr val="F0F4F5"/>
-          </a:solidFill>
-          <a:ln w="12700">
-            <a:solidFill>
-              <a:srgbClr val="F0F4F5"/>
-            </a:solidFill>
-            <a:prstDash val="solid"/>
-          </a:ln>
-        </p:spPr>
-      </p:sp>
-      <p:sp>
-        <p:nvSpPr>
-          <p:cNvPr id="10" name="Shape 7"/>
-          <p:cNvSpPr/>
-          <p:nvPr/>
-        </p:nvSpPr>
-        <p:spPr>
-          <a:xfrm>
-            <a:off x="457200" y="3236976"/>
-            <a:ext cx="82296" cy="859282"/>
+          <p:cNvPr id="3" name="Shape 0"/>
+          <p:cNvSpPr/>
+          <p:nvPr/>
+        </p:nvSpPr>
+        <p:spPr>
+          <a:xfrm>
+            <a:off x="0" y="932688"/>
+            <a:ext cx="12191695" cy="50292"/>
           </a:xfrm>
           <a:prstGeom prst="rect">
             <a:avLst/>
@@ -4856,23 +4724,62 @@
       </p:sp>
       <p:sp>
         <p:nvSpPr>
-          <p:cNvPr id="11" name="Text 8"/>
-          <p:cNvSpPr/>
-          <p:nvPr/>
-        </p:nvSpPr>
-        <p:spPr>
-          <a:xfrm>
-            <a:off x="685800" y="3291840"/>
-            <a:ext cx="4526280" cy="493522"/>
-          </a:xfrm>
-          <a:prstGeom prst="rect">
-            <a:avLst/>
-          </a:prstGeom>
-          <a:noFill/>
-          <a:ln/>
-        </p:spPr>
-        <p:txBody>
-          <a:bodyPr wrap="square" lIns="0" tIns="0" rIns="0" bIns="0" rtlCol="0" anchor="t">
+          <p:cNvPr id="4" name="Text 1"/>
+          <p:cNvSpPr/>
+          <p:nvPr/>
+        </p:nvSpPr>
+        <p:spPr>
+          <a:xfrm>
+            <a:off x="502920" y="137160"/>
+            <a:ext cx="8595360" cy="256032"/>
+          </a:xfrm>
+          <a:prstGeom prst="rect">
+            <a:avLst/>
+          </a:prstGeom>
+          <a:noFill/>
+          <a:ln/>
+        </p:spPr>
+        <p:txBody>
+          <a:bodyPr wrap="square" lIns="0" tIns="0" rIns="0" bIns="0" rtlCol="0" anchor="ctr"/>
+          <a:lstStyle/>
+          <a:p>
+            <a:pPr indent="0" marL="0">
+              <a:buNone/>
+            </a:pPr>
+            <a:r>
+              <a:rPr lang="en-US" sz="950" b="1" spc="240" kern="0" dirty="0">
+                <a:solidFill>
+                  <a:srgbClr val="FFD66B"/>
+                </a:solidFill>
+                <a:latin typeface="Segoe UI" pitchFamily="34" charset="0"/>
+                <a:ea typeface="Segoe UI" pitchFamily="34" charset="-122"/>
+                <a:cs typeface="Segoe UI" pitchFamily="34" charset="-120"/>
+              </a:rPr>
+              <a:t>HEARTS AND MINDS  ·  LAYLA’S JOURNEY  ·  STAGE 2 OF 5</a:t>
+            </a:r>
+            <a:endParaRPr lang="en-US" sz="950" dirty="0"/>
+          </a:p>
+        </p:txBody>
+      </p:sp>
+      <p:sp>
+        <p:nvSpPr>
+          <p:cNvPr id="5" name="Text 2"/>
+          <p:cNvSpPr/>
+          <p:nvPr/>
+        </p:nvSpPr>
+        <p:spPr>
+          <a:xfrm>
+            <a:off x="502920" y="402336"/>
+            <a:ext cx="9509760" cy="457200"/>
+          </a:xfrm>
+          <a:prstGeom prst="rect">
+            <a:avLst/>
+          </a:prstGeom>
+          <a:noFill/>
+          <a:ln/>
+        </p:spPr>
+        <p:txBody>
+          <a:bodyPr wrap="square" lIns="0" tIns="0" rIns="0" bIns="0" rtlCol="0" anchor="ctr">
             <a:normAutofit/>
           </a:bodyPr>
           <a:lstStyle/>
@@ -4881,62 +4788,50 @@
               <a:buNone/>
             </a:pPr>
             <a:r>
-              <a:rPr lang="en-US" sz="1150" i="1" dirty="0">
-                <a:solidFill>
-                  <a:srgbClr val="231F20"/>
-                </a:solidFill>
-                <a:latin typeface="Arial" pitchFamily="34" charset="0"/>
-                <a:ea typeface="Arial" pitchFamily="34" charset="-122"/>
-                <a:cs typeface="Arial" pitchFamily="34" charset="-120"/>
-              </a:rPr>
-              <a:t>“Nobody rang me. A text said a kit was coming for my six-month bloods, and it came. That was the whole appointment.”</a:t>
-            </a:r>
-            <a:endParaRPr lang="en-US" sz="1150" dirty="0"/>
-          </a:p>
-        </p:txBody>
-      </p:sp>
-      <p:sp>
-        <p:nvSpPr>
-          <p:cNvPr id="12" name="Text 9"/>
-          <p:cNvSpPr/>
-          <p:nvPr/>
-        </p:nvSpPr>
-        <p:spPr>
-          <a:xfrm>
-            <a:off x="685800" y="3785362"/>
-            <a:ext cx="4526280" cy="256032"/>
-          </a:xfrm>
-          <a:prstGeom prst="rect">
-            <a:avLst/>
-          </a:prstGeom>
-          <a:noFill/>
-          <a:ln/>
-        </p:spPr>
-        <p:txBody>
-          <a:bodyPr wrap="square" lIns="0" tIns="0" rIns="0" bIns="0" rtlCol="0" anchor="ctr"/>
-          <a:lstStyle/>
-          <a:p>
-            <a:pPr indent="0" marL="0">
-              <a:buNone/>
-            </a:pPr>
-            <a:r>
-              <a:rPr lang="en-US" sz="950" b="1" dirty="0">
-                <a:solidFill>
-                  <a:srgbClr val="8A6D1F"/>
-                </a:solidFill>
-                <a:latin typeface="Arial" pitchFamily="34" charset="0"/>
-                <a:ea typeface="Arial" pitchFamily="34" charset="-122"/>
-                <a:cs typeface="Arial" pitchFamily="34" charset="-120"/>
-              </a:rPr>
-              <a:t>Layla</a:t>
-            </a:r>
-            <a:endParaRPr lang="en-US" sz="950" dirty="0"/>
-          </a:p>
-        </p:txBody>
+              <a:rPr lang="en-US" sz="2100" b="1" dirty="0">
+                <a:solidFill>
+                  <a:srgbClr val="FFFFFF"/>
+                </a:solidFill>
+                <a:latin typeface="Segoe UI" pitchFamily="34" charset="0"/>
+                <a:ea typeface="Segoe UI" pitchFamily="34" charset="-122"/>
+                <a:cs typeface="Segoe UI" pitchFamily="34" charset="-120"/>
+              </a:rPr>
+              <a:t>Identification, the practice system orders and nobody has to ask</a:t>
+            </a:r>
+            <a:endParaRPr lang="en-US" sz="2100" dirty="0"/>
+          </a:p>
+        </p:txBody>
+      </p:sp>
+      <p:sp>
+        <p:nvSpPr>
+          <p:cNvPr id="6" name="Shape 3"/>
+          <p:cNvSpPr/>
+          <p:nvPr/>
+        </p:nvSpPr>
+        <p:spPr>
+          <a:xfrm>
+            <a:off x="10942806" y="173736"/>
+            <a:ext cx="791689" cy="605699"/>
+          </a:xfrm>
+          <a:prstGeom prst="roundRect">
+            <a:avLst>
+              <a:gd name="adj" fmla="val 12077"/>
+            </a:avLst>
+          </a:prstGeom>
+          <a:solidFill>
+            <a:srgbClr val="FFFFFF"/>
+          </a:solidFill>
+          <a:ln w="12700">
+            <a:solidFill>
+              <a:srgbClr val="FFFFFF"/>
+            </a:solidFill>
+            <a:prstDash val="solid"/>
+          </a:ln>
+        </p:spPr>
       </p:sp>
       <p:pic>
         <p:nvPicPr>
-          <p:cNvPr id="13" name="Image 1" descr="/sessions/quirky-zen-galileo/mnt/outputs/hmdecks5/img/layla-stage2.jpg">    </p:cNvPr>
+          <p:cNvPr id="7" name="Image 1" descr="/sessions/quirky-zen-galileo/mnt/NHS/07 Sites &amp; Repos/dtx-ecosystem/hearts-and-minds/_generators/assets/nhs-logo.png">    </p:cNvPr>
           <p:cNvPicPr>
             <a:picLocks noChangeAspect="1"/>
           </p:cNvPicPr>
@@ -4950,8 +4845,8 @@
         </p:blipFill>
         <p:spPr>
           <a:xfrm>
-            <a:off x="457200" y="4260850"/>
-            <a:ext cx="3637481" cy="2030222"/>
+            <a:off x="11068993" y="266273"/>
+            <a:ext cx="539315" cy="420624"/>
           </a:xfrm>
           <a:prstGeom prst="rect">
             <a:avLst/>
@@ -4960,13 +4855,246 @@
       </p:pic>
       <p:sp>
         <p:nvSpPr>
-          <p:cNvPr id="14" name="Shape 10"/>
-          <p:cNvSpPr/>
-          <p:nvPr/>
-        </p:nvSpPr>
-        <p:spPr>
-          <a:xfrm>
-            <a:off x="5669280" y="1097280"/>
+          <p:cNvPr id="8" name="Text 4"/>
+          <p:cNvSpPr/>
+          <p:nvPr/>
+        </p:nvSpPr>
+        <p:spPr>
+          <a:xfrm>
+            <a:off x="429768" y="1129284"/>
+            <a:ext cx="1463040" cy="841248"/>
+          </a:xfrm>
+          <a:prstGeom prst="rect">
+            <a:avLst/>
+          </a:prstGeom>
+          <a:noFill/>
+          <a:ln/>
+        </p:spPr>
+        <p:txBody>
+          <a:bodyPr wrap="square" lIns="0" tIns="0" rIns="0" bIns="0" rtlCol="0" anchor="ctr"/>
+          <a:lstStyle/>
+          <a:p>
+            <a:pPr indent="0" marL="0">
+              <a:buNone/>
+            </a:pPr>
+            <a:r>
+              <a:rPr lang="en-US" sz="5000" b="1" spc="-100" kern="0" dirty="0">
+                <a:solidFill>
+                  <a:srgbClr val="FFB91D"/>
+                </a:solidFill>
+                <a:latin typeface="Segoe UI" pitchFamily="34" charset="0"/>
+                <a:ea typeface="Segoe UI" pitchFamily="34" charset="-122"/>
+                <a:cs typeface="Segoe UI" pitchFamily="34" charset="-120"/>
+              </a:rPr>
+              <a:t>02</a:t>
+            </a:r>
+            <a:endParaRPr lang="en-US" sz="5000" dirty="0"/>
+          </a:p>
+        </p:txBody>
+      </p:sp>
+      <p:sp>
+        <p:nvSpPr>
+          <p:cNvPr id="9" name="Text 5"/>
+          <p:cNvSpPr/>
+          <p:nvPr/>
+        </p:nvSpPr>
+        <p:spPr>
+          <a:xfrm>
+            <a:off x="457200" y="2007108"/>
+            <a:ext cx="4892040" cy="996950"/>
+          </a:xfrm>
+          <a:prstGeom prst="rect">
+            <a:avLst/>
+          </a:prstGeom>
+          <a:noFill/>
+          <a:ln/>
+        </p:spPr>
+        <p:txBody>
+          <a:bodyPr wrap="square" lIns="0" tIns="0" rIns="0" bIns="0" rtlCol="0" anchor="t">
+            <a:normAutofit/>
+          </a:bodyPr>
+          <a:lstStyle/>
+          <a:p>
+            <a:pPr indent="0" marL="0">
+              <a:buNone/>
+            </a:pPr>
+            <a:r>
+              <a:rPr lang="en-US" sz="1150" b="1" dirty="0">
+                <a:solidFill>
+                  <a:srgbClr val="003087"/>
+                </a:solidFill>
+                <a:latin typeface="Segoe UI" pitchFamily="34" charset="0"/>
+                <a:ea typeface="Segoe UI" pitchFamily="34" charset="-122"/>
+                <a:cs typeface="Segoe UI" pitchFamily="34" charset="-120"/>
+              </a:rPr>
+              <a:t>Hannah's recall search flags Layla as due. In the GP-initiated pattern the practice system raises the order for the FBC and ferritin, the platform ships the kit, and the appointment Layla could never keep is never booked. There is no conversation to have, because there is nothing for Layla to agree to yet.</a:t>
+            </a:r>
+            <a:endParaRPr lang="en-US" sz="1150" dirty="0"/>
+          </a:p>
+        </p:txBody>
+      </p:sp>
+      <p:sp>
+        <p:nvSpPr>
+          <p:cNvPr id="10" name="Shape 6"/>
+          <p:cNvSpPr/>
+          <p:nvPr/>
+        </p:nvSpPr>
+        <p:spPr>
+          <a:xfrm>
+            <a:off x="457200" y="3132074"/>
+            <a:ext cx="4892040" cy="874268"/>
+          </a:xfrm>
+          <a:prstGeom prst="rect">
+            <a:avLst/>
+          </a:prstGeom>
+          <a:solidFill>
+            <a:srgbClr val="F8FAFC"/>
+          </a:solidFill>
+          <a:ln w="12700">
+            <a:solidFill>
+              <a:srgbClr val="F8FAFC"/>
+            </a:solidFill>
+            <a:prstDash val="solid"/>
+          </a:ln>
+        </p:spPr>
+      </p:sp>
+      <p:sp>
+        <p:nvSpPr>
+          <p:cNvPr id="11" name="Shape 7"/>
+          <p:cNvSpPr/>
+          <p:nvPr/>
+        </p:nvSpPr>
+        <p:spPr>
+          <a:xfrm>
+            <a:off x="457200" y="3132074"/>
+            <a:ext cx="82296" cy="874268"/>
+          </a:xfrm>
+          <a:prstGeom prst="rect">
+            <a:avLst/>
+          </a:prstGeom>
+          <a:solidFill>
+            <a:srgbClr val="FFB91D"/>
+          </a:solidFill>
+          <a:ln w="12700">
+            <a:solidFill>
+              <a:srgbClr val="FFB91D"/>
+            </a:solidFill>
+            <a:prstDash val="solid"/>
+          </a:ln>
+        </p:spPr>
+      </p:sp>
+      <p:sp>
+        <p:nvSpPr>
+          <p:cNvPr id="12" name="Text 8"/>
+          <p:cNvSpPr/>
+          <p:nvPr/>
+        </p:nvSpPr>
+        <p:spPr>
+          <a:xfrm>
+            <a:off x="694944" y="3196082"/>
+            <a:ext cx="4507992" cy="490220"/>
+          </a:xfrm>
+          <a:prstGeom prst="rect">
+            <a:avLst/>
+          </a:prstGeom>
+          <a:noFill/>
+          <a:ln/>
+        </p:spPr>
+        <p:txBody>
+          <a:bodyPr wrap="square" lIns="0" tIns="0" rIns="0" bIns="0" rtlCol="0" anchor="t">
+            <a:normAutofit/>
+          </a:bodyPr>
+          <a:lstStyle/>
+          <a:p>
+            <a:pPr indent="0" marL="0">
+              <a:buNone/>
+            </a:pPr>
+            <a:r>
+              <a:rPr lang="en-US" sz="1150" i="1" dirty="0">
+                <a:solidFill>
+                  <a:srgbClr val="212B32"/>
+                </a:solidFill>
+                <a:latin typeface="Segoe UI" pitchFamily="34" charset="0"/>
+                <a:ea typeface="Segoe UI" pitchFamily="34" charset="-122"/>
+                <a:cs typeface="Segoe UI" pitchFamily="34" charset="-120"/>
+              </a:rPr>
+              <a:t>“Nobody rang me. A text said a kit was coming for my six-month bloods, and it came. That was the whole appointment.”</a:t>
+            </a:r>
+            <a:endParaRPr lang="en-US" sz="1150" dirty="0"/>
+          </a:p>
+        </p:txBody>
+      </p:sp>
+      <p:sp>
+        <p:nvSpPr>
+          <p:cNvPr id="13" name="Text 9"/>
+          <p:cNvSpPr/>
+          <p:nvPr/>
+        </p:nvSpPr>
+        <p:spPr>
+          <a:xfrm>
+            <a:off x="694944" y="3686302"/>
+            <a:ext cx="4507992" cy="256032"/>
+          </a:xfrm>
+          <a:prstGeom prst="rect">
+            <a:avLst/>
+          </a:prstGeom>
+          <a:noFill/>
+          <a:ln/>
+        </p:spPr>
+        <p:txBody>
+          <a:bodyPr wrap="square" lIns="0" tIns="0" rIns="0" bIns="0" rtlCol="0" anchor="ctr"/>
+          <a:lstStyle/>
+          <a:p>
+            <a:pPr indent="0" marL="0">
+              <a:buNone/>
+            </a:pPr>
+            <a:r>
+              <a:rPr lang="en-US" sz="950" b="1" dirty="0">
+                <a:solidFill>
+                  <a:srgbClr val="8A6D1F"/>
+                </a:solidFill>
+                <a:latin typeface="Segoe UI" pitchFamily="34" charset="0"/>
+                <a:ea typeface="Segoe UI" pitchFamily="34" charset="-122"/>
+                <a:cs typeface="Segoe UI" pitchFamily="34" charset="-120"/>
+              </a:rPr>
+              <a:t>Layla</a:t>
+            </a:r>
+            <a:endParaRPr lang="en-US" sz="950" dirty="0"/>
+          </a:p>
+        </p:txBody>
+      </p:sp>
+      <p:pic>
+        <p:nvPicPr>
+          <p:cNvPr id="14" name="Image 2" descr="/sessions/quirky-zen-galileo/mnt/outputs/jd/img/layla-stage2.jpg">    </p:cNvPr>
+          <p:cNvPicPr>
+            <a:picLocks noChangeAspect="1"/>
+          </p:cNvPicPr>
+          <p:nvPr/>
+        </p:nvPicPr>
+        <p:blipFill>
+          <a:blip r:embed="rId3"/>
+          <a:srcRect l="0" r="0" t="0" b="0"/>
+          <a:stretch/>
+        </p:blipFill>
+        <p:spPr>
+          <a:xfrm>
+            <a:off x="457200" y="4189222"/>
+            <a:ext cx="4892040" cy="2101850"/>
+          </a:xfrm>
+          <a:prstGeom prst="rect">
+            <a:avLst/>
+          </a:prstGeom>
+        </p:spPr>
+      </p:pic>
+      <p:sp>
+        <p:nvSpPr>
+          <p:cNvPr id="15" name="Shape 10"/>
+          <p:cNvSpPr/>
+          <p:nvPr/>
+        </p:nvSpPr>
+        <p:spPr>
+          <a:xfrm>
+            <a:off x="5669280" y="1184148"/>
             <a:ext cx="6065215" cy="274320"/>
           </a:xfrm>
           <a:prstGeom prst="rect">
@@ -4985,14 +5113,14 @@
       </p:sp>
       <p:sp>
         <p:nvSpPr>
-          <p:cNvPr id="15" name="Text 11"/>
-          <p:cNvSpPr/>
-          <p:nvPr/>
-        </p:nvSpPr>
-        <p:spPr>
-          <a:xfrm>
-            <a:off x="5779008" y="1097280"/>
-            <a:ext cx="5845759" cy="274320"/>
+          <p:cNvPr id="16" name="Text 11"/>
+          <p:cNvSpPr/>
+          <p:nvPr/>
+        </p:nvSpPr>
+        <p:spPr>
+          <a:xfrm>
+            <a:off x="5788152" y="1184148"/>
+            <a:ext cx="5827471" cy="274320"/>
           </a:xfrm>
           <a:prstGeom prst="rect">
             <a:avLst/>
@@ -5012,9 +5140,9 @@
                 <a:solidFill>
                   <a:srgbClr val="FFFFFF"/>
                 </a:solidFill>
-                <a:latin typeface="Arial" pitchFamily="34" charset="0"/>
-                <a:ea typeface="Arial" pitchFamily="34" charset="-122"/>
-                <a:cs typeface="Arial" pitchFamily="34" charset="-120"/>
+                <a:latin typeface="Segoe UI" pitchFamily="34" charset="0"/>
+                <a:ea typeface="Segoe UI" pitchFamily="34" charset="-122"/>
+                <a:cs typeface="Segoe UI" pitchFamily="34" charset="-120"/>
               </a:rPr>
               <a:t>WHAT THE MODEL IS DOING UNDERNEATH</a:t>
             </a:r>
@@ -5024,14 +5152,14 @@
       </p:sp>
       <p:sp>
         <p:nvSpPr>
-          <p:cNvPr id="16" name="Shape 12"/>
-          <p:cNvSpPr/>
-          <p:nvPr/>
-        </p:nvSpPr>
-        <p:spPr>
-          <a:xfrm>
-            <a:off x="5669280" y="1371600"/>
-            <a:ext cx="6065215" cy="1053338"/>
+          <p:cNvPr id="17" name="Shape 12"/>
+          <p:cNvSpPr/>
+          <p:nvPr/>
+        </p:nvSpPr>
+        <p:spPr>
+          <a:xfrm>
+            <a:off x="5669280" y="1458468"/>
+            <a:ext cx="6065215" cy="1067308"/>
           </a:xfrm>
           <a:prstGeom prst="rect">
             <a:avLst/>
@@ -5049,14 +5177,14 @@
       </p:sp>
       <p:sp>
         <p:nvSpPr>
-          <p:cNvPr id="17" name="Text 13"/>
-          <p:cNvSpPr/>
-          <p:nvPr/>
-        </p:nvSpPr>
-        <p:spPr>
-          <a:xfrm>
-            <a:off x="5779008" y="1408176"/>
-            <a:ext cx="5845759" cy="998474"/>
+          <p:cNvPr id="18" name="Text 13"/>
+          <p:cNvSpPr/>
+          <p:nvPr/>
+        </p:nvSpPr>
+        <p:spPr>
+          <a:xfrm>
+            <a:off x="5788152" y="1495044"/>
+            <a:ext cx="5827471" cy="1012444"/>
           </a:xfrm>
           <a:prstGeom prst="rect">
             <a:avLst/>
@@ -5074,11 +5202,11 @@
             <a:r>
               <a:rPr lang="en-US" sz="1100" dirty="0">
                 <a:solidFill>
-                  <a:srgbClr val="231F20"/>
-                </a:solidFill>
-                <a:latin typeface="Arial" pitchFamily="34" charset="0"/>
-                <a:ea typeface="Arial" pitchFamily="34" charset="-122"/>
-                <a:cs typeface="Arial" pitchFamily="34" charset="-120"/>
+                  <a:srgbClr val="212B32"/>
+                </a:solidFill>
+                <a:latin typeface="Segoe UI" pitchFamily="34" charset="0"/>
+                <a:ea typeface="Segoe UI" pitchFamily="34" charset="-122"/>
+                <a:cs typeface="Segoe UI" pitchFamily="34" charset="-120"/>
               </a:rPr>
               <a:t>Around 15 million general-practice appointments are missed each year, costing the NHS £216 million. The GP-initiated pattern removes the appointment rather than chasing it: the order originates in the practice system as part of the review cycle, the kit is dispatched against it, and the result is written back to the GP record. Layla is the sample provider, not the orderer or the recipient.</a:t>
             </a:r>
@@ -5088,13 +5216,13 @@
       </p:sp>
       <p:sp>
         <p:nvSpPr>
-          <p:cNvPr id="18" name="Shape 14"/>
-          <p:cNvSpPr/>
-          <p:nvPr/>
-        </p:nvSpPr>
-        <p:spPr>
-          <a:xfrm>
-            <a:off x="5669280" y="2552954"/>
+          <p:cNvPr id="19" name="Shape 14"/>
+          <p:cNvSpPr/>
+          <p:nvPr/>
+        </p:nvSpPr>
+        <p:spPr>
+          <a:xfrm>
+            <a:off x="5669280" y="2653792"/>
             <a:ext cx="6065215" cy="274320"/>
           </a:xfrm>
           <a:prstGeom prst="rect">
@@ -5113,14 +5241,14 @@
       </p:sp>
       <p:sp>
         <p:nvSpPr>
-          <p:cNvPr id="19" name="Text 15"/>
-          <p:cNvSpPr/>
-          <p:nvPr/>
-        </p:nvSpPr>
-        <p:spPr>
-          <a:xfrm>
-            <a:off x="5779008" y="2552954"/>
-            <a:ext cx="5845759" cy="274320"/>
+          <p:cNvPr id="20" name="Text 15"/>
+          <p:cNvSpPr/>
+          <p:nvPr/>
+        </p:nvSpPr>
+        <p:spPr>
+          <a:xfrm>
+            <a:off x="5788152" y="2653792"/>
+            <a:ext cx="5827471" cy="274320"/>
           </a:xfrm>
           <a:prstGeom prst="rect">
             <a:avLst/>
@@ -5140,9 +5268,9 @@
                 <a:solidFill>
                   <a:srgbClr val="FFFFFF"/>
                 </a:solidFill>
-                <a:latin typeface="Arial" pitchFamily="34" charset="0"/>
-                <a:ea typeface="Arial" pitchFamily="34" charset="-122"/>
-                <a:cs typeface="Arial" pitchFamily="34" charset="-120"/>
+                <a:latin typeface="Segoe UI" pitchFamily="34" charset="0"/>
+                <a:ea typeface="Segoe UI" pitchFamily="34" charset="-122"/>
+                <a:cs typeface="Segoe UI" pitchFamily="34" charset="-120"/>
               </a:rPr>
               <a:t>THE OLD WAY</a:t>
             </a:r>
@@ -5152,24 +5280,24 @@
       </p:sp>
       <p:sp>
         <p:nvSpPr>
-          <p:cNvPr id="20" name="Shape 16"/>
-          <p:cNvSpPr/>
-          <p:nvPr/>
-        </p:nvSpPr>
-        <p:spPr>
-          <a:xfrm>
-            <a:off x="5669280" y="2827274"/>
-            <a:ext cx="6065215" cy="542036"/>
-          </a:xfrm>
-          <a:prstGeom prst="rect">
-            <a:avLst/>
-          </a:prstGeom>
-          <a:solidFill>
-            <a:srgbClr val="F0F4F5"/>
+          <p:cNvPr id="21" name="Shape 16"/>
+          <p:cNvSpPr/>
+          <p:nvPr/>
+        </p:nvSpPr>
+        <p:spPr>
+          <a:xfrm>
+            <a:off x="5669280" y="2928112"/>
+            <a:ext cx="6065215" cy="547624"/>
+          </a:xfrm>
+          <a:prstGeom prst="rect">
+            <a:avLst/>
+          </a:prstGeom>
+          <a:solidFill>
+            <a:srgbClr val="F8FAFC"/>
           </a:solidFill>
           <a:ln w="12700">
             <a:solidFill>
-              <a:srgbClr val="F0F4F5"/>
+              <a:srgbClr val="F8FAFC"/>
             </a:solidFill>
             <a:prstDash val="solid"/>
           </a:ln>
@@ -5177,14 +5305,14 @@
       </p:sp>
       <p:sp>
         <p:nvSpPr>
-          <p:cNvPr id="21" name="Text 17"/>
-          <p:cNvSpPr/>
-          <p:nvPr/>
-        </p:nvSpPr>
-        <p:spPr>
-          <a:xfrm>
-            <a:off x="5779008" y="2863850"/>
-            <a:ext cx="5845759" cy="487172"/>
+          <p:cNvPr id="22" name="Text 17"/>
+          <p:cNvSpPr/>
+          <p:nvPr/>
+        </p:nvSpPr>
+        <p:spPr>
+          <a:xfrm>
+            <a:off x="5788152" y="2964688"/>
+            <a:ext cx="5827471" cy="492760"/>
           </a:xfrm>
           <a:prstGeom prst="rect">
             <a:avLst/>
@@ -5202,11 +5330,11 @@
             <a:r>
               <a:rPr lang="en-US" sz="1100" dirty="0">
                 <a:solidFill>
-                  <a:srgbClr val="231F20"/>
-                </a:solidFill>
-                <a:latin typeface="Arial" pitchFamily="34" charset="0"/>
-                <a:ea typeface="Arial" pitchFamily="34" charset="-122"/>
-                <a:cs typeface="Arial" pitchFamily="34" charset="-120"/>
+                  <a:srgbClr val="212B32"/>
+                </a:solidFill>
+                <a:latin typeface="Segoe UI" pitchFamily="34" charset="0"/>
+                <a:ea typeface="Segoe UI" pitchFamily="34" charset="-122"/>
+                <a:cs typeface="Segoe UI" pitchFamily="34" charset="-120"/>
               </a:rPr>
               <a:t>Book, miss, re-book, miss, then a DNA code on the record that follows her into every future conversation about engagement.</a:t>
             </a:r>
@@ -5216,13 +5344,13 @@
       </p:sp>
       <p:sp>
         <p:nvSpPr>
-          <p:cNvPr id="22" name="Shape 18"/>
-          <p:cNvSpPr/>
-          <p:nvPr/>
-        </p:nvSpPr>
-        <p:spPr>
-          <a:xfrm>
-            <a:off x="5669280" y="3497326"/>
+          <p:cNvPr id="23" name="Shape 18"/>
+          <p:cNvSpPr/>
+          <p:nvPr/>
+        </p:nvSpPr>
+        <p:spPr>
+          <a:xfrm>
+            <a:off x="5669280" y="3603752"/>
             <a:ext cx="6065215" cy="274320"/>
           </a:xfrm>
           <a:prstGeom prst="rect">
@@ -5241,14 +5369,14 @@
       </p:sp>
       <p:sp>
         <p:nvSpPr>
-          <p:cNvPr id="23" name="Text 19"/>
-          <p:cNvSpPr/>
-          <p:nvPr/>
-        </p:nvSpPr>
-        <p:spPr>
-          <a:xfrm>
-            <a:off x="5779008" y="3497326"/>
-            <a:ext cx="5845759" cy="274320"/>
+          <p:cNvPr id="24" name="Text 19"/>
+          <p:cNvSpPr/>
+          <p:nvPr/>
+        </p:nvSpPr>
+        <p:spPr>
+          <a:xfrm>
+            <a:off x="5788152" y="3603752"/>
+            <a:ext cx="5827471" cy="274320"/>
           </a:xfrm>
           <a:prstGeom prst="rect">
             <a:avLst/>
@@ -5268,9 +5396,9 @@
                 <a:solidFill>
                   <a:srgbClr val="FFFFFF"/>
                 </a:solidFill>
-                <a:latin typeface="Arial" pitchFamily="34" charset="0"/>
-                <a:ea typeface="Arial" pitchFamily="34" charset="-122"/>
-                <a:cs typeface="Arial" pitchFamily="34" charset="-120"/>
+                <a:latin typeface="Segoe UI" pitchFamily="34" charset="0"/>
+                <a:ea typeface="Segoe UI" pitchFamily="34" charset="-122"/>
+                <a:cs typeface="Segoe UI" pitchFamily="34" charset="-120"/>
               </a:rPr>
               <a:t>WHAT THE CARE TEAM SEES</a:t>
             </a:r>
@@ -5280,14 +5408,14 @@
       </p:sp>
       <p:sp>
         <p:nvSpPr>
-          <p:cNvPr id="24" name="Shape 20"/>
-          <p:cNvSpPr/>
-          <p:nvPr/>
-        </p:nvSpPr>
-        <p:spPr>
-          <a:xfrm>
-            <a:off x="5669280" y="3771646"/>
-            <a:ext cx="6065215" cy="542036"/>
+          <p:cNvPr id="25" name="Shape 20"/>
+          <p:cNvSpPr/>
+          <p:nvPr/>
+        </p:nvSpPr>
+        <p:spPr>
+          <a:xfrm>
+            <a:off x="5669280" y="3878072"/>
+            <a:ext cx="6065215" cy="547624"/>
           </a:xfrm>
           <a:prstGeom prst="rect">
             <a:avLst/>
@@ -5305,14 +5433,14 @@
       </p:sp>
       <p:sp>
         <p:nvSpPr>
-          <p:cNvPr id="25" name="Text 21"/>
-          <p:cNvSpPr/>
-          <p:nvPr/>
-        </p:nvSpPr>
-        <p:spPr>
-          <a:xfrm>
-            <a:off x="5779008" y="3808222"/>
-            <a:ext cx="5845759" cy="487172"/>
+          <p:cNvPr id="26" name="Text 21"/>
+          <p:cNvSpPr/>
+          <p:nvPr/>
+        </p:nvSpPr>
+        <p:spPr>
+          <a:xfrm>
+            <a:off x="5788152" y="3914648"/>
+            <a:ext cx="5827471" cy="492760"/>
           </a:xfrm>
           <a:prstGeom prst="rect">
             <a:avLst/>
@@ -5330,11 +5458,11 @@
             <a:r>
               <a:rPr lang="en-US" sz="1100" dirty="0">
                 <a:solidFill>
-                  <a:srgbClr val="231F20"/>
-                </a:solidFill>
-                <a:latin typeface="Arial" pitchFamily="34" charset="0"/>
-                <a:ea typeface="Arial" pitchFamily="34" charset="-122"/>
-                <a:cs typeface="Arial" pitchFamily="34" charset="-120"/>
+                  <a:srgbClr val="212B32"/>
+                </a:solidFill>
+                <a:latin typeface="Segoe UI" pitchFamily="34" charset="0"/>
+                <a:ea typeface="Segoe UI" pitchFamily="34" charset="-122"/>
+                <a:cs typeface="Segoe UI" pitchFamily="34" charset="-120"/>
               </a:rPr>
               <a:t>Hannah. The practice recall administrator. The supplier dispatching against the practice order. Anita, whose access figures stop counting Layla as a failure.</a:t>
             </a:r>
@@ -5344,14 +5472,14 @@
       </p:sp>
       <p:sp>
         <p:nvSpPr>
-          <p:cNvPr id="27" name="Text 22"/>
-          <p:cNvSpPr/>
-          <p:nvPr/>
-        </p:nvSpPr>
-        <p:spPr>
-          <a:xfrm>
-            <a:off x="457200" y="6473952"/>
-            <a:ext cx="3108960" cy="274320"/>
+          <p:cNvPr id="28" name="Text 22"/>
+          <p:cNvSpPr/>
+          <p:nvPr/>
+        </p:nvSpPr>
+        <p:spPr>
+          <a:xfrm>
+            <a:off x="457200" y="6455664"/>
+            <a:ext cx="4206240" cy="274320"/>
           </a:xfrm>
           <a:prstGeom prst="rect">
             <a:avLst/>
@@ -5371,9 +5499,9 @@
                 <a:solidFill>
                   <a:srgbClr val="7E8B97"/>
                 </a:solidFill>
-                <a:latin typeface="Arial" pitchFamily="34" charset="0"/>
-                <a:ea typeface="Arial" pitchFamily="34" charset="-122"/>
-                <a:cs typeface="Arial" pitchFamily="34" charset="-120"/>
+                <a:latin typeface="Segoe UI" pitchFamily="34" charset="0"/>
+                <a:ea typeface="Segoe UI" pitchFamily="34" charset="-122"/>
+                <a:cs typeface="Segoe UI" pitchFamily="34" charset="-120"/>
               </a:rPr>
               <a:t>Layla  ·  Hearts and Minds</a:t>
             </a:r>
@@ -5383,14 +5511,14 @@
       </p:sp>
       <p:sp>
         <p:nvSpPr>
-          <p:cNvPr id="28" name="Text 23"/>
-          <p:cNvSpPr/>
-          <p:nvPr/>
-        </p:nvSpPr>
-        <p:spPr>
-          <a:xfrm>
-            <a:off x="3657600" y="6473952"/>
-            <a:ext cx="7528255" cy="274320"/>
+          <p:cNvPr id="29" name="Text 23"/>
+          <p:cNvSpPr/>
+          <p:nvPr/>
+        </p:nvSpPr>
+        <p:spPr>
+          <a:xfrm>
+            <a:off x="4754880" y="6455664"/>
+            <a:ext cx="6430975" cy="274320"/>
           </a:xfrm>
           <a:prstGeom prst="rect">
             <a:avLst/>
@@ -5410,9 +5538,9 @@
                 <a:solidFill>
                   <a:srgbClr val="7E8B97"/>
                 </a:solidFill>
-                <a:latin typeface="Arial" pitchFamily="34" charset="0"/>
-                <a:ea typeface="Arial" pitchFamily="34" charset="-122"/>
-                <a:cs typeface="Arial" pitchFamily="34" charset="-120"/>
+                <a:latin typeface="Segoe UI" pitchFamily="34" charset="0"/>
+                <a:ea typeface="Segoe UI" pitchFamily="34" charset="-122"/>
+                <a:cs typeface="Segoe UI" pitchFamily="34" charset="-120"/>
               </a:rPr>
               <a:t>Commercial positions are agreed in principle and remain subject to the live procurement.</a:t>
             </a:r>
@@ -5422,14 +5550,14 @@
       </p:sp>
       <p:sp>
         <p:nvSpPr>
-          <p:cNvPr id="29" name="Text 24"/>
-          <p:cNvSpPr/>
-          <p:nvPr/>
-        </p:nvSpPr>
-        <p:spPr>
-          <a:xfrm>
-            <a:off x="11368735" y="6473952"/>
-            <a:ext cx="365760" cy="274320"/>
+          <p:cNvPr id="30" name="Text 24"/>
+          <p:cNvSpPr/>
+          <p:nvPr/>
+        </p:nvSpPr>
+        <p:spPr>
+          <a:xfrm>
+            <a:off x="11323015" y="6455664"/>
+            <a:ext cx="411480" cy="274320"/>
           </a:xfrm>
           <a:prstGeom prst="rect">
             <a:avLst/>
@@ -5449,9 +5577,9 @@
                 <a:solidFill>
                   <a:srgbClr val="7E8B97"/>
                 </a:solidFill>
-                <a:latin typeface="Arial" pitchFamily="34" charset="0"/>
-                <a:ea typeface="Arial" pitchFamily="34" charset="-122"/>
-                <a:cs typeface="Arial" pitchFamily="34" charset="-120"/>
+                <a:latin typeface="Segoe UI" pitchFamily="34" charset="0"/>
+                <a:ea typeface="Segoe UI" pitchFamily="34" charset="-122"/>
+                <a:cs typeface="Segoe UI" pitchFamily="34" charset="-120"/>
               </a:rPr>
               <a:t>4</a:t>
             </a:r>
@@ -5491,137 +5619,9 @@
           <a:chExt cx="0" cy="0"/>
         </a:xfrm>
       </p:grpSpPr>
-      <p:sp>
-        <p:nvSpPr>
-          <p:cNvPr id="2" name="Shape 0"/>
-          <p:cNvSpPr/>
-          <p:nvPr/>
-        </p:nvSpPr>
-        <p:spPr>
-          <a:xfrm>
-            <a:off x="0" y="0"/>
-            <a:ext cx="12191695" cy="868680"/>
-          </a:xfrm>
-          <a:prstGeom prst="rect">
-            <a:avLst/>
-          </a:prstGeom>
-          <a:solidFill>
-            <a:srgbClr val="003087"/>
-          </a:solidFill>
-          <a:ln w="12700">
-            <a:solidFill>
-              <a:srgbClr val="003087"/>
-            </a:solidFill>
-            <a:prstDash val="solid"/>
-          </a:ln>
-        </p:spPr>
-      </p:sp>
-      <p:sp>
-        <p:nvSpPr>
-          <p:cNvPr id="3" name="Shape 1"/>
-          <p:cNvSpPr/>
-          <p:nvPr/>
-        </p:nvSpPr>
-        <p:spPr>
-          <a:xfrm>
-            <a:off x="0" y="868680"/>
-            <a:ext cx="12191695" cy="54864"/>
-          </a:xfrm>
-          <a:prstGeom prst="rect">
-            <a:avLst/>
-          </a:prstGeom>
-          <a:solidFill>
-            <a:srgbClr val="FFB91D"/>
-          </a:solidFill>
-          <a:ln w="12700">
-            <a:solidFill>
-              <a:srgbClr val="FFB91D"/>
-            </a:solidFill>
-            <a:prstDash val="solid"/>
-          </a:ln>
-        </p:spPr>
-      </p:sp>
-      <p:sp>
-        <p:nvSpPr>
-          <p:cNvPr id="4" name="Text 2"/>
-          <p:cNvSpPr/>
-          <p:nvPr/>
-        </p:nvSpPr>
-        <p:spPr>
-          <a:xfrm>
-            <a:off x="457200" y="128016"/>
-            <a:ext cx="8686800" cy="256032"/>
-          </a:xfrm>
-          <a:prstGeom prst="rect">
-            <a:avLst/>
-          </a:prstGeom>
-          <a:noFill/>
-          <a:ln/>
-        </p:spPr>
-        <p:txBody>
-          <a:bodyPr wrap="square" lIns="0" tIns="0" rIns="0" bIns="0" rtlCol="0" anchor="ctr"/>
-          <a:lstStyle/>
-          <a:p>
-            <a:pPr indent="0" marL="0">
-              <a:buNone/>
-            </a:pPr>
-            <a:r>
-              <a:rPr lang="en-US" sz="950" b="1" spc="200" kern="0" dirty="0">
-                <a:solidFill>
-                  <a:srgbClr val="7EC8E3"/>
-                </a:solidFill>
-                <a:latin typeface="Arial" pitchFamily="34" charset="0"/>
-                <a:ea typeface="Arial" pitchFamily="34" charset="-122"/>
-                <a:cs typeface="Arial" pitchFamily="34" charset="-120"/>
-              </a:rPr>
-              <a:t>HEARTS AND MINDS  ·  LAYLA'S JOURNEY  ·  STAGE 3 OF 5</a:t>
-            </a:r>
-            <a:endParaRPr lang="en-US" sz="950" dirty="0"/>
-          </a:p>
-        </p:txBody>
-      </p:sp>
-      <p:sp>
-        <p:nvSpPr>
-          <p:cNvPr id="5" name="Text 3"/>
-          <p:cNvSpPr/>
-          <p:nvPr/>
-        </p:nvSpPr>
-        <p:spPr>
-          <a:xfrm>
-            <a:off x="457200" y="384048"/>
-            <a:ext cx="9601200" cy="411480"/>
-          </a:xfrm>
-          <a:prstGeom prst="rect">
-            <a:avLst/>
-          </a:prstGeom>
-          <a:noFill/>
-          <a:ln/>
-        </p:spPr>
-        <p:txBody>
-          <a:bodyPr wrap="square" lIns="0" tIns="0" rIns="0" bIns="0" rtlCol="0" anchor="ctr"/>
-          <a:lstStyle/>
-          <a:p>
-            <a:pPr indent="0" marL="0">
-              <a:buNone/>
-            </a:pPr>
-            <a:r>
-              <a:rPr lang="en-US" sz="2000" b="1" dirty="0">
-                <a:solidFill>
-                  <a:srgbClr val="FFFFFF"/>
-                </a:solidFill>
-                <a:latin typeface="Arial" pitchFamily="34" charset="0"/>
-                <a:ea typeface="Arial" pitchFamily="34" charset="-122"/>
-                <a:cs typeface="Arial" pitchFamily="34" charset="-120"/>
-              </a:rPr>
-              <a:t>Diagnosis, a sample between shifts</a:t>
-            </a:r>
-            <a:endParaRPr lang="en-US" sz="2000" dirty="0"/>
-          </a:p>
-        </p:txBody>
-      </p:sp>
       <p:pic>
         <p:nvPicPr>
-          <p:cNvPr id="6" name="Image 0" descr="/sessions/quirky-zen-galileo/mnt/outputs/deckbuild/nhs_logo.png">    </p:cNvPr>
+          <p:cNvPr id="2" name="Image 0" descr="/sessions/quirky-zen-galileo/mnt/NHS/07 Sites &amp; Repos/dtx-ecosystem/hearts-and-minds/_generators/assets/bg-band.jpg">    </p:cNvPr>
           <p:cNvPicPr>
             <a:picLocks noChangeAspect="1"/>
           </p:cNvPicPr>
@@ -5635,8 +5635,8 @@
         </p:blipFill>
         <p:spPr>
           <a:xfrm>
-            <a:off x="10774375" y="201168"/>
-            <a:ext cx="960120" cy="393192"/>
+            <a:off x="0" y="0"/>
+            <a:ext cx="12191695" cy="932688"/>
           </a:xfrm>
           <a:prstGeom prst="rect">
             <a:avLst/>
@@ -5645,119 +5645,14 @@
       </p:pic>
       <p:sp>
         <p:nvSpPr>
-          <p:cNvPr id="7" name="Text 4"/>
-          <p:cNvSpPr/>
-          <p:nvPr/>
-        </p:nvSpPr>
-        <p:spPr>
-          <a:xfrm>
-            <a:off x="429768" y="1024128"/>
-            <a:ext cx="1463040" cy="868680"/>
-          </a:xfrm>
-          <a:prstGeom prst="rect">
-            <a:avLst/>
-          </a:prstGeom>
-          <a:noFill/>
-          <a:ln/>
-        </p:spPr>
-        <p:txBody>
-          <a:bodyPr wrap="square" lIns="0" tIns="0" rIns="0" bIns="0" rtlCol="0" anchor="ctr"/>
-          <a:lstStyle/>
-          <a:p>
-            <a:pPr indent="0" marL="0">
-              <a:buNone/>
-            </a:pPr>
-            <a:r>
-              <a:rPr lang="en-US" sz="5200" b="1" dirty="0">
-                <a:solidFill>
-                  <a:srgbClr val="FFB91D"/>
-                </a:solidFill>
-                <a:latin typeface="Arial" pitchFamily="34" charset="0"/>
-                <a:ea typeface="Arial" pitchFamily="34" charset="-122"/>
-                <a:cs typeface="Arial" pitchFamily="34" charset="-120"/>
-              </a:rPr>
-              <a:t>03</a:t>
-            </a:r>
-            <a:endParaRPr lang="en-US" sz="5200" dirty="0"/>
-          </a:p>
-        </p:txBody>
-      </p:sp>
-      <p:sp>
-        <p:nvSpPr>
-          <p:cNvPr id="8" name="Text 5"/>
-          <p:cNvSpPr/>
-          <p:nvPr/>
-        </p:nvSpPr>
-        <p:spPr>
-          <a:xfrm>
-            <a:off x="457200" y="1920240"/>
-            <a:ext cx="4892040" cy="1207008"/>
-          </a:xfrm>
-          <a:prstGeom prst="rect">
-            <a:avLst/>
-          </a:prstGeom>
-          <a:noFill/>
-          <a:ln/>
-        </p:spPr>
-        <p:txBody>
-          <a:bodyPr wrap="square" lIns="0" tIns="0" rIns="0" bIns="0" rtlCol="0" anchor="t">
-            <a:normAutofit/>
-          </a:bodyPr>
-          <a:lstStyle/>
-          <a:p>
-            <a:pPr indent="0" marL="0">
-              <a:buNone/>
-            </a:pPr>
-            <a:r>
-              <a:rPr lang="en-US" sz="1200" b="1" dirty="0">
-                <a:solidFill>
-                  <a:srgbClr val="003087"/>
-                </a:solidFill>
-                <a:latin typeface="Arial" pitchFamily="34" charset="0"/>
-                <a:ea typeface="Arial" pitchFamily="34" charset="-122"/>
-                <a:cs typeface="Arial" pitchFamily="34" charset="-120"/>
-              </a:rPr>
-              <a:t>The kit arrives on a Wednesday. Layla takes the capillary sample at the kitchen table while the kids finish their homework, before her evening shift, posts it on the way in and does not think about it again. The lab processes it on the same platform as any clinic sample and the result lands in Hannah's record on time.</a:t>
-            </a:r>
-            <a:endParaRPr lang="en-US" sz="1200" dirty="0"/>
-          </a:p>
-        </p:txBody>
-      </p:sp>
-      <p:sp>
-        <p:nvSpPr>
-          <p:cNvPr id="9" name="Shape 6"/>
-          <p:cNvSpPr/>
-          <p:nvPr/>
-        </p:nvSpPr>
-        <p:spPr>
-          <a:xfrm>
-            <a:off x="457200" y="3236976"/>
-            <a:ext cx="4892040" cy="944499"/>
-          </a:xfrm>
-          <a:prstGeom prst="rect">
-            <a:avLst/>
-          </a:prstGeom>
-          <a:solidFill>
-            <a:srgbClr val="F0F4F5"/>
-          </a:solidFill>
-          <a:ln w="12700">
-            <a:solidFill>
-              <a:srgbClr val="F0F4F5"/>
-            </a:solidFill>
-            <a:prstDash val="solid"/>
-          </a:ln>
-        </p:spPr>
-      </p:sp>
-      <p:sp>
-        <p:nvSpPr>
-          <p:cNvPr id="10" name="Shape 7"/>
-          <p:cNvSpPr/>
-          <p:nvPr/>
-        </p:nvSpPr>
-        <p:spPr>
-          <a:xfrm>
-            <a:off x="457200" y="3236976"/>
-            <a:ext cx="82296" cy="944499"/>
+          <p:cNvPr id="3" name="Shape 0"/>
+          <p:cNvSpPr/>
+          <p:nvPr/>
+        </p:nvSpPr>
+        <p:spPr>
+          <a:xfrm>
+            <a:off x="0" y="932688"/>
+            <a:ext cx="12191695" cy="50292"/>
           </a:xfrm>
           <a:prstGeom prst="rect">
             <a:avLst/>
@@ -5775,23 +5670,62 @@
       </p:sp>
       <p:sp>
         <p:nvSpPr>
-          <p:cNvPr id="11" name="Text 8"/>
-          <p:cNvSpPr/>
-          <p:nvPr/>
-        </p:nvSpPr>
-        <p:spPr>
-          <a:xfrm>
-            <a:off x="685800" y="3291840"/>
-            <a:ext cx="4526280" cy="578739"/>
-          </a:xfrm>
-          <a:prstGeom prst="rect">
-            <a:avLst/>
-          </a:prstGeom>
-          <a:noFill/>
-          <a:ln/>
-        </p:spPr>
-        <p:txBody>
-          <a:bodyPr wrap="square" lIns="0" tIns="0" rIns="0" bIns="0" rtlCol="0" anchor="t">
+          <p:cNvPr id="4" name="Text 1"/>
+          <p:cNvSpPr/>
+          <p:nvPr/>
+        </p:nvSpPr>
+        <p:spPr>
+          <a:xfrm>
+            <a:off x="502920" y="137160"/>
+            <a:ext cx="8595360" cy="256032"/>
+          </a:xfrm>
+          <a:prstGeom prst="rect">
+            <a:avLst/>
+          </a:prstGeom>
+          <a:noFill/>
+          <a:ln/>
+        </p:spPr>
+        <p:txBody>
+          <a:bodyPr wrap="square" lIns="0" tIns="0" rIns="0" bIns="0" rtlCol="0" anchor="ctr"/>
+          <a:lstStyle/>
+          <a:p>
+            <a:pPr indent="0" marL="0">
+              <a:buNone/>
+            </a:pPr>
+            <a:r>
+              <a:rPr lang="en-US" sz="950" b="1" spc="240" kern="0" dirty="0">
+                <a:solidFill>
+                  <a:srgbClr val="FFD66B"/>
+                </a:solidFill>
+                <a:latin typeface="Segoe UI" pitchFamily="34" charset="0"/>
+                <a:ea typeface="Segoe UI" pitchFamily="34" charset="-122"/>
+                <a:cs typeface="Segoe UI" pitchFamily="34" charset="-120"/>
+              </a:rPr>
+              <a:t>HEARTS AND MINDS  ·  LAYLA’S JOURNEY  ·  STAGE 3 OF 5</a:t>
+            </a:r>
+            <a:endParaRPr lang="en-US" sz="950" dirty="0"/>
+          </a:p>
+        </p:txBody>
+      </p:sp>
+      <p:sp>
+        <p:nvSpPr>
+          <p:cNvPr id="5" name="Text 2"/>
+          <p:cNvSpPr/>
+          <p:nvPr/>
+        </p:nvSpPr>
+        <p:spPr>
+          <a:xfrm>
+            <a:off x="502920" y="402336"/>
+            <a:ext cx="9509760" cy="457200"/>
+          </a:xfrm>
+          <a:prstGeom prst="rect">
+            <a:avLst/>
+          </a:prstGeom>
+          <a:noFill/>
+          <a:ln/>
+        </p:spPr>
+        <p:txBody>
+          <a:bodyPr wrap="square" lIns="0" tIns="0" rIns="0" bIns="0" rtlCol="0" anchor="ctr">
             <a:normAutofit/>
           </a:bodyPr>
           <a:lstStyle/>
@@ -5800,62 +5734,50 @@
               <a:buNone/>
             </a:pPr>
             <a:r>
-              <a:rPr lang="en-US" sz="950" i="1" dirty="0">
-                <a:solidFill>
-                  <a:srgbClr val="231F20"/>
-                </a:solidFill>
-                <a:latin typeface="Arial" pitchFamily="34" charset="0"/>
-                <a:ea typeface="Arial" pitchFamily="34" charset="-122"/>
-                <a:cs typeface="Arial" pitchFamily="34" charset="-120"/>
-              </a:rPr>
-              <a:t>“Twenty minutes between the kids' homework and the start of my shift. I would not have got to the surgery and back in that gap, let alone waited.”</a:t>
-            </a:r>
-            <a:endParaRPr lang="en-US" sz="950" dirty="0"/>
-          </a:p>
-        </p:txBody>
-      </p:sp>
-      <p:sp>
-        <p:nvSpPr>
-          <p:cNvPr id="12" name="Text 9"/>
-          <p:cNvSpPr/>
-          <p:nvPr/>
-        </p:nvSpPr>
-        <p:spPr>
-          <a:xfrm>
-            <a:off x="685800" y="3870579"/>
-            <a:ext cx="4526280" cy="256032"/>
-          </a:xfrm>
-          <a:prstGeom prst="rect">
-            <a:avLst/>
-          </a:prstGeom>
-          <a:noFill/>
-          <a:ln/>
-        </p:spPr>
-        <p:txBody>
-          <a:bodyPr wrap="square" lIns="0" tIns="0" rIns="0" bIns="0" rtlCol="0" anchor="ctr"/>
-          <a:lstStyle/>
-          <a:p>
-            <a:pPr indent="0" marL="0">
-              <a:buNone/>
-            </a:pPr>
-            <a:r>
-              <a:rPr lang="en-US" sz="950" b="1" dirty="0">
-                <a:solidFill>
-                  <a:srgbClr val="8A6D1F"/>
-                </a:solidFill>
-                <a:latin typeface="Arial" pitchFamily="34" charset="0"/>
-                <a:ea typeface="Arial" pitchFamily="34" charset="-122"/>
-                <a:cs typeface="Arial" pitchFamily="34" charset="-120"/>
-              </a:rPr>
-              <a:t>Layla</a:t>
-            </a:r>
-            <a:endParaRPr lang="en-US" sz="950" dirty="0"/>
-          </a:p>
-        </p:txBody>
+              <a:rPr lang="en-US" sz="2100" b="1" dirty="0">
+                <a:solidFill>
+                  <a:srgbClr val="FFFFFF"/>
+                </a:solidFill>
+                <a:latin typeface="Segoe UI" pitchFamily="34" charset="0"/>
+                <a:ea typeface="Segoe UI" pitchFamily="34" charset="-122"/>
+                <a:cs typeface="Segoe UI" pitchFamily="34" charset="-120"/>
+              </a:rPr>
+              <a:t>Diagnosis, a sample between shifts</a:t>
+            </a:r>
+            <a:endParaRPr lang="en-US" sz="2100" dirty="0"/>
+          </a:p>
+        </p:txBody>
+      </p:sp>
+      <p:sp>
+        <p:nvSpPr>
+          <p:cNvPr id="6" name="Shape 3"/>
+          <p:cNvSpPr/>
+          <p:nvPr/>
+        </p:nvSpPr>
+        <p:spPr>
+          <a:xfrm>
+            <a:off x="10942806" y="173736"/>
+            <a:ext cx="791689" cy="605699"/>
+          </a:xfrm>
+          <a:prstGeom prst="roundRect">
+            <a:avLst>
+              <a:gd name="adj" fmla="val 12077"/>
+            </a:avLst>
+          </a:prstGeom>
+          <a:solidFill>
+            <a:srgbClr val="FFFFFF"/>
+          </a:solidFill>
+          <a:ln w="12700">
+            <a:solidFill>
+              <a:srgbClr val="FFFFFF"/>
+            </a:solidFill>
+            <a:prstDash val="solid"/>
+          </a:ln>
+        </p:spPr>
       </p:sp>
       <p:pic>
         <p:nvPicPr>
-          <p:cNvPr id="13" name="Image 1" descr="/sessions/quirky-zen-galileo/mnt/outputs/hmdecks5/img/layla-stage3.jpg">    </p:cNvPr>
+          <p:cNvPr id="7" name="Image 1" descr="/sessions/quirky-zen-galileo/mnt/NHS/07 Sites &amp; Repos/dtx-ecosystem/hearts-and-minds/_generators/assets/nhs-logo.png">    </p:cNvPr>
           <p:cNvPicPr>
             <a:picLocks noChangeAspect="1"/>
           </p:cNvPicPr>
@@ -5869,8 +5791,8 @@
         </p:blipFill>
         <p:spPr>
           <a:xfrm>
-            <a:off x="457200" y="4346067"/>
-            <a:ext cx="3484801" cy="1945005"/>
+            <a:off x="11068993" y="266273"/>
+            <a:ext cx="539315" cy="420624"/>
           </a:xfrm>
           <a:prstGeom prst="rect">
             <a:avLst/>
@@ -5879,13 +5801,246 @@
       </p:pic>
       <p:sp>
         <p:nvSpPr>
-          <p:cNvPr id="14" name="Shape 10"/>
-          <p:cNvSpPr/>
-          <p:nvPr/>
-        </p:nvSpPr>
-        <p:spPr>
-          <a:xfrm>
-            <a:off x="5669280" y="1097280"/>
+          <p:cNvPr id="8" name="Text 4"/>
+          <p:cNvSpPr/>
+          <p:nvPr/>
+        </p:nvSpPr>
+        <p:spPr>
+          <a:xfrm>
+            <a:off x="429768" y="1129284"/>
+            <a:ext cx="1463040" cy="841248"/>
+          </a:xfrm>
+          <a:prstGeom prst="rect">
+            <a:avLst/>
+          </a:prstGeom>
+          <a:noFill/>
+          <a:ln/>
+        </p:spPr>
+        <p:txBody>
+          <a:bodyPr wrap="square" lIns="0" tIns="0" rIns="0" bIns="0" rtlCol="0" anchor="ctr"/>
+          <a:lstStyle/>
+          <a:p>
+            <a:pPr indent="0" marL="0">
+              <a:buNone/>
+            </a:pPr>
+            <a:r>
+              <a:rPr lang="en-US" sz="5000" b="1" spc="-100" kern="0" dirty="0">
+                <a:solidFill>
+                  <a:srgbClr val="FFB91D"/>
+                </a:solidFill>
+                <a:latin typeface="Segoe UI" pitchFamily="34" charset="0"/>
+                <a:ea typeface="Segoe UI" pitchFamily="34" charset="-122"/>
+                <a:cs typeface="Segoe UI" pitchFamily="34" charset="-120"/>
+              </a:rPr>
+              <a:t>03</a:t>
+            </a:r>
+            <a:endParaRPr lang="en-US" sz="5000" dirty="0"/>
+          </a:p>
+        </p:txBody>
+      </p:sp>
+      <p:sp>
+        <p:nvSpPr>
+          <p:cNvPr id="9" name="Text 5"/>
+          <p:cNvSpPr/>
+          <p:nvPr/>
+        </p:nvSpPr>
+        <p:spPr>
+          <a:xfrm>
+            <a:off x="457200" y="2007108"/>
+            <a:ext cx="4892040" cy="1178052"/>
+          </a:xfrm>
+          <a:prstGeom prst="rect">
+            <a:avLst/>
+          </a:prstGeom>
+          <a:noFill/>
+          <a:ln/>
+        </p:spPr>
+        <p:txBody>
+          <a:bodyPr wrap="square" lIns="0" tIns="0" rIns="0" bIns="0" rtlCol="0" anchor="t">
+            <a:normAutofit/>
+          </a:bodyPr>
+          <a:lstStyle/>
+          <a:p>
+            <a:pPr indent="0" marL="0">
+              <a:buNone/>
+            </a:pPr>
+            <a:r>
+              <a:rPr lang="en-US" sz="1150" b="1" dirty="0">
+                <a:solidFill>
+                  <a:srgbClr val="003087"/>
+                </a:solidFill>
+                <a:latin typeface="Segoe UI" pitchFamily="34" charset="0"/>
+                <a:ea typeface="Segoe UI" pitchFamily="34" charset="-122"/>
+                <a:cs typeface="Segoe UI" pitchFamily="34" charset="-120"/>
+              </a:rPr>
+              <a:t>The kit arrives on a Wednesday. Layla takes the capillary sample at the kitchen table while the kids finish their homework, before her evening shift, posts it on the way in and does not think about it again. The lab processes it on the same platform as any clinic sample and the result lands in Hannah's record on time.</a:t>
+            </a:r>
+            <a:endParaRPr lang="en-US" sz="1150" dirty="0"/>
+          </a:p>
+        </p:txBody>
+      </p:sp>
+      <p:sp>
+        <p:nvSpPr>
+          <p:cNvPr id="10" name="Shape 6"/>
+          <p:cNvSpPr/>
+          <p:nvPr/>
+        </p:nvSpPr>
+        <p:spPr>
+          <a:xfrm>
+            <a:off x="457200" y="3313176"/>
+            <a:ext cx="4892040" cy="1051560"/>
+          </a:xfrm>
+          <a:prstGeom prst="rect">
+            <a:avLst/>
+          </a:prstGeom>
+          <a:solidFill>
+            <a:srgbClr val="F8FAFC"/>
+          </a:solidFill>
+          <a:ln w="12700">
+            <a:solidFill>
+              <a:srgbClr val="F8FAFC"/>
+            </a:solidFill>
+            <a:prstDash val="solid"/>
+          </a:ln>
+        </p:spPr>
+      </p:sp>
+      <p:sp>
+        <p:nvSpPr>
+          <p:cNvPr id="11" name="Shape 7"/>
+          <p:cNvSpPr/>
+          <p:nvPr/>
+        </p:nvSpPr>
+        <p:spPr>
+          <a:xfrm>
+            <a:off x="457200" y="3313176"/>
+            <a:ext cx="82296" cy="1051560"/>
+          </a:xfrm>
+          <a:prstGeom prst="rect">
+            <a:avLst/>
+          </a:prstGeom>
+          <a:solidFill>
+            <a:srgbClr val="FFB91D"/>
+          </a:solidFill>
+          <a:ln w="12700">
+            <a:solidFill>
+              <a:srgbClr val="FFB91D"/>
+            </a:solidFill>
+            <a:prstDash val="solid"/>
+          </a:ln>
+        </p:spPr>
+      </p:sp>
+      <p:sp>
+        <p:nvSpPr>
+          <p:cNvPr id="12" name="Text 8"/>
+          <p:cNvSpPr/>
+          <p:nvPr/>
+        </p:nvSpPr>
+        <p:spPr>
+          <a:xfrm>
+            <a:off x="694944" y="3377184"/>
+            <a:ext cx="4507992" cy="667512"/>
+          </a:xfrm>
+          <a:prstGeom prst="rect">
+            <a:avLst/>
+          </a:prstGeom>
+          <a:noFill/>
+          <a:ln/>
+        </p:spPr>
+        <p:txBody>
+          <a:bodyPr wrap="square" lIns="0" tIns="0" rIns="0" bIns="0" rtlCol="0" anchor="t">
+            <a:normAutofit/>
+          </a:bodyPr>
+          <a:lstStyle/>
+          <a:p>
+            <a:pPr indent="0" marL="0">
+              <a:buNone/>
+            </a:pPr>
+            <a:r>
+              <a:rPr lang="en-US" sz="1150" i="1" dirty="0">
+                <a:solidFill>
+                  <a:srgbClr val="212B32"/>
+                </a:solidFill>
+                <a:latin typeface="Segoe UI" pitchFamily="34" charset="0"/>
+                <a:ea typeface="Segoe UI" pitchFamily="34" charset="-122"/>
+                <a:cs typeface="Segoe UI" pitchFamily="34" charset="-120"/>
+              </a:rPr>
+              <a:t>“Twenty minutes between the kids' homework and the start of my shift. I would not have got to the surgery and back in that gap, let alone waited.”</a:t>
+            </a:r>
+            <a:endParaRPr lang="en-US" sz="1150" dirty="0"/>
+          </a:p>
+        </p:txBody>
+      </p:sp>
+      <p:sp>
+        <p:nvSpPr>
+          <p:cNvPr id="13" name="Text 9"/>
+          <p:cNvSpPr/>
+          <p:nvPr/>
+        </p:nvSpPr>
+        <p:spPr>
+          <a:xfrm>
+            <a:off x="694944" y="4044696"/>
+            <a:ext cx="4507992" cy="256032"/>
+          </a:xfrm>
+          <a:prstGeom prst="rect">
+            <a:avLst/>
+          </a:prstGeom>
+          <a:noFill/>
+          <a:ln/>
+        </p:spPr>
+        <p:txBody>
+          <a:bodyPr wrap="square" lIns="0" tIns="0" rIns="0" bIns="0" rtlCol="0" anchor="ctr"/>
+          <a:lstStyle/>
+          <a:p>
+            <a:pPr indent="0" marL="0">
+              <a:buNone/>
+            </a:pPr>
+            <a:r>
+              <a:rPr lang="en-US" sz="950" b="1" dirty="0">
+                <a:solidFill>
+                  <a:srgbClr val="8A6D1F"/>
+                </a:solidFill>
+                <a:latin typeface="Segoe UI" pitchFamily="34" charset="0"/>
+                <a:ea typeface="Segoe UI" pitchFamily="34" charset="-122"/>
+                <a:cs typeface="Segoe UI" pitchFamily="34" charset="-120"/>
+              </a:rPr>
+              <a:t>Layla</a:t>
+            </a:r>
+            <a:endParaRPr lang="en-US" sz="950" dirty="0"/>
+          </a:p>
+        </p:txBody>
+      </p:sp>
+      <p:pic>
+        <p:nvPicPr>
+          <p:cNvPr id="14" name="Image 2" descr="/sessions/quirky-zen-galileo/mnt/outputs/jd/img/layla-stage3.jpg">    </p:cNvPr>
+          <p:cNvPicPr>
+            <a:picLocks noChangeAspect="1"/>
+          </p:cNvPicPr>
+          <p:nvPr/>
+        </p:nvPicPr>
+        <p:blipFill>
+          <a:blip r:embed="rId3"/>
+          <a:srcRect l="0" r="0" t="0" b="0"/>
+          <a:stretch/>
+        </p:blipFill>
+        <p:spPr>
+          <a:xfrm>
+            <a:off x="457200" y="4547616"/>
+            <a:ext cx="4892040" cy="1743456"/>
+          </a:xfrm>
+          <a:prstGeom prst="rect">
+            <a:avLst/>
+          </a:prstGeom>
+        </p:spPr>
+      </p:pic>
+      <p:sp>
+        <p:nvSpPr>
+          <p:cNvPr id="15" name="Shape 10"/>
+          <p:cNvSpPr/>
+          <p:nvPr/>
+        </p:nvSpPr>
+        <p:spPr>
+          <a:xfrm>
+            <a:off x="5669280" y="1184148"/>
             <a:ext cx="6065215" cy="274320"/>
           </a:xfrm>
           <a:prstGeom prst="rect">
@@ -5904,14 +6059,14 @@
       </p:sp>
       <p:sp>
         <p:nvSpPr>
-          <p:cNvPr id="15" name="Text 11"/>
-          <p:cNvSpPr/>
-          <p:nvPr/>
-        </p:nvSpPr>
-        <p:spPr>
-          <a:xfrm>
-            <a:off x="5779008" y="1097280"/>
-            <a:ext cx="5845759" cy="274320"/>
+          <p:cNvPr id="16" name="Text 11"/>
+          <p:cNvSpPr/>
+          <p:nvPr/>
+        </p:nvSpPr>
+        <p:spPr>
+          <a:xfrm>
+            <a:off x="5788152" y="1184148"/>
+            <a:ext cx="5827471" cy="274320"/>
           </a:xfrm>
           <a:prstGeom prst="rect">
             <a:avLst/>
@@ -5931,9 +6086,9 @@
                 <a:solidFill>
                   <a:srgbClr val="FFFFFF"/>
                 </a:solidFill>
-                <a:latin typeface="Arial" pitchFamily="34" charset="0"/>
-                <a:ea typeface="Arial" pitchFamily="34" charset="-122"/>
-                <a:cs typeface="Arial" pitchFamily="34" charset="-120"/>
+                <a:latin typeface="Segoe UI" pitchFamily="34" charset="0"/>
+                <a:ea typeface="Segoe UI" pitchFamily="34" charset="-122"/>
+                <a:cs typeface="Segoe UI" pitchFamily="34" charset="-120"/>
               </a:rPr>
               <a:t>WHAT THE MODEL IS DOING UNDERNEATH</a:t>
             </a:r>
@@ -5943,14 +6098,14 @@
       </p:sp>
       <p:sp>
         <p:nvSpPr>
-          <p:cNvPr id="16" name="Shape 12"/>
-          <p:cNvSpPr/>
-          <p:nvPr/>
-        </p:nvSpPr>
-        <p:spPr>
-          <a:xfrm>
-            <a:off x="5669280" y="1371600"/>
-            <a:ext cx="6065215" cy="1053338"/>
+          <p:cNvPr id="17" name="Shape 12"/>
+          <p:cNvSpPr/>
+          <p:nvPr/>
+        </p:nvSpPr>
+        <p:spPr>
+          <a:xfrm>
+            <a:off x="5669280" y="1458468"/>
+            <a:ext cx="6065215" cy="1067308"/>
           </a:xfrm>
           <a:prstGeom prst="rect">
             <a:avLst/>
@@ -5968,14 +6123,14 @@
       </p:sp>
       <p:sp>
         <p:nvSpPr>
-          <p:cNvPr id="17" name="Text 13"/>
-          <p:cNvSpPr/>
-          <p:nvPr/>
-        </p:nvSpPr>
-        <p:spPr>
-          <a:xfrm>
-            <a:off x="5779008" y="1408176"/>
-            <a:ext cx="5845759" cy="998474"/>
+          <p:cNvPr id="18" name="Text 13"/>
+          <p:cNvSpPr/>
+          <p:nvPr/>
+        </p:nvSpPr>
+        <p:spPr>
+          <a:xfrm>
+            <a:off x="5788152" y="1495044"/>
+            <a:ext cx="5827471" cy="1012444"/>
           </a:xfrm>
           <a:prstGeom prst="rect">
             <a:avLst/>
@@ -5993,11 +6148,11 @@
             <a:r>
               <a:rPr lang="en-US" sz="1100" dirty="0">
                 <a:solidFill>
-                  <a:srgbClr val="231F20"/>
-                </a:solidFill>
-                <a:latin typeface="Arial" pitchFamily="34" charset="0"/>
-                <a:ea typeface="Arial" pitchFamily="34" charset="-122"/>
-                <a:cs typeface="Arial" pitchFamily="34" charset="-120"/>
+                  <a:srgbClr val="212B32"/>
+                </a:solidFill>
+                <a:latin typeface="Segoe UI" pitchFamily="34" charset="0"/>
+                <a:ea typeface="Segoe UI" pitchFamily="34" charset="-122"/>
+                <a:cs typeface="Segoe UI" pitchFamily="34" charset="-120"/>
               </a:rPr>
               <a:t>The home capillary FBC and ferritin are a recognised route for routine monitoring. The sample is processed at a UKAS-accredited lab on the same assay platform that processes in-clinic samples, and the result writes back to the practice EPR through the framework integration. Nothing about the clinical standard changes; only the venue and the timing do.</a:t>
             </a:r>
@@ -6007,13 +6162,13 @@
       </p:sp>
       <p:sp>
         <p:nvSpPr>
-          <p:cNvPr id="18" name="Shape 14"/>
-          <p:cNvSpPr/>
-          <p:nvPr/>
-        </p:nvSpPr>
-        <p:spPr>
-          <a:xfrm>
-            <a:off x="5669280" y="2552954"/>
+          <p:cNvPr id="19" name="Shape 14"/>
+          <p:cNvSpPr/>
+          <p:nvPr/>
+        </p:nvSpPr>
+        <p:spPr>
+          <a:xfrm>
+            <a:off x="5669280" y="2653792"/>
             <a:ext cx="6065215" cy="274320"/>
           </a:xfrm>
           <a:prstGeom prst="rect">
@@ -6032,14 +6187,14 @@
       </p:sp>
       <p:sp>
         <p:nvSpPr>
-          <p:cNvPr id="19" name="Text 15"/>
-          <p:cNvSpPr/>
-          <p:nvPr/>
-        </p:nvSpPr>
-        <p:spPr>
-          <a:xfrm>
-            <a:off x="5779008" y="2552954"/>
-            <a:ext cx="5845759" cy="274320"/>
+          <p:cNvPr id="20" name="Text 15"/>
+          <p:cNvSpPr/>
+          <p:nvPr/>
+        </p:nvSpPr>
+        <p:spPr>
+          <a:xfrm>
+            <a:off x="5788152" y="2653792"/>
+            <a:ext cx="5827471" cy="274320"/>
           </a:xfrm>
           <a:prstGeom prst="rect">
             <a:avLst/>
@@ -6059,9 +6214,9 @@
                 <a:solidFill>
                   <a:srgbClr val="FFFFFF"/>
                 </a:solidFill>
-                <a:latin typeface="Arial" pitchFamily="34" charset="0"/>
-                <a:ea typeface="Arial" pitchFamily="34" charset="-122"/>
-                <a:cs typeface="Arial" pitchFamily="34" charset="-120"/>
+                <a:latin typeface="Segoe UI" pitchFamily="34" charset="0"/>
+                <a:ea typeface="Segoe UI" pitchFamily="34" charset="-122"/>
+                <a:cs typeface="Segoe UI" pitchFamily="34" charset="-120"/>
               </a:rPr>
               <a:t>THE OLD WAY</a:t>
             </a:r>
@@ -6071,24 +6226,24 @@
       </p:sp>
       <p:sp>
         <p:nvSpPr>
-          <p:cNvPr id="20" name="Shape 16"/>
-          <p:cNvSpPr/>
-          <p:nvPr/>
-        </p:nvSpPr>
-        <p:spPr>
-          <a:xfrm>
-            <a:off x="5669280" y="2827274"/>
-            <a:ext cx="6065215" cy="712470"/>
-          </a:xfrm>
-          <a:prstGeom prst="rect">
-            <a:avLst/>
-          </a:prstGeom>
-          <a:solidFill>
-            <a:srgbClr val="F0F4F5"/>
+          <p:cNvPr id="21" name="Shape 16"/>
+          <p:cNvSpPr/>
+          <p:nvPr/>
+        </p:nvSpPr>
+        <p:spPr>
+          <a:xfrm>
+            <a:off x="5669280" y="2928112"/>
+            <a:ext cx="6065215" cy="720852"/>
+          </a:xfrm>
+          <a:prstGeom prst="rect">
+            <a:avLst/>
+          </a:prstGeom>
+          <a:solidFill>
+            <a:srgbClr val="F8FAFC"/>
           </a:solidFill>
           <a:ln w="12700">
             <a:solidFill>
-              <a:srgbClr val="F0F4F5"/>
+              <a:srgbClr val="F8FAFC"/>
             </a:solidFill>
             <a:prstDash val="solid"/>
           </a:ln>
@@ -6096,14 +6251,14 @@
       </p:sp>
       <p:sp>
         <p:nvSpPr>
-          <p:cNvPr id="21" name="Text 17"/>
-          <p:cNvSpPr/>
-          <p:nvPr/>
-        </p:nvSpPr>
-        <p:spPr>
-          <a:xfrm>
-            <a:off x="5779008" y="2863850"/>
-            <a:ext cx="5845759" cy="657606"/>
+          <p:cNvPr id="22" name="Text 17"/>
+          <p:cNvSpPr/>
+          <p:nvPr/>
+        </p:nvSpPr>
+        <p:spPr>
+          <a:xfrm>
+            <a:off x="5788152" y="2964688"/>
+            <a:ext cx="5827471" cy="665988"/>
           </a:xfrm>
           <a:prstGeom prst="rect">
             <a:avLst/>
@@ -6121,11 +6276,11 @@
             <a:r>
               <a:rPr lang="en-US" sz="1100" dirty="0">
                 <a:solidFill>
-                  <a:srgbClr val="231F20"/>
-                </a:solidFill>
-                <a:latin typeface="Arial" pitchFamily="34" charset="0"/>
-                <a:ea typeface="Arial" pitchFamily="34" charset="-122"/>
-                <a:cs typeface="Arial" pitchFamily="34" charset="-120"/>
+                  <a:srgbClr val="212B32"/>
+                </a:solidFill>
+                <a:latin typeface="Segoe UI" pitchFamily="34" charset="0"/>
+                <a:ea typeface="Segoe UI" pitchFamily="34" charset="-122"/>
+                <a:cs typeface="Segoe UI" pitchFamily="34" charset="-120"/>
               </a:rPr>
               <a:t>An appointment at the surgery in working hours, which for Layla means an hour of unpaid time and a manager she has to ask twice a year, or a check that does not happen.</a:t>
             </a:r>
@@ -6135,13 +6290,13 @@
       </p:sp>
       <p:sp>
         <p:nvSpPr>
-          <p:cNvPr id="22" name="Shape 18"/>
-          <p:cNvSpPr/>
-          <p:nvPr/>
-        </p:nvSpPr>
-        <p:spPr>
-          <a:xfrm>
-            <a:off x="5669280" y="3667760"/>
+          <p:cNvPr id="23" name="Shape 18"/>
+          <p:cNvSpPr/>
+          <p:nvPr/>
+        </p:nvSpPr>
+        <p:spPr>
+          <a:xfrm>
+            <a:off x="5669280" y="3776980"/>
             <a:ext cx="6065215" cy="274320"/>
           </a:xfrm>
           <a:prstGeom prst="rect">
@@ -6160,14 +6315,14 @@
       </p:sp>
       <p:sp>
         <p:nvSpPr>
-          <p:cNvPr id="23" name="Text 19"/>
-          <p:cNvSpPr/>
-          <p:nvPr/>
-        </p:nvSpPr>
-        <p:spPr>
-          <a:xfrm>
-            <a:off x="5779008" y="3667760"/>
-            <a:ext cx="5845759" cy="274320"/>
+          <p:cNvPr id="24" name="Text 19"/>
+          <p:cNvSpPr/>
+          <p:nvPr/>
+        </p:nvSpPr>
+        <p:spPr>
+          <a:xfrm>
+            <a:off x="5788152" y="3776980"/>
+            <a:ext cx="5827471" cy="274320"/>
           </a:xfrm>
           <a:prstGeom prst="rect">
             <a:avLst/>
@@ -6187,9 +6342,9 @@
                 <a:solidFill>
                   <a:srgbClr val="FFFFFF"/>
                 </a:solidFill>
-                <a:latin typeface="Arial" pitchFamily="34" charset="0"/>
-                <a:ea typeface="Arial" pitchFamily="34" charset="-122"/>
-                <a:cs typeface="Arial" pitchFamily="34" charset="-120"/>
+                <a:latin typeface="Segoe UI" pitchFamily="34" charset="0"/>
+                <a:ea typeface="Segoe UI" pitchFamily="34" charset="-122"/>
+                <a:cs typeface="Segoe UI" pitchFamily="34" charset="-120"/>
               </a:rPr>
               <a:t>WHAT THE CARE TEAM SEES</a:t>
             </a:r>
@@ -6199,14 +6354,14 @@
       </p:sp>
       <p:sp>
         <p:nvSpPr>
-          <p:cNvPr id="24" name="Shape 20"/>
-          <p:cNvSpPr/>
-          <p:nvPr/>
-        </p:nvSpPr>
-        <p:spPr>
-          <a:xfrm>
-            <a:off x="5669280" y="3942080"/>
-            <a:ext cx="6065215" cy="542036"/>
+          <p:cNvPr id="25" name="Shape 20"/>
+          <p:cNvSpPr/>
+          <p:nvPr/>
+        </p:nvSpPr>
+        <p:spPr>
+          <a:xfrm>
+            <a:off x="5669280" y="4051300"/>
+            <a:ext cx="6065215" cy="547624"/>
           </a:xfrm>
           <a:prstGeom prst="rect">
             <a:avLst/>
@@ -6224,14 +6379,14 @@
       </p:sp>
       <p:sp>
         <p:nvSpPr>
-          <p:cNvPr id="25" name="Text 21"/>
-          <p:cNvSpPr/>
-          <p:nvPr/>
-        </p:nvSpPr>
-        <p:spPr>
-          <a:xfrm>
-            <a:off x="5779008" y="3978656"/>
-            <a:ext cx="5845759" cy="487172"/>
+          <p:cNvPr id="26" name="Text 21"/>
+          <p:cNvSpPr/>
+          <p:nvPr/>
+        </p:nvSpPr>
+        <p:spPr>
+          <a:xfrm>
+            <a:off x="5788152" y="4087876"/>
+            <a:ext cx="5827471" cy="492760"/>
           </a:xfrm>
           <a:prstGeom prst="rect">
             <a:avLst/>
@@ -6249,11 +6404,11 @@
             <a:r>
               <a:rPr lang="en-US" sz="1100" dirty="0">
                 <a:solidFill>
-                  <a:srgbClr val="231F20"/>
-                </a:solidFill>
-                <a:latin typeface="Arial" pitchFamily="34" charset="0"/>
-                <a:ea typeface="Arial" pitchFamily="34" charset="-122"/>
-                <a:cs typeface="Arial" pitchFamily="34" charset="-120"/>
+                  <a:srgbClr val="212B32"/>
+                </a:solidFill>
+                <a:latin typeface="Segoe UI" pitchFamily="34" charset="0"/>
+                <a:ea typeface="Segoe UI" pitchFamily="34" charset="-122"/>
+                <a:cs typeface="Segoe UI" pitchFamily="34" charset="-120"/>
               </a:rPr>
               <a:t>The supplier shipping the kit. The lab. The platform writing the result back. Layla, on her own timetable.</a:t>
             </a:r>
@@ -6263,14 +6418,14 @@
       </p:sp>
       <p:sp>
         <p:nvSpPr>
-          <p:cNvPr id="27" name="Text 22"/>
-          <p:cNvSpPr/>
-          <p:nvPr/>
-        </p:nvSpPr>
-        <p:spPr>
-          <a:xfrm>
-            <a:off x="457200" y="6473952"/>
-            <a:ext cx="3108960" cy="274320"/>
+          <p:cNvPr id="28" name="Text 22"/>
+          <p:cNvSpPr/>
+          <p:nvPr/>
+        </p:nvSpPr>
+        <p:spPr>
+          <a:xfrm>
+            <a:off x="457200" y="6455664"/>
+            <a:ext cx="4206240" cy="274320"/>
           </a:xfrm>
           <a:prstGeom prst="rect">
             <a:avLst/>
@@ -6290,9 +6445,9 @@
                 <a:solidFill>
                   <a:srgbClr val="7E8B97"/>
                 </a:solidFill>
-                <a:latin typeface="Arial" pitchFamily="34" charset="0"/>
-                <a:ea typeface="Arial" pitchFamily="34" charset="-122"/>
-                <a:cs typeface="Arial" pitchFamily="34" charset="-120"/>
+                <a:latin typeface="Segoe UI" pitchFamily="34" charset="0"/>
+                <a:ea typeface="Segoe UI" pitchFamily="34" charset="-122"/>
+                <a:cs typeface="Segoe UI" pitchFamily="34" charset="-120"/>
               </a:rPr>
               <a:t>Layla  ·  Hearts and Minds</a:t>
             </a:r>
@@ -6302,14 +6457,14 @@
       </p:sp>
       <p:sp>
         <p:nvSpPr>
-          <p:cNvPr id="28" name="Text 23"/>
-          <p:cNvSpPr/>
-          <p:nvPr/>
-        </p:nvSpPr>
-        <p:spPr>
-          <a:xfrm>
-            <a:off x="3657600" y="6473952"/>
-            <a:ext cx="7528255" cy="274320"/>
+          <p:cNvPr id="29" name="Text 23"/>
+          <p:cNvSpPr/>
+          <p:nvPr/>
+        </p:nvSpPr>
+        <p:spPr>
+          <a:xfrm>
+            <a:off x="4754880" y="6455664"/>
+            <a:ext cx="6430975" cy="274320"/>
           </a:xfrm>
           <a:prstGeom prst="rect">
             <a:avLst/>
@@ -6329,9 +6484,9 @@
                 <a:solidFill>
                   <a:srgbClr val="7E8B97"/>
                 </a:solidFill>
-                <a:latin typeface="Arial" pitchFamily="34" charset="0"/>
-                <a:ea typeface="Arial" pitchFamily="34" charset="-122"/>
-                <a:cs typeface="Arial" pitchFamily="34" charset="-120"/>
+                <a:latin typeface="Segoe UI" pitchFamily="34" charset="0"/>
+                <a:ea typeface="Segoe UI" pitchFamily="34" charset="-122"/>
+                <a:cs typeface="Segoe UI" pitchFamily="34" charset="-120"/>
               </a:rPr>
               <a:t>Commercial positions are agreed in principle and remain subject to the live procurement.</a:t>
             </a:r>
@@ -6341,14 +6496,14 @@
       </p:sp>
       <p:sp>
         <p:nvSpPr>
-          <p:cNvPr id="29" name="Text 24"/>
-          <p:cNvSpPr/>
-          <p:nvPr/>
-        </p:nvSpPr>
-        <p:spPr>
-          <a:xfrm>
-            <a:off x="11368735" y="6473952"/>
-            <a:ext cx="365760" cy="274320"/>
+          <p:cNvPr id="30" name="Text 24"/>
+          <p:cNvSpPr/>
+          <p:nvPr/>
+        </p:nvSpPr>
+        <p:spPr>
+          <a:xfrm>
+            <a:off x="11323015" y="6455664"/>
+            <a:ext cx="411480" cy="274320"/>
           </a:xfrm>
           <a:prstGeom prst="rect">
             <a:avLst/>
@@ -6368,9 +6523,9 @@
                 <a:solidFill>
                   <a:srgbClr val="7E8B97"/>
                 </a:solidFill>
-                <a:latin typeface="Arial" pitchFamily="34" charset="0"/>
-                <a:ea typeface="Arial" pitchFamily="34" charset="-122"/>
-                <a:cs typeface="Arial" pitchFamily="34" charset="-120"/>
+                <a:latin typeface="Segoe UI" pitchFamily="34" charset="0"/>
+                <a:ea typeface="Segoe UI" pitchFamily="34" charset="-122"/>
+                <a:cs typeface="Segoe UI" pitchFamily="34" charset="-120"/>
               </a:rPr>
               <a:t>5</a:t>
             </a:r>
@@ -6410,137 +6565,9 @@
           <a:chExt cx="0" cy="0"/>
         </a:xfrm>
       </p:grpSpPr>
-      <p:sp>
-        <p:nvSpPr>
-          <p:cNvPr id="2" name="Shape 0"/>
-          <p:cNvSpPr/>
-          <p:nvPr/>
-        </p:nvSpPr>
-        <p:spPr>
-          <a:xfrm>
-            <a:off x="0" y="0"/>
-            <a:ext cx="12191695" cy="868680"/>
-          </a:xfrm>
-          <a:prstGeom prst="rect">
-            <a:avLst/>
-          </a:prstGeom>
-          <a:solidFill>
-            <a:srgbClr val="003087"/>
-          </a:solidFill>
-          <a:ln w="12700">
-            <a:solidFill>
-              <a:srgbClr val="003087"/>
-            </a:solidFill>
-            <a:prstDash val="solid"/>
-          </a:ln>
-        </p:spPr>
-      </p:sp>
-      <p:sp>
-        <p:nvSpPr>
-          <p:cNvPr id="3" name="Shape 1"/>
-          <p:cNvSpPr/>
-          <p:nvPr/>
-        </p:nvSpPr>
-        <p:spPr>
-          <a:xfrm>
-            <a:off x="0" y="868680"/>
-            <a:ext cx="12191695" cy="54864"/>
-          </a:xfrm>
-          <a:prstGeom prst="rect">
-            <a:avLst/>
-          </a:prstGeom>
-          <a:solidFill>
-            <a:srgbClr val="FFB91D"/>
-          </a:solidFill>
-          <a:ln w="12700">
-            <a:solidFill>
-              <a:srgbClr val="FFB91D"/>
-            </a:solidFill>
-            <a:prstDash val="solid"/>
-          </a:ln>
-        </p:spPr>
-      </p:sp>
-      <p:sp>
-        <p:nvSpPr>
-          <p:cNvPr id="4" name="Text 2"/>
-          <p:cNvSpPr/>
-          <p:nvPr/>
-        </p:nvSpPr>
-        <p:spPr>
-          <a:xfrm>
-            <a:off x="457200" y="128016"/>
-            <a:ext cx="8686800" cy="256032"/>
-          </a:xfrm>
-          <a:prstGeom prst="rect">
-            <a:avLst/>
-          </a:prstGeom>
-          <a:noFill/>
-          <a:ln/>
-        </p:spPr>
-        <p:txBody>
-          <a:bodyPr wrap="square" lIns="0" tIns="0" rIns="0" bIns="0" rtlCol="0" anchor="ctr"/>
-          <a:lstStyle/>
-          <a:p>
-            <a:pPr indent="0" marL="0">
-              <a:buNone/>
-            </a:pPr>
-            <a:r>
-              <a:rPr lang="en-US" sz="950" b="1" spc="200" kern="0" dirty="0">
-                <a:solidFill>
-                  <a:srgbClr val="7EC8E3"/>
-                </a:solidFill>
-                <a:latin typeface="Arial" pitchFamily="34" charset="0"/>
-                <a:ea typeface="Arial" pitchFamily="34" charset="-122"/>
-                <a:cs typeface="Arial" pitchFamily="34" charset="-120"/>
-              </a:rPr>
-              <a:t>HEARTS AND MINDS  ·  LAYLA'S JOURNEY  ·  STAGE 4 OF 5</a:t>
-            </a:r>
-            <a:endParaRPr lang="en-US" sz="950" dirty="0"/>
-          </a:p>
-        </p:txBody>
-      </p:sp>
-      <p:sp>
-        <p:nvSpPr>
-          <p:cNvPr id="5" name="Text 3"/>
-          <p:cNvSpPr/>
-          <p:nvPr/>
-        </p:nvSpPr>
-        <p:spPr>
-          <a:xfrm>
-            <a:off x="457200" y="384048"/>
-            <a:ext cx="9601200" cy="411480"/>
-          </a:xfrm>
-          <a:prstGeom prst="rect">
-            <a:avLst/>
-          </a:prstGeom>
-          <a:noFill/>
-          <a:ln/>
-        </p:spPr>
-        <p:txBody>
-          <a:bodyPr wrap="square" lIns="0" tIns="0" rIns="0" bIns="0" rtlCol="0" anchor="ctr"/>
-          <a:lstStyle/>
-          <a:p>
-            <a:pPr indent="0" marL="0">
-              <a:buNone/>
-            </a:pPr>
-            <a:r>
-              <a:rPr lang="en-US" sz="2000" b="1" dirty="0">
-                <a:solidFill>
-                  <a:srgbClr val="FFFFFF"/>
-                </a:solidFill>
-                <a:latin typeface="Arial" pitchFamily="34" charset="0"/>
-                <a:ea typeface="Arial" pitchFamily="34" charset="-122"/>
-                <a:cs typeface="Arial" pitchFamily="34" charset="-120"/>
-              </a:rPr>
-              <a:t>Treatment, the dose follows the ferritin</a:t>
-            </a:r>
-            <a:endParaRPr lang="en-US" sz="2000" dirty="0"/>
-          </a:p>
-        </p:txBody>
-      </p:sp>
       <p:pic>
         <p:nvPicPr>
-          <p:cNvPr id="6" name="Image 0" descr="/sessions/quirky-zen-galileo/mnt/outputs/deckbuild/nhs_logo.png">    </p:cNvPr>
+          <p:cNvPr id="2" name="Image 0" descr="/sessions/quirky-zen-galileo/mnt/NHS/07 Sites &amp; Repos/dtx-ecosystem/hearts-and-minds/_generators/assets/bg-band.jpg">    </p:cNvPr>
           <p:cNvPicPr>
             <a:picLocks noChangeAspect="1"/>
           </p:cNvPicPr>
@@ -6554,8 +6581,8 @@
         </p:blipFill>
         <p:spPr>
           <a:xfrm>
-            <a:off x="10774375" y="201168"/>
-            <a:ext cx="960120" cy="393192"/>
+            <a:off x="0" y="0"/>
+            <a:ext cx="12191695" cy="932688"/>
           </a:xfrm>
           <a:prstGeom prst="rect">
             <a:avLst/>
@@ -6564,119 +6591,14 @@
       </p:pic>
       <p:sp>
         <p:nvSpPr>
-          <p:cNvPr id="7" name="Text 4"/>
-          <p:cNvSpPr/>
-          <p:nvPr/>
-        </p:nvSpPr>
-        <p:spPr>
-          <a:xfrm>
-            <a:off x="429768" y="1024128"/>
-            <a:ext cx="1463040" cy="868680"/>
-          </a:xfrm>
-          <a:prstGeom prst="rect">
-            <a:avLst/>
-          </a:prstGeom>
-          <a:noFill/>
-          <a:ln/>
-        </p:spPr>
-        <p:txBody>
-          <a:bodyPr wrap="square" lIns="0" tIns="0" rIns="0" bIns="0" rtlCol="0" anchor="ctr"/>
-          <a:lstStyle/>
-          <a:p>
-            <a:pPr indent="0" marL="0">
-              <a:buNone/>
-            </a:pPr>
-            <a:r>
-              <a:rPr lang="en-US" sz="5200" b="1" dirty="0">
-                <a:solidFill>
-                  <a:srgbClr val="FFB91D"/>
-                </a:solidFill>
-                <a:latin typeface="Arial" pitchFamily="34" charset="0"/>
-                <a:ea typeface="Arial" pitchFamily="34" charset="-122"/>
-                <a:cs typeface="Arial" pitchFamily="34" charset="-120"/>
-              </a:rPr>
-              <a:t>04</a:t>
-            </a:r>
-            <a:endParaRPr lang="en-US" sz="5200" dirty="0"/>
-          </a:p>
-        </p:txBody>
-      </p:sp>
-      <p:sp>
-        <p:nvSpPr>
-          <p:cNvPr id="8" name="Text 5"/>
-          <p:cNvSpPr/>
-          <p:nvPr/>
-        </p:nvSpPr>
-        <p:spPr>
-          <a:xfrm>
-            <a:off x="457200" y="1920240"/>
-            <a:ext cx="4892040" cy="1207008"/>
-          </a:xfrm>
-          <a:prstGeom prst="rect">
-            <a:avLst/>
-          </a:prstGeom>
-          <a:noFill/>
-          <a:ln/>
-        </p:spPr>
-        <p:txBody>
-          <a:bodyPr wrap="square" lIns="0" tIns="0" rIns="0" bIns="0" rtlCol="0" anchor="t">
-            <a:normAutofit/>
-          </a:bodyPr>
-          <a:lstStyle/>
-          <a:p>
-            <a:pPr indent="0" marL="0">
-              <a:buNone/>
-            </a:pPr>
-            <a:r>
-              <a:rPr lang="en-US" sz="1200" b="1" dirty="0">
-                <a:solidFill>
-                  <a:srgbClr val="003087"/>
-                </a:solidFill>
-                <a:latin typeface="Arial" pitchFamily="34" charset="0"/>
-                <a:ea typeface="Arial" pitchFamily="34" charset="-122"/>
-                <a:cs typeface="Arial" pitchFamily="34" charset="-120"/>
-              </a:rPr>
-              <a:t>Hannah reviews the haemoglobin and ferritin against the previous cycles. This time the ferritin has plateaued below target, so the dose is adjusted and a note goes to Layla. Same clinical decision as an in-clinic sample would have prompted, with one difference: it happened on time, so the trend was still readable.</a:t>
-            </a:r>
-            <a:endParaRPr lang="en-US" sz="1200" dirty="0"/>
-          </a:p>
-        </p:txBody>
-      </p:sp>
-      <p:sp>
-        <p:nvSpPr>
-          <p:cNvPr id="9" name="Shape 6"/>
-          <p:cNvSpPr/>
-          <p:nvPr/>
-        </p:nvSpPr>
-        <p:spPr>
-          <a:xfrm>
-            <a:off x="457200" y="3236976"/>
-            <a:ext cx="4892040" cy="812800"/>
-          </a:xfrm>
-          <a:prstGeom prst="rect">
-            <a:avLst/>
-          </a:prstGeom>
-          <a:solidFill>
-            <a:srgbClr val="F0F4F5"/>
-          </a:solidFill>
-          <a:ln w="12700">
-            <a:solidFill>
-              <a:srgbClr val="F0F4F5"/>
-            </a:solidFill>
-            <a:prstDash val="solid"/>
-          </a:ln>
-        </p:spPr>
-      </p:sp>
-      <p:sp>
-        <p:nvSpPr>
-          <p:cNvPr id="10" name="Shape 7"/>
-          <p:cNvSpPr/>
-          <p:nvPr/>
-        </p:nvSpPr>
-        <p:spPr>
-          <a:xfrm>
-            <a:off x="457200" y="3236976"/>
-            <a:ext cx="82296" cy="812800"/>
+          <p:cNvPr id="3" name="Shape 0"/>
+          <p:cNvSpPr/>
+          <p:nvPr/>
+        </p:nvSpPr>
+        <p:spPr>
+          <a:xfrm>
+            <a:off x="0" y="932688"/>
+            <a:ext cx="12191695" cy="50292"/>
           </a:xfrm>
           <a:prstGeom prst="rect">
             <a:avLst/>
@@ -6694,23 +6616,62 @@
       </p:sp>
       <p:sp>
         <p:nvSpPr>
-          <p:cNvPr id="11" name="Text 8"/>
-          <p:cNvSpPr/>
-          <p:nvPr/>
-        </p:nvSpPr>
-        <p:spPr>
-          <a:xfrm>
-            <a:off x="685800" y="3291840"/>
-            <a:ext cx="4526280" cy="447040"/>
-          </a:xfrm>
-          <a:prstGeom prst="rect">
-            <a:avLst/>
-          </a:prstGeom>
-          <a:noFill/>
-          <a:ln/>
-        </p:spPr>
-        <p:txBody>
-          <a:bodyPr wrap="square" lIns="0" tIns="0" rIns="0" bIns="0" rtlCol="0" anchor="t">
+          <p:cNvPr id="4" name="Text 1"/>
+          <p:cNvSpPr/>
+          <p:nvPr/>
+        </p:nvSpPr>
+        <p:spPr>
+          <a:xfrm>
+            <a:off x="502920" y="137160"/>
+            <a:ext cx="8595360" cy="256032"/>
+          </a:xfrm>
+          <a:prstGeom prst="rect">
+            <a:avLst/>
+          </a:prstGeom>
+          <a:noFill/>
+          <a:ln/>
+        </p:spPr>
+        <p:txBody>
+          <a:bodyPr wrap="square" lIns="0" tIns="0" rIns="0" bIns="0" rtlCol="0" anchor="ctr"/>
+          <a:lstStyle/>
+          <a:p>
+            <a:pPr indent="0" marL="0">
+              <a:buNone/>
+            </a:pPr>
+            <a:r>
+              <a:rPr lang="en-US" sz="950" b="1" spc="240" kern="0" dirty="0">
+                <a:solidFill>
+                  <a:srgbClr val="FFD66B"/>
+                </a:solidFill>
+                <a:latin typeface="Segoe UI" pitchFamily="34" charset="0"/>
+                <a:ea typeface="Segoe UI" pitchFamily="34" charset="-122"/>
+                <a:cs typeface="Segoe UI" pitchFamily="34" charset="-120"/>
+              </a:rPr>
+              <a:t>HEARTS AND MINDS  ·  LAYLA’S JOURNEY  ·  STAGE 4 OF 5</a:t>
+            </a:r>
+            <a:endParaRPr lang="en-US" sz="950" dirty="0"/>
+          </a:p>
+        </p:txBody>
+      </p:sp>
+      <p:sp>
+        <p:nvSpPr>
+          <p:cNvPr id="5" name="Text 2"/>
+          <p:cNvSpPr/>
+          <p:nvPr/>
+        </p:nvSpPr>
+        <p:spPr>
+          <a:xfrm>
+            <a:off x="502920" y="402336"/>
+            <a:ext cx="9509760" cy="457200"/>
+          </a:xfrm>
+          <a:prstGeom prst="rect">
+            <a:avLst/>
+          </a:prstGeom>
+          <a:noFill/>
+          <a:ln/>
+        </p:spPr>
+        <p:txBody>
+          <a:bodyPr wrap="square" lIns="0" tIns="0" rIns="0" bIns="0" rtlCol="0" anchor="ctr">
             <a:normAutofit/>
           </a:bodyPr>
           <a:lstStyle/>
@@ -6719,62 +6680,50 @@
               <a:buNone/>
             </a:pPr>
             <a:r>
-              <a:rPr lang="en-US" sz="1000" i="1" dirty="0">
-                <a:solidFill>
-                  <a:srgbClr val="231F20"/>
-                </a:solidFill>
-                <a:latin typeface="Arial" pitchFamily="34" charset="0"/>
-                <a:ea typeface="Arial" pitchFamily="34" charset="-122"/>
-                <a:cs typeface="Arial" pitchFamily="34" charset="-120"/>
-              </a:rPr>
-              <a:t>“A message from the practice: we are changing your dose, here is why, the new prescription is at the pharmacy. I read it on my break.”</a:t>
-            </a:r>
-            <a:endParaRPr lang="en-US" sz="1000" dirty="0"/>
-          </a:p>
-        </p:txBody>
-      </p:sp>
-      <p:sp>
-        <p:nvSpPr>
-          <p:cNvPr id="12" name="Text 9"/>
-          <p:cNvSpPr/>
-          <p:nvPr/>
-        </p:nvSpPr>
-        <p:spPr>
-          <a:xfrm>
-            <a:off x="685800" y="3738880"/>
-            <a:ext cx="4526280" cy="256032"/>
-          </a:xfrm>
-          <a:prstGeom prst="rect">
-            <a:avLst/>
-          </a:prstGeom>
-          <a:noFill/>
-          <a:ln/>
-        </p:spPr>
-        <p:txBody>
-          <a:bodyPr wrap="square" lIns="0" tIns="0" rIns="0" bIns="0" rtlCol="0" anchor="ctr"/>
-          <a:lstStyle/>
-          <a:p>
-            <a:pPr indent="0" marL="0">
-              <a:buNone/>
-            </a:pPr>
-            <a:r>
-              <a:rPr lang="en-US" sz="950" b="1" dirty="0">
-                <a:solidFill>
-                  <a:srgbClr val="8A6D1F"/>
-                </a:solidFill>
-                <a:latin typeface="Arial" pitchFamily="34" charset="0"/>
-                <a:ea typeface="Arial" pitchFamily="34" charset="-122"/>
-                <a:cs typeface="Arial" pitchFamily="34" charset="-120"/>
-              </a:rPr>
-              <a:t>Layla</a:t>
-            </a:r>
-            <a:endParaRPr lang="en-US" sz="950" dirty="0"/>
-          </a:p>
-        </p:txBody>
+              <a:rPr lang="en-US" sz="2100" b="1" dirty="0">
+                <a:solidFill>
+                  <a:srgbClr val="FFFFFF"/>
+                </a:solidFill>
+                <a:latin typeface="Segoe UI" pitchFamily="34" charset="0"/>
+                <a:ea typeface="Segoe UI" pitchFamily="34" charset="-122"/>
+                <a:cs typeface="Segoe UI" pitchFamily="34" charset="-120"/>
+              </a:rPr>
+              <a:t>Treatment, the dose follows the ferritin</a:t>
+            </a:r>
+            <a:endParaRPr lang="en-US" sz="2100" dirty="0"/>
+          </a:p>
+        </p:txBody>
+      </p:sp>
+      <p:sp>
+        <p:nvSpPr>
+          <p:cNvPr id="6" name="Shape 3"/>
+          <p:cNvSpPr/>
+          <p:nvPr/>
+        </p:nvSpPr>
+        <p:spPr>
+          <a:xfrm>
+            <a:off x="10942806" y="173736"/>
+            <a:ext cx="791689" cy="605699"/>
+          </a:xfrm>
+          <a:prstGeom prst="roundRect">
+            <a:avLst>
+              <a:gd name="adj" fmla="val 12077"/>
+            </a:avLst>
+          </a:prstGeom>
+          <a:solidFill>
+            <a:srgbClr val="FFFFFF"/>
+          </a:solidFill>
+          <a:ln w="12700">
+            <a:solidFill>
+              <a:srgbClr val="FFFFFF"/>
+            </a:solidFill>
+            <a:prstDash val="solid"/>
+          </a:ln>
+        </p:spPr>
       </p:sp>
       <p:pic>
         <p:nvPicPr>
-          <p:cNvPr id="13" name="Image 1" descr="/sessions/quirky-zen-galileo/mnt/outputs/hmdecks5/img/layla-stage4.jpg">    </p:cNvPr>
+          <p:cNvPr id="7" name="Image 1" descr="/sessions/quirky-zen-galileo/mnt/NHS/07 Sites &amp; Repos/dtx-ecosystem/hearts-and-minds/_generators/assets/nhs-logo.png">    </p:cNvPr>
           <p:cNvPicPr>
             <a:picLocks noChangeAspect="1"/>
           </p:cNvPicPr>
@@ -6788,8 +6737,8 @@
         </p:blipFill>
         <p:spPr>
           <a:xfrm>
-            <a:off x="457200" y="4214368"/>
-            <a:ext cx="3720761" cy="2076704"/>
+            <a:off x="11068993" y="266273"/>
+            <a:ext cx="539315" cy="420624"/>
           </a:xfrm>
           <a:prstGeom prst="rect">
             <a:avLst/>
@@ -6798,13 +6747,246 @@
       </p:pic>
       <p:sp>
         <p:nvSpPr>
-          <p:cNvPr id="14" name="Shape 10"/>
-          <p:cNvSpPr/>
-          <p:nvPr/>
-        </p:nvSpPr>
-        <p:spPr>
-          <a:xfrm>
-            <a:off x="5669280" y="1097280"/>
+          <p:cNvPr id="8" name="Text 4"/>
+          <p:cNvSpPr/>
+          <p:nvPr/>
+        </p:nvSpPr>
+        <p:spPr>
+          <a:xfrm>
+            <a:off x="429768" y="1129284"/>
+            <a:ext cx="1463040" cy="841248"/>
+          </a:xfrm>
+          <a:prstGeom prst="rect">
+            <a:avLst/>
+          </a:prstGeom>
+          <a:noFill/>
+          <a:ln/>
+        </p:spPr>
+        <p:txBody>
+          <a:bodyPr wrap="square" lIns="0" tIns="0" rIns="0" bIns="0" rtlCol="0" anchor="ctr"/>
+          <a:lstStyle/>
+          <a:p>
+            <a:pPr indent="0" marL="0">
+              <a:buNone/>
+            </a:pPr>
+            <a:r>
+              <a:rPr lang="en-US" sz="5000" b="1" spc="-100" kern="0" dirty="0">
+                <a:solidFill>
+                  <a:srgbClr val="FFB91D"/>
+                </a:solidFill>
+                <a:latin typeface="Segoe UI" pitchFamily="34" charset="0"/>
+                <a:ea typeface="Segoe UI" pitchFamily="34" charset="-122"/>
+                <a:cs typeface="Segoe UI" pitchFamily="34" charset="-120"/>
+              </a:rPr>
+              <a:t>04</a:t>
+            </a:r>
+            <a:endParaRPr lang="en-US" sz="5000" dirty="0"/>
+          </a:p>
+        </p:txBody>
+      </p:sp>
+      <p:sp>
+        <p:nvSpPr>
+          <p:cNvPr id="9" name="Text 5"/>
+          <p:cNvSpPr/>
+          <p:nvPr/>
+        </p:nvSpPr>
+        <p:spPr>
+          <a:xfrm>
+            <a:off x="457200" y="2007108"/>
+            <a:ext cx="4892040" cy="996950"/>
+          </a:xfrm>
+          <a:prstGeom prst="rect">
+            <a:avLst/>
+          </a:prstGeom>
+          <a:noFill/>
+          <a:ln/>
+        </p:spPr>
+        <p:txBody>
+          <a:bodyPr wrap="square" lIns="0" tIns="0" rIns="0" bIns="0" rtlCol="0" anchor="t">
+            <a:normAutofit/>
+          </a:bodyPr>
+          <a:lstStyle/>
+          <a:p>
+            <a:pPr indent="0" marL="0">
+              <a:buNone/>
+            </a:pPr>
+            <a:r>
+              <a:rPr lang="en-US" sz="1150" b="1" dirty="0">
+                <a:solidFill>
+                  <a:srgbClr val="003087"/>
+                </a:solidFill>
+                <a:latin typeface="Segoe UI" pitchFamily="34" charset="0"/>
+                <a:ea typeface="Segoe UI" pitchFamily="34" charset="-122"/>
+                <a:cs typeface="Segoe UI" pitchFamily="34" charset="-120"/>
+              </a:rPr>
+              <a:t>Hannah reviews the haemoglobin and ferritin against the previous cycles. This time the ferritin has plateaued below target, so the dose is adjusted and a note goes to Layla. Same clinical decision as an in-clinic sample would have prompted, with one difference: it happened on time, so the trend was still readable.</a:t>
+            </a:r>
+            <a:endParaRPr lang="en-US" sz="1150" dirty="0"/>
+          </a:p>
+        </p:txBody>
+      </p:sp>
+      <p:sp>
+        <p:nvSpPr>
+          <p:cNvPr id="10" name="Shape 6"/>
+          <p:cNvSpPr/>
+          <p:nvPr/>
+        </p:nvSpPr>
+        <p:spPr>
+          <a:xfrm>
+            <a:off x="457200" y="3132074"/>
+            <a:ext cx="4892040" cy="1051560"/>
+          </a:xfrm>
+          <a:prstGeom prst="rect">
+            <a:avLst/>
+          </a:prstGeom>
+          <a:solidFill>
+            <a:srgbClr val="F8FAFC"/>
+          </a:solidFill>
+          <a:ln w="12700">
+            <a:solidFill>
+              <a:srgbClr val="F8FAFC"/>
+            </a:solidFill>
+            <a:prstDash val="solid"/>
+          </a:ln>
+        </p:spPr>
+      </p:sp>
+      <p:sp>
+        <p:nvSpPr>
+          <p:cNvPr id="11" name="Shape 7"/>
+          <p:cNvSpPr/>
+          <p:nvPr/>
+        </p:nvSpPr>
+        <p:spPr>
+          <a:xfrm>
+            <a:off x="457200" y="3132074"/>
+            <a:ext cx="82296" cy="1051560"/>
+          </a:xfrm>
+          <a:prstGeom prst="rect">
+            <a:avLst/>
+          </a:prstGeom>
+          <a:solidFill>
+            <a:srgbClr val="FFB91D"/>
+          </a:solidFill>
+          <a:ln w="12700">
+            <a:solidFill>
+              <a:srgbClr val="FFB91D"/>
+            </a:solidFill>
+            <a:prstDash val="solid"/>
+          </a:ln>
+        </p:spPr>
+      </p:sp>
+      <p:sp>
+        <p:nvSpPr>
+          <p:cNvPr id="12" name="Text 8"/>
+          <p:cNvSpPr/>
+          <p:nvPr/>
+        </p:nvSpPr>
+        <p:spPr>
+          <a:xfrm>
+            <a:off x="694944" y="3196082"/>
+            <a:ext cx="4507992" cy="667512"/>
+          </a:xfrm>
+          <a:prstGeom prst="rect">
+            <a:avLst/>
+          </a:prstGeom>
+          <a:noFill/>
+          <a:ln/>
+        </p:spPr>
+        <p:txBody>
+          <a:bodyPr wrap="square" lIns="0" tIns="0" rIns="0" bIns="0" rtlCol="0" anchor="t">
+            <a:normAutofit/>
+          </a:bodyPr>
+          <a:lstStyle/>
+          <a:p>
+            <a:pPr indent="0" marL="0">
+              <a:buNone/>
+            </a:pPr>
+            <a:r>
+              <a:rPr lang="en-US" sz="1150" i="1" dirty="0">
+                <a:solidFill>
+                  <a:srgbClr val="212B32"/>
+                </a:solidFill>
+                <a:latin typeface="Segoe UI" pitchFamily="34" charset="0"/>
+                <a:ea typeface="Segoe UI" pitchFamily="34" charset="-122"/>
+                <a:cs typeface="Segoe UI" pitchFamily="34" charset="-120"/>
+              </a:rPr>
+              <a:t>“A message from the practice: we are changing your dose, here is why, the new prescription is at the pharmacy. I read it on my break.”</a:t>
+            </a:r>
+            <a:endParaRPr lang="en-US" sz="1150" dirty="0"/>
+          </a:p>
+        </p:txBody>
+      </p:sp>
+      <p:sp>
+        <p:nvSpPr>
+          <p:cNvPr id="13" name="Text 9"/>
+          <p:cNvSpPr/>
+          <p:nvPr/>
+        </p:nvSpPr>
+        <p:spPr>
+          <a:xfrm>
+            <a:off x="694944" y="3863594"/>
+            <a:ext cx="4507992" cy="256032"/>
+          </a:xfrm>
+          <a:prstGeom prst="rect">
+            <a:avLst/>
+          </a:prstGeom>
+          <a:noFill/>
+          <a:ln/>
+        </p:spPr>
+        <p:txBody>
+          <a:bodyPr wrap="square" lIns="0" tIns="0" rIns="0" bIns="0" rtlCol="0" anchor="ctr"/>
+          <a:lstStyle/>
+          <a:p>
+            <a:pPr indent="0" marL="0">
+              <a:buNone/>
+            </a:pPr>
+            <a:r>
+              <a:rPr lang="en-US" sz="950" b="1" dirty="0">
+                <a:solidFill>
+                  <a:srgbClr val="8A6D1F"/>
+                </a:solidFill>
+                <a:latin typeface="Segoe UI" pitchFamily="34" charset="0"/>
+                <a:ea typeface="Segoe UI" pitchFamily="34" charset="-122"/>
+                <a:cs typeface="Segoe UI" pitchFamily="34" charset="-120"/>
+              </a:rPr>
+              <a:t>Layla</a:t>
+            </a:r>
+            <a:endParaRPr lang="en-US" sz="950" dirty="0"/>
+          </a:p>
+        </p:txBody>
+      </p:sp>
+      <p:pic>
+        <p:nvPicPr>
+          <p:cNvPr id="14" name="Image 2" descr="/sessions/quirky-zen-galileo/mnt/outputs/jd/img/layla-stage4.jpg">    </p:cNvPr>
+          <p:cNvPicPr>
+            <a:picLocks noChangeAspect="1"/>
+          </p:cNvPicPr>
+          <p:nvPr/>
+        </p:nvPicPr>
+        <p:blipFill>
+          <a:blip r:embed="rId3"/>
+          <a:srcRect l="0" r="0" t="0" b="0"/>
+          <a:stretch/>
+        </p:blipFill>
+        <p:spPr>
+          <a:xfrm>
+            <a:off x="457200" y="4366514"/>
+            <a:ext cx="4892040" cy="1924558"/>
+          </a:xfrm>
+          <a:prstGeom prst="rect">
+            <a:avLst/>
+          </a:prstGeom>
+        </p:spPr>
+      </p:pic>
+      <p:sp>
+        <p:nvSpPr>
+          <p:cNvPr id="15" name="Shape 10"/>
+          <p:cNvSpPr/>
+          <p:nvPr/>
+        </p:nvSpPr>
+        <p:spPr>
+          <a:xfrm>
+            <a:off x="5669280" y="1184148"/>
             <a:ext cx="6065215" cy="274320"/>
           </a:xfrm>
           <a:prstGeom prst="rect">
@@ -6823,14 +7005,14 @@
       </p:sp>
       <p:sp>
         <p:nvSpPr>
-          <p:cNvPr id="15" name="Text 11"/>
-          <p:cNvSpPr/>
-          <p:nvPr/>
-        </p:nvSpPr>
-        <p:spPr>
-          <a:xfrm>
-            <a:off x="5779008" y="1097280"/>
-            <a:ext cx="5845759" cy="274320"/>
+          <p:cNvPr id="16" name="Text 11"/>
+          <p:cNvSpPr/>
+          <p:nvPr/>
+        </p:nvSpPr>
+        <p:spPr>
+          <a:xfrm>
+            <a:off x="5788152" y="1184148"/>
+            <a:ext cx="5827471" cy="274320"/>
           </a:xfrm>
           <a:prstGeom prst="rect">
             <a:avLst/>
@@ -6850,9 +7032,9 @@
                 <a:solidFill>
                   <a:srgbClr val="FFFFFF"/>
                 </a:solidFill>
-                <a:latin typeface="Arial" pitchFamily="34" charset="0"/>
-                <a:ea typeface="Arial" pitchFamily="34" charset="-122"/>
-                <a:cs typeface="Arial" pitchFamily="34" charset="-120"/>
+                <a:latin typeface="Segoe UI" pitchFamily="34" charset="0"/>
+                <a:ea typeface="Segoe UI" pitchFamily="34" charset="-122"/>
+                <a:cs typeface="Segoe UI" pitchFamily="34" charset="-120"/>
               </a:rPr>
               <a:t>WHAT THE MODEL IS DOING UNDERNEATH</a:t>
             </a:r>
@@ -6862,14 +7044,14 @@
       </p:sp>
       <p:sp>
         <p:nvSpPr>
-          <p:cNvPr id="16" name="Shape 12"/>
-          <p:cNvSpPr/>
-          <p:nvPr/>
-        </p:nvSpPr>
-        <p:spPr>
-          <a:xfrm>
-            <a:off x="5669280" y="1371600"/>
-            <a:ext cx="6065215" cy="882904"/>
+          <p:cNvPr id="17" name="Shape 12"/>
+          <p:cNvSpPr/>
+          <p:nvPr/>
+        </p:nvSpPr>
+        <p:spPr>
+          <a:xfrm>
+            <a:off x="5669280" y="1458468"/>
+            <a:ext cx="6065215" cy="894080"/>
           </a:xfrm>
           <a:prstGeom prst="rect">
             <a:avLst/>
@@ -6887,14 +7069,14 @@
       </p:sp>
       <p:sp>
         <p:nvSpPr>
-          <p:cNvPr id="17" name="Text 13"/>
-          <p:cNvSpPr/>
-          <p:nvPr/>
-        </p:nvSpPr>
-        <p:spPr>
-          <a:xfrm>
-            <a:off x="5779008" y="1408176"/>
-            <a:ext cx="5845759" cy="828040"/>
+          <p:cNvPr id="18" name="Text 13"/>
+          <p:cNvSpPr/>
+          <p:nvPr/>
+        </p:nvSpPr>
+        <p:spPr>
+          <a:xfrm>
+            <a:off x="5788152" y="1495044"/>
+            <a:ext cx="5827471" cy="839216"/>
           </a:xfrm>
           <a:prstGeom prst="rect">
             <a:avLst/>
@@ -6912,11 +7094,11 @@
             <a:r>
               <a:rPr lang="en-US" sz="1100" dirty="0">
                 <a:solidFill>
-                  <a:srgbClr val="231F20"/>
-                </a:solidFill>
-                <a:latin typeface="Arial" pitchFamily="34" charset="0"/>
-                <a:ea typeface="Arial" pitchFamily="34" charset="-122"/>
-                <a:cs typeface="Arial" pitchFamily="34" charset="-120"/>
+                  <a:srgbClr val="212B32"/>
+                </a:solidFill>
+                <a:latin typeface="Segoe UI" pitchFamily="34" charset="0"/>
+                <a:ea typeface="Segoe UI" pitchFamily="34" charset="-122"/>
+                <a:cs typeface="Segoe UI" pitchFamily="34" charset="-120"/>
               </a:rPr>
               <a:t>The treatment pathway is NICE-guideline-aligned and unchanged by the home venue: iron supplementation is titrated to the FBC and ferritin response, and the GP holds prescribing accountability. What the home cycle adds is timeliness. A dose that needs changing gets changed at six months, not at fourteen.</a:t>
             </a:r>
@@ -6926,13 +7108,13 @@
       </p:sp>
       <p:sp>
         <p:nvSpPr>
-          <p:cNvPr id="18" name="Shape 14"/>
-          <p:cNvSpPr/>
-          <p:nvPr/>
-        </p:nvSpPr>
-        <p:spPr>
-          <a:xfrm>
-            <a:off x="5669280" y="2382520"/>
+          <p:cNvPr id="19" name="Shape 14"/>
+          <p:cNvSpPr/>
+          <p:nvPr/>
+        </p:nvSpPr>
+        <p:spPr>
+          <a:xfrm>
+            <a:off x="5669280" y="2480564"/>
             <a:ext cx="6065215" cy="274320"/>
           </a:xfrm>
           <a:prstGeom prst="rect">
@@ -6951,14 +7133,14 @@
       </p:sp>
       <p:sp>
         <p:nvSpPr>
-          <p:cNvPr id="19" name="Text 15"/>
-          <p:cNvSpPr/>
-          <p:nvPr/>
-        </p:nvSpPr>
-        <p:spPr>
-          <a:xfrm>
-            <a:off x="5779008" y="2382520"/>
-            <a:ext cx="5845759" cy="274320"/>
+          <p:cNvPr id="20" name="Text 15"/>
+          <p:cNvSpPr/>
+          <p:nvPr/>
+        </p:nvSpPr>
+        <p:spPr>
+          <a:xfrm>
+            <a:off x="5788152" y="2480564"/>
+            <a:ext cx="5827471" cy="274320"/>
           </a:xfrm>
           <a:prstGeom prst="rect">
             <a:avLst/>
@@ -6978,9 +7160,9 @@
                 <a:solidFill>
                   <a:srgbClr val="FFFFFF"/>
                 </a:solidFill>
-                <a:latin typeface="Arial" pitchFamily="34" charset="0"/>
-                <a:ea typeface="Arial" pitchFamily="34" charset="-122"/>
-                <a:cs typeface="Arial" pitchFamily="34" charset="-120"/>
+                <a:latin typeface="Segoe UI" pitchFamily="34" charset="0"/>
+                <a:ea typeface="Segoe UI" pitchFamily="34" charset="-122"/>
+                <a:cs typeface="Segoe UI" pitchFamily="34" charset="-120"/>
               </a:rPr>
               <a:t>THE OLD WAY</a:t>
             </a:r>
@@ -6990,24 +7172,24 @@
       </p:sp>
       <p:sp>
         <p:nvSpPr>
-          <p:cNvPr id="20" name="Shape 16"/>
-          <p:cNvSpPr/>
-          <p:nvPr/>
-        </p:nvSpPr>
-        <p:spPr>
-          <a:xfrm>
-            <a:off x="5669280" y="2656840"/>
-            <a:ext cx="6065215" cy="542036"/>
-          </a:xfrm>
-          <a:prstGeom prst="rect">
-            <a:avLst/>
-          </a:prstGeom>
-          <a:solidFill>
-            <a:srgbClr val="F0F4F5"/>
+          <p:cNvPr id="21" name="Shape 16"/>
+          <p:cNvSpPr/>
+          <p:nvPr/>
+        </p:nvSpPr>
+        <p:spPr>
+          <a:xfrm>
+            <a:off x="5669280" y="2754884"/>
+            <a:ext cx="6065215" cy="547624"/>
+          </a:xfrm>
+          <a:prstGeom prst="rect">
+            <a:avLst/>
+          </a:prstGeom>
+          <a:solidFill>
+            <a:srgbClr val="F8FAFC"/>
           </a:solidFill>
           <a:ln w="12700">
             <a:solidFill>
-              <a:srgbClr val="F0F4F5"/>
+              <a:srgbClr val="F8FAFC"/>
             </a:solidFill>
             <a:prstDash val="solid"/>
           </a:ln>
@@ -7015,14 +7197,14 @@
       </p:sp>
       <p:sp>
         <p:nvSpPr>
-          <p:cNvPr id="21" name="Text 17"/>
-          <p:cNvSpPr/>
-          <p:nvPr/>
-        </p:nvSpPr>
-        <p:spPr>
-          <a:xfrm>
-            <a:off x="5779008" y="2693416"/>
-            <a:ext cx="5845759" cy="487172"/>
+          <p:cNvPr id="22" name="Text 17"/>
+          <p:cNvSpPr/>
+          <p:nvPr/>
+        </p:nvSpPr>
+        <p:spPr>
+          <a:xfrm>
+            <a:off x="5788152" y="2791460"/>
+            <a:ext cx="5827471" cy="492760"/>
           </a:xfrm>
           <a:prstGeom prst="rect">
             <a:avLst/>
@@ -7040,11 +7222,11 @@
             <a:r>
               <a:rPr lang="en-US" sz="1100" dirty="0">
                 <a:solidFill>
-                  <a:srgbClr val="231F20"/>
-                </a:solidFill>
-                <a:latin typeface="Arial" pitchFamily="34" charset="0"/>
-                <a:ea typeface="Arial" pitchFamily="34" charset="-122"/>
-                <a:cs typeface="Arial" pitchFamily="34" charset="-120"/>
+                  <a:srgbClr val="212B32"/>
+                </a:solidFill>
+                <a:latin typeface="Segoe UI" pitchFamily="34" charset="0"/>
+                <a:ea typeface="Segoe UI" pitchFamily="34" charset="-122"/>
+                <a:cs typeface="Segoe UI" pitchFamily="34" charset="-120"/>
               </a:rPr>
               <a:t>A result reviewed months late, if at all, and a dose change made on a trend with a hole in it.</a:t>
             </a:r>
@@ -7054,13 +7236,13 @@
       </p:sp>
       <p:sp>
         <p:nvSpPr>
-          <p:cNvPr id="22" name="Shape 18"/>
-          <p:cNvSpPr/>
-          <p:nvPr/>
-        </p:nvSpPr>
-        <p:spPr>
-          <a:xfrm>
-            <a:off x="5669280" y="3326892"/>
+          <p:cNvPr id="23" name="Shape 18"/>
+          <p:cNvSpPr/>
+          <p:nvPr/>
+        </p:nvSpPr>
+        <p:spPr>
+          <a:xfrm>
+            <a:off x="5669280" y="3430524"/>
             <a:ext cx="6065215" cy="274320"/>
           </a:xfrm>
           <a:prstGeom prst="rect">
@@ -7079,14 +7261,14 @@
       </p:sp>
       <p:sp>
         <p:nvSpPr>
-          <p:cNvPr id="23" name="Text 19"/>
-          <p:cNvSpPr/>
-          <p:nvPr/>
-        </p:nvSpPr>
-        <p:spPr>
-          <a:xfrm>
-            <a:off x="5779008" y="3326892"/>
-            <a:ext cx="5845759" cy="274320"/>
+          <p:cNvPr id="24" name="Text 19"/>
+          <p:cNvSpPr/>
+          <p:nvPr/>
+        </p:nvSpPr>
+        <p:spPr>
+          <a:xfrm>
+            <a:off x="5788152" y="3430524"/>
+            <a:ext cx="5827471" cy="274320"/>
           </a:xfrm>
           <a:prstGeom prst="rect">
             <a:avLst/>
@@ -7106,9 +7288,9 @@
                 <a:solidFill>
                   <a:srgbClr val="FFFFFF"/>
                 </a:solidFill>
-                <a:latin typeface="Arial" pitchFamily="34" charset="0"/>
-                <a:ea typeface="Arial" pitchFamily="34" charset="-122"/>
-                <a:cs typeface="Arial" pitchFamily="34" charset="-120"/>
+                <a:latin typeface="Segoe UI" pitchFamily="34" charset="0"/>
+                <a:ea typeface="Segoe UI" pitchFamily="34" charset="-122"/>
+                <a:cs typeface="Segoe UI" pitchFamily="34" charset="-120"/>
               </a:rPr>
               <a:t>WHAT THE CARE TEAM SEES</a:t>
             </a:r>
@@ -7118,14 +7300,14 @@
       </p:sp>
       <p:sp>
         <p:nvSpPr>
-          <p:cNvPr id="24" name="Shape 20"/>
-          <p:cNvSpPr/>
-          <p:nvPr/>
-        </p:nvSpPr>
-        <p:spPr>
-          <a:xfrm>
-            <a:off x="5669280" y="3601212"/>
-            <a:ext cx="6065215" cy="542036"/>
+          <p:cNvPr id="25" name="Shape 20"/>
+          <p:cNvSpPr/>
+          <p:nvPr/>
+        </p:nvSpPr>
+        <p:spPr>
+          <a:xfrm>
+            <a:off x="5669280" y="3704844"/>
+            <a:ext cx="6065215" cy="547624"/>
           </a:xfrm>
           <a:prstGeom prst="rect">
             <a:avLst/>
@@ -7143,14 +7325,14 @@
       </p:sp>
       <p:sp>
         <p:nvSpPr>
-          <p:cNvPr id="25" name="Text 21"/>
-          <p:cNvSpPr/>
-          <p:nvPr/>
-        </p:nvSpPr>
-        <p:spPr>
-          <a:xfrm>
-            <a:off x="5779008" y="3637788"/>
-            <a:ext cx="5845759" cy="487172"/>
+          <p:cNvPr id="26" name="Text 21"/>
+          <p:cNvSpPr/>
+          <p:nvPr/>
+        </p:nvSpPr>
+        <p:spPr>
+          <a:xfrm>
+            <a:off x="5788152" y="3741420"/>
+            <a:ext cx="5827471" cy="492760"/>
           </a:xfrm>
           <a:prstGeom prst="rect">
             <a:avLst/>
@@ -7168,11 +7350,11 @@
             <a:r>
               <a:rPr lang="en-US" sz="1100" dirty="0">
                 <a:solidFill>
-                  <a:srgbClr val="231F20"/>
-                </a:solidFill>
-                <a:latin typeface="Arial" pitchFamily="34" charset="0"/>
-                <a:ea typeface="Arial" pitchFamily="34" charset="-122"/>
-                <a:cs typeface="Arial" pitchFamily="34" charset="-120"/>
+                  <a:srgbClr val="212B32"/>
+                </a:solidFill>
+                <a:latin typeface="Segoe UI" pitchFamily="34" charset="0"/>
+                <a:ea typeface="Segoe UI" pitchFamily="34" charset="-122"/>
+                <a:cs typeface="Segoe UI" pitchFamily="34" charset="-120"/>
               </a:rPr>
               <a:t>Hannah. Practice pharmacist for the dose change. The community pharmacy that already has her prescription.</a:t>
             </a:r>
@@ -7182,14 +7364,14 @@
       </p:sp>
       <p:sp>
         <p:nvSpPr>
-          <p:cNvPr id="27" name="Text 22"/>
-          <p:cNvSpPr/>
-          <p:nvPr/>
-        </p:nvSpPr>
-        <p:spPr>
-          <a:xfrm>
-            <a:off x="457200" y="6473952"/>
-            <a:ext cx="3108960" cy="274320"/>
+          <p:cNvPr id="28" name="Text 22"/>
+          <p:cNvSpPr/>
+          <p:nvPr/>
+        </p:nvSpPr>
+        <p:spPr>
+          <a:xfrm>
+            <a:off x="457200" y="6455664"/>
+            <a:ext cx="4206240" cy="274320"/>
           </a:xfrm>
           <a:prstGeom prst="rect">
             <a:avLst/>
@@ -7209,9 +7391,9 @@
                 <a:solidFill>
                   <a:srgbClr val="7E8B97"/>
                 </a:solidFill>
-                <a:latin typeface="Arial" pitchFamily="34" charset="0"/>
-                <a:ea typeface="Arial" pitchFamily="34" charset="-122"/>
-                <a:cs typeface="Arial" pitchFamily="34" charset="-120"/>
+                <a:latin typeface="Segoe UI" pitchFamily="34" charset="0"/>
+                <a:ea typeface="Segoe UI" pitchFamily="34" charset="-122"/>
+                <a:cs typeface="Segoe UI" pitchFamily="34" charset="-120"/>
               </a:rPr>
               <a:t>Layla  ·  Hearts and Minds</a:t>
             </a:r>
@@ -7221,14 +7403,14 @@
       </p:sp>
       <p:sp>
         <p:nvSpPr>
-          <p:cNvPr id="28" name="Text 23"/>
-          <p:cNvSpPr/>
-          <p:nvPr/>
-        </p:nvSpPr>
-        <p:spPr>
-          <a:xfrm>
-            <a:off x="3657600" y="6473952"/>
-            <a:ext cx="7528255" cy="274320"/>
+          <p:cNvPr id="29" name="Text 23"/>
+          <p:cNvSpPr/>
+          <p:nvPr/>
+        </p:nvSpPr>
+        <p:spPr>
+          <a:xfrm>
+            <a:off x="4754880" y="6455664"/>
+            <a:ext cx="6430975" cy="274320"/>
           </a:xfrm>
           <a:prstGeom prst="rect">
             <a:avLst/>
@@ -7248,9 +7430,9 @@
                 <a:solidFill>
                   <a:srgbClr val="7E8B97"/>
                 </a:solidFill>
-                <a:latin typeface="Arial" pitchFamily="34" charset="0"/>
-                <a:ea typeface="Arial" pitchFamily="34" charset="-122"/>
-                <a:cs typeface="Arial" pitchFamily="34" charset="-120"/>
+                <a:latin typeface="Segoe UI" pitchFamily="34" charset="0"/>
+                <a:ea typeface="Segoe UI" pitchFamily="34" charset="-122"/>
+                <a:cs typeface="Segoe UI" pitchFamily="34" charset="-120"/>
               </a:rPr>
               <a:t>Commercial positions are agreed in principle and remain subject to the live procurement.</a:t>
             </a:r>
@@ -7260,14 +7442,14 @@
       </p:sp>
       <p:sp>
         <p:nvSpPr>
-          <p:cNvPr id="29" name="Text 24"/>
-          <p:cNvSpPr/>
-          <p:nvPr/>
-        </p:nvSpPr>
-        <p:spPr>
-          <a:xfrm>
-            <a:off x="11368735" y="6473952"/>
-            <a:ext cx="365760" cy="274320"/>
+          <p:cNvPr id="30" name="Text 24"/>
+          <p:cNvSpPr/>
+          <p:nvPr/>
+        </p:nvSpPr>
+        <p:spPr>
+          <a:xfrm>
+            <a:off x="11323015" y="6455664"/>
+            <a:ext cx="411480" cy="274320"/>
           </a:xfrm>
           <a:prstGeom prst="rect">
             <a:avLst/>
@@ -7287,9 +7469,9 @@
                 <a:solidFill>
                   <a:srgbClr val="7E8B97"/>
                 </a:solidFill>
-                <a:latin typeface="Arial" pitchFamily="34" charset="0"/>
-                <a:ea typeface="Arial" pitchFamily="34" charset="-122"/>
-                <a:cs typeface="Arial" pitchFamily="34" charset="-120"/>
+                <a:latin typeface="Segoe UI" pitchFamily="34" charset="0"/>
+                <a:ea typeface="Segoe UI" pitchFamily="34" charset="-122"/>
+                <a:cs typeface="Segoe UI" pitchFamily="34" charset="-120"/>
               </a:rPr>
               <a:t>6</a:t>
             </a:r>
@@ -7329,137 +7511,9 @@
           <a:chExt cx="0" cy="0"/>
         </a:xfrm>
       </p:grpSpPr>
-      <p:sp>
-        <p:nvSpPr>
-          <p:cNvPr id="2" name="Shape 0"/>
-          <p:cNvSpPr/>
-          <p:nvPr/>
-        </p:nvSpPr>
-        <p:spPr>
-          <a:xfrm>
-            <a:off x="0" y="0"/>
-            <a:ext cx="12191695" cy="868680"/>
-          </a:xfrm>
-          <a:prstGeom prst="rect">
-            <a:avLst/>
-          </a:prstGeom>
-          <a:solidFill>
-            <a:srgbClr val="003087"/>
-          </a:solidFill>
-          <a:ln w="12700">
-            <a:solidFill>
-              <a:srgbClr val="003087"/>
-            </a:solidFill>
-            <a:prstDash val="solid"/>
-          </a:ln>
-        </p:spPr>
-      </p:sp>
-      <p:sp>
-        <p:nvSpPr>
-          <p:cNvPr id="3" name="Shape 1"/>
-          <p:cNvSpPr/>
-          <p:nvPr/>
-        </p:nvSpPr>
-        <p:spPr>
-          <a:xfrm>
-            <a:off x="0" y="868680"/>
-            <a:ext cx="12191695" cy="54864"/>
-          </a:xfrm>
-          <a:prstGeom prst="rect">
-            <a:avLst/>
-          </a:prstGeom>
-          <a:solidFill>
-            <a:srgbClr val="FFB91D"/>
-          </a:solidFill>
-          <a:ln w="12700">
-            <a:solidFill>
-              <a:srgbClr val="FFB91D"/>
-            </a:solidFill>
-            <a:prstDash val="solid"/>
-          </a:ln>
-        </p:spPr>
-      </p:sp>
-      <p:sp>
-        <p:nvSpPr>
-          <p:cNvPr id="4" name="Text 2"/>
-          <p:cNvSpPr/>
-          <p:nvPr/>
-        </p:nvSpPr>
-        <p:spPr>
-          <a:xfrm>
-            <a:off x="457200" y="128016"/>
-            <a:ext cx="8686800" cy="256032"/>
-          </a:xfrm>
-          <a:prstGeom prst="rect">
-            <a:avLst/>
-          </a:prstGeom>
-          <a:noFill/>
-          <a:ln/>
-        </p:spPr>
-        <p:txBody>
-          <a:bodyPr wrap="square" lIns="0" tIns="0" rIns="0" bIns="0" rtlCol="0" anchor="ctr"/>
-          <a:lstStyle/>
-          <a:p>
-            <a:pPr indent="0" marL="0">
-              <a:buNone/>
-            </a:pPr>
-            <a:r>
-              <a:rPr lang="en-US" sz="950" b="1" spc="200" kern="0" dirty="0">
-                <a:solidFill>
-                  <a:srgbClr val="7EC8E3"/>
-                </a:solidFill>
-                <a:latin typeface="Arial" pitchFamily="34" charset="0"/>
-                <a:ea typeface="Arial" pitchFamily="34" charset="-122"/>
-                <a:cs typeface="Arial" pitchFamily="34" charset="-120"/>
-              </a:rPr>
-              <a:t>HEARTS AND MINDS  ·  LAYLA'S JOURNEY  ·  STAGE 5 OF 5</a:t>
-            </a:r>
-            <a:endParaRPr lang="en-US" sz="950" dirty="0"/>
-          </a:p>
-        </p:txBody>
-      </p:sp>
-      <p:sp>
-        <p:nvSpPr>
-          <p:cNvPr id="5" name="Text 3"/>
-          <p:cNvSpPr/>
-          <p:nvPr/>
-        </p:nvSpPr>
-        <p:spPr>
-          <a:xfrm>
-            <a:off x="457200" y="384048"/>
-            <a:ext cx="9601200" cy="411480"/>
-          </a:xfrm>
-          <a:prstGeom prst="rect">
-            <a:avLst/>
-          </a:prstGeom>
-          <a:noFill/>
-          <a:ln/>
-        </p:spPr>
-        <p:txBody>
-          <a:bodyPr wrap="square" lIns="0" tIns="0" rIns="0" bIns="0" rtlCol="0" anchor="ctr"/>
-          <a:lstStyle/>
-          <a:p>
-            <a:pPr indent="0" marL="0">
-              <a:buNone/>
-            </a:pPr>
-            <a:r>
-              <a:rPr lang="en-US" sz="2000" b="1" dirty="0">
-                <a:solidFill>
-                  <a:srgbClr val="FFFFFF"/>
-                </a:solidFill>
-                <a:latin typeface="Arial" pitchFamily="34" charset="0"/>
-                <a:ea typeface="Arial" pitchFamily="34" charset="-122"/>
-                <a:cs typeface="Arial" pitchFamily="34" charset="-120"/>
-              </a:rPr>
-              <a:t>Long-term optimisation, silence as the good result</a:t>
-            </a:r>
-            <a:endParaRPr lang="en-US" sz="2000" dirty="0"/>
-          </a:p>
-        </p:txBody>
-      </p:sp>
       <p:pic>
         <p:nvPicPr>
-          <p:cNvPr id="6" name="Image 0" descr="/sessions/quirky-zen-galileo/mnt/outputs/deckbuild/nhs_logo.png">    </p:cNvPr>
+          <p:cNvPr id="2" name="Image 0" descr="/sessions/quirky-zen-galileo/mnt/NHS/07 Sites &amp; Repos/dtx-ecosystem/hearts-and-minds/_generators/assets/bg-band.jpg">    </p:cNvPr>
           <p:cNvPicPr>
             <a:picLocks noChangeAspect="1"/>
           </p:cNvPicPr>
@@ -7473,8 +7527,8 @@
         </p:blipFill>
         <p:spPr>
           <a:xfrm>
-            <a:off x="10774375" y="201168"/>
-            <a:ext cx="960120" cy="393192"/>
+            <a:off x="0" y="0"/>
+            <a:ext cx="12191695" cy="932688"/>
           </a:xfrm>
           <a:prstGeom prst="rect">
             <a:avLst/>
@@ -7483,119 +7537,14 @@
       </p:pic>
       <p:sp>
         <p:nvSpPr>
-          <p:cNvPr id="7" name="Text 4"/>
-          <p:cNvSpPr/>
-          <p:nvPr/>
-        </p:nvSpPr>
-        <p:spPr>
-          <a:xfrm>
-            <a:off x="429768" y="1024128"/>
-            <a:ext cx="1463040" cy="868680"/>
-          </a:xfrm>
-          <a:prstGeom prst="rect">
-            <a:avLst/>
-          </a:prstGeom>
-          <a:noFill/>
-          <a:ln/>
-        </p:spPr>
-        <p:txBody>
-          <a:bodyPr wrap="square" lIns="0" tIns="0" rIns="0" bIns="0" rtlCol="0" anchor="ctr"/>
-          <a:lstStyle/>
-          <a:p>
-            <a:pPr indent="0" marL="0">
-              <a:buNone/>
-            </a:pPr>
-            <a:r>
-              <a:rPr lang="en-US" sz="5200" b="1" dirty="0">
-                <a:solidFill>
-                  <a:srgbClr val="FFB91D"/>
-                </a:solidFill>
-                <a:latin typeface="Arial" pitchFamily="34" charset="0"/>
-                <a:ea typeface="Arial" pitchFamily="34" charset="-122"/>
-                <a:cs typeface="Arial" pitchFamily="34" charset="-120"/>
-              </a:rPr>
-              <a:t>05</a:t>
-            </a:r>
-            <a:endParaRPr lang="en-US" sz="5200" dirty="0"/>
-          </a:p>
-        </p:txBody>
-      </p:sp>
-      <p:sp>
-        <p:nvSpPr>
-          <p:cNvPr id="8" name="Text 5"/>
-          <p:cNvSpPr/>
-          <p:nvPr/>
-        </p:nvSpPr>
-        <p:spPr>
-          <a:xfrm>
-            <a:off x="457200" y="1920240"/>
-            <a:ext cx="4892040" cy="1021080"/>
-          </a:xfrm>
-          <a:prstGeom prst="rect">
-            <a:avLst/>
-          </a:prstGeom>
-          <a:noFill/>
-          <a:ln/>
-        </p:spPr>
-        <p:txBody>
-          <a:bodyPr wrap="square" lIns="0" tIns="0" rIns="0" bIns="0" rtlCol="0" anchor="t">
-            <a:normAutofit/>
-          </a:bodyPr>
-          <a:lstStyle/>
-          <a:p>
-            <a:pPr indent="0" marL="0">
-              <a:buNone/>
-            </a:pPr>
-            <a:r>
-              <a:rPr lang="en-US" sz="1200" b="1" dirty="0">
-                <a:solidFill>
-                  <a:srgbClr val="003087"/>
-                </a:solidFill>
-                <a:latin typeface="Arial" pitchFamily="34" charset="0"/>
-                <a:ea typeface="Arial" pitchFamily="34" charset="-122"/>
-                <a:cs typeface="Arial" pitchFamily="34" charset="-120"/>
-              </a:rPr>
-              <a:t>The cycle holds. The next kit is dated for six months, tied to the practice recall rather than to Layla's memory or her rota. If the trend is steady she hears nothing, and nothing is the right answer. If it moves, she hears from Hannah. Either way the practice knows, which is the whole point.</a:t>
-            </a:r>
-            <a:endParaRPr lang="en-US" sz="1200" dirty="0"/>
-          </a:p>
-        </p:txBody>
-      </p:sp>
-      <p:sp>
-        <p:nvSpPr>
-          <p:cNvPr id="9" name="Shape 6"/>
-          <p:cNvSpPr/>
-          <p:nvPr/>
-        </p:nvSpPr>
-        <p:spPr>
-          <a:xfrm>
-            <a:off x="457200" y="3051048"/>
-            <a:ext cx="4892040" cy="944499"/>
-          </a:xfrm>
-          <a:prstGeom prst="rect">
-            <a:avLst/>
-          </a:prstGeom>
-          <a:solidFill>
-            <a:srgbClr val="F0F4F5"/>
-          </a:solidFill>
-          <a:ln w="12700">
-            <a:solidFill>
-              <a:srgbClr val="F0F4F5"/>
-            </a:solidFill>
-            <a:prstDash val="solid"/>
-          </a:ln>
-        </p:spPr>
-      </p:sp>
-      <p:sp>
-        <p:nvSpPr>
-          <p:cNvPr id="10" name="Shape 7"/>
-          <p:cNvSpPr/>
-          <p:nvPr/>
-        </p:nvSpPr>
-        <p:spPr>
-          <a:xfrm>
-            <a:off x="457200" y="3051048"/>
-            <a:ext cx="82296" cy="944499"/>
+          <p:cNvPr id="3" name="Shape 0"/>
+          <p:cNvSpPr/>
+          <p:nvPr/>
+        </p:nvSpPr>
+        <p:spPr>
+          <a:xfrm>
+            <a:off x="0" y="932688"/>
+            <a:ext cx="12191695" cy="50292"/>
           </a:xfrm>
           <a:prstGeom prst="rect">
             <a:avLst/>
@@ -7613,23 +7562,62 @@
       </p:sp>
       <p:sp>
         <p:nvSpPr>
-          <p:cNvPr id="11" name="Text 8"/>
-          <p:cNvSpPr/>
-          <p:nvPr/>
-        </p:nvSpPr>
-        <p:spPr>
-          <a:xfrm>
-            <a:off x="685800" y="3105912"/>
-            <a:ext cx="4526280" cy="578739"/>
-          </a:xfrm>
-          <a:prstGeom prst="rect">
-            <a:avLst/>
-          </a:prstGeom>
-          <a:noFill/>
-          <a:ln/>
-        </p:spPr>
-        <p:txBody>
-          <a:bodyPr wrap="square" lIns="0" tIns="0" rIns="0" bIns="0" rtlCol="0" anchor="t">
+          <p:cNvPr id="4" name="Text 1"/>
+          <p:cNvSpPr/>
+          <p:nvPr/>
+        </p:nvSpPr>
+        <p:spPr>
+          <a:xfrm>
+            <a:off x="502920" y="137160"/>
+            <a:ext cx="8595360" cy="256032"/>
+          </a:xfrm>
+          <a:prstGeom prst="rect">
+            <a:avLst/>
+          </a:prstGeom>
+          <a:noFill/>
+          <a:ln/>
+        </p:spPr>
+        <p:txBody>
+          <a:bodyPr wrap="square" lIns="0" tIns="0" rIns="0" bIns="0" rtlCol="0" anchor="ctr"/>
+          <a:lstStyle/>
+          <a:p>
+            <a:pPr indent="0" marL="0">
+              <a:buNone/>
+            </a:pPr>
+            <a:r>
+              <a:rPr lang="en-US" sz="950" b="1" spc="240" kern="0" dirty="0">
+                <a:solidFill>
+                  <a:srgbClr val="FFD66B"/>
+                </a:solidFill>
+                <a:latin typeface="Segoe UI" pitchFamily="34" charset="0"/>
+                <a:ea typeface="Segoe UI" pitchFamily="34" charset="-122"/>
+                <a:cs typeface="Segoe UI" pitchFamily="34" charset="-120"/>
+              </a:rPr>
+              <a:t>HEARTS AND MINDS  ·  LAYLA’S JOURNEY  ·  STAGE 5 OF 5</a:t>
+            </a:r>
+            <a:endParaRPr lang="en-US" sz="950" dirty="0"/>
+          </a:p>
+        </p:txBody>
+      </p:sp>
+      <p:sp>
+        <p:nvSpPr>
+          <p:cNvPr id="5" name="Text 2"/>
+          <p:cNvSpPr/>
+          <p:nvPr/>
+        </p:nvSpPr>
+        <p:spPr>
+          <a:xfrm>
+            <a:off x="502920" y="402336"/>
+            <a:ext cx="9509760" cy="457200"/>
+          </a:xfrm>
+          <a:prstGeom prst="rect">
+            <a:avLst/>
+          </a:prstGeom>
+          <a:noFill/>
+          <a:ln/>
+        </p:spPr>
+        <p:txBody>
+          <a:bodyPr wrap="square" lIns="0" tIns="0" rIns="0" bIns="0" rtlCol="0" anchor="ctr">
             <a:normAutofit/>
           </a:bodyPr>
           <a:lstStyle/>
@@ -7638,62 +7626,50 @@
               <a:buNone/>
             </a:pPr>
             <a:r>
-              <a:rPr lang="en-US" sz="950" i="1" dirty="0">
-                <a:solidFill>
-                  <a:srgbClr val="231F20"/>
-                </a:solidFill>
-                <a:latin typeface="Arial" pitchFamily="34" charset="0"/>
-                <a:ea typeface="Arial" pitchFamily="34" charset="-122"/>
-                <a:cs typeface="Arial" pitchFamily="34" charset="-120"/>
-              </a:rPr>
-              <a:t>“I used to feel like I was always about to be in trouble with the surgery. Now the only time I hear from them is when there is actually something to say.”</a:t>
-            </a:r>
-            <a:endParaRPr lang="en-US" sz="950" dirty="0"/>
-          </a:p>
-        </p:txBody>
-      </p:sp>
-      <p:sp>
-        <p:nvSpPr>
-          <p:cNvPr id="12" name="Text 9"/>
-          <p:cNvSpPr/>
-          <p:nvPr/>
-        </p:nvSpPr>
-        <p:spPr>
-          <a:xfrm>
-            <a:off x="685800" y="3684651"/>
-            <a:ext cx="4526280" cy="256032"/>
-          </a:xfrm>
-          <a:prstGeom prst="rect">
-            <a:avLst/>
-          </a:prstGeom>
-          <a:noFill/>
-          <a:ln/>
-        </p:spPr>
-        <p:txBody>
-          <a:bodyPr wrap="square" lIns="0" tIns="0" rIns="0" bIns="0" rtlCol="0" anchor="ctr"/>
-          <a:lstStyle/>
-          <a:p>
-            <a:pPr indent="0" marL="0">
-              <a:buNone/>
-            </a:pPr>
-            <a:r>
-              <a:rPr lang="en-US" sz="950" b="1" dirty="0">
-                <a:solidFill>
-                  <a:srgbClr val="8A6D1F"/>
-                </a:solidFill>
-                <a:latin typeface="Arial" pitchFamily="34" charset="0"/>
-                <a:ea typeface="Arial" pitchFamily="34" charset="-122"/>
-                <a:cs typeface="Arial" pitchFamily="34" charset="-120"/>
-              </a:rPr>
-              <a:t>Layla</a:t>
-            </a:r>
-            <a:endParaRPr lang="en-US" sz="950" dirty="0"/>
-          </a:p>
-        </p:txBody>
+              <a:rPr lang="en-US" sz="2100" b="1" dirty="0">
+                <a:solidFill>
+                  <a:srgbClr val="FFFFFF"/>
+                </a:solidFill>
+                <a:latin typeface="Segoe UI" pitchFamily="34" charset="0"/>
+                <a:ea typeface="Segoe UI" pitchFamily="34" charset="-122"/>
+                <a:cs typeface="Segoe UI" pitchFamily="34" charset="-120"/>
+              </a:rPr>
+              <a:t>Long-term optimisation, silence as the good result</a:t>
+            </a:r>
+            <a:endParaRPr lang="en-US" sz="2100" dirty="0"/>
+          </a:p>
+        </p:txBody>
+      </p:sp>
+      <p:sp>
+        <p:nvSpPr>
+          <p:cNvPr id="6" name="Shape 3"/>
+          <p:cNvSpPr/>
+          <p:nvPr/>
+        </p:nvSpPr>
+        <p:spPr>
+          <a:xfrm>
+            <a:off x="10942806" y="173736"/>
+            <a:ext cx="791689" cy="605699"/>
+          </a:xfrm>
+          <a:prstGeom prst="roundRect">
+            <a:avLst>
+              <a:gd name="adj" fmla="val 12077"/>
+            </a:avLst>
+          </a:prstGeom>
+          <a:solidFill>
+            <a:srgbClr val="FFFFFF"/>
+          </a:solidFill>
+          <a:ln w="12700">
+            <a:solidFill>
+              <a:srgbClr val="FFFFFF"/>
+            </a:solidFill>
+            <a:prstDash val="solid"/>
+          </a:ln>
+        </p:spPr>
       </p:sp>
       <p:pic>
         <p:nvPicPr>
-          <p:cNvPr id="13" name="Image 1" descr="/sessions/quirky-zen-galileo/mnt/outputs/hmdecks5/img/layla-stage5.jpg">    </p:cNvPr>
+          <p:cNvPr id="7" name="Image 1" descr="/sessions/quirky-zen-galileo/mnt/NHS/07 Sites &amp; Repos/dtx-ecosystem/hearts-and-minds/_generators/assets/nhs-logo.png">    </p:cNvPr>
           <p:cNvPicPr>
             <a:picLocks noChangeAspect="1"/>
           </p:cNvPicPr>
@@ -7707,8 +7683,8 @@
         </p:blipFill>
         <p:spPr>
           <a:xfrm>
-            <a:off x="457200" y="4160139"/>
-            <a:ext cx="3817922" cy="2130933"/>
+            <a:off x="11068993" y="266273"/>
+            <a:ext cx="539315" cy="420624"/>
           </a:xfrm>
           <a:prstGeom prst="rect">
             <a:avLst/>
@@ -7717,13 +7693,246 @@
       </p:pic>
       <p:sp>
         <p:nvSpPr>
-          <p:cNvPr id="14" name="Shape 10"/>
-          <p:cNvSpPr/>
-          <p:nvPr/>
-        </p:nvSpPr>
-        <p:spPr>
-          <a:xfrm>
-            <a:off x="5669280" y="1097280"/>
+          <p:cNvPr id="8" name="Text 4"/>
+          <p:cNvSpPr/>
+          <p:nvPr/>
+        </p:nvSpPr>
+        <p:spPr>
+          <a:xfrm>
+            <a:off x="429768" y="1129284"/>
+            <a:ext cx="1463040" cy="841248"/>
+          </a:xfrm>
+          <a:prstGeom prst="rect">
+            <a:avLst/>
+          </a:prstGeom>
+          <a:noFill/>
+          <a:ln/>
+        </p:spPr>
+        <p:txBody>
+          <a:bodyPr wrap="square" lIns="0" tIns="0" rIns="0" bIns="0" rtlCol="0" anchor="ctr"/>
+          <a:lstStyle/>
+          <a:p>
+            <a:pPr indent="0" marL="0">
+              <a:buNone/>
+            </a:pPr>
+            <a:r>
+              <a:rPr lang="en-US" sz="5000" b="1" spc="-100" kern="0" dirty="0">
+                <a:solidFill>
+                  <a:srgbClr val="FFB91D"/>
+                </a:solidFill>
+                <a:latin typeface="Segoe UI" pitchFamily="34" charset="0"/>
+                <a:ea typeface="Segoe UI" pitchFamily="34" charset="-122"/>
+                <a:cs typeface="Segoe UI" pitchFamily="34" charset="-120"/>
+              </a:rPr>
+              <a:t>05</a:t>
+            </a:r>
+            <a:endParaRPr lang="en-US" sz="5000" dirty="0"/>
+          </a:p>
+        </p:txBody>
+      </p:sp>
+      <p:sp>
+        <p:nvSpPr>
+          <p:cNvPr id="9" name="Text 5"/>
+          <p:cNvSpPr/>
+          <p:nvPr/>
+        </p:nvSpPr>
+        <p:spPr>
+          <a:xfrm>
+            <a:off x="457200" y="2007108"/>
+            <a:ext cx="4892040" cy="1036320"/>
+          </a:xfrm>
+          <a:prstGeom prst="rect">
+            <a:avLst/>
+          </a:prstGeom>
+          <a:noFill/>
+          <a:ln/>
+        </p:spPr>
+        <p:txBody>
+          <a:bodyPr wrap="square" lIns="0" tIns="0" rIns="0" bIns="0" rtlCol="0" anchor="t">
+            <a:normAutofit/>
+          </a:bodyPr>
+          <a:lstStyle/>
+          <a:p>
+            <a:pPr indent="0" marL="0">
+              <a:buNone/>
+            </a:pPr>
+            <a:r>
+              <a:rPr lang="en-US" sz="1200" b="1" dirty="0">
+                <a:solidFill>
+                  <a:srgbClr val="003087"/>
+                </a:solidFill>
+                <a:latin typeface="Segoe UI" pitchFamily="34" charset="0"/>
+                <a:ea typeface="Segoe UI" pitchFamily="34" charset="-122"/>
+                <a:cs typeface="Segoe UI" pitchFamily="34" charset="-120"/>
+              </a:rPr>
+              <a:t>The cycle holds. The next kit is dated for six months, tied to the practice recall rather than to Layla's memory or her rota. If the trend is steady she hears nothing, and nothing is the right answer. If it moves, she hears from Hannah. Either way the practice knows, which is the whole point.</a:t>
+            </a:r>
+            <a:endParaRPr lang="en-US" sz="1200" dirty="0"/>
+          </a:p>
+        </p:txBody>
+      </p:sp>
+      <p:sp>
+        <p:nvSpPr>
+          <p:cNvPr id="10" name="Shape 6"/>
+          <p:cNvSpPr/>
+          <p:nvPr/>
+        </p:nvSpPr>
+        <p:spPr>
+          <a:xfrm>
+            <a:off x="457200" y="3171444"/>
+            <a:ext cx="4892040" cy="1051560"/>
+          </a:xfrm>
+          <a:prstGeom prst="rect">
+            <a:avLst/>
+          </a:prstGeom>
+          <a:solidFill>
+            <a:srgbClr val="F8FAFC"/>
+          </a:solidFill>
+          <a:ln w="12700">
+            <a:solidFill>
+              <a:srgbClr val="F8FAFC"/>
+            </a:solidFill>
+            <a:prstDash val="solid"/>
+          </a:ln>
+        </p:spPr>
+      </p:sp>
+      <p:sp>
+        <p:nvSpPr>
+          <p:cNvPr id="11" name="Shape 7"/>
+          <p:cNvSpPr/>
+          <p:nvPr/>
+        </p:nvSpPr>
+        <p:spPr>
+          <a:xfrm>
+            <a:off x="457200" y="3171444"/>
+            <a:ext cx="82296" cy="1051560"/>
+          </a:xfrm>
+          <a:prstGeom prst="rect">
+            <a:avLst/>
+          </a:prstGeom>
+          <a:solidFill>
+            <a:srgbClr val="FFB91D"/>
+          </a:solidFill>
+          <a:ln w="12700">
+            <a:solidFill>
+              <a:srgbClr val="FFB91D"/>
+            </a:solidFill>
+            <a:prstDash val="solid"/>
+          </a:ln>
+        </p:spPr>
+      </p:sp>
+      <p:sp>
+        <p:nvSpPr>
+          <p:cNvPr id="12" name="Text 8"/>
+          <p:cNvSpPr/>
+          <p:nvPr/>
+        </p:nvSpPr>
+        <p:spPr>
+          <a:xfrm>
+            <a:off x="694944" y="3235452"/>
+            <a:ext cx="4507992" cy="667512"/>
+          </a:xfrm>
+          <a:prstGeom prst="rect">
+            <a:avLst/>
+          </a:prstGeom>
+          <a:noFill/>
+          <a:ln/>
+        </p:spPr>
+        <p:txBody>
+          <a:bodyPr wrap="square" lIns="0" tIns="0" rIns="0" bIns="0" rtlCol="0" anchor="t">
+            <a:normAutofit/>
+          </a:bodyPr>
+          <a:lstStyle/>
+          <a:p>
+            <a:pPr indent="0" marL="0">
+              <a:buNone/>
+            </a:pPr>
+            <a:r>
+              <a:rPr lang="en-US" sz="1150" i="1" dirty="0">
+                <a:solidFill>
+                  <a:srgbClr val="212B32"/>
+                </a:solidFill>
+                <a:latin typeface="Segoe UI" pitchFamily="34" charset="0"/>
+                <a:ea typeface="Segoe UI" pitchFamily="34" charset="-122"/>
+                <a:cs typeface="Segoe UI" pitchFamily="34" charset="-120"/>
+              </a:rPr>
+              <a:t>“I used to feel like I was always about to be in trouble with the surgery. Now the only time I hear from them is when there is actually something to say.”</a:t>
+            </a:r>
+            <a:endParaRPr lang="en-US" sz="1150" dirty="0"/>
+          </a:p>
+        </p:txBody>
+      </p:sp>
+      <p:sp>
+        <p:nvSpPr>
+          <p:cNvPr id="13" name="Text 9"/>
+          <p:cNvSpPr/>
+          <p:nvPr/>
+        </p:nvSpPr>
+        <p:spPr>
+          <a:xfrm>
+            <a:off x="694944" y="3902964"/>
+            <a:ext cx="4507992" cy="256032"/>
+          </a:xfrm>
+          <a:prstGeom prst="rect">
+            <a:avLst/>
+          </a:prstGeom>
+          <a:noFill/>
+          <a:ln/>
+        </p:spPr>
+        <p:txBody>
+          <a:bodyPr wrap="square" lIns="0" tIns="0" rIns="0" bIns="0" rtlCol="0" anchor="ctr"/>
+          <a:lstStyle/>
+          <a:p>
+            <a:pPr indent="0" marL="0">
+              <a:buNone/>
+            </a:pPr>
+            <a:r>
+              <a:rPr lang="en-US" sz="950" b="1" dirty="0">
+                <a:solidFill>
+                  <a:srgbClr val="8A6D1F"/>
+                </a:solidFill>
+                <a:latin typeface="Segoe UI" pitchFamily="34" charset="0"/>
+                <a:ea typeface="Segoe UI" pitchFamily="34" charset="-122"/>
+                <a:cs typeface="Segoe UI" pitchFamily="34" charset="-120"/>
+              </a:rPr>
+              <a:t>Layla</a:t>
+            </a:r>
+            <a:endParaRPr lang="en-US" sz="950" dirty="0"/>
+          </a:p>
+        </p:txBody>
+      </p:sp>
+      <p:pic>
+        <p:nvPicPr>
+          <p:cNvPr id="14" name="Image 2" descr="/sessions/quirky-zen-galileo/mnt/outputs/jd/img/layla-stage5.jpg">    </p:cNvPr>
+          <p:cNvPicPr>
+            <a:picLocks noChangeAspect="1"/>
+          </p:cNvPicPr>
+          <p:nvPr/>
+        </p:nvPicPr>
+        <p:blipFill>
+          <a:blip r:embed="rId3"/>
+          <a:srcRect l="0" r="0" t="0" b="0"/>
+          <a:stretch/>
+        </p:blipFill>
+        <p:spPr>
+          <a:xfrm>
+            <a:off x="457200" y="4405884"/>
+            <a:ext cx="4892040" cy="1885188"/>
+          </a:xfrm>
+          <a:prstGeom prst="rect">
+            <a:avLst/>
+          </a:prstGeom>
+        </p:spPr>
+      </p:pic>
+      <p:sp>
+        <p:nvSpPr>
+          <p:cNvPr id="15" name="Shape 10"/>
+          <p:cNvSpPr/>
+          <p:nvPr/>
+        </p:nvSpPr>
+        <p:spPr>
+          <a:xfrm>
+            <a:off x="5669280" y="1184148"/>
             <a:ext cx="6065215" cy="274320"/>
           </a:xfrm>
           <a:prstGeom prst="rect">
@@ -7742,14 +7951,14 @@
       </p:sp>
       <p:sp>
         <p:nvSpPr>
-          <p:cNvPr id="15" name="Text 11"/>
-          <p:cNvSpPr/>
-          <p:nvPr/>
-        </p:nvSpPr>
-        <p:spPr>
-          <a:xfrm>
-            <a:off x="5779008" y="1097280"/>
-            <a:ext cx="5845759" cy="274320"/>
+          <p:cNvPr id="16" name="Text 11"/>
+          <p:cNvSpPr/>
+          <p:nvPr/>
+        </p:nvSpPr>
+        <p:spPr>
+          <a:xfrm>
+            <a:off x="5788152" y="1184148"/>
+            <a:ext cx="5827471" cy="274320"/>
           </a:xfrm>
           <a:prstGeom prst="rect">
             <a:avLst/>
@@ -7769,9 +7978,9 @@
                 <a:solidFill>
                   <a:srgbClr val="FFFFFF"/>
                 </a:solidFill>
-                <a:latin typeface="Arial" pitchFamily="34" charset="0"/>
-                <a:ea typeface="Arial" pitchFamily="34" charset="-122"/>
-                <a:cs typeface="Arial" pitchFamily="34" charset="-120"/>
+                <a:latin typeface="Segoe UI" pitchFamily="34" charset="0"/>
+                <a:ea typeface="Segoe UI" pitchFamily="34" charset="-122"/>
+                <a:cs typeface="Segoe UI" pitchFamily="34" charset="-120"/>
               </a:rPr>
               <a:t>WHAT THE MODEL IS DOING UNDERNEATH</a:t>
             </a:r>
@@ -7781,14 +7990,14 @@
       </p:sp>
       <p:sp>
         <p:nvSpPr>
-          <p:cNvPr id="16" name="Shape 12"/>
-          <p:cNvSpPr/>
-          <p:nvPr/>
-        </p:nvSpPr>
-        <p:spPr>
-          <a:xfrm>
-            <a:off x="5669280" y="1371600"/>
-            <a:ext cx="6065215" cy="1223772"/>
+          <p:cNvPr id="17" name="Shape 12"/>
+          <p:cNvSpPr/>
+          <p:nvPr/>
+        </p:nvSpPr>
+        <p:spPr>
+          <a:xfrm>
+            <a:off x="5669280" y="1458468"/>
+            <a:ext cx="6065215" cy="1240536"/>
           </a:xfrm>
           <a:prstGeom prst="rect">
             <a:avLst/>
@@ -7806,14 +8015,14 @@
       </p:sp>
       <p:sp>
         <p:nvSpPr>
-          <p:cNvPr id="17" name="Text 13"/>
-          <p:cNvSpPr/>
-          <p:nvPr/>
-        </p:nvSpPr>
-        <p:spPr>
-          <a:xfrm>
-            <a:off x="5779008" y="1408176"/>
-            <a:ext cx="5845759" cy="1168908"/>
+          <p:cNvPr id="18" name="Text 13"/>
+          <p:cNvSpPr/>
+          <p:nvPr/>
+        </p:nvSpPr>
+        <p:spPr>
+          <a:xfrm>
+            <a:off x="5788152" y="1495044"/>
+            <a:ext cx="5827471" cy="1185672"/>
           </a:xfrm>
           <a:prstGeom prst="rect">
             <a:avLst/>
@@ -7831,11 +8040,11 @@
             <a:r>
               <a:rPr lang="en-US" sz="1100" dirty="0">
                 <a:solidFill>
-                  <a:srgbClr val="231F20"/>
-                </a:solidFill>
-                <a:latin typeface="Arial" pitchFamily="34" charset="0"/>
-                <a:ea typeface="Arial" pitchFamily="34" charset="-122"/>
-                <a:cs typeface="Arial" pitchFamily="34" charset="-120"/>
+                  <a:srgbClr val="212B32"/>
+                </a:solidFill>
+                <a:latin typeface="Segoe UI" pitchFamily="34" charset="0"/>
+                <a:ea typeface="Segoe UI" pitchFamily="34" charset="-122"/>
+                <a:cs typeface="Segoe UI" pitchFamily="34" charset="-120"/>
               </a:rPr>
               <a:t>Sustained monitoring is the clinical outcome for a treated long-term condition. The home cycle keeps the interval honest, surfaces a falling ferritin at the point it can be corrected cheaply, and frees the practice nurse slot for patients who clinically need the room. The illustration ends where the configuration stands: held, low priority under the framework, and able to run on the same rails as every other primary-care cycle if the gate opens.</a:t>
             </a:r>
@@ -7845,13 +8054,13 @@
       </p:sp>
       <p:sp>
         <p:nvSpPr>
-          <p:cNvPr id="18" name="Shape 14"/>
-          <p:cNvSpPr/>
-          <p:nvPr/>
-        </p:nvSpPr>
-        <p:spPr>
-          <a:xfrm>
-            <a:off x="5669280" y="2723388"/>
+          <p:cNvPr id="19" name="Shape 14"/>
+          <p:cNvSpPr/>
+          <p:nvPr/>
+        </p:nvSpPr>
+        <p:spPr>
+          <a:xfrm>
+            <a:off x="5669280" y="2827020"/>
             <a:ext cx="6065215" cy="274320"/>
           </a:xfrm>
           <a:prstGeom prst="rect">
@@ -7870,14 +8079,14 @@
       </p:sp>
       <p:sp>
         <p:nvSpPr>
-          <p:cNvPr id="19" name="Text 15"/>
-          <p:cNvSpPr/>
-          <p:nvPr/>
-        </p:nvSpPr>
-        <p:spPr>
-          <a:xfrm>
-            <a:off x="5779008" y="2723388"/>
-            <a:ext cx="5845759" cy="274320"/>
+          <p:cNvPr id="20" name="Text 15"/>
+          <p:cNvSpPr/>
+          <p:nvPr/>
+        </p:nvSpPr>
+        <p:spPr>
+          <a:xfrm>
+            <a:off x="5788152" y="2827020"/>
+            <a:ext cx="5827471" cy="274320"/>
           </a:xfrm>
           <a:prstGeom prst="rect">
             <a:avLst/>
@@ -7897,9 +8106,9 @@
                 <a:solidFill>
                   <a:srgbClr val="FFFFFF"/>
                 </a:solidFill>
-                <a:latin typeface="Arial" pitchFamily="34" charset="0"/>
-                <a:ea typeface="Arial" pitchFamily="34" charset="-122"/>
-                <a:cs typeface="Arial" pitchFamily="34" charset="-120"/>
+                <a:latin typeface="Segoe UI" pitchFamily="34" charset="0"/>
+                <a:ea typeface="Segoe UI" pitchFamily="34" charset="-122"/>
+                <a:cs typeface="Segoe UI" pitchFamily="34" charset="-120"/>
               </a:rPr>
               <a:t>THE OLD WAY</a:t>
             </a:r>
@@ -7909,24 +8118,24 @@
       </p:sp>
       <p:sp>
         <p:nvSpPr>
-          <p:cNvPr id="20" name="Shape 16"/>
-          <p:cNvSpPr/>
-          <p:nvPr/>
-        </p:nvSpPr>
-        <p:spPr>
-          <a:xfrm>
-            <a:off x="5669280" y="2997708"/>
-            <a:ext cx="6065215" cy="542036"/>
-          </a:xfrm>
-          <a:prstGeom prst="rect">
-            <a:avLst/>
-          </a:prstGeom>
-          <a:solidFill>
-            <a:srgbClr val="F0F4F5"/>
+          <p:cNvPr id="21" name="Shape 16"/>
+          <p:cNvSpPr/>
+          <p:nvPr/>
+        </p:nvSpPr>
+        <p:spPr>
+          <a:xfrm>
+            <a:off x="5669280" y="3101340"/>
+            <a:ext cx="6065215" cy="547624"/>
+          </a:xfrm>
+          <a:prstGeom prst="rect">
+            <a:avLst/>
+          </a:prstGeom>
+          <a:solidFill>
+            <a:srgbClr val="F8FAFC"/>
           </a:solidFill>
           <a:ln w="12700">
             <a:solidFill>
-              <a:srgbClr val="F0F4F5"/>
+              <a:srgbClr val="F8FAFC"/>
             </a:solidFill>
             <a:prstDash val="solid"/>
           </a:ln>
@@ -7934,14 +8143,14 @@
       </p:sp>
       <p:sp>
         <p:nvSpPr>
-          <p:cNvPr id="21" name="Text 17"/>
-          <p:cNvSpPr/>
-          <p:nvPr/>
-        </p:nvSpPr>
-        <p:spPr>
-          <a:xfrm>
-            <a:off x="5779008" y="3034284"/>
-            <a:ext cx="5845759" cy="487172"/>
+          <p:cNvPr id="22" name="Text 17"/>
+          <p:cNvSpPr/>
+          <p:nvPr/>
+        </p:nvSpPr>
+        <p:spPr>
+          <a:xfrm>
+            <a:off x="5788152" y="3137916"/>
+            <a:ext cx="5827471" cy="492760"/>
           </a:xfrm>
           <a:prstGeom prst="rect">
             <a:avLst/>
@@ -7959,11 +8168,11 @@
             <a:r>
               <a:rPr lang="en-US" sz="1100" dirty="0">
                 <a:solidFill>
-                  <a:srgbClr val="231F20"/>
-                </a:solidFill>
-                <a:latin typeface="Arial" pitchFamily="34" charset="0"/>
-                <a:ea typeface="Arial" pitchFamily="34" charset="-122"/>
-                <a:cs typeface="Arial" pitchFamily="34" charset="-120"/>
+                  <a:srgbClr val="212B32"/>
+                </a:solidFill>
+                <a:latin typeface="Segoe UI" pitchFamily="34" charset="0"/>
+                <a:ea typeface="Segoe UI" pitchFamily="34" charset="-122"/>
+                <a:cs typeface="Segoe UI" pitchFamily="34" charset="-120"/>
               </a:rPr>
               <a:t>Drift out of the cycle for a year or two and re-present with a haemoglobin far lower than it needed to be. The risk was always in the interval, not in the patient.</a:t>
             </a:r>
@@ -7973,13 +8182,13 @@
       </p:sp>
       <p:sp>
         <p:nvSpPr>
-          <p:cNvPr id="22" name="Shape 18"/>
-          <p:cNvSpPr/>
-          <p:nvPr/>
-        </p:nvSpPr>
-        <p:spPr>
-          <a:xfrm>
-            <a:off x="5669280" y="3667760"/>
+          <p:cNvPr id="23" name="Shape 18"/>
+          <p:cNvSpPr/>
+          <p:nvPr/>
+        </p:nvSpPr>
+        <p:spPr>
+          <a:xfrm>
+            <a:off x="5669280" y="3776980"/>
             <a:ext cx="6065215" cy="274320"/>
           </a:xfrm>
           <a:prstGeom prst="rect">
@@ -7998,14 +8207,14 @@
       </p:sp>
       <p:sp>
         <p:nvSpPr>
-          <p:cNvPr id="23" name="Text 19"/>
-          <p:cNvSpPr/>
-          <p:nvPr/>
-        </p:nvSpPr>
-        <p:spPr>
-          <a:xfrm>
-            <a:off x="5779008" y="3667760"/>
-            <a:ext cx="5845759" cy="274320"/>
+          <p:cNvPr id="24" name="Text 19"/>
+          <p:cNvSpPr/>
+          <p:nvPr/>
+        </p:nvSpPr>
+        <p:spPr>
+          <a:xfrm>
+            <a:off x="5788152" y="3776980"/>
+            <a:ext cx="5827471" cy="274320"/>
           </a:xfrm>
           <a:prstGeom prst="rect">
             <a:avLst/>
@@ -8025,9 +8234,9 @@
                 <a:solidFill>
                   <a:srgbClr val="FFFFFF"/>
                 </a:solidFill>
-                <a:latin typeface="Arial" pitchFamily="34" charset="0"/>
-                <a:ea typeface="Arial" pitchFamily="34" charset="-122"/>
-                <a:cs typeface="Arial" pitchFamily="34" charset="-120"/>
+                <a:latin typeface="Segoe UI" pitchFamily="34" charset="0"/>
+                <a:ea typeface="Segoe UI" pitchFamily="34" charset="-122"/>
+                <a:cs typeface="Segoe UI" pitchFamily="34" charset="-120"/>
               </a:rPr>
               <a:t>WHAT THE CARE TEAM SEES</a:t>
             </a:r>
@@ -8037,14 +8246,14 @@
       </p:sp>
       <p:sp>
         <p:nvSpPr>
-          <p:cNvPr id="24" name="Shape 20"/>
-          <p:cNvSpPr/>
-          <p:nvPr/>
-        </p:nvSpPr>
-        <p:spPr>
-          <a:xfrm>
-            <a:off x="5669280" y="3942080"/>
-            <a:ext cx="6065215" cy="371602"/>
+          <p:cNvPr id="25" name="Shape 20"/>
+          <p:cNvSpPr/>
+          <p:nvPr/>
+        </p:nvSpPr>
+        <p:spPr>
+          <a:xfrm>
+            <a:off x="5669280" y="4051300"/>
+            <a:ext cx="6065215" cy="374396"/>
           </a:xfrm>
           <a:prstGeom prst="rect">
             <a:avLst/>
@@ -8062,14 +8271,14 @@
       </p:sp>
       <p:sp>
         <p:nvSpPr>
-          <p:cNvPr id="25" name="Text 21"/>
-          <p:cNvSpPr/>
-          <p:nvPr/>
-        </p:nvSpPr>
-        <p:spPr>
-          <a:xfrm>
-            <a:off x="5779008" y="3978656"/>
-            <a:ext cx="5845759" cy="316738"/>
+          <p:cNvPr id="26" name="Text 21"/>
+          <p:cNvSpPr/>
+          <p:nvPr/>
+        </p:nvSpPr>
+        <p:spPr>
+          <a:xfrm>
+            <a:off x="5788152" y="4087876"/>
+            <a:ext cx="5827471" cy="319532"/>
           </a:xfrm>
           <a:prstGeom prst="rect">
             <a:avLst/>
@@ -8087,11 +8296,11 @@
             <a:r>
               <a:rPr lang="en-US" sz="1100" dirty="0">
                 <a:solidFill>
-                  <a:srgbClr val="231F20"/>
-                </a:solidFill>
-                <a:latin typeface="Arial" pitchFamily="34" charset="0"/>
-                <a:ea typeface="Arial" pitchFamily="34" charset="-122"/>
-                <a:cs typeface="Arial" pitchFamily="34" charset="-120"/>
+                  <a:srgbClr val="212B32"/>
+                </a:solidFill>
+                <a:latin typeface="Segoe UI" pitchFamily="34" charset="0"/>
+                <a:ea typeface="Segoe UI" pitchFamily="34" charset="-122"/>
+                <a:cs typeface="Segoe UI" pitchFamily="34" charset="-120"/>
               </a:rPr>
               <a:t>Layla. Hannah. The practice nurse. The platform holding the recall date.</a:t>
             </a:r>
@@ -8101,14 +8310,14 @@
       </p:sp>
       <p:sp>
         <p:nvSpPr>
-          <p:cNvPr id="27" name="Text 22"/>
-          <p:cNvSpPr/>
-          <p:nvPr/>
-        </p:nvSpPr>
-        <p:spPr>
-          <a:xfrm>
-            <a:off x="457200" y="6473952"/>
-            <a:ext cx="3108960" cy="274320"/>
+          <p:cNvPr id="28" name="Text 22"/>
+          <p:cNvSpPr/>
+          <p:nvPr/>
+        </p:nvSpPr>
+        <p:spPr>
+          <a:xfrm>
+            <a:off x="457200" y="6455664"/>
+            <a:ext cx="4206240" cy="274320"/>
           </a:xfrm>
           <a:prstGeom prst="rect">
             <a:avLst/>
@@ -8128,9 +8337,9 @@
                 <a:solidFill>
                   <a:srgbClr val="7E8B97"/>
                 </a:solidFill>
-                <a:latin typeface="Arial" pitchFamily="34" charset="0"/>
-                <a:ea typeface="Arial" pitchFamily="34" charset="-122"/>
-                <a:cs typeface="Arial" pitchFamily="34" charset="-120"/>
+                <a:latin typeface="Segoe UI" pitchFamily="34" charset="0"/>
+                <a:ea typeface="Segoe UI" pitchFamily="34" charset="-122"/>
+                <a:cs typeface="Segoe UI" pitchFamily="34" charset="-120"/>
               </a:rPr>
               <a:t>Layla  ·  Hearts and Minds</a:t>
             </a:r>
@@ -8140,14 +8349,14 @@
       </p:sp>
       <p:sp>
         <p:nvSpPr>
-          <p:cNvPr id="28" name="Text 23"/>
-          <p:cNvSpPr/>
-          <p:nvPr/>
-        </p:nvSpPr>
-        <p:spPr>
-          <a:xfrm>
-            <a:off x="3657600" y="6473952"/>
-            <a:ext cx="7528255" cy="274320"/>
+          <p:cNvPr id="29" name="Text 23"/>
+          <p:cNvSpPr/>
+          <p:nvPr/>
+        </p:nvSpPr>
+        <p:spPr>
+          <a:xfrm>
+            <a:off x="4754880" y="6455664"/>
+            <a:ext cx="6430975" cy="274320"/>
           </a:xfrm>
           <a:prstGeom prst="rect">
             <a:avLst/>
@@ -8167,9 +8376,9 @@
                 <a:solidFill>
                   <a:srgbClr val="7E8B97"/>
                 </a:solidFill>
-                <a:latin typeface="Arial" pitchFamily="34" charset="0"/>
-                <a:ea typeface="Arial" pitchFamily="34" charset="-122"/>
-                <a:cs typeface="Arial" pitchFamily="34" charset="-120"/>
+                <a:latin typeface="Segoe UI" pitchFamily="34" charset="0"/>
+                <a:ea typeface="Segoe UI" pitchFamily="34" charset="-122"/>
+                <a:cs typeface="Segoe UI" pitchFamily="34" charset="-120"/>
               </a:rPr>
               <a:t>Commercial positions are agreed in principle and remain subject to the live procurement.</a:t>
             </a:r>
@@ -8179,14 +8388,14 @@
       </p:sp>
       <p:sp>
         <p:nvSpPr>
-          <p:cNvPr id="29" name="Text 24"/>
-          <p:cNvSpPr/>
-          <p:nvPr/>
-        </p:nvSpPr>
-        <p:spPr>
-          <a:xfrm>
-            <a:off x="11368735" y="6473952"/>
-            <a:ext cx="365760" cy="274320"/>
+          <p:cNvPr id="30" name="Text 24"/>
+          <p:cNvSpPr/>
+          <p:nvPr/>
+        </p:nvSpPr>
+        <p:spPr>
+          <a:xfrm>
+            <a:off x="11323015" y="6455664"/>
+            <a:ext cx="411480" cy="274320"/>
           </a:xfrm>
           <a:prstGeom prst="rect">
             <a:avLst/>
@@ -8206,9 +8415,9 @@
                 <a:solidFill>
                   <a:srgbClr val="7E8B97"/>
                 </a:solidFill>
-                <a:latin typeface="Arial" pitchFamily="34" charset="0"/>
-                <a:ea typeface="Arial" pitchFamily="34" charset="-122"/>
-                <a:cs typeface="Arial" pitchFamily="34" charset="-120"/>
+                <a:latin typeface="Segoe UI" pitchFamily="34" charset="0"/>
+                <a:ea typeface="Segoe UI" pitchFamily="34" charset="-122"/>
+                <a:cs typeface="Segoe UI" pitchFamily="34" charset="-120"/>
               </a:rPr>
               <a:t>7</a:t>
             </a:r>
@@ -8248,137 +8457,9 @@
           <a:chExt cx="0" cy="0"/>
         </a:xfrm>
       </p:grpSpPr>
-      <p:sp>
-        <p:nvSpPr>
-          <p:cNvPr id="2" name="Shape 0"/>
-          <p:cNvSpPr/>
-          <p:nvPr/>
-        </p:nvSpPr>
-        <p:spPr>
-          <a:xfrm>
-            <a:off x="0" y="0"/>
-            <a:ext cx="12191695" cy="868680"/>
-          </a:xfrm>
-          <a:prstGeom prst="rect">
-            <a:avLst/>
-          </a:prstGeom>
-          <a:solidFill>
-            <a:srgbClr val="003087"/>
-          </a:solidFill>
-          <a:ln w="12700">
-            <a:solidFill>
-              <a:srgbClr val="003087"/>
-            </a:solidFill>
-            <a:prstDash val="solid"/>
-          </a:ln>
-        </p:spPr>
-      </p:sp>
-      <p:sp>
-        <p:nvSpPr>
-          <p:cNvPr id="3" name="Shape 1"/>
-          <p:cNvSpPr/>
-          <p:nvPr/>
-        </p:nvSpPr>
-        <p:spPr>
-          <a:xfrm>
-            <a:off x="0" y="868680"/>
-            <a:ext cx="12191695" cy="54864"/>
-          </a:xfrm>
-          <a:prstGeom prst="rect">
-            <a:avLst/>
-          </a:prstGeom>
-          <a:solidFill>
-            <a:srgbClr val="FFB91D"/>
-          </a:solidFill>
-          <a:ln w="12700">
-            <a:solidFill>
-              <a:srgbClr val="FFB91D"/>
-            </a:solidFill>
-            <a:prstDash val="solid"/>
-          </a:ln>
-        </p:spPr>
-      </p:sp>
-      <p:sp>
-        <p:nvSpPr>
-          <p:cNvPr id="4" name="Text 2"/>
-          <p:cNvSpPr/>
-          <p:nvPr/>
-        </p:nvSpPr>
-        <p:spPr>
-          <a:xfrm>
-            <a:off x="457200" y="128016"/>
-            <a:ext cx="8686800" cy="256032"/>
-          </a:xfrm>
-          <a:prstGeom prst="rect">
-            <a:avLst/>
-          </a:prstGeom>
-          <a:noFill/>
-          <a:ln/>
-        </p:spPr>
-        <p:txBody>
-          <a:bodyPr wrap="square" lIns="0" tIns="0" rIns="0" bIns="0" rtlCol="0" anchor="ctr"/>
-          <a:lstStyle/>
-          <a:p>
-            <a:pPr indent="0" marL="0">
-              <a:buNone/>
-            </a:pPr>
-            <a:r>
-              <a:rPr lang="en-US" sz="950" b="1" spc="200" kern="0" dirty="0">
-                <a:solidFill>
-                  <a:srgbClr val="7EC8E3"/>
-                </a:solidFill>
-                <a:latin typeface="Arial" pitchFamily="34" charset="0"/>
-                <a:ea typeface="Arial" pitchFamily="34" charset="-122"/>
-                <a:cs typeface="Arial" pitchFamily="34" charset="-120"/>
-              </a:rPr>
-              <a:t>HEARTS AND MINDS  ·  LAYLA'S JOURNEY  ·  THE OUTCOME</a:t>
-            </a:r>
-            <a:endParaRPr lang="en-US" sz="950" dirty="0"/>
-          </a:p>
-        </p:txBody>
-      </p:sp>
-      <p:sp>
-        <p:nvSpPr>
-          <p:cNvPr id="5" name="Text 3"/>
-          <p:cNvSpPr/>
-          <p:nvPr/>
-        </p:nvSpPr>
-        <p:spPr>
-          <a:xfrm>
-            <a:off x="457200" y="384048"/>
-            <a:ext cx="9601200" cy="411480"/>
-          </a:xfrm>
-          <a:prstGeom prst="rect">
-            <a:avLst/>
-          </a:prstGeom>
-          <a:noFill/>
-          <a:ln/>
-        </p:spPr>
-        <p:txBody>
-          <a:bodyPr wrap="square" lIns="0" tIns="0" rIns="0" bIns="0" rtlCol="0" anchor="ctr"/>
-          <a:lstStyle/>
-          <a:p>
-            <a:pPr indent="0" marL="0">
-              <a:buNone/>
-            </a:pPr>
-            <a:r>
-              <a:rPr lang="en-US" sz="2000" b="1" dirty="0">
-                <a:solidFill>
-                  <a:srgbClr val="FFFFFF"/>
-                </a:solidFill>
-                <a:latin typeface="Arial" pitchFamily="34" charset="0"/>
-                <a:ea typeface="Arial" pitchFamily="34" charset="-122"/>
-                <a:cs typeface="Arial" pitchFamily="34" charset="-120"/>
-              </a:rPr>
-              <a:t>Layla's win</a:t>
-            </a:r>
-            <a:endParaRPr lang="en-US" sz="2000" dirty="0"/>
-          </a:p>
-        </p:txBody>
-      </p:sp>
       <p:pic>
         <p:nvPicPr>
-          <p:cNvPr id="6" name="Image 0" descr="/sessions/quirky-zen-galileo/mnt/outputs/deckbuild/nhs_logo.png">    </p:cNvPr>
+          <p:cNvPr id="2" name="Image 0" descr="/sessions/quirky-zen-galileo/mnt/NHS/07 Sites &amp; Repos/dtx-ecosystem/hearts-and-minds/_generators/assets/bg-band.jpg">    </p:cNvPr>
           <p:cNvPicPr>
             <a:picLocks noChangeAspect="1"/>
           </p:cNvPicPr>
@@ -8392,8 +8473,8 @@
         </p:blipFill>
         <p:spPr>
           <a:xfrm>
-            <a:off x="10774375" y="201168"/>
-            <a:ext cx="960120" cy="393192"/>
+            <a:off x="0" y="0"/>
+            <a:ext cx="12191695" cy="932688"/>
           </a:xfrm>
           <a:prstGeom prst="rect">
             <a:avLst/>
@@ -8402,14 +8483,170 @@
       </p:pic>
       <p:sp>
         <p:nvSpPr>
-          <p:cNvPr id="7" name="Text 4"/>
-          <p:cNvSpPr/>
-          <p:nvPr/>
-        </p:nvSpPr>
-        <p:spPr>
-          <a:xfrm>
-            <a:off x="457200" y="1143000"/>
-            <a:ext cx="11277295" cy="822960"/>
+          <p:cNvPr id="3" name="Shape 0"/>
+          <p:cNvSpPr/>
+          <p:nvPr/>
+        </p:nvSpPr>
+        <p:spPr>
+          <a:xfrm>
+            <a:off x="0" y="932688"/>
+            <a:ext cx="12191695" cy="50292"/>
+          </a:xfrm>
+          <a:prstGeom prst="rect">
+            <a:avLst/>
+          </a:prstGeom>
+          <a:solidFill>
+            <a:srgbClr val="FFB91D"/>
+          </a:solidFill>
+          <a:ln w="12700">
+            <a:solidFill>
+              <a:srgbClr val="FFB91D"/>
+            </a:solidFill>
+            <a:prstDash val="solid"/>
+          </a:ln>
+        </p:spPr>
+      </p:sp>
+      <p:sp>
+        <p:nvSpPr>
+          <p:cNvPr id="4" name="Text 1"/>
+          <p:cNvSpPr/>
+          <p:nvPr/>
+        </p:nvSpPr>
+        <p:spPr>
+          <a:xfrm>
+            <a:off x="502920" y="137160"/>
+            <a:ext cx="8595360" cy="256032"/>
+          </a:xfrm>
+          <a:prstGeom prst="rect">
+            <a:avLst/>
+          </a:prstGeom>
+          <a:noFill/>
+          <a:ln/>
+        </p:spPr>
+        <p:txBody>
+          <a:bodyPr wrap="square" lIns="0" tIns="0" rIns="0" bIns="0" rtlCol="0" anchor="ctr"/>
+          <a:lstStyle/>
+          <a:p>
+            <a:pPr indent="0" marL="0">
+              <a:buNone/>
+            </a:pPr>
+            <a:r>
+              <a:rPr lang="en-US" sz="950" b="1" spc="240" kern="0" dirty="0">
+                <a:solidFill>
+                  <a:srgbClr val="FFD66B"/>
+                </a:solidFill>
+                <a:latin typeface="Segoe UI" pitchFamily="34" charset="0"/>
+                <a:ea typeface="Segoe UI" pitchFamily="34" charset="-122"/>
+                <a:cs typeface="Segoe UI" pitchFamily="34" charset="-120"/>
+              </a:rPr>
+              <a:t>HEARTS AND MINDS  ·  LAYLA’S JOURNEY  ·  THE OUTCOME</a:t>
+            </a:r>
+            <a:endParaRPr lang="en-US" sz="950" dirty="0"/>
+          </a:p>
+        </p:txBody>
+      </p:sp>
+      <p:sp>
+        <p:nvSpPr>
+          <p:cNvPr id="5" name="Text 2"/>
+          <p:cNvSpPr/>
+          <p:nvPr/>
+        </p:nvSpPr>
+        <p:spPr>
+          <a:xfrm>
+            <a:off x="502920" y="402336"/>
+            <a:ext cx="9509760" cy="457200"/>
+          </a:xfrm>
+          <a:prstGeom prst="rect">
+            <a:avLst/>
+          </a:prstGeom>
+          <a:noFill/>
+          <a:ln/>
+        </p:spPr>
+        <p:txBody>
+          <a:bodyPr wrap="square" lIns="0" tIns="0" rIns="0" bIns="0" rtlCol="0" anchor="ctr">
+            <a:normAutofit/>
+          </a:bodyPr>
+          <a:lstStyle/>
+          <a:p>
+            <a:pPr indent="0" marL="0">
+              <a:buNone/>
+            </a:pPr>
+            <a:r>
+              <a:rPr lang="en-US" sz="2100" b="1" dirty="0">
+                <a:solidFill>
+                  <a:srgbClr val="FFFFFF"/>
+                </a:solidFill>
+                <a:latin typeface="Segoe UI" pitchFamily="34" charset="0"/>
+                <a:ea typeface="Segoe UI" pitchFamily="34" charset="-122"/>
+                <a:cs typeface="Segoe UI" pitchFamily="34" charset="-120"/>
+              </a:rPr>
+              <a:t>Layla's win</a:t>
+            </a:r>
+            <a:endParaRPr lang="en-US" sz="2100" dirty="0"/>
+          </a:p>
+        </p:txBody>
+      </p:sp>
+      <p:sp>
+        <p:nvSpPr>
+          <p:cNvPr id="6" name="Shape 3"/>
+          <p:cNvSpPr/>
+          <p:nvPr/>
+        </p:nvSpPr>
+        <p:spPr>
+          <a:xfrm>
+            <a:off x="10942806" y="173736"/>
+            <a:ext cx="791689" cy="605699"/>
+          </a:xfrm>
+          <a:prstGeom prst="roundRect">
+            <a:avLst>
+              <a:gd name="adj" fmla="val 12077"/>
+            </a:avLst>
+          </a:prstGeom>
+          <a:solidFill>
+            <a:srgbClr val="FFFFFF"/>
+          </a:solidFill>
+          <a:ln w="12700">
+            <a:solidFill>
+              <a:srgbClr val="FFFFFF"/>
+            </a:solidFill>
+            <a:prstDash val="solid"/>
+          </a:ln>
+        </p:spPr>
+      </p:sp>
+      <p:pic>
+        <p:nvPicPr>
+          <p:cNvPr id="7" name="Image 1" descr="/sessions/quirky-zen-galileo/mnt/NHS/07 Sites &amp; Repos/dtx-ecosystem/hearts-and-minds/_generators/assets/nhs-logo.png">    </p:cNvPr>
+          <p:cNvPicPr>
+            <a:picLocks noChangeAspect="1"/>
+          </p:cNvPicPr>
+          <p:nvPr/>
+        </p:nvPicPr>
+        <p:blipFill>
+          <a:blip r:embed="rId2"/>
+          <a:stretch>
+            <a:fillRect/>
+          </a:stretch>
+        </p:blipFill>
+        <p:spPr>
+          <a:xfrm>
+            <a:off x="11068993" y="266273"/>
+            <a:ext cx="539315" cy="420624"/>
+          </a:xfrm>
+          <a:prstGeom prst="rect">
+            <a:avLst/>
+          </a:prstGeom>
+        </p:spPr>
+      </p:pic>
+      <p:sp>
+        <p:nvSpPr>
+          <p:cNvPr id="8" name="Text 4"/>
+          <p:cNvSpPr/>
+          <p:nvPr/>
+        </p:nvSpPr>
+        <p:spPr>
+          <a:xfrm>
+            <a:off x="457200" y="1239012"/>
+            <a:ext cx="11277295" cy="766064"/>
           </a:xfrm>
           <a:prstGeom prst="rect">
             <a:avLst/>
@@ -8431,9 +8668,9 @@
                 <a:solidFill>
                   <a:srgbClr val="003087"/>
                 </a:solidFill>
-                <a:latin typeface="Arial" pitchFamily="34" charset="0"/>
-                <a:ea typeface="Arial" pitchFamily="34" charset="-122"/>
-                <a:cs typeface="Arial" pitchFamily="34" charset="-120"/>
+                <a:latin typeface="Segoe UI" pitchFamily="34" charset="0"/>
+                <a:ea typeface="Segoe UI" pitchFamily="34" charset="-122"/>
+                <a:cs typeface="Segoe UI" pitchFamily="34" charset="-120"/>
               </a:rPr>
               <a:t>Monitored on time. Paid for every shift. Known to the practice as a patient, not as a DNA code.</a:t>
             </a:r>
@@ -8443,14 +8680,14 @@
       </p:sp>
       <p:sp>
         <p:nvSpPr>
-          <p:cNvPr id="8" name="Text 5"/>
-          <p:cNvSpPr/>
-          <p:nvPr/>
-        </p:nvSpPr>
-        <p:spPr>
-          <a:xfrm>
-            <a:off x="457200" y="2011680"/>
-            <a:ext cx="11277295" cy="835152"/>
+          <p:cNvPr id="9" name="Text 5"/>
+          <p:cNvSpPr/>
+          <p:nvPr/>
+        </p:nvSpPr>
+        <p:spPr>
+          <a:xfrm>
+            <a:off x="457200" y="2206244"/>
+            <a:ext cx="11277295" cy="829056"/>
           </a:xfrm>
           <a:prstGeom prst="rect">
             <a:avLst/>
@@ -8470,11 +8707,11 @@
             <a:r>
               <a:rPr lang="en-US" sz="1200" dirty="0">
                 <a:solidFill>
-                  <a:srgbClr val="231F20"/>
-                </a:solidFill>
-                <a:latin typeface="Arial" pitchFamily="34" charset="0"/>
-                <a:ea typeface="Arial" pitchFamily="34" charset="-122"/>
-                <a:cs typeface="Arial" pitchFamily="34" charset="-120"/>
+                  <a:srgbClr val="212B32"/>
+                </a:solidFill>
+                <a:latin typeface="Segoe UI" pitchFamily="34" charset="0"/>
+                <a:ea typeface="Segoe UI" pitchFamily="34" charset="-122"/>
+                <a:cs typeface="Segoe UI" pitchFamily="34" charset="-120"/>
               </a:rPr>
               <a:t>Layla does not see the framework or the platform. She sees a text, a kit, twenty minutes between homework and a shift, and a message from Hannah only when something needs to change. The trend that tells the practice whether three years of tablets are still working stays readable, because the cycle stopped asking for the one thing she cannot give it: a fixed hour in a working week. </a:t>
             </a:r>
@@ -8484,11 +8721,11 @@
             <a:r>
               <a:rPr lang="en-US" sz="1200" b="1" dirty="0">
                 <a:solidFill>
-                  <a:srgbClr val="231F20"/>
-                </a:solidFill>
-                <a:latin typeface="Arial" pitchFamily="34" charset="0"/>
-                <a:ea typeface="Arial" pitchFamily="34" charset="-122"/>
-                <a:cs typeface="Arial" pitchFamily="34" charset="-120"/>
+                  <a:srgbClr val="212B32"/>
+                </a:solidFill>
+                <a:latin typeface="Segoe UI" pitchFamily="34" charset="0"/>
+                <a:ea typeface="Segoe UI" pitchFamily="34" charset="-122"/>
+                <a:cs typeface="Segoe UI" pitchFamily="34" charset="-120"/>
               </a:rPr>
               <a:t>The configuration is held, so this is an illustration of the GP-initiated pattern, not a live pathway. The point stands: hold the cycle and you hold the treatment.</a:t>
             </a:r>
@@ -8498,18 +8735,18 @@
       </p:sp>
       <p:sp>
         <p:nvSpPr>
-          <p:cNvPr id="9" name="Shape 6"/>
-          <p:cNvSpPr/>
-          <p:nvPr/>
-        </p:nvSpPr>
-        <p:spPr>
-          <a:xfrm>
-            <a:off x="457200" y="3121152"/>
-            <a:ext cx="11277295" cy="1874012"/>
+          <p:cNvPr id="10" name="Shape 6"/>
+          <p:cNvSpPr/>
+          <p:nvPr/>
+        </p:nvSpPr>
+        <p:spPr>
+          <a:xfrm>
+            <a:off x="457200" y="3291332"/>
+            <a:ext cx="11277295" cy="1757680"/>
           </a:xfrm>
           <a:prstGeom prst="roundRect">
             <a:avLst>
-              <a:gd name="adj" fmla="val 4879"/>
+              <a:gd name="adj" fmla="val 5202"/>
             </a:avLst>
           </a:prstGeom>
           <a:solidFill>
@@ -8517,7 +8754,7 @@
           </a:solidFill>
           <a:ln w="9525">
             <a:solidFill>
-              <a:srgbClr val="DDE3E8"/>
+              <a:srgbClr val="EBEEF1"/>
             </a:solidFill>
             <a:prstDash val="solid"/>
           </a:ln>
@@ -8525,14 +8762,14 @@
       </p:sp>
       <p:sp>
         <p:nvSpPr>
-          <p:cNvPr id="10" name="Shape 7"/>
-          <p:cNvSpPr/>
-          <p:nvPr/>
-        </p:nvSpPr>
-        <p:spPr>
-          <a:xfrm>
-            <a:off x="457200" y="3121152"/>
-            <a:ext cx="11277295" cy="73152"/>
+          <p:cNvPr id="11" name="Shape 7"/>
+          <p:cNvSpPr/>
+          <p:nvPr/>
+        </p:nvSpPr>
+        <p:spPr>
+          <a:xfrm>
+            <a:off x="457200" y="3291332"/>
+            <a:ext cx="11277295" cy="64008"/>
           </a:xfrm>
           <a:prstGeom prst="rect">
             <a:avLst/>
@@ -8550,14 +8787,14 @@
       </p:sp>
       <p:sp>
         <p:nvSpPr>
-          <p:cNvPr id="11" name="Text 8"/>
-          <p:cNvSpPr/>
-          <p:nvPr/>
-        </p:nvSpPr>
-        <p:spPr>
-          <a:xfrm>
-            <a:off x="731520" y="3304032"/>
-            <a:ext cx="5486400" cy="274320"/>
+          <p:cNvPr id="12" name="Text 8"/>
+          <p:cNvSpPr/>
+          <p:nvPr/>
+        </p:nvSpPr>
+        <p:spPr>
+          <a:xfrm>
+            <a:off x="731520" y="3465068"/>
+            <a:ext cx="5486400" cy="256032"/>
           </a:xfrm>
           <a:prstGeom prst="rect">
             <a:avLst/>
@@ -8577,9 +8814,9 @@
                 <a:solidFill>
                   <a:srgbClr val="006747"/>
                 </a:solidFill>
-                <a:latin typeface="Arial" pitchFamily="34" charset="0"/>
-                <a:ea typeface="Arial" pitchFamily="34" charset="-122"/>
-                <a:cs typeface="Arial" pitchFamily="34" charset="-120"/>
+                <a:latin typeface="Segoe UI" pitchFamily="34" charset="0"/>
+                <a:ea typeface="Segoe UI" pitchFamily="34" charset="-122"/>
+                <a:cs typeface="Segoe UI" pitchFamily="34" charset="-120"/>
               </a:rPr>
               <a:t>THE MONEY IN THIS STORY</a:t>
             </a:r>
@@ -8589,14 +8826,14 @@
       </p:sp>
       <p:sp>
         <p:nvSpPr>
-          <p:cNvPr id="12" name="Text 9"/>
-          <p:cNvSpPr/>
-          <p:nvPr/>
-        </p:nvSpPr>
-        <p:spPr>
-          <a:xfrm>
-            <a:off x="731520" y="3624072"/>
-            <a:ext cx="10728655" cy="913892"/>
+          <p:cNvPr id="13" name="Text 9"/>
+          <p:cNvSpPr/>
+          <p:nvPr/>
+        </p:nvSpPr>
+        <p:spPr>
+          <a:xfrm>
+            <a:off x="731520" y="3766820"/>
+            <a:ext cx="10728655" cy="870712"/>
           </a:xfrm>
           <a:prstGeom prst="rect">
             <a:avLst/>
@@ -8612,7 +8849,7 @@
           <a:p>
             <a:pPr indent="0" marL="0">
               <a:spcAft>
-                <a:spcPts val="600"/>
+                <a:spcPts val="500"/>
               </a:spcAft>
               <a:buNone/>
             </a:pPr>
@@ -8621,9 +8858,9 @@
                 <a:solidFill>
                   <a:srgbClr val="4C6272"/>
                 </a:solidFill>
-                <a:latin typeface="Arial" pitchFamily="34" charset="0"/>
-                <a:ea typeface="Arial" pitchFamily="34" charset="-122"/>
-                <a:cs typeface="Arial" pitchFamily="34" charset="-120"/>
+                <a:latin typeface="Segoe UI" pitchFamily="34" charset="0"/>
+                <a:ea typeface="Segoe UI" pitchFamily="34" charset="-122"/>
+                <a:cs typeface="Segoe UI" pitchFamily="34" charset="-120"/>
               </a:rPr>
               <a:t>If the iron deficiency configuration opens under a roadmap gate, the money would work the way every other primary-care cycle does: a cost per activity for each completed test, paid by the commissioner direct to the supplier, against a national ceiling. Nothing about Layla's economics is exotic. The saving is the string of missed and re-booked appointments the practice stops paying for in slots, letters and chased bookings, and the dose change that stops being fourteen months late.</a:t>
             </a:r>
@@ -8633,14 +8870,53 @@
       </p:sp>
       <p:sp>
         <p:nvSpPr>
-          <p:cNvPr id="13" name="Text 10"/>
-          <p:cNvSpPr/>
-          <p:nvPr/>
-        </p:nvSpPr>
-        <p:spPr>
-          <a:xfrm>
-            <a:off x="731520" y="4583684"/>
-            <a:ext cx="10728655" cy="320040"/>
+          <p:cNvPr id="14" name="Text 10"/>
+          <p:cNvSpPr/>
+          <p:nvPr/>
+        </p:nvSpPr>
+        <p:spPr>
+          <a:xfrm>
+            <a:off x="731520" y="4664964"/>
+            <a:ext cx="10728655" cy="329184"/>
+          </a:xfrm>
+          <a:prstGeom prst="rect">
+            <a:avLst/>
+          </a:prstGeom>
+          <a:noFill/>
+          <a:ln/>
+        </p:spPr>
+        <p:txBody>
+          <a:bodyPr wrap="square" lIns="0" tIns="0" rIns="0" bIns="0" rtlCol="0" anchor="b"/>
+          <a:lstStyle/>
+          <a:p>
+            <a:pPr indent="0" marL="0">
+              <a:buNone/>
+            </a:pPr>
+            <a:r>
+              <a:rPr lang="en-US" sz="850" i="1" dirty="0">
+                <a:solidFill>
+                  <a:srgbClr val="7E8B97"/>
+                </a:solidFill>
+                <a:latin typeface="Segoe UI" pitchFamily="34" charset="0"/>
+                <a:ea typeface="Segoe UI" pitchFamily="34" charset="-122"/>
+                <a:cs typeface="Segoe UI" pitchFamily="34" charset="-120"/>
+              </a:rPr>
+              <a:t>Commercial positions are agreed in principle and remain subject to the live procurement. See the Money Loop and How Commissioners Buy pages of the operating model.</a:t>
+            </a:r>
+            <a:endParaRPr lang="en-US" sz="850" dirty="0"/>
+          </a:p>
+        </p:txBody>
+      </p:sp>
+      <p:sp>
+        <p:nvSpPr>
+          <p:cNvPr id="15" name="Text 11"/>
+          <p:cNvSpPr/>
+          <p:nvPr/>
+        </p:nvSpPr>
+        <p:spPr>
+          <a:xfrm>
+            <a:off x="457200" y="6455664"/>
+            <a:ext cx="4206240" cy="274320"/>
           </a:xfrm>
           <a:prstGeom prst="rect">
             <a:avLst/>
@@ -8656,15 +8932,15 @@
               <a:buNone/>
             </a:pPr>
             <a:r>
-              <a:rPr lang="en-US" sz="850" i="1" dirty="0">
+              <a:rPr lang="en-US" sz="850" dirty="0">
                 <a:solidFill>
                   <a:srgbClr val="7E8B97"/>
                 </a:solidFill>
-                <a:latin typeface="Arial" pitchFamily="34" charset="0"/>
-                <a:ea typeface="Arial" pitchFamily="34" charset="-122"/>
-                <a:cs typeface="Arial" pitchFamily="34" charset="-120"/>
-              </a:rPr>
-              <a:t>Commercial positions are agreed in principle and remain subject to the live procurement. See the Money Loop and How Commissioners Buy pages of the operating model.</a:t>
+                <a:latin typeface="Segoe UI" pitchFamily="34" charset="0"/>
+                <a:ea typeface="Segoe UI" pitchFamily="34" charset="-122"/>
+                <a:cs typeface="Segoe UI" pitchFamily="34" charset="-120"/>
+              </a:rPr>
+              <a:t>Layla  ·  Hearts and Minds</a:t>
             </a:r>
             <a:endParaRPr lang="en-US" sz="850" dirty="0"/>
           </a:p>
@@ -8672,14 +8948,14 @@
       </p:sp>
       <p:sp>
         <p:nvSpPr>
-          <p:cNvPr id="14" name="Text 11"/>
-          <p:cNvSpPr/>
-          <p:nvPr/>
-        </p:nvSpPr>
-        <p:spPr>
-          <a:xfrm>
-            <a:off x="457200" y="6473952"/>
-            <a:ext cx="3108960" cy="274320"/>
+          <p:cNvPr id="16" name="Text 12"/>
+          <p:cNvSpPr/>
+          <p:nvPr/>
+        </p:nvSpPr>
+        <p:spPr>
+          <a:xfrm>
+            <a:off x="4754880" y="6455664"/>
+            <a:ext cx="6430975" cy="274320"/>
           </a:xfrm>
           <a:prstGeom prst="rect">
             <a:avLst/>
@@ -8691,34 +8967,34 @@
           <a:bodyPr wrap="square" lIns="0" tIns="0" rIns="0" bIns="0" rtlCol="0" anchor="ctr"/>
           <a:lstStyle/>
           <a:p>
-            <a:pPr indent="0" marL="0">
-              <a:buNone/>
-            </a:pPr>
-            <a:r>
-              <a:rPr lang="en-US" sz="850" dirty="0">
+            <a:pPr algn="r" indent="0" marL="0">
+              <a:buNone/>
+            </a:pPr>
+            <a:r>
+              <a:rPr lang="en-US" sz="800" dirty="0">
                 <a:solidFill>
                   <a:srgbClr val="7E8B97"/>
                 </a:solidFill>
-                <a:latin typeface="Arial" pitchFamily="34" charset="0"/>
-                <a:ea typeface="Arial" pitchFamily="34" charset="-122"/>
-                <a:cs typeface="Arial" pitchFamily="34" charset="-120"/>
-              </a:rPr>
-              <a:t>Layla  ·  Hearts and Minds</a:t>
-            </a:r>
-            <a:endParaRPr lang="en-US" sz="850" dirty="0"/>
-          </a:p>
-        </p:txBody>
-      </p:sp>
-      <p:sp>
-        <p:nvSpPr>
-          <p:cNvPr id="15" name="Text 12"/>
-          <p:cNvSpPr/>
-          <p:nvPr/>
-        </p:nvSpPr>
-        <p:spPr>
-          <a:xfrm>
-            <a:off x="3657600" y="6473952"/>
-            <a:ext cx="7528255" cy="274320"/>
+                <a:latin typeface="Segoe UI" pitchFamily="34" charset="0"/>
+                <a:ea typeface="Segoe UI" pitchFamily="34" charset="-122"/>
+                <a:cs typeface="Segoe UI" pitchFamily="34" charset="-120"/>
+              </a:rPr>
+              <a:t>Commercial positions are agreed in principle and remain subject to the live procurement.</a:t>
+            </a:r>
+            <a:endParaRPr lang="en-US" sz="800" dirty="0"/>
+          </a:p>
+        </p:txBody>
+      </p:sp>
+      <p:sp>
+        <p:nvSpPr>
+          <p:cNvPr id="17" name="Text 13"/>
+          <p:cNvSpPr/>
+          <p:nvPr/>
+        </p:nvSpPr>
+        <p:spPr>
+          <a:xfrm>
+            <a:off x="11323015" y="6455664"/>
+            <a:ext cx="411480" cy="274320"/>
           </a:xfrm>
           <a:prstGeom prst="rect">
             <a:avLst/>
@@ -8734,52 +9010,13 @@
               <a:buNone/>
             </a:pPr>
             <a:r>
-              <a:rPr lang="en-US" sz="800" dirty="0">
+              <a:rPr lang="en-US" sz="850" b="1" dirty="0">
                 <a:solidFill>
                   <a:srgbClr val="7E8B97"/>
                 </a:solidFill>
-                <a:latin typeface="Arial" pitchFamily="34" charset="0"/>
-                <a:ea typeface="Arial" pitchFamily="34" charset="-122"/>
-                <a:cs typeface="Arial" pitchFamily="34" charset="-120"/>
-              </a:rPr>
-              <a:t>Commercial positions are agreed in principle and remain subject to the live procurement.</a:t>
-            </a:r>
-            <a:endParaRPr lang="en-US" sz="800" dirty="0"/>
-          </a:p>
-        </p:txBody>
-      </p:sp>
-      <p:sp>
-        <p:nvSpPr>
-          <p:cNvPr id="16" name="Text 13"/>
-          <p:cNvSpPr/>
-          <p:nvPr/>
-        </p:nvSpPr>
-        <p:spPr>
-          <a:xfrm>
-            <a:off x="11368735" y="6473952"/>
-            <a:ext cx="365760" cy="274320"/>
-          </a:xfrm>
-          <a:prstGeom prst="rect">
-            <a:avLst/>
-          </a:prstGeom>
-          <a:noFill/>
-          <a:ln/>
-        </p:spPr>
-        <p:txBody>
-          <a:bodyPr wrap="square" lIns="0" tIns="0" rIns="0" bIns="0" rtlCol="0" anchor="ctr"/>
-          <a:lstStyle/>
-          <a:p>
-            <a:pPr algn="r" indent="0" marL="0">
-              <a:buNone/>
-            </a:pPr>
-            <a:r>
-              <a:rPr lang="en-US" sz="850" b="1" dirty="0">
-                <a:solidFill>
-                  <a:srgbClr val="7E8B97"/>
-                </a:solidFill>
-                <a:latin typeface="Arial" pitchFamily="34" charset="0"/>
-                <a:ea typeface="Arial" pitchFamily="34" charset="-122"/>
-                <a:cs typeface="Arial" pitchFamily="34" charset="-120"/>
+                <a:latin typeface="Segoe UI" pitchFamily="34" charset="0"/>
+                <a:ea typeface="Segoe UI" pitchFamily="34" charset="-122"/>
+                <a:cs typeface="Segoe UI" pitchFamily="34" charset="-120"/>
               </a:rPr>
               <a:t>8</a:t>
             </a:r>
